--- a/protected-downloads/praesentation/M15.pptx
+++ b/protected-downloads/praesentation/M15.pptx
@@ -8,16 +8,17 @@
     <p:sldId id="256" r:id="rId7"/>
     <p:sldId id="257" r:id="rId8"/>
     <p:sldId id="258" r:id="rId9"/>
-    <p:sldId id="259" r:id="rId10"/>
-    <p:sldId id="260" r:id="rId11"/>
-    <p:sldId id="261" r:id="rId12"/>
-    <p:sldId id="262" r:id="rId13"/>
-    <p:sldId id="263" r:id="rId14"/>
-    <p:sldId id="264" r:id="rId15"/>
-    <p:sldId id="265" r:id="rId16"/>
-    <p:sldId id="266" r:id="rId17"/>
-    <p:sldId id="267" r:id="rId18"/>
-    <p:sldId id="268" r:id="rId19"/>
+    <p:sldId id="259" r:id="rId11"/>
+    <p:sldId id="260" r:id="rId12"/>
+    <p:sldId id="261" r:id="rId13"/>
+    <p:sldId id="262" r:id="rId14"/>
+    <p:sldId id="263" r:id="rId15"/>
+    <p:sldId id="264" r:id="rId16"/>
+    <p:sldId id="265" r:id="rId17"/>
+    <p:sldId id="266" r:id="rId18"/>
+    <p:sldId id="267" r:id="rId19"/>
+    <p:sldId id="268" r:id="rId20"/>
+    <p:sldId id="269" r:id="rId21"/>
   </p:sldIdLst>
   <p:sldSz cx="12188952" cy="6858000" type="screen4x3"/>
   <p:notesSz cx="6858000" cy="9144000"/>
@@ -117,6 +118,1126 @@
     </a:lvl9pPr>
   </p:defaultTextStyle>
 </p:presentation>
+</file>
+
+<file path=ppt/notesMasters/notesMaster1.xml><?xml version="1.0" encoding="utf-8"?>
+<p:notesMaster xmlns:a="http://schemas.openxmlformats.org/drawingml/2006/main" xmlns:p="http://schemas.openxmlformats.org/presentationml/2006/main" xmlns:r="http://schemas.openxmlformats.org/officeDocument/2006/relationships">
+  <p:cSld>
+    <p:bg>
+      <p:bgRef idx="1001">
+        <a:schemeClr val="bg1"/>
+      </p:bgRef>
+    </p:bg>
+    <p:spTree>
+      <p:nvGrpSpPr>
+        <p:cNvPr id="1" name=""/>
+        <p:cNvGrpSpPr/>
+        <p:nvPr/>
+      </p:nvGrpSpPr>
+      <p:grpSpPr>
+        <a:xfrm>
+          <a:off x="0" y="0"/>
+          <a:ext cx="0" cy="0"/>
+          <a:chOff x="0" y="0"/>
+          <a:chExt cx="0" cy="0"/>
+        </a:xfrm>
+      </p:grpSpPr>
+      <p:sp>
+        <p:nvSpPr>
+          <p:cNvPr id="2" name="Header Placeholder 1"/>
+          <p:cNvSpPr>
+            <a:spLocks noGrp="1"/>
+          </p:cNvSpPr>
+          <p:nvPr>
+            <p:ph type="hdr" sz="quarter"/>
+          </p:nvPr>
+        </p:nvSpPr>
+        <p:spPr>
+          <a:xfrm>
+            <a:off x="0" y="0"/>
+            <a:ext cx="2971800" cy="457200"/>
+          </a:xfrm>
+          <a:prstGeom prst="rect">
+            <a:avLst/>
+          </a:prstGeom>
+        </p:spPr>
+        <p:txBody>
+          <a:bodyPr vert="horz" lIns="91440" tIns="45720" rIns="91440" bIns="45720" rtlCol="0"/>
+          <a:lstStyle>
+            <a:lvl1pPr algn="l">
+              <a:defRPr sz="1200"/>
+            </a:lvl1pPr>
+          </a:lstStyle>
+          <a:p>
+            <a:endParaRPr lang="en-US"/>
+          </a:p>
+        </p:txBody>
+      </p:sp>
+      <p:sp>
+        <p:nvSpPr>
+          <p:cNvPr id="3" name="Date Placeholder 2"/>
+          <p:cNvSpPr>
+            <a:spLocks noGrp="1"/>
+          </p:cNvSpPr>
+          <p:nvPr>
+            <p:ph type="dt" idx="1"/>
+          </p:nvPr>
+        </p:nvSpPr>
+        <p:spPr>
+          <a:xfrm>
+            <a:off x="3884613" y="0"/>
+            <a:ext cx="2971800" cy="457200"/>
+          </a:xfrm>
+          <a:prstGeom prst="rect">
+            <a:avLst/>
+          </a:prstGeom>
+        </p:spPr>
+        <p:txBody>
+          <a:bodyPr vert="horz" lIns="91440" tIns="45720" rIns="91440" bIns="45720" rtlCol="0"/>
+          <a:lstStyle>
+            <a:lvl1pPr algn="r">
+              <a:defRPr sz="1200"/>
+            </a:lvl1pPr>
+          </a:lstStyle>
+          <a:p>
+            <a:fld id="{0F89C1C7-3DCD-1040-A9CF-14679D8B5DDD}" type="datetimeFigureOut">
+              <a:rPr lang="en-US" smtClean="0"/>
+              <a:t>10/17/16</a:t>
+            </a:fld>
+            <a:endParaRPr lang="en-US"/>
+          </a:p>
+        </p:txBody>
+      </p:sp>
+      <p:sp>
+        <p:nvSpPr>
+          <p:cNvPr id="4" name="Slide Image Placeholder 3"/>
+          <p:cNvSpPr>
+            <a:spLocks noGrp="1" noRot="1" noChangeAspect="1"/>
+          </p:cNvSpPr>
+          <p:nvPr>
+            <p:ph type="sldImg" idx="2"/>
+          </p:nvPr>
+        </p:nvSpPr>
+        <p:spPr>
+          <a:xfrm>
+            <a:off x="1143000" y="685800"/>
+            <a:ext cx="4572000" cy="3429000"/>
+          </a:xfrm>
+          <a:prstGeom prst="rect">
+            <a:avLst/>
+          </a:prstGeom>
+          <a:noFill/>
+          <a:ln w="12700">
+            <a:solidFill>
+              <a:prstClr val="black"/>
+            </a:solidFill>
+          </a:ln>
+        </p:spPr>
+        <p:txBody>
+          <a:bodyPr vert="horz" lIns="91440" tIns="45720" rIns="91440" bIns="45720" rtlCol="0" anchor="ctr"/>
+          <a:lstStyle/>
+          <a:p>
+            <a:endParaRPr lang="en-US"/>
+          </a:p>
+        </p:txBody>
+      </p:sp>
+      <p:sp>
+        <p:nvSpPr>
+          <p:cNvPr id="5" name="Notes Placeholder 4"/>
+          <p:cNvSpPr>
+            <a:spLocks noGrp="1"/>
+          </p:cNvSpPr>
+          <p:nvPr>
+            <p:ph type="body" sz="quarter" idx="3"/>
+          </p:nvPr>
+        </p:nvSpPr>
+        <p:spPr>
+          <a:xfrm>
+            <a:off x="685800" y="4343400"/>
+            <a:ext cx="5486400" cy="4114800"/>
+          </a:xfrm>
+          <a:prstGeom prst="rect">
+            <a:avLst/>
+          </a:prstGeom>
+        </p:spPr>
+        <p:txBody>
+          <a:bodyPr vert="horz" lIns="91440" tIns="45720" rIns="91440" bIns="45720" rtlCol="0"/>
+          <a:lstStyle/>
+          <a:p>
+            <a:pPr lvl="0"/>
+            <a:r>
+              <a:rPr lang="en-US" smtClean="0"/>
+              <a:t>Click to edit Master text styles</a:t>
+            </a:r>
+          </a:p>
+          <a:p>
+            <a:pPr lvl="1"/>
+            <a:r>
+              <a:rPr lang="en-US" smtClean="0"/>
+              <a:t>Second level</a:t>
+            </a:r>
+          </a:p>
+          <a:p>
+            <a:pPr lvl="2"/>
+            <a:r>
+              <a:rPr lang="en-US" smtClean="0"/>
+              <a:t>Third level</a:t>
+            </a:r>
+          </a:p>
+          <a:p>
+            <a:pPr lvl="3"/>
+            <a:r>
+              <a:rPr lang="en-US" smtClean="0"/>
+              <a:t>Fourth level</a:t>
+            </a:r>
+          </a:p>
+          <a:p>
+            <a:pPr lvl="4"/>
+            <a:r>
+              <a:rPr lang="en-US" smtClean="0"/>
+              <a:t>Fifth level</a:t>
+            </a:r>
+            <a:endParaRPr lang="en-US"/>
+          </a:p>
+        </p:txBody>
+      </p:sp>
+      <p:sp>
+        <p:nvSpPr>
+          <p:cNvPr id="6" name="Footer Placeholder 5"/>
+          <p:cNvSpPr>
+            <a:spLocks noGrp="1"/>
+          </p:cNvSpPr>
+          <p:nvPr>
+            <p:ph type="ftr" sz="quarter" idx="4"/>
+          </p:nvPr>
+        </p:nvSpPr>
+        <p:spPr>
+          <a:xfrm>
+            <a:off x="0" y="8685213"/>
+            <a:ext cx="2971800" cy="457200"/>
+          </a:xfrm>
+          <a:prstGeom prst="rect">
+            <a:avLst/>
+          </a:prstGeom>
+        </p:spPr>
+        <p:txBody>
+          <a:bodyPr vert="horz" lIns="91440" tIns="45720" rIns="91440" bIns="45720" rtlCol="0" anchor="b"/>
+          <a:lstStyle>
+            <a:lvl1pPr algn="l">
+              <a:defRPr sz="1200"/>
+            </a:lvl1pPr>
+          </a:lstStyle>
+          <a:p>
+            <a:endParaRPr lang="en-US"/>
+          </a:p>
+        </p:txBody>
+      </p:sp>
+      <p:sp>
+        <p:nvSpPr>
+          <p:cNvPr id="7" name="Slide Number Placeholder 6"/>
+          <p:cNvSpPr>
+            <a:spLocks noGrp="1"/>
+          </p:cNvSpPr>
+          <p:nvPr>
+            <p:ph type="sldNum" sz="quarter" idx="5"/>
+          </p:nvPr>
+        </p:nvSpPr>
+        <p:spPr>
+          <a:xfrm>
+            <a:off x="3884613" y="8685213"/>
+            <a:ext cx="2971800" cy="457200"/>
+          </a:xfrm>
+          <a:prstGeom prst="rect">
+            <a:avLst/>
+          </a:prstGeom>
+        </p:spPr>
+        <p:txBody>
+          <a:bodyPr vert="horz" lIns="91440" tIns="45720" rIns="91440" bIns="45720" rtlCol="0" anchor="b"/>
+          <a:lstStyle>
+            <a:lvl1pPr algn="r">
+              <a:defRPr sz="1200"/>
+            </a:lvl1pPr>
+          </a:lstStyle>
+          <a:p>
+            <a:fld id="{BB5E49A5-4136-284D-997B-48E1D791AD67}" type="slidenum">
+              <a:rPr lang="en-US" smtClean="0"/>
+              <a:t>‹#›</a:t>
+            </a:fld>
+            <a:endParaRPr lang="en-US"/>
+          </a:p>
+        </p:txBody>
+      </p:sp>
+    </p:spTree>
+    <p:extLst>
+      <p:ext uri="{BB962C8B-B14F-4D97-AF65-F5344CB8AC3E}">
+        <p14:creationId xmlns:p14="http://schemas.microsoft.com/office/powerpoint/2010/main" val="2623252185"/>
+      </p:ext>
+    </p:extLst>
+  </p:cSld>
+  <p:clrMap bg1="lt1" tx1="dk1" bg2="lt2" tx2="dk2" accent1="accent1" accent2="accent2" accent3="accent3" accent4="accent4" accent5="accent5" accent6="accent6" hlink="hlink" folHlink="folHlink"/>
+  <p:notesStyle>
+    <a:lvl1pPr marL="0" algn="l" defTabSz="457200" rtl="0" eaLnBrk="1" latinLnBrk="0" hangingPunct="1">
+      <a:defRPr sz="1200" kern="1200">
+        <a:solidFill>
+          <a:schemeClr val="tx1"/>
+        </a:solidFill>
+        <a:latin typeface="+mn-lt"/>
+        <a:ea typeface="+mn-ea"/>
+        <a:cs typeface="+mn-cs"/>
+      </a:defRPr>
+    </a:lvl1pPr>
+    <a:lvl2pPr marL="457200" algn="l" defTabSz="457200" rtl="0" eaLnBrk="1" latinLnBrk="0" hangingPunct="1">
+      <a:defRPr sz="1200" kern="1200">
+        <a:solidFill>
+          <a:schemeClr val="tx1"/>
+        </a:solidFill>
+        <a:latin typeface="+mn-lt"/>
+        <a:ea typeface="+mn-ea"/>
+        <a:cs typeface="+mn-cs"/>
+      </a:defRPr>
+    </a:lvl2pPr>
+    <a:lvl3pPr marL="914400" algn="l" defTabSz="457200" rtl="0" eaLnBrk="1" latinLnBrk="0" hangingPunct="1">
+      <a:defRPr sz="1200" kern="1200">
+        <a:solidFill>
+          <a:schemeClr val="tx1"/>
+        </a:solidFill>
+        <a:latin typeface="+mn-lt"/>
+        <a:ea typeface="+mn-ea"/>
+        <a:cs typeface="+mn-cs"/>
+      </a:defRPr>
+    </a:lvl3pPr>
+    <a:lvl4pPr marL="1371600" algn="l" defTabSz="457200" rtl="0" eaLnBrk="1" latinLnBrk="0" hangingPunct="1">
+      <a:defRPr sz="1200" kern="1200">
+        <a:solidFill>
+          <a:schemeClr val="tx1"/>
+        </a:solidFill>
+        <a:latin typeface="+mn-lt"/>
+        <a:ea typeface="+mn-ea"/>
+        <a:cs typeface="+mn-cs"/>
+      </a:defRPr>
+    </a:lvl4pPr>
+    <a:lvl5pPr marL="1828800" algn="l" defTabSz="457200" rtl="0" eaLnBrk="1" latinLnBrk="0" hangingPunct="1">
+      <a:defRPr sz="1200" kern="1200">
+        <a:solidFill>
+          <a:schemeClr val="tx1"/>
+        </a:solidFill>
+        <a:latin typeface="+mn-lt"/>
+        <a:ea typeface="+mn-ea"/>
+        <a:cs typeface="+mn-cs"/>
+      </a:defRPr>
+    </a:lvl5pPr>
+    <a:lvl6pPr marL="2286000" algn="l" defTabSz="457200" rtl="0" eaLnBrk="1" latinLnBrk="0" hangingPunct="1">
+      <a:defRPr sz="1200" kern="1200">
+        <a:solidFill>
+          <a:schemeClr val="tx1"/>
+        </a:solidFill>
+        <a:latin typeface="+mn-lt"/>
+        <a:ea typeface="+mn-ea"/>
+        <a:cs typeface="+mn-cs"/>
+      </a:defRPr>
+    </a:lvl6pPr>
+    <a:lvl7pPr marL="2743200" algn="l" defTabSz="457200" rtl="0" eaLnBrk="1" latinLnBrk="0" hangingPunct="1">
+      <a:defRPr sz="1200" kern="1200">
+        <a:solidFill>
+          <a:schemeClr val="tx1"/>
+        </a:solidFill>
+        <a:latin typeface="+mn-lt"/>
+        <a:ea typeface="+mn-ea"/>
+        <a:cs typeface="+mn-cs"/>
+      </a:defRPr>
+    </a:lvl7pPr>
+    <a:lvl8pPr marL="3200400" algn="l" defTabSz="457200" rtl="0" eaLnBrk="1" latinLnBrk="0" hangingPunct="1">
+      <a:defRPr sz="1200" kern="1200">
+        <a:solidFill>
+          <a:schemeClr val="tx1"/>
+        </a:solidFill>
+        <a:latin typeface="+mn-lt"/>
+        <a:ea typeface="+mn-ea"/>
+        <a:cs typeface="+mn-cs"/>
+      </a:defRPr>
+    </a:lvl8pPr>
+    <a:lvl9pPr marL="3657600" algn="l" defTabSz="457200" rtl="0" eaLnBrk="1" latinLnBrk="0" hangingPunct="1">
+      <a:defRPr sz="1200" kern="1200">
+        <a:solidFill>
+          <a:schemeClr val="tx1"/>
+        </a:solidFill>
+        <a:latin typeface="+mn-lt"/>
+        <a:ea typeface="+mn-ea"/>
+        <a:cs typeface="+mn-cs"/>
+      </a:defRPr>
+    </a:lvl9pPr>
+  </p:notesStyle>
+</p:notesMaster>
+</file>
+
+<file path=ppt/notesSlides/notesSlide1.xml><?xml version="1.0" encoding="utf-8"?>
+<p:notes xmlns:a="http://schemas.openxmlformats.org/drawingml/2006/main" xmlns:p="http://schemas.openxmlformats.org/presentationml/2006/main" xmlns:r="http://schemas.openxmlformats.org/officeDocument/2006/relationships">
+  <p:cSld>
+    <p:spTree>
+      <p:nvGrpSpPr>
+        <p:cNvPr id="1" name=""/>
+        <p:cNvGrpSpPr/>
+        <p:nvPr/>
+      </p:nvGrpSpPr>
+      <p:grpSpPr>
+        <a:xfrm>
+          <a:off x="0" y="0"/>
+          <a:ext cx="0" cy="0"/>
+          <a:chOff x="0" y="0"/>
+          <a:chExt cx="0" cy="0"/>
+        </a:xfrm>
+      </p:grpSpPr>
+      <p:sp>
+        <p:nvSpPr>
+          <p:cNvPr id="2" name="Slide Image Placeholder 1"/>
+          <p:cNvSpPr>
+            <a:spLocks noGrp="1"/>
+          </p:cNvSpPr>
+          <p:nvPr>
+            <p:ph type="sldImg" idx="2"/>
+          </p:nvPr>
+        </p:nvSpPr>
+        <p:spPr/>
+      </p:sp>
+      <p:sp>
+        <p:nvSpPr>
+          <p:cNvPr id="3" name="Notes Placeholder 2"/>
+          <p:cNvSpPr>
+            <a:spLocks noGrp="1"/>
+          </p:cNvSpPr>
+          <p:nvPr>
+            <p:ph type="body" idx="3" sz="quarter"/>
+          </p:nvPr>
+        </p:nvSpPr>
+        <p:spPr/>
+        <p:txBody>
+          <a:bodyPr/>
+          <a:lstStyle/>
+          <a:p>
+            <a:r>
+              <a:t>Agenda-Überblick. Timing und Pausen siehe Ablaufplan im Trainerhandbuch (Sektion 3).</a:t>
+            </a:r>
+          </a:p>
+        </p:txBody>
+      </p:sp>
+      <p:sp>
+        <p:nvSpPr>
+          <p:cNvPr id="4" name="Slide Number Placeholder 3"/>
+          <p:cNvSpPr>
+            <a:spLocks noGrp="1"/>
+          </p:cNvSpPr>
+          <p:nvPr>
+            <p:ph type="sldNum" idx="5" sz="quarter"/>
+          </p:nvPr>
+        </p:nvSpPr>
+        <p:spPr/>
+      </p:sp>
+    </p:spTree>
+  </p:cSld>
+  <p:clrMapOvr>
+    <a:masterClrMapping/>
+  </p:clrMapOvr>
+</p:notes>
+</file>
+
+<file path=ppt/notesSlides/notesSlide10.xml><?xml version="1.0" encoding="utf-8"?>
+<p:notes xmlns:a="http://schemas.openxmlformats.org/drawingml/2006/main" xmlns:p="http://schemas.openxmlformats.org/presentationml/2006/main" xmlns:r="http://schemas.openxmlformats.org/officeDocument/2006/relationships">
+  <p:cSld>
+    <p:spTree>
+      <p:nvGrpSpPr>
+        <p:cNvPr id="1" name=""/>
+        <p:cNvGrpSpPr/>
+        <p:nvPr/>
+      </p:nvGrpSpPr>
+      <p:grpSpPr>
+        <a:xfrm>
+          <a:off x="0" y="0"/>
+          <a:ext cx="0" cy="0"/>
+          <a:chOff x="0" y="0"/>
+          <a:chExt cx="0" cy="0"/>
+        </a:xfrm>
+      </p:grpSpPr>
+      <p:sp>
+        <p:nvSpPr>
+          <p:cNvPr id="2" name="Slide Image Placeholder 1"/>
+          <p:cNvSpPr>
+            <a:spLocks noGrp="1"/>
+          </p:cNvSpPr>
+          <p:nvPr>
+            <p:ph type="sldImg" idx="2"/>
+          </p:nvPr>
+        </p:nvSpPr>
+        <p:spPr/>
+      </p:sp>
+      <p:sp>
+        <p:nvSpPr>
+          <p:cNvPr id="3" name="Notes Placeholder 2"/>
+          <p:cNvSpPr>
+            <a:spLocks noGrp="1"/>
+          </p:cNvSpPr>
+          <p:nvPr>
+            <p:ph type="body" idx="3" sz="quarter"/>
+          </p:nvPr>
+        </p:nvSpPr>
+        <p:spPr/>
+        <p:txBody>
+          <a:bodyPr/>
+          <a:lstStyle/>
+          <a:p>
+            <a:r>
+              <a:t>Siehe Trainerhandbuch (Sektion 3) für Moderationshinweise, Timing und erwartete Teilnehmerreaktionen.</a:t>
+            </a:r>
+          </a:p>
+        </p:txBody>
+      </p:sp>
+      <p:sp>
+        <p:nvSpPr>
+          <p:cNvPr id="4" name="Slide Number Placeholder 3"/>
+          <p:cNvSpPr>
+            <a:spLocks noGrp="1"/>
+          </p:cNvSpPr>
+          <p:nvPr>
+            <p:ph type="sldNum" idx="5" sz="quarter"/>
+          </p:nvPr>
+        </p:nvSpPr>
+        <p:spPr/>
+      </p:sp>
+    </p:spTree>
+  </p:cSld>
+  <p:clrMapOvr>
+    <a:masterClrMapping/>
+  </p:clrMapOvr>
+</p:notes>
+</file>
+
+<file path=ppt/notesSlides/notesSlide11.xml><?xml version="1.0" encoding="utf-8"?>
+<p:notes xmlns:a="http://schemas.openxmlformats.org/drawingml/2006/main" xmlns:p="http://schemas.openxmlformats.org/presentationml/2006/main" xmlns:r="http://schemas.openxmlformats.org/officeDocument/2006/relationships">
+  <p:cSld>
+    <p:spTree>
+      <p:nvGrpSpPr>
+        <p:cNvPr id="1" name=""/>
+        <p:cNvGrpSpPr/>
+        <p:nvPr/>
+      </p:nvGrpSpPr>
+      <p:grpSpPr>
+        <a:xfrm>
+          <a:off x="0" y="0"/>
+          <a:ext cx="0" cy="0"/>
+          <a:chOff x="0" y="0"/>
+          <a:chExt cx="0" cy="0"/>
+        </a:xfrm>
+      </p:grpSpPr>
+      <p:sp>
+        <p:nvSpPr>
+          <p:cNvPr id="2" name="Slide Image Placeholder 1"/>
+          <p:cNvSpPr>
+            <a:spLocks noGrp="1"/>
+          </p:cNvSpPr>
+          <p:nvPr>
+            <p:ph type="sldImg" idx="2"/>
+          </p:nvPr>
+        </p:nvSpPr>
+        <p:spPr/>
+      </p:sp>
+      <p:sp>
+        <p:nvSpPr>
+          <p:cNvPr id="3" name="Notes Placeholder 2"/>
+          <p:cNvSpPr>
+            <a:spLocks noGrp="1"/>
+          </p:cNvSpPr>
+          <p:nvPr>
+            <p:ph type="body" idx="3" sz="quarter"/>
+          </p:nvPr>
+        </p:nvSpPr>
+        <p:spPr/>
+        <p:txBody>
+          <a:bodyPr/>
+          <a:lstStyle/>
+          <a:p>
+            <a:r>
+              <a:t>Siehe Trainerhandbuch (Sektion 3) für Moderationshinweise, Timing und erwartete Teilnehmerreaktionen.</a:t>
+            </a:r>
+          </a:p>
+        </p:txBody>
+      </p:sp>
+      <p:sp>
+        <p:nvSpPr>
+          <p:cNvPr id="4" name="Slide Number Placeholder 3"/>
+          <p:cNvSpPr>
+            <a:spLocks noGrp="1"/>
+          </p:cNvSpPr>
+          <p:nvPr>
+            <p:ph type="sldNum" idx="5" sz="quarter"/>
+          </p:nvPr>
+        </p:nvSpPr>
+        <p:spPr/>
+      </p:sp>
+    </p:spTree>
+  </p:cSld>
+  <p:clrMapOvr>
+    <a:masterClrMapping/>
+  </p:clrMapOvr>
+</p:notes>
+</file>
+
+<file path=ppt/notesSlides/notesSlide2.xml><?xml version="1.0" encoding="utf-8"?>
+<p:notes xmlns:a="http://schemas.openxmlformats.org/drawingml/2006/main" xmlns:p="http://schemas.openxmlformats.org/presentationml/2006/main" xmlns:r="http://schemas.openxmlformats.org/officeDocument/2006/relationships">
+  <p:cSld>
+    <p:spTree>
+      <p:nvGrpSpPr>
+        <p:cNvPr id="1" name=""/>
+        <p:cNvGrpSpPr/>
+        <p:nvPr/>
+      </p:nvGrpSpPr>
+      <p:grpSpPr>
+        <a:xfrm>
+          <a:off x="0" y="0"/>
+          <a:ext cx="0" cy="0"/>
+          <a:chOff x="0" y="0"/>
+          <a:chExt cx="0" cy="0"/>
+        </a:xfrm>
+      </p:grpSpPr>
+      <p:sp>
+        <p:nvSpPr>
+          <p:cNvPr id="2" name="Slide Image Placeholder 1"/>
+          <p:cNvSpPr>
+            <a:spLocks noGrp="1"/>
+          </p:cNvSpPr>
+          <p:nvPr>
+            <p:ph type="sldImg" idx="2"/>
+          </p:nvPr>
+        </p:nvSpPr>
+        <p:spPr/>
+      </p:sp>
+      <p:sp>
+        <p:nvSpPr>
+          <p:cNvPr id="3" name="Notes Placeholder 2"/>
+          <p:cNvSpPr>
+            <a:spLocks noGrp="1"/>
+          </p:cNvSpPr>
+          <p:nvPr>
+            <p:ph type="body" idx="3" sz="quarter"/>
+          </p:nvPr>
+        </p:nvSpPr>
+        <p:spPr/>
+        <p:txBody>
+          <a:bodyPr/>
+          <a:lstStyle/>
+          <a:p>
+            <a:r>
+              <a:t>Siehe Trainerhandbuch (Sektion 3) für Moderationshinweise, Timing und erwartete Teilnehmerreaktionen.</a:t>
+            </a:r>
+          </a:p>
+        </p:txBody>
+      </p:sp>
+      <p:sp>
+        <p:nvSpPr>
+          <p:cNvPr id="4" name="Slide Number Placeholder 3"/>
+          <p:cNvSpPr>
+            <a:spLocks noGrp="1"/>
+          </p:cNvSpPr>
+          <p:nvPr>
+            <p:ph type="sldNum" idx="5" sz="quarter"/>
+          </p:nvPr>
+        </p:nvSpPr>
+        <p:spPr/>
+      </p:sp>
+    </p:spTree>
+  </p:cSld>
+  <p:clrMapOvr>
+    <a:masterClrMapping/>
+  </p:clrMapOvr>
+</p:notes>
+</file>
+
+<file path=ppt/notesSlides/notesSlide3.xml><?xml version="1.0" encoding="utf-8"?>
+<p:notes xmlns:a="http://schemas.openxmlformats.org/drawingml/2006/main" xmlns:p="http://schemas.openxmlformats.org/presentationml/2006/main" xmlns:r="http://schemas.openxmlformats.org/officeDocument/2006/relationships">
+  <p:cSld>
+    <p:spTree>
+      <p:nvGrpSpPr>
+        <p:cNvPr id="1" name=""/>
+        <p:cNvGrpSpPr/>
+        <p:nvPr/>
+      </p:nvGrpSpPr>
+      <p:grpSpPr>
+        <a:xfrm>
+          <a:off x="0" y="0"/>
+          <a:ext cx="0" cy="0"/>
+          <a:chOff x="0" y="0"/>
+          <a:chExt cx="0" cy="0"/>
+        </a:xfrm>
+      </p:grpSpPr>
+      <p:sp>
+        <p:nvSpPr>
+          <p:cNvPr id="2" name="Slide Image Placeholder 1"/>
+          <p:cNvSpPr>
+            <a:spLocks noGrp="1"/>
+          </p:cNvSpPr>
+          <p:nvPr>
+            <p:ph type="sldImg" idx="2"/>
+          </p:nvPr>
+        </p:nvSpPr>
+        <p:spPr/>
+      </p:sp>
+      <p:sp>
+        <p:nvSpPr>
+          <p:cNvPr id="3" name="Notes Placeholder 2"/>
+          <p:cNvSpPr>
+            <a:spLocks noGrp="1"/>
+          </p:cNvSpPr>
+          <p:nvPr>
+            <p:ph type="body" idx="3" sz="quarter"/>
+          </p:nvPr>
+        </p:nvSpPr>
+        <p:spPr/>
+        <p:txBody>
+          <a:bodyPr/>
+          <a:lstStyle/>
+          <a:p>
+            <a:r>
+              <a:t>Siehe Trainerhandbuch (Sektion 3) für Moderationshinweise, Timing und erwartete Teilnehmerreaktionen.</a:t>
+            </a:r>
+          </a:p>
+        </p:txBody>
+      </p:sp>
+      <p:sp>
+        <p:nvSpPr>
+          <p:cNvPr id="4" name="Slide Number Placeholder 3"/>
+          <p:cNvSpPr>
+            <a:spLocks noGrp="1"/>
+          </p:cNvSpPr>
+          <p:nvPr>
+            <p:ph type="sldNum" idx="5" sz="quarter"/>
+          </p:nvPr>
+        </p:nvSpPr>
+        <p:spPr/>
+      </p:sp>
+    </p:spTree>
+  </p:cSld>
+  <p:clrMapOvr>
+    <a:masterClrMapping/>
+  </p:clrMapOvr>
+</p:notes>
+</file>
+
+<file path=ppt/notesSlides/notesSlide4.xml><?xml version="1.0" encoding="utf-8"?>
+<p:notes xmlns:a="http://schemas.openxmlformats.org/drawingml/2006/main" xmlns:p="http://schemas.openxmlformats.org/presentationml/2006/main" xmlns:r="http://schemas.openxmlformats.org/officeDocument/2006/relationships">
+  <p:cSld>
+    <p:spTree>
+      <p:nvGrpSpPr>
+        <p:cNvPr id="1" name=""/>
+        <p:cNvGrpSpPr/>
+        <p:nvPr/>
+      </p:nvGrpSpPr>
+      <p:grpSpPr>
+        <a:xfrm>
+          <a:off x="0" y="0"/>
+          <a:ext cx="0" cy="0"/>
+          <a:chOff x="0" y="0"/>
+          <a:chExt cx="0" cy="0"/>
+        </a:xfrm>
+      </p:grpSpPr>
+      <p:sp>
+        <p:nvSpPr>
+          <p:cNvPr id="2" name="Slide Image Placeholder 1"/>
+          <p:cNvSpPr>
+            <a:spLocks noGrp="1"/>
+          </p:cNvSpPr>
+          <p:nvPr>
+            <p:ph type="sldImg" idx="2"/>
+          </p:nvPr>
+        </p:nvSpPr>
+        <p:spPr/>
+      </p:sp>
+      <p:sp>
+        <p:nvSpPr>
+          <p:cNvPr id="3" name="Notes Placeholder 2"/>
+          <p:cNvSpPr>
+            <a:spLocks noGrp="1"/>
+          </p:cNvSpPr>
+          <p:nvPr>
+            <p:ph type="body" idx="3" sz="quarter"/>
+          </p:nvPr>
+        </p:nvSpPr>
+        <p:spPr/>
+        <p:txBody>
+          <a:bodyPr/>
+          <a:lstStyle/>
+          <a:p>
+            <a:r>
+              <a:t>Siehe Trainerhandbuch (Sektion 3) für Moderationshinweise, Timing und erwartete Teilnehmerreaktionen.</a:t>
+            </a:r>
+          </a:p>
+        </p:txBody>
+      </p:sp>
+      <p:sp>
+        <p:nvSpPr>
+          <p:cNvPr id="4" name="Slide Number Placeholder 3"/>
+          <p:cNvSpPr>
+            <a:spLocks noGrp="1"/>
+          </p:cNvSpPr>
+          <p:nvPr>
+            <p:ph type="sldNum" idx="5" sz="quarter"/>
+          </p:nvPr>
+        </p:nvSpPr>
+        <p:spPr/>
+      </p:sp>
+    </p:spTree>
+  </p:cSld>
+  <p:clrMapOvr>
+    <a:masterClrMapping/>
+  </p:clrMapOvr>
+</p:notes>
+</file>
+
+<file path=ppt/notesSlides/notesSlide5.xml><?xml version="1.0" encoding="utf-8"?>
+<p:notes xmlns:a="http://schemas.openxmlformats.org/drawingml/2006/main" xmlns:p="http://schemas.openxmlformats.org/presentationml/2006/main" xmlns:r="http://schemas.openxmlformats.org/officeDocument/2006/relationships">
+  <p:cSld>
+    <p:spTree>
+      <p:nvGrpSpPr>
+        <p:cNvPr id="1" name=""/>
+        <p:cNvGrpSpPr/>
+        <p:nvPr/>
+      </p:nvGrpSpPr>
+      <p:grpSpPr>
+        <a:xfrm>
+          <a:off x="0" y="0"/>
+          <a:ext cx="0" cy="0"/>
+          <a:chOff x="0" y="0"/>
+          <a:chExt cx="0" cy="0"/>
+        </a:xfrm>
+      </p:grpSpPr>
+      <p:sp>
+        <p:nvSpPr>
+          <p:cNvPr id="2" name="Slide Image Placeholder 1"/>
+          <p:cNvSpPr>
+            <a:spLocks noGrp="1"/>
+          </p:cNvSpPr>
+          <p:nvPr>
+            <p:ph type="sldImg" idx="2"/>
+          </p:nvPr>
+        </p:nvSpPr>
+        <p:spPr/>
+      </p:sp>
+      <p:sp>
+        <p:nvSpPr>
+          <p:cNvPr id="3" name="Notes Placeholder 2"/>
+          <p:cNvSpPr>
+            <a:spLocks noGrp="1"/>
+          </p:cNvSpPr>
+          <p:nvPr>
+            <p:ph type="body" idx="3" sz="quarter"/>
+          </p:nvPr>
+        </p:nvSpPr>
+        <p:spPr/>
+        <p:txBody>
+          <a:bodyPr/>
+          <a:lstStyle/>
+          <a:p>
+            <a:r>
+              <a:t>Siehe Trainerhandbuch (Sektion 3) für Moderationshinweise, Timing und erwartete Teilnehmerreaktionen.</a:t>
+            </a:r>
+          </a:p>
+        </p:txBody>
+      </p:sp>
+      <p:sp>
+        <p:nvSpPr>
+          <p:cNvPr id="4" name="Slide Number Placeholder 3"/>
+          <p:cNvSpPr>
+            <a:spLocks noGrp="1"/>
+          </p:cNvSpPr>
+          <p:nvPr>
+            <p:ph type="sldNum" idx="5" sz="quarter"/>
+          </p:nvPr>
+        </p:nvSpPr>
+        <p:spPr/>
+      </p:sp>
+    </p:spTree>
+  </p:cSld>
+  <p:clrMapOvr>
+    <a:masterClrMapping/>
+  </p:clrMapOvr>
+</p:notes>
+</file>
+
+<file path=ppt/notesSlides/notesSlide6.xml><?xml version="1.0" encoding="utf-8"?>
+<p:notes xmlns:a="http://schemas.openxmlformats.org/drawingml/2006/main" xmlns:p="http://schemas.openxmlformats.org/presentationml/2006/main" xmlns:r="http://schemas.openxmlformats.org/officeDocument/2006/relationships">
+  <p:cSld>
+    <p:spTree>
+      <p:nvGrpSpPr>
+        <p:cNvPr id="1" name=""/>
+        <p:cNvGrpSpPr/>
+        <p:nvPr/>
+      </p:nvGrpSpPr>
+      <p:grpSpPr>
+        <a:xfrm>
+          <a:off x="0" y="0"/>
+          <a:ext cx="0" cy="0"/>
+          <a:chOff x="0" y="0"/>
+          <a:chExt cx="0" cy="0"/>
+        </a:xfrm>
+      </p:grpSpPr>
+      <p:sp>
+        <p:nvSpPr>
+          <p:cNvPr id="2" name="Slide Image Placeholder 1"/>
+          <p:cNvSpPr>
+            <a:spLocks noGrp="1"/>
+          </p:cNvSpPr>
+          <p:nvPr>
+            <p:ph type="sldImg" idx="2"/>
+          </p:nvPr>
+        </p:nvSpPr>
+        <p:spPr/>
+      </p:sp>
+      <p:sp>
+        <p:nvSpPr>
+          <p:cNvPr id="3" name="Notes Placeholder 2"/>
+          <p:cNvSpPr>
+            <a:spLocks noGrp="1"/>
+          </p:cNvSpPr>
+          <p:nvPr>
+            <p:ph type="body" idx="3" sz="quarter"/>
+          </p:nvPr>
+        </p:nvSpPr>
+        <p:spPr/>
+        <p:txBody>
+          <a:bodyPr/>
+          <a:lstStyle/>
+          <a:p>
+            <a:r>
+              <a:t>Siehe Trainerhandbuch (Sektion 3) für Moderationshinweise, Timing und erwartete Teilnehmerreaktionen.</a:t>
+            </a:r>
+          </a:p>
+        </p:txBody>
+      </p:sp>
+      <p:sp>
+        <p:nvSpPr>
+          <p:cNvPr id="4" name="Slide Number Placeholder 3"/>
+          <p:cNvSpPr>
+            <a:spLocks noGrp="1"/>
+          </p:cNvSpPr>
+          <p:nvPr>
+            <p:ph type="sldNum" idx="5" sz="quarter"/>
+          </p:nvPr>
+        </p:nvSpPr>
+        <p:spPr/>
+      </p:sp>
+    </p:spTree>
+  </p:cSld>
+  <p:clrMapOvr>
+    <a:masterClrMapping/>
+  </p:clrMapOvr>
+</p:notes>
+</file>
+
+<file path=ppt/notesSlides/notesSlide7.xml><?xml version="1.0" encoding="utf-8"?>
+<p:notes xmlns:a="http://schemas.openxmlformats.org/drawingml/2006/main" xmlns:p="http://schemas.openxmlformats.org/presentationml/2006/main" xmlns:r="http://schemas.openxmlformats.org/officeDocument/2006/relationships">
+  <p:cSld>
+    <p:spTree>
+      <p:nvGrpSpPr>
+        <p:cNvPr id="1" name=""/>
+        <p:cNvGrpSpPr/>
+        <p:nvPr/>
+      </p:nvGrpSpPr>
+      <p:grpSpPr>
+        <a:xfrm>
+          <a:off x="0" y="0"/>
+          <a:ext cx="0" cy="0"/>
+          <a:chOff x="0" y="0"/>
+          <a:chExt cx="0" cy="0"/>
+        </a:xfrm>
+      </p:grpSpPr>
+      <p:sp>
+        <p:nvSpPr>
+          <p:cNvPr id="2" name="Slide Image Placeholder 1"/>
+          <p:cNvSpPr>
+            <a:spLocks noGrp="1"/>
+          </p:cNvSpPr>
+          <p:nvPr>
+            <p:ph type="sldImg" idx="2"/>
+          </p:nvPr>
+        </p:nvSpPr>
+        <p:spPr/>
+      </p:sp>
+      <p:sp>
+        <p:nvSpPr>
+          <p:cNvPr id="3" name="Notes Placeholder 2"/>
+          <p:cNvSpPr>
+            <a:spLocks noGrp="1"/>
+          </p:cNvSpPr>
+          <p:nvPr>
+            <p:ph type="body" idx="3" sz="quarter"/>
+          </p:nvPr>
+        </p:nvSpPr>
+        <p:spPr/>
+        <p:txBody>
+          <a:bodyPr/>
+          <a:lstStyle/>
+          <a:p>
+            <a:r>
+              <a:t>Siehe Trainerhandbuch (Sektion 3) für Moderationshinweise, Timing und erwartete Teilnehmerreaktionen.</a:t>
+            </a:r>
+          </a:p>
+        </p:txBody>
+      </p:sp>
+      <p:sp>
+        <p:nvSpPr>
+          <p:cNvPr id="4" name="Slide Number Placeholder 3"/>
+          <p:cNvSpPr>
+            <a:spLocks noGrp="1"/>
+          </p:cNvSpPr>
+          <p:nvPr>
+            <p:ph type="sldNum" idx="5" sz="quarter"/>
+          </p:nvPr>
+        </p:nvSpPr>
+        <p:spPr/>
+      </p:sp>
+    </p:spTree>
+  </p:cSld>
+  <p:clrMapOvr>
+    <a:masterClrMapping/>
+  </p:clrMapOvr>
+</p:notes>
+</file>
+
+<file path=ppt/notesSlides/notesSlide8.xml><?xml version="1.0" encoding="utf-8"?>
+<p:notes xmlns:a="http://schemas.openxmlformats.org/drawingml/2006/main" xmlns:p="http://schemas.openxmlformats.org/presentationml/2006/main" xmlns:r="http://schemas.openxmlformats.org/officeDocument/2006/relationships">
+  <p:cSld>
+    <p:spTree>
+      <p:nvGrpSpPr>
+        <p:cNvPr id="1" name=""/>
+        <p:cNvGrpSpPr/>
+        <p:nvPr/>
+      </p:nvGrpSpPr>
+      <p:grpSpPr>
+        <a:xfrm>
+          <a:off x="0" y="0"/>
+          <a:ext cx="0" cy="0"/>
+          <a:chOff x="0" y="0"/>
+          <a:chExt cx="0" cy="0"/>
+        </a:xfrm>
+      </p:grpSpPr>
+      <p:sp>
+        <p:nvSpPr>
+          <p:cNvPr id="2" name="Slide Image Placeholder 1"/>
+          <p:cNvSpPr>
+            <a:spLocks noGrp="1"/>
+          </p:cNvSpPr>
+          <p:nvPr>
+            <p:ph type="sldImg" idx="2"/>
+          </p:nvPr>
+        </p:nvSpPr>
+        <p:spPr/>
+      </p:sp>
+      <p:sp>
+        <p:nvSpPr>
+          <p:cNvPr id="3" name="Notes Placeholder 2"/>
+          <p:cNvSpPr>
+            <a:spLocks noGrp="1"/>
+          </p:cNvSpPr>
+          <p:nvPr>
+            <p:ph type="body" idx="3" sz="quarter"/>
+          </p:nvPr>
+        </p:nvSpPr>
+        <p:spPr/>
+        <p:txBody>
+          <a:bodyPr/>
+          <a:lstStyle/>
+          <a:p>
+            <a:r>
+              <a:t>Siehe Trainerhandbuch (Sektion 3) für Moderationshinweise, Timing und erwartete Teilnehmerreaktionen.</a:t>
+            </a:r>
+          </a:p>
+        </p:txBody>
+      </p:sp>
+      <p:sp>
+        <p:nvSpPr>
+          <p:cNvPr id="4" name="Slide Number Placeholder 3"/>
+          <p:cNvSpPr>
+            <a:spLocks noGrp="1"/>
+          </p:cNvSpPr>
+          <p:nvPr>
+            <p:ph type="sldNum" idx="5" sz="quarter"/>
+          </p:nvPr>
+        </p:nvSpPr>
+        <p:spPr/>
+      </p:sp>
+    </p:spTree>
+  </p:cSld>
+  <p:clrMapOvr>
+    <a:masterClrMapping/>
+  </p:clrMapOvr>
+</p:notes>
+</file>
+
+<file path=ppt/notesSlides/notesSlide9.xml><?xml version="1.0" encoding="utf-8"?>
+<p:notes xmlns:a="http://schemas.openxmlformats.org/drawingml/2006/main" xmlns:p="http://schemas.openxmlformats.org/presentationml/2006/main" xmlns:r="http://schemas.openxmlformats.org/officeDocument/2006/relationships">
+  <p:cSld>
+    <p:spTree>
+      <p:nvGrpSpPr>
+        <p:cNvPr id="1" name=""/>
+        <p:cNvGrpSpPr/>
+        <p:nvPr/>
+      </p:nvGrpSpPr>
+      <p:grpSpPr>
+        <a:xfrm>
+          <a:off x="0" y="0"/>
+          <a:ext cx="0" cy="0"/>
+          <a:chOff x="0" y="0"/>
+          <a:chExt cx="0" cy="0"/>
+        </a:xfrm>
+      </p:grpSpPr>
+      <p:sp>
+        <p:nvSpPr>
+          <p:cNvPr id="2" name="Slide Image Placeholder 1"/>
+          <p:cNvSpPr>
+            <a:spLocks noGrp="1"/>
+          </p:cNvSpPr>
+          <p:nvPr>
+            <p:ph type="sldImg" idx="2"/>
+          </p:nvPr>
+        </p:nvSpPr>
+        <p:spPr/>
+      </p:sp>
+      <p:sp>
+        <p:nvSpPr>
+          <p:cNvPr id="3" name="Notes Placeholder 2"/>
+          <p:cNvSpPr>
+            <a:spLocks noGrp="1"/>
+          </p:cNvSpPr>
+          <p:nvPr>
+            <p:ph type="body" idx="3" sz="quarter"/>
+          </p:nvPr>
+        </p:nvSpPr>
+        <p:spPr/>
+        <p:txBody>
+          <a:bodyPr/>
+          <a:lstStyle/>
+          <a:p>
+            <a:r>
+              <a:t>Trainer-Hinweis: Für die Jahresplanung rechnen wir konservativ mit 15–20 %, damit keine unrealistischen Ziele entstehen. 33 % sind möglich bei sehr qualifizierten Verbundpartner-Leads – als Planungsbasis aber zu optimistisch.</a:t>
+            </a:r>
+          </a:p>
+        </p:txBody>
+      </p:sp>
+      <p:sp>
+        <p:nvSpPr>
+          <p:cNvPr id="4" name="Slide Number Placeholder 3"/>
+          <p:cNvSpPr>
+            <a:spLocks noGrp="1"/>
+          </p:cNvSpPr>
+          <p:nvPr>
+            <p:ph type="sldNum" idx="5" sz="quarter"/>
+          </p:nvPr>
+        </p:nvSpPr>
+        <p:spPr/>
+      </p:sp>
+    </p:spTree>
+  </p:cSld>
+  <p:clrMapOvr>
+    <a:masterClrMapping/>
+  </p:clrMapOvr>
+</p:notes>
 </file>
 
 <file path=ppt/slideLayouts/slideLayout1.xml><?xml version="1.0" encoding="utf-8"?>
@@ -3912,14 +5033,151 @@
                 </a:solidFill>
                 <a:latin typeface="Source Serif 4"/>
               </a:rPr>
-              <a:t>Welche Kanäle funktionieren wirklich?</a:t>
-            </a:r>
-          </a:p>
-        </p:txBody>
-      </p:sp>
-      <p:sp>
-        <p:nvSpPr>
-          <p:cNvPr id="8" name="Rectangle 7"/>
+              <a:t>Wertversprechen formulieren</a:t>
+            </a:r>
+          </a:p>
+        </p:txBody>
+      </p:sp>
+      <p:sp>
+        <p:nvSpPr>
+          <p:cNvPr id="8" name="TextBox 7"/>
+          <p:cNvSpPr txBox="1"/>
+          <p:nvPr/>
+        </p:nvSpPr>
+        <p:spPr>
+          <a:xfrm>
+            <a:off x="685800" y="1417320"/>
+            <a:ext cx="10817352" cy="5029200"/>
+          </a:xfrm>
+          <a:prstGeom prst="rect">
+            <a:avLst/>
+          </a:prstGeom>
+          <a:noFill/>
+        </p:spPr>
+        <p:txBody>
+          <a:bodyPr wrap="square">
+            <a:spAutoFit/>
+          </a:bodyPr>
+          <a:lstStyle/>
+          <a:p>
+            <a:pPr>
+              <a:spcBef>
+                <a:spcPts val="400"/>
+              </a:spcBef>
+              <a:spcAft>
+                <a:spcPts val="200"/>
+              </a:spcAft>
+            </a:pPr>
+            <a:r>
+              <a:rPr sz="1200">
+                <a:solidFill>
+                  <a:srgbClr val="3D5466"/>
+                </a:solidFill>
+                <a:latin typeface="Arial"/>
+              </a:rPr>
+              <a:t>Das Wertversprechen (Value Proposition) beantwortet: Warum sollte ein Unternehmen aus meinem Zielsegment zu uns wechseln – oder bleiben?</a:t>
+            </a:r>
+          </a:p>
+          <a:p>
+            <a:pPr>
+              <a:spcBef>
+                <a:spcPts val="400"/>
+              </a:spcBef>
+              <a:spcAft>
+                <a:spcPts val="200"/>
+              </a:spcAft>
+            </a:pPr>
+            <a:r>
+              <a:rPr sz="1200">
+                <a:solidFill>
+                  <a:srgbClr val="3D5466"/>
+                </a:solidFill>
+                <a:latin typeface="Arial"/>
+              </a:rPr>
+              <a:t>Ein wirksames Wertversprechen im Firmenkundengeschäft ist:</a:t>
+            </a:r>
+          </a:p>
+          <a:p>
+            <a:pPr>
+              <a:spcBef>
+                <a:spcPts val="400"/>
+              </a:spcBef>
+              <a:spcAft>
+                <a:spcPts val="200"/>
+              </a:spcAft>
+            </a:pPr>
+            <a:r>
+              <a:rPr sz="1300">
+                <a:solidFill>
+                  <a:srgbClr val="3D5466"/>
+                </a:solidFill>
+                <a:latin typeface="Arial"/>
+              </a:rPr>
+              <a:t>▸  Spezifisch (nicht „wir sind die beste Bank"): „Für Handwerksbetriebe in der Region sind wir der Partner, der Finanzierungsentscheidungen in 48 Stunden trifft."</a:t>
+            </a:r>
+          </a:p>
+          <a:p>
+            <a:pPr>
+              <a:spcBef>
+                <a:spcPts val="400"/>
+              </a:spcBef>
+              <a:spcAft>
+                <a:spcPts val="200"/>
+              </a:spcAft>
+            </a:pPr>
+            <a:r>
+              <a:rPr sz="1300">
+                <a:solidFill>
+                  <a:srgbClr val="3D5466"/>
+                </a:solidFill>
+                <a:latin typeface="Arial"/>
+              </a:rPr>
+              <a:t>▸  Belegbar: Konkrete Referenzen, Bearbeitungszeiten, Verbundpartner-Einbindung</a:t>
+            </a:r>
+          </a:p>
+          <a:p>
+            <a:pPr>
+              <a:spcBef>
+                <a:spcPts val="400"/>
+              </a:spcBef>
+              <a:spcAft>
+                <a:spcPts val="200"/>
+              </a:spcAft>
+            </a:pPr>
+            <a:r>
+              <a:rPr sz="1300">
+                <a:solidFill>
+                  <a:srgbClr val="3D5466"/>
+                </a:solidFill>
+                <a:latin typeface="Arial"/>
+              </a:rPr>
+              <a:t>▸  Differenzierend: Was kann ich, was die Sparkasse oder Commerzbank nicht kann?</a:t>
+            </a:r>
+          </a:p>
+          <a:p>
+            <a:pPr>
+              <a:spcBef>
+                <a:spcPts val="400"/>
+              </a:spcBef>
+              <a:spcAft>
+                <a:spcPts val="200"/>
+              </a:spcAft>
+            </a:pPr>
+            <a:r>
+              <a:rPr sz="1200">
+                <a:solidFill>
+                  <a:srgbClr val="3D5466"/>
+                </a:solidFill>
+                <a:latin typeface="Arial"/>
+              </a:rPr>
+              <a:t>## 4.5 Neukundenansprache: Kanäle und Maßnahmen</a:t>
+            </a:r>
+          </a:p>
+        </p:txBody>
+      </p:sp>
+      <p:sp>
+        <p:nvSpPr>
+          <p:cNvPr id="9" name="Rectangle 8"/>
           <p:cNvSpPr/>
           <p:nvPr/>
         </p:nvSpPr>
@@ -3962,7 +5220,7 @@
       </p:sp>
       <p:sp>
         <p:nvSpPr>
-          <p:cNvPr id="9" name="TextBox 8"/>
+          <p:cNvPr id="10" name="TextBox 9"/>
           <p:cNvSpPr txBox="1"/>
           <p:nvPr/>
         </p:nvSpPr>
@@ -4250,265 +5508,14 @@
                 </a:solidFill>
                 <a:latin typeface="Source Serif 4"/>
               </a:rPr>
-              <a:t>Empfehlungsmanagement systematisieren</a:t>
-            </a:r>
-          </a:p>
-        </p:txBody>
-      </p:sp>
-      <p:sp>
-        <p:nvSpPr>
-          <p:cNvPr id="8" name="TextBox 7"/>
-          <p:cNvSpPr txBox="1"/>
-          <p:nvPr/>
-        </p:nvSpPr>
-        <p:spPr>
-          <a:xfrm>
-            <a:off x="685800" y="1417320"/>
-            <a:ext cx="10817352" cy="5029200"/>
-          </a:xfrm>
-          <a:prstGeom prst="rect">
-            <a:avLst/>
-          </a:prstGeom>
-          <a:noFill/>
-        </p:spPr>
-        <p:txBody>
-          <a:bodyPr wrap="square">
-            <a:spAutoFit/>
-          </a:bodyPr>
-          <a:lstStyle/>
-          <a:p>
-            <a:pPr>
-              <a:spcBef>
-                <a:spcPts val="400"/>
-              </a:spcBef>
-              <a:spcAft>
-                <a:spcPts val="200"/>
-              </a:spcAft>
-            </a:pPr>
-            <a:r>
-              <a:rPr sz="1200">
-                <a:solidFill>
-                  <a:srgbClr val="3D5466"/>
-                </a:solidFill>
-                <a:latin typeface="Arial"/>
-              </a:rPr>
-              <a:t>Empfehlungen entstehen nicht zufällig. Ein aktives Empfehlungsmanagement umfasst:</a:t>
-            </a:r>
-          </a:p>
-          <a:p>
-            <a:pPr>
-              <a:spcBef>
-                <a:spcPts val="400"/>
-              </a:spcBef>
-              <a:spcAft>
-                <a:spcPts val="200"/>
-              </a:spcAft>
-            </a:pPr>
-            <a:r>
-              <a:rPr sz="1300">
-                <a:solidFill>
-                  <a:srgbClr val="3D5466"/>
-                </a:solidFill>
-                <a:latin typeface="Arial"/>
-              </a:rPr>
-              <a:t>▸  Identifizieren: Welche meiner Bestandskunden sind Meinungsführer in ihrem Branchenumfeld?</a:t>
-            </a:r>
-          </a:p>
-          <a:p>
-            <a:pPr>
-              <a:spcBef>
-                <a:spcPts val="400"/>
-              </a:spcBef>
-              <a:spcAft>
-                <a:spcPts val="200"/>
-              </a:spcAft>
-            </a:pPr>
-            <a:r>
-              <a:rPr sz="1300">
-                <a:solidFill>
-                  <a:srgbClr val="3D5466"/>
-                </a:solidFill>
-                <a:latin typeface="Arial"/>
-              </a:rPr>
-              <a:t>▸  Beziehung vertiefen: Diese Kunden erhalten besondere Aufmerksamkeit – nicht wegen der Empfehlung, sondern wegen ihres Werts.</a:t>
-            </a:r>
-          </a:p>
-          <a:p>
-            <a:pPr>
-              <a:spcBef>
-                <a:spcPts val="400"/>
-              </a:spcBef>
-              <a:spcAft>
-                <a:spcPts val="200"/>
-              </a:spcAft>
-            </a:pPr>
-            <a:r>
-              <a:rPr sz="1300">
-                <a:solidFill>
-                  <a:srgbClr val="3D5466"/>
-                </a:solidFill>
-                <a:latin typeface="Arial"/>
-              </a:rPr>
-              <a:t>▸  Aktiv bitten: Am Ende eines erfolgreichen Gesprächs: „Gibt es Unternehmen in Ihrem Umfeld, die unsere Zusammenarbeit kennenlernen sollten?"</a:t>
-            </a:r>
-          </a:p>
-          <a:p>
-            <a:pPr>
-              <a:spcBef>
-                <a:spcPts val="400"/>
-              </a:spcBef>
-              <a:spcAft>
-                <a:spcPts val="200"/>
-              </a:spcAft>
-            </a:pPr>
-            <a:r>
-              <a:rPr sz="1300">
-                <a:solidFill>
-                  <a:srgbClr val="3D5466"/>
-                </a:solidFill>
-                <a:latin typeface="Arial"/>
-              </a:rPr>
-              <a:t>▸  Danken und schließen: Rückmeldung geben, ob der Kontakt erfolgreich war.</a:t>
-            </a:r>
-          </a:p>
-          <a:p>
-            <a:pPr>
-              <a:spcBef>
-                <a:spcPts val="400"/>
-              </a:spcBef>
-              <a:spcAft>
-                <a:spcPts val="200"/>
-              </a:spcAft>
-            </a:pPr>
-            <a:r>
-              <a:rPr sz="1200">
-                <a:solidFill>
-                  <a:srgbClr val="3D5466"/>
-                </a:solidFill>
-                <a:latin typeface="Arial"/>
-              </a:rPr>
-              <a:t>## 4.6 Praxiscase: Thomas Gruber entwickelt seine Strategie für den Agrar-Markt</a:t>
-            </a:r>
-          </a:p>
-          <a:p>
-            <a:pPr>
-              <a:spcBef>
-                <a:spcPts val="400"/>
-              </a:spcBef>
-              <a:spcAft>
-                <a:spcPts val="200"/>
-              </a:spcAft>
-            </a:pPr>
-            <a:r>
-              <a:rPr sz="1200">
-                <a:solidFill>
-                  <a:srgbClr val="3D5466"/>
-                </a:solidFill>
-                <a:latin typeface="Arial"/>
-              </a:rPr>
-              <a:t>Ausgangssituation</a:t>
-            </a:r>
-          </a:p>
-          <a:p>
-            <a:pPr>
-              <a:spcBef>
-                <a:spcPts val="400"/>
-              </a:spcBef>
-              <a:spcAft>
-                <a:spcPts val="200"/>
-              </a:spcAft>
-            </a:pPr>
-            <a:r>
-              <a:rPr sz="1200">
-                <a:solidFill>
-                  <a:srgbClr val="3D5466"/>
-                </a:solidFill>
-                <a:latin typeface="Arial"/>
-              </a:rPr>
-              <a:t>Thomas entwickelt seine Marktbearbeitungsstrategie</a:t>
-            </a:r>
-          </a:p>
-          <a:p>
-            <a:pPr>
-              <a:spcBef>
-                <a:spcPts val="400"/>
-              </a:spcBef>
-              <a:spcAft>
-                <a:spcPts val="200"/>
-              </a:spcAft>
-            </a:pPr>
-            <a:r>
-              <a:rPr sz="1200">
-                <a:solidFill>
-                  <a:srgbClr val="3D5466"/>
-                </a:solidFill>
-                <a:latin typeface="Arial"/>
-              </a:rPr>
-              <a:t>Schritt 1: Segmentpriorisierung</a:t>
-            </a:r>
-          </a:p>
-          <a:p>
-            <a:pPr>
-              <a:spcBef>
-                <a:spcPts val="400"/>
-              </a:spcBef>
-              <a:spcAft>
-                <a:spcPts val="200"/>
-              </a:spcAft>
-            </a:pPr>
-            <a:r>
-              <a:rPr sz="1200">
-                <a:solidFill>
-                  <a:srgbClr val="3D5466"/>
-                </a:solidFill>
-                <a:latin typeface="Arial"/>
-              </a:rPr>
-              <a:t>Schritt 2: Marktpotenzial</a:t>
-            </a:r>
-          </a:p>
-          <a:p>
-            <a:pPr>
-              <a:spcBef>
-                <a:spcPts val="400"/>
-              </a:spcBef>
-              <a:spcAft>
-                <a:spcPts val="200"/>
-              </a:spcAft>
-            </a:pPr>
-            <a:r>
-              <a:rPr sz="1200">
-                <a:solidFill>
-                  <a:srgbClr val="3D5466"/>
-                </a:solidFill>
-                <a:latin typeface="Arial"/>
-              </a:rPr>
-              <a:t>Schritt 3: Wertversprechen</a:t>
-            </a:r>
-          </a:p>
-          <a:p>
-            <a:pPr>
-              <a:spcBef>
-                <a:spcPts val="400"/>
-              </a:spcBef>
-              <a:spcAft>
-                <a:spcPts val="200"/>
-              </a:spcAft>
-            </a:pPr>
-            <a:r>
-              <a:rPr sz="1200">
-                <a:solidFill>
-                  <a:srgbClr val="3D5466"/>
-                </a:solidFill>
-                <a:latin typeface="Arial"/>
-              </a:rPr>
-              <a:t>„Für landwirtschaftliche Betriebe in [Region] sind wir der Agrar-Spezialist der VR-Bank: schnelle Investitionsfinanzierungen, GAP-Expertise und ein Netzwerk in die wichtigsten Branchenverbände."</a:t>
-            </a:r>
-          </a:p>
-        </p:txBody>
-      </p:sp>
-      <p:sp>
-        <p:nvSpPr>
-          <p:cNvPr id="9" name="Rectangle 8"/>
+              <a:t>Welche Kanäle funktionieren wirklich?</a:t>
+            </a:r>
+          </a:p>
+        </p:txBody>
+      </p:sp>
+      <p:sp>
+        <p:nvSpPr>
+          <p:cNvPr id="8" name="Rectangle 7"/>
           <p:cNvSpPr/>
           <p:nvPr/>
         </p:nvSpPr>
@@ -4551,7 +5558,7 @@
       </p:sp>
       <p:sp>
         <p:nvSpPr>
-          <p:cNvPr id="10" name="TextBox 9"/>
+          <p:cNvPr id="9" name="TextBox 8"/>
           <p:cNvSpPr txBox="1"/>
           <p:nvPr/>
         </p:nvSpPr>
@@ -4839,7 +5846,7 @@
                 </a:solidFill>
                 <a:latin typeface="Source Serif 4"/>
               </a:rPr>
-              <a:t>Arbeitsblatt A: Segmentpriorisierung – Scoring</a:t>
+              <a:t>Empfehlungsmanagement systematisieren</a:t>
             </a:r>
           </a:p>
         </p:txBody>
@@ -4881,7 +5888,7 @@
                 </a:solidFill>
                 <a:latin typeface="Arial"/>
               </a:rPr>
-              <a:t>Meine drei Kandidatensegmente:</a:t>
+              <a:t>Empfehlungen entstehen nicht zufällig. Ein aktives Empfehlungsmanagement umfasst:</a:t>
             </a:r>
           </a:p>
           <a:p>
@@ -4894,13 +5901,203 @@
               </a:spcAft>
             </a:pPr>
             <a:r>
-              <a:rPr sz="1200">
+              <a:rPr sz="1300">
                 <a:solidFill>
                   <a:srgbClr val="3D5466"/>
                 </a:solidFill>
                 <a:latin typeface="Arial"/>
               </a:rPr>
-              <a:t>Mein Primärsegment: ___________________________</a:t>
+              <a:t>▸  Identifizieren: Welche meiner Bestandskunden sind Meinungsführer in ihrem Branchenumfeld?</a:t>
+            </a:r>
+          </a:p>
+          <a:p>
+            <a:pPr>
+              <a:spcBef>
+                <a:spcPts val="400"/>
+              </a:spcBef>
+              <a:spcAft>
+                <a:spcPts val="200"/>
+              </a:spcAft>
+            </a:pPr>
+            <a:r>
+              <a:rPr sz="1300">
+                <a:solidFill>
+                  <a:srgbClr val="3D5466"/>
+                </a:solidFill>
+                <a:latin typeface="Arial"/>
+              </a:rPr>
+              <a:t>▸  Beziehung vertiefen: Diese Kunden erhalten besondere Aufmerksamkeit – nicht wegen der Empfehlung, sondern wegen ihres Werts.</a:t>
+            </a:r>
+          </a:p>
+          <a:p>
+            <a:pPr>
+              <a:spcBef>
+                <a:spcPts val="400"/>
+              </a:spcBef>
+              <a:spcAft>
+                <a:spcPts val="200"/>
+              </a:spcAft>
+            </a:pPr>
+            <a:r>
+              <a:rPr sz="1300">
+                <a:solidFill>
+                  <a:srgbClr val="3D5466"/>
+                </a:solidFill>
+                <a:latin typeface="Arial"/>
+              </a:rPr>
+              <a:t>▸  Aktiv bitten: Am Ende eines erfolgreichen Gesprächs: „Gibt es Unternehmen in Ihrem Umfeld, die unsere Zusammenarbeit kennenlernen sollten?"</a:t>
+            </a:r>
+          </a:p>
+          <a:p>
+            <a:pPr>
+              <a:spcBef>
+                <a:spcPts val="400"/>
+              </a:spcBef>
+              <a:spcAft>
+                <a:spcPts val="200"/>
+              </a:spcAft>
+            </a:pPr>
+            <a:r>
+              <a:rPr sz="1300">
+                <a:solidFill>
+                  <a:srgbClr val="3D5466"/>
+                </a:solidFill>
+                <a:latin typeface="Arial"/>
+              </a:rPr>
+              <a:t>▸  Danken und schließen: Rückmeldung geben, ob der Kontakt erfolgreich war.</a:t>
+            </a:r>
+          </a:p>
+          <a:p>
+            <a:pPr>
+              <a:spcBef>
+                <a:spcPts val="400"/>
+              </a:spcBef>
+              <a:spcAft>
+                <a:spcPts val="200"/>
+              </a:spcAft>
+            </a:pPr>
+            <a:r>
+              <a:rPr sz="1200">
+                <a:solidFill>
+                  <a:srgbClr val="3D5466"/>
+                </a:solidFill>
+                <a:latin typeface="Arial"/>
+              </a:rPr>
+              <a:t>## 4.6 Praxiscase: Thomas Gruber entwickelt seine Strategie für den Agrar-Markt</a:t>
+            </a:r>
+          </a:p>
+          <a:p>
+            <a:pPr>
+              <a:spcBef>
+                <a:spcPts val="400"/>
+              </a:spcBef>
+              <a:spcAft>
+                <a:spcPts val="200"/>
+              </a:spcAft>
+            </a:pPr>
+            <a:r>
+              <a:rPr sz="1200">
+                <a:solidFill>
+                  <a:srgbClr val="3D5466"/>
+                </a:solidFill>
+                <a:latin typeface="Arial"/>
+              </a:rPr>
+              <a:t>Ausgangssituation</a:t>
+            </a:r>
+          </a:p>
+          <a:p>
+            <a:pPr>
+              <a:spcBef>
+                <a:spcPts val="400"/>
+              </a:spcBef>
+              <a:spcAft>
+                <a:spcPts val="200"/>
+              </a:spcAft>
+            </a:pPr>
+            <a:r>
+              <a:rPr sz="1200">
+                <a:solidFill>
+                  <a:srgbClr val="3D5466"/>
+                </a:solidFill>
+                <a:latin typeface="Arial"/>
+              </a:rPr>
+              <a:t>Thomas entwickelt seine Marktbearbeitungsstrategie</a:t>
+            </a:r>
+          </a:p>
+          <a:p>
+            <a:pPr>
+              <a:spcBef>
+                <a:spcPts val="400"/>
+              </a:spcBef>
+              <a:spcAft>
+                <a:spcPts val="200"/>
+              </a:spcAft>
+            </a:pPr>
+            <a:r>
+              <a:rPr sz="1200">
+                <a:solidFill>
+                  <a:srgbClr val="3D5466"/>
+                </a:solidFill>
+                <a:latin typeface="Arial"/>
+              </a:rPr>
+              <a:t>Schritt 1: Segmentpriorisierung</a:t>
+            </a:r>
+          </a:p>
+          <a:p>
+            <a:pPr>
+              <a:spcBef>
+                <a:spcPts val="400"/>
+              </a:spcBef>
+              <a:spcAft>
+                <a:spcPts val="200"/>
+              </a:spcAft>
+            </a:pPr>
+            <a:r>
+              <a:rPr sz="1200">
+                <a:solidFill>
+                  <a:srgbClr val="3D5466"/>
+                </a:solidFill>
+                <a:latin typeface="Arial"/>
+              </a:rPr>
+              <a:t>Schritt 2: Marktpotenzial</a:t>
+            </a:r>
+          </a:p>
+          <a:p>
+            <a:pPr>
+              <a:spcBef>
+                <a:spcPts val="400"/>
+              </a:spcBef>
+              <a:spcAft>
+                <a:spcPts val="200"/>
+              </a:spcAft>
+            </a:pPr>
+            <a:r>
+              <a:rPr sz="1200">
+                <a:solidFill>
+                  <a:srgbClr val="3D5466"/>
+                </a:solidFill>
+                <a:latin typeface="Arial"/>
+              </a:rPr>
+              <a:t>Schritt 3: Wertversprechen</a:t>
+            </a:r>
+          </a:p>
+          <a:p>
+            <a:pPr>
+              <a:spcBef>
+                <a:spcPts val="400"/>
+              </a:spcBef>
+              <a:spcAft>
+                <a:spcPts val="200"/>
+              </a:spcAft>
+            </a:pPr>
+            <a:r>
+              <a:rPr sz="1200">
+                <a:solidFill>
+                  <a:srgbClr val="3D5466"/>
+                </a:solidFill>
+                <a:latin typeface="Arial"/>
+              </a:rPr>
+              <a:t>„Für landwirtschaftliche Betriebe in [Region] sind wir der Agrar-Spezialist der VR-Bank: schnelle Investitionsfinanzierungen, GAP-Expertise und ein Netzwerk in die wichtigsten Branchenverbände."</a:t>
             </a:r>
           </a:p>
         </p:txBody>
@@ -5238,7 +6435,7 @@
                 </a:solidFill>
                 <a:latin typeface="Source Serif 4"/>
               </a:rPr>
-              <a:t>Arbeitsblatt B: Marktbearbeitungs-Jahresplan</a:t>
+              <a:t>Arbeitsblatt A: Segmentpriorisierung – Scoring</a:t>
             </a:r>
           </a:p>
         </p:txBody>
@@ -5280,9 +6477,370 @@
                 </a:solidFill>
                 <a:latin typeface="Arial"/>
               </a:rPr>
-              <a:t>Zielsegment: ___________________________</a:t>
-            </a:r>
-          </a:p>
+              <a:t>Meine drei Kandidatensegmente:</a:t>
+            </a:r>
+          </a:p>
+        </p:txBody>
+      </p:sp>
+      <p:sp>
+        <p:nvSpPr>
+          <p:cNvPr id="9" name="Rectangle 8"/>
+          <p:cNvSpPr/>
+          <p:nvPr/>
+        </p:nvSpPr>
+        <p:spPr>
+          <a:xfrm>
+            <a:off x="0" y="6510528"/>
+            <a:ext cx="12188952" cy="347472"/>
+          </a:xfrm>
+          <a:prstGeom prst="rect">
+            <a:avLst/>
+          </a:prstGeom>
+          <a:solidFill>
+            <a:srgbClr val="0A1937"/>
+          </a:solidFill>
+          <a:ln>
+            <a:noFill/>
+          </a:ln>
+        </p:spPr>
+        <p:style>
+          <a:lnRef idx="1">
+            <a:schemeClr val="accent1"/>
+          </a:lnRef>
+          <a:fillRef idx="3">
+            <a:schemeClr val="accent1"/>
+          </a:fillRef>
+          <a:effectRef idx="2">
+            <a:schemeClr val="accent1"/>
+          </a:effectRef>
+          <a:fontRef idx="minor">
+            <a:schemeClr val="lt1"/>
+          </a:fontRef>
+        </p:style>
+        <p:txBody>
+          <a:bodyPr rtlCol="0" anchor="ctr"/>
+          <a:lstStyle/>
+          <a:p>
+            <a:pPr algn="ctr"/>
+          </a:p>
+        </p:txBody>
+      </p:sp>
+      <p:sp>
+        <p:nvSpPr>
+          <p:cNvPr id="10" name="TextBox 9"/>
+          <p:cNvSpPr txBox="1"/>
+          <p:nvPr/>
+        </p:nvSpPr>
+        <p:spPr>
+          <a:xfrm>
+            <a:off x="685800" y="6583680"/>
+            <a:ext cx="6490411" cy="256032"/>
+          </a:xfrm>
+          <a:prstGeom prst="rect">
+            <a:avLst/>
+          </a:prstGeom>
+          <a:noFill/>
+        </p:spPr>
+        <p:txBody>
+          <a:bodyPr wrap="none">
+            <a:spAutoFit/>
+          </a:bodyPr>
+          <a:lstStyle/>
+          <a:p>
+            <a:pPr algn="l"/>
+            <a:r>
+              <a:rPr sz="700">
+                <a:solidFill>
+                  <a:srgbClr val="A0B4D2"/>
+                </a:solidFill>
+                <a:latin typeface="JetBrains Mono"/>
+              </a:rPr>
+              <a:t>Benedikt Zoller Coaching  ·  FKB Campus  ·  M15</a:t>
+            </a:r>
+          </a:p>
+        </p:txBody>
+      </p:sp>
+    </p:spTree>
+  </p:cSld>
+  <p:clrMapOvr>
+    <a:masterClrMapping/>
+  </p:clrMapOvr>
+</p:sld>
+</file>
+
+<file path=ppt/slides/slide14.xml><?xml version="1.0" encoding="utf-8"?>
+<p:sld xmlns:a="http://schemas.openxmlformats.org/drawingml/2006/main" xmlns:p="http://schemas.openxmlformats.org/presentationml/2006/main" xmlns:r="http://schemas.openxmlformats.org/officeDocument/2006/relationships">
+  <p:cSld>
+    <p:spTree>
+      <p:nvGrpSpPr>
+        <p:cNvPr id="1" name=""/>
+        <p:cNvGrpSpPr/>
+        <p:nvPr/>
+      </p:nvGrpSpPr>
+      <p:grpSpPr/>
+      <p:sp>
+        <p:nvSpPr>
+          <p:cNvPr id="2" name="Rectangle 1"/>
+          <p:cNvSpPr/>
+          <p:nvPr/>
+        </p:nvSpPr>
+        <p:spPr>
+          <a:xfrm>
+            <a:off x="0" y="0"/>
+            <a:ext cx="12188952" cy="6858000"/>
+          </a:xfrm>
+          <a:prstGeom prst="rect">
+            <a:avLst/>
+          </a:prstGeom>
+          <a:solidFill>
+            <a:srgbClr val="EDEDF3"/>
+          </a:solidFill>
+          <a:ln>
+            <a:noFill/>
+          </a:ln>
+        </p:spPr>
+        <p:style>
+          <a:lnRef idx="1">
+            <a:schemeClr val="accent1"/>
+          </a:lnRef>
+          <a:fillRef idx="3">
+            <a:schemeClr val="accent1"/>
+          </a:fillRef>
+          <a:effectRef idx="2">
+            <a:schemeClr val="accent1"/>
+          </a:effectRef>
+          <a:fontRef idx="minor">
+            <a:schemeClr val="lt1"/>
+          </a:fontRef>
+        </p:style>
+        <p:txBody>
+          <a:bodyPr rtlCol="0" anchor="ctr"/>
+          <a:lstStyle/>
+          <a:p>
+            <a:pPr algn="ctr"/>
+          </a:p>
+        </p:txBody>
+      </p:sp>
+      <p:sp>
+        <p:nvSpPr>
+          <p:cNvPr id="3" name="Rectangle 2"/>
+          <p:cNvSpPr/>
+          <p:nvPr/>
+        </p:nvSpPr>
+        <p:spPr>
+          <a:xfrm>
+            <a:off x="0" y="0"/>
+            <a:ext cx="12188952" cy="50292"/>
+          </a:xfrm>
+          <a:prstGeom prst="rect">
+            <a:avLst/>
+          </a:prstGeom>
+          <a:solidFill>
+            <a:srgbClr val="1F2C56"/>
+          </a:solidFill>
+          <a:ln>
+            <a:noFill/>
+          </a:ln>
+        </p:spPr>
+        <p:style>
+          <a:lnRef idx="1">
+            <a:schemeClr val="accent1"/>
+          </a:lnRef>
+          <a:fillRef idx="3">
+            <a:schemeClr val="accent1"/>
+          </a:fillRef>
+          <a:effectRef idx="2">
+            <a:schemeClr val="accent1"/>
+          </a:effectRef>
+          <a:fontRef idx="minor">
+            <a:schemeClr val="lt1"/>
+          </a:fontRef>
+        </p:style>
+        <p:txBody>
+          <a:bodyPr rtlCol="0" anchor="ctr"/>
+          <a:lstStyle/>
+          <a:p>
+            <a:pPr algn="ctr"/>
+          </a:p>
+        </p:txBody>
+      </p:sp>
+      <p:sp>
+        <p:nvSpPr>
+          <p:cNvPr id="4" name="TextBox 3"/>
+          <p:cNvSpPr txBox="1"/>
+          <p:nvPr/>
+        </p:nvSpPr>
+        <p:spPr>
+          <a:xfrm>
+            <a:off x="685800" y="109728"/>
+            <a:ext cx="10817352" cy="228600"/>
+          </a:xfrm>
+          <a:prstGeom prst="rect">
+            <a:avLst/>
+          </a:prstGeom>
+          <a:noFill/>
+        </p:spPr>
+        <p:txBody>
+          <a:bodyPr wrap="none">
+            <a:spAutoFit/>
+          </a:bodyPr>
+          <a:lstStyle/>
+          <a:p>
+            <a:pPr algn="l"/>
+            <a:r>
+              <a:rPr sz="750">
+                <a:solidFill>
+                  <a:srgbClr val="78808C"/>
+                </a:solidFill>
+                <a:latin typeface="JetBrains Mono"/>
+              </a:rPr>
+              <a:t>M15  ·  INHALT</a:t>
+            </a:r>
+          </a:p>
+        </p:txBody>
+      </p:sp>
+      <p:sp>
+        <p:nvSpPr>
+          <p:cNvPr id="5" name="Rectangle 4"/>
+          <p:cNvSpPr/>
+          <p:nvPr/>
+        </p:nvSpPr>
+        <p:spPr>
+          <a:xfrm>
+            <a:off x="0" y="1234440"/>
+            <a:ext cx="12188952" cy="12700"/>
+          </a:xfrm>
+          <a:prstGeom prst="rect">
+            <a:avLst/>
+          </a:prstGeom>
+          <a:solidFill>
+            <a:srgbClr val="D8DFE4"/>
+          </a:solidFill>
+          <a:ln>
+            <a:noFill/>
+          </a:ln>
+        </p:spPr>
+        <p:style>
+          <a:lnRef idx="1">
+            <a:schemeClr val="accent1"/>
+          </a:lnRef>
+          <a:fillRef idx="3">
+            <a:schemeClr val="accent1"/>
+          </a:fillRef>
+          <a:effectRef idx="2">
+            <a:schemeClr val="accent1"/>
+          </a:effectRef>
+          <a:fontRef idx="minor">
+            <a:schemeClr val="lt1"/>
+          </a:fontRef>
+        </p:style>
+        <p:txBody>
+          <a:bodyPr rtlCol="0" anchor="ctr"/>
+          <a:lstStyle/>
+          <a:p>
+            <a:pPr algn="ctr"/>
+          </a:p>
+        </p:txBody>
+      </p:sp>
+      <p:sp>
+        <p:nvSpPr>
+          <p:cNvPr id="6" name="Rectangle 5"/>
+          <p:cNvSpPr/>
+          <p:nvPr/>
+        </p:nvSpPr>
+        <p:spPr>
+          <a:xfrm>
+            <a:off x="685800" y="502920"/>
+            <a:ext cx="36576" cy="658368"/>
+          </a:xfrm>
+          <a:prstGeom prst="rect">
+            <a:avLst/>
+          </a:prstGeom>
+          <a:solidFill>
+            <a:srgbClr val="D9C089"/>
+          </a:solidFill>
+          <a:ln>
+            <a:noFill/>
+          </a:ln>
+        </p:spPr>
+        <p:style>
+          <a:lnRef idx="1">
+            <a:schemeClr val="accent1"/>
+          </a:lnRef>
+          <a:fillRef idx="3">
+            <a:schemeClr val="accent1"/>
+          </a:fillRef>
+          <a:effectRef idx="2">
+            <a:schemeClr val="accent1"/>
+          </a:effectRef>
+          <a:fontRef idx="minor">
+            <a:schemeClr val="lt1"/>
+          </a:fontRef>
+        </p:style>
+        <p:txBody>
+          <a:bodyPr rtlCol="0" anchor="ctr"/>
+          <a:lstStyle/>
+          <a:p>
+            <a:pPr algn="ctr"/>
+          </a:p>
+        </p:txBody>
+      </p:sp>
+      <p:sp>
+        <p:nvSpPr>
+          <p:cNvPr id="7" name="TextBox 6"/>
+          <p:cNvSpPr txBox="1"/>
+          <p:nvPr/>
+        </p:nvSpPr>
+        <p:spPr>
+          <a:xfrm>
+            <a:off x="813816" y="502920"/>
+            <a:ext cx="10634472" cy="685800"/>
+          </a:xfrm>
+          <a:prstGeom prst="rect">
+            <a:avLst/>
+          </a:prstGeom>
+          <a:noFill/>
+        </p:spPr>
+        <p:txBody>
+          <a:bodyPr wrap="square">
+            <a:spAutoFit/>
+          </a:bodyPr>
+          <a:lstStyle/>
+          <a:p>
+            <a:pPr algn="l"/>
+            <a:r>
+              <a:rPr sz="2400" b="1" i="0">
+                <a:solidFill>
+                  <a:srgbClr val="1F2C56"/>
+                </a:solidFill>
+                <a:latin typeface="Source Serif 4"/>
+              </a:rPr>
+              <a:t>Arbeitsblatt B: Marktbearbeitungs-Jahresplan</a:t>
+            </a:r>
+          </a:p>
+        </p:txBody>
+      </p:sp>
+      <p:sp>
+        <p:nvSpPr>
+          <p:cNvPr id="8" name="TextBox 7"/>
+          <p:cNvSpPr txBox="1"/>
+          <p:nvPr/>
+        </p:nvSpPr>
+        <p:spPr>
+          <a:xfrm>
+            <a:off x="685800" y="1417320"/>
+            <a:ext cx="10817352" cy="5029200"/>
+          </a:xfrm>
+          <a:prstGeom prst="rect">
+            <a:avLst/>
+          </a:prstGeom>
+          <a:noFill/>
+        </p:spPr>
+        <p:txBody>
+          <a:bodyPr wrap="square">
+            <a:spAutoFit/>
+          </a:bodyPr>
+          <a:lstStyle/>
           <a:p>
             <a:pPr>
               <a:spcBef>
@@ -5299,83 +6857,7 @@
                 </a:solidFill>
                 <a:latin typeface="Arial"/>
               </a:rPr>
-              <a:t>Marktpotenzial: ___ Zielbetriebe – ___ bestehende Kunden = ___ Neukunden-Potenzial</a:t>
-            </a:r>
-          </a:p>
-          <a:p>
-            <a:pPr>
-              <a:spcBef>
-                <a:spcPts val="400"/>
-              </a:spcBef>
-              <a:spcAft>
-                <a:spcPts val="200"/>
-              </a:spcAft>
-            </a:pPr>
-            <a:r>
-              <a:rPr sz="1200">
-                <a:solidFill>
-                  <a:srgbClr val="3D5466"/>
-                </a:solidFill>
-                <a:latin typeface="Arial"/>
-              </a:rPr>
               <a:t>Mein Wertversprechen (in einem Satz):</a:t>
-            </a:r>
-          </a:p>
-          <a:p>
-            <a:pPr>
-              <a:spcBef>
-                <a:spcPts val="400"/>
-              </a:spcBef>
-              <a:spcAft>
-                <a:spcPts val="200"/>
-              </a:spcAft>
-            </a:pPr>
-            <a:r>
-              <a:rPr sz="1200">
-                <a:solidFill>
-                  <a:srgbClr val="3D5466"/>
-                </a:solidFill>
-                <a:latin typeface="Arial"/>
-              </a:rPr>
-              <a:t>___________________________________________________________________________</a:t>
-            </a:r>
-          </a:p>
-          <a:p>
-            <a:pPr>
-              <a:spcBef>
-                <a:spcPts val="400"/>
-              </a:spcBef>
-              <a:spcAft>
-                <a:spcPts val="200"/>
-              </a:spcAft>
-            </a:pPr>
-            <a:r>
-              <a:rPr sz="1200">
-                <a:solidFill>
-                  <a:srgbClr val="3D5466"/>
-                </a:solidFill>
-                <a:latin typeface="Arial"/>
-              </a:rPr>
-              <a:t>Jahreszielsetzung: ___ Neukunden / ___ EUR Neuvolumen / ___ % Wallet-Share-Steigerung Bestand</a:t>
-            </a:r>
-          </a:p>
-          <a:p>
-            <a:pPr>
-              <a:spcBef>
-                <a:spcPts val="400"/>
-              </a:spcBef>
-              <a:spcAft>
-                <a:spcPts val="200"/>
-              </a:spcAft>
-            </a:pPr>
-            <a:r>
-              <a:rPr sz="1200">
-                <a:solidFill>
-                  <a:srgbClr val="3D5466"/>
-                </a:solidFill>
-                <a:latin typeface="Arial"/>
-              </a:rPr>
-              <a:t>Abstimmung mit Führungskraft: ○ Ja, abgestimmt am: ______ ○ Noch ausstehend bis: ______</a:t>
             </a:r>
           </a:p>
           <a:p>
@@ -6024,7 +7506,7 @@
                 </a:solidFill>
                 <a:latin typeface="JetBrains Mono"/>
               </a:rPr>
-              <a:t>M15  ·  INHALT</a:t>
+              <a:t>AGENDA  ·  M15</a:t>
             </a:r>
           </a:p>
         </p:txBody>
@@ -6074,57 +7556,14 @@
       </p:sp>
       <p:sp>
         <p:nvSpPr>
-          <p:cNvPr id="6" name="Rectangle 5"/>
-          <p:cNvSpPr/>
+          <p:cNvPr id="6" name="TextBox 5"/>
+          <p:cNvSpPr txBox="1"/>
           <p:nvPr/>
         </p:nvSpPr>
         <p:spPr>
           <a:xfrm>
             <a:off x="685800" y="502920"/>
-            <a:ext cx="36576" cy="658368"/>
-          </a:xfrm>
-          <a:prstGeom prst="rect">
-            <a:avLst/>
-          </a:prstGeom>
-          <a:solidFill>
-            <a:srgbClr val="D9C089"/>
-          </a:solidFill>
-          <a:ln>
-            <a:noFill/>
-          </a:ln>
-        </p:spPr>
-        <p:style>
-          <a:lnRef idx="1">
-            <a:schemeClr val="accent1"/>
-          </a:lnRef>
-          <a:fillRef idx="3">
-            <a:schemeClr val="accent1"/>
-          </a:fillRef>
-          <a:effectRef idx="2">
-            <a:schemeClr val="accent1"/>
-          </a:effectRef>
-          <a:fontRef idx="minor">
-            <a:schemeClr val="lt1"/>
-          </a:fontRef>
-        </p:style>
-        <p:txBody>
-          <a:bodyPr rtlCol="0" anchor="ctr"/>
-          <a:lstStyle/>
-          <a:p>
-            <a:pPr algn="ctr"/>
-          </a:p>
-        </p:txBody>
-      </p:sp>
-      <p:sp>
-        <p:nvSpPr>
-          <p:cNvPr id="7" name="TextBox 6"/>
-          <p:cNvSpPr txBox="1"/>
-          <p:nvPr/>
-        </p:nvSpPr>
-        <p:spPr>
-          <a:xfrm>
-            <a:off x="813816" y="502920"/>
-            <a:ext cx="10634472" cy="685800"/>
+            <a:ext cx="10817352" cy="658368"/>
           </a:xfrm>
           <a:prstGeom prst="rect">
             <a:avLst/>
@@ -6139,27 +7578,27 @@
           <a:p>
             <a:pPr algn="l"/>
             <a:r>
-              <a:rPr sz="2400" b="1" i="0">
+              <a:rPr sz="2600" b="1" i="0">
                 <a:solidFill>
                   <a:srgbClr val="1F2C56"/>
                 </a:solidFill>
                 <a:latin typeface="Source Serif 4"/>
               </a:rPr>
-              <a:t>Vom reaktiven zum strategischen Vertrieb</a:t>
-            </a:r>
-          </a:p>
-        </p:txBody>
-      </p:sp>
-      <p:sp>
-        <p:nvSpPr>
-          <p:cNvPr id="8" name="TextBox 7"/>
+              <a:t>Agenda</a:t>
+            </a:r>
+          </a:p>
+        </p:txBody>
+      </p:sp>
+      <p:sp>
+        <p:nvSpPr>
+          <p:cNvPr id="7" name="TextBox 6"/>
           <p:cNvSpPr txBox="1"/>
           <p:nvPr/>
         </p:nvSpPr>
         <p:spPr>
           <a:xfrm>
-            <a:off x="685800" y="1417320"/>
-            <a:ext cx="10817352" cy="5029200"/>
+            <a:off x="685800" y="1463040"/>
+            <a:ext cx="10817352" cy="4937760"/>
           </a:xfrm>
           <a:prstGeom prst="rect">
             <a:avLst/>
@@ -6174,122 +7613,198 @@
           <a:p>
             <a:pPr>
               <a:spcBef>
-                <a:spcPts val="400"/>
+                <a:spcPts val="800"/>
               </a:spcBef>
               <a:spcAft>
                 <a:spcPts val="200"/>
               </a:spcAft>
             </a:pPr>
             <a:r>
-              <a:rPr sz="1200">
+              <a:rPr sz="1500">
                 <a:solidFill>
                   <a:srgbClr val="3D5466"/>
                 </a:solidFill>
                 <a:latin typeface="Arial"/>
               </a:rPr>
-              <a:t>Eine Marktbearbeitungsstrategie beantwortet vier Fragen:</a:t>
+              <a:t>01   Vom reaktiven zum strategischen Vertrieb</a:t>
             </a:r>
           </a:p>
           <a:p>
             <a:pPr>
               <a:spcBef>
-                <a:spcPts val="400"/>
+                <a:spcPts val="800"/>
               </a:spcBef>
               <a:spcAft>
                 <a:spcPts val="200"/>
               </a:spcAft>
             </a:pPr>
             <a:r>
-              <a:rPr sz="1300">
+              <a:rPr sz="1500">
                 <a:solidFill>
                   <a:srgbClr val="3D5466"/>
                 </a:solidFill>
                 <a:latin typeface="Arial"/>
               </a:rPr>
-              <a:t>▸  Wen? – Welches Kundensegment bearbeite ich mit Priorität?</a:t>
+              <a:t>02   Segmentierungskriterien</a:t>
             </a:r>
           </a:p>
           <a:p>
             <a:pPr>
               <a:spcBef>
-                <a:spcPts val="400"/>
+                <a:spcPts val="800"/>
               </a:spcBef>
               <a:spcAft>
                 <a:spcPts val="200"/>
               </a:spcAft>
             </a:pPr>
             <a:r>
-              <a:rPr sz="1300">
+              <a:rPr sz="1500">
                 <a:solidFill>
                   <a:srgbClr val="3D5466"/>
                 </a:solidFill>
                 <a:latin typeface="Arial"/>
               </a:rPr>
-              <a:t>▸  Womit? – Was ist mein Wertversprechen für dieses Segment?</a:t>
+              <a:t>03   Das Scoring-Modell zur Segmentpriorisierung</a:t>
             </a:r>
           </a:p>
           <a:p>
             <a:pPr>
               <a:spcBef>
-                <a:spcPts val="400"/>
+                <a:spcPts val="800"/>
               </a:spcBef>
               <a:spcAft>
                 <a:spcPts val="200"/>
               </a:spcAft>
             </a:pPr>
             <a:r>
-              <a:rPr sz="1300">
+              <a:rPr sz="1500">
                 <a:solidFill>
                   <a:srgbClr val="3D5466"/>
                 </a:solidFill>
                 <a:latin typeface="Arial"/>
               </a:rPr>
-              <a:t>▸  Wie? – Über welche Kanäle und Maßnahmen erreiche ich diese Kunden?</a:t>
+              <a:t>04   Wie groß ist mein adressierbarer Markt?</a:t>
             </a:r>
           </a:p>
           <a:p>
             <a:pPr>
               <a:spcBef>
-                <a:spcPts val="400"/>
+                <a:spcPts val="800"/>
               </a:spcBef>
               <a:spcAft>
                 <a:spcPts val="200"/>
               </a:spcAft>
             </a:pPr>
             <a:r>
-              <a:rPr sz="1300">
+              <a:rPr sz="1500">
                 <a:solidFill>
                   <a:srgbClr val="3D5466"/>
                 </a:solidFill>
                 <a:latin typeface="Arial"/>
               </a:rPr>
-              <a:t>▸  Wann? – Welche Meilensteine und Zielgrößen setze ich uns?</a:t>
+              <a:t>05   SWOT im Firmenkundensegment</a:t>
             </a:r>
           </a:p>
           <a:p>
             <a:pPr>
               <a:spcBef>
-                <a:spcPts val="400"/>
+                <a:spcPts val="800"/>
               </a:spcBef>
               <a:spcAft>
                 <a:spcPts val="200"/>
               </a:spcAft>
             </a:pPr>
             <a:r>
-              <a:rPr sz="1200">
+              <a:rPr sz="1500">
                 <a:solidFill>
                   <a:srgbClr val="3D5466"/>
                 </a:solidFill>
                 <a:latin typeface="Arial"/>
               </a:rPr>
-              <a:t>## 4.2 Marktsegmentierung im Firmenkundengeschäft</a:t>
-            </a:r>
-          </a:p>
-        </p:txBody>
-      </p:sp>
-      <p:sp>
-        <p:nvSpPr>
-          <p:cNvPr id="9" name="Rectangle 8"/>
+              <a:t>06   Wertversprechen formulieren</a:t>
+            </a:r>
+          </a:p>
+          <a:p>
+            <a:pPr>
+              <a:spcBef>
+                <a:spcPts val="800"/>
+              </a:spcBef>
+              <a:spcAft>
+                <a:spcPts val="200"/>
+              </a:spcAft>
+            </a:pPr>
+            <a:r>
+              <a:rPr sz="1500">
+                <a:solidFill>
+                  <a:srgbClr val="3D5466"/>
+                </a:solidFill>
+                <a:latin typeface="Arial"/>
+              </a:rPr>
+              <a:t>07   Welche Kanäle funktionieren wirklich?</a:t>
+            </a:r>
+          </a:p>
+          <a:p>
+            <a:pPr>
+              <a:spcBef>
+                <a:spcPts val="800"/>
+              </a:spcBef>
+              <a:spcAft>
+                <a:spcPts val="200"/>
+              </a:spcAft>
+            </a:pPr>
+            <a:r>
+              <a:rPr sz="1500">
+                <a:solidFill>
+                  <a:srgbClr val="3D5466"/>
+                </a:solidFill>
+                <a:latin typeface="Arial"/>
+              </a:rPr>
+              <a:t>08   Empfehlungsmanagement systematisieren</a:t>
+            </a:r>
+          </a:p>
+          <a:p>
+            <a:pPr>
+              <a:spcBef>
+                <a:spcPts val="800"/>
+              </a:spcBef>
+              <a:spcAft>
+                <a:spcPts val="200"/>
+              </a:spcAft>
+            </a:pPr>
+            <a:r>
+              <a:rPr sz="1500">
+                <a:solidFill>
+                  <a:srgbClr val="3D5466"/>
+                </a:solidFill>
+                <a:latin typeface="Arial"/>
+              </a:rPr>
+              <a:t>09   Arbeitsblatt A: Segmentpriorisierung – Scoring</a:t>
+            </a:r>
+          </a:p>
+          <a:p>
+            <a:pPr>
+              <a:spcBef>
+                <a:spcPts val="800"/>
+              </a:spcBef>
+              <a:spcAft>
+                <a:spcPts val="200"/>
+              </a:spcAft>
+            </a:pPr>
+            <a:r>
+              <a:rPr sz="1500">
+                <a:solidFill>
+                  <a:srgbClr val="3D5466"/>
+                </a:solidFill>
+                <a:latin typeface="Arial"/>
+              </a:rPr>
+              <a:t>10   Arbeitsblatt B: Marktbearbeitungs-Jahresplan</a:t>
+            </a:r>
+          </a:p>
+        </p:txBody>
+      </p:sp>
+      <p:sp>
+        <p:nvSpPr>
+          <p:cNvPr id="8" name="Rectangle 7"/>
           <p:cNvSpPr/>
           <p:nvPr/>
         </p:nvSpPr>
@@ -6332,7 +7847,7 @@
       </p:sp>
       <p:sp>
         <p:nvSpPr>
-          <p:cNvPr id="10" name="TextBox 9"/>
+          <p:cNvPr id="9" name="TextBox 8"/>
           <p:cNvSpPr txBox="1"/>
           <p:nvPr/>
         </p:nvSpPr>
@@ -6398,7 +7913,7 @@
             <a:avLst/>
           </a:prstGeom>
           <a:solidFill>
-            <a:srgbClr val="FFFFFF"/>
+            <a:srgbClr val="EDEDF3"/>
           </a:solidFill>
           <a:ln>
             <a:noFill/>
@@ -6499,43 +8014,51 @@
                 </a:solidFill>
                 <a:latin typeface="JetBrains Mono"/>
               </a:rPr>
-              <a:t>M15  ·  SCHAUBILD</a:t>
-            </a:r>
-          </a:p>
-        </p:txBody>
-      </p:sp>
-      <p:sp>
-        <p:nvSpPr>
-          <p:cNvPr id="5" name="TextBox 4"/>
-          <p:cNvSpPr txBox="1"/>
-          <p:nvPr/>
-        </p:nvSpPr>
-        <p:spPr>
-          <a:xfrm>
-            <a:off x="685800" y="502920"/>
-            <a:ext cx="10817352" cy="594360"/>
-          </a:xfrm>
-          <a:prstGeom prst="rect">
-            <a:avLst/>
-          </a:prstGeom>
-          <a:noFill/>
-        </p:spPr>
-        <p:txBody>
-          <a:bodyPr wrap="square">
-            <a:spAutoFit/>
-          </a:bodyPr>
-          <a:lstStyle/>
-          <a:p>
-            <a:pPr algn="l"/>
-            <a:r>
-              <a:rPr sz="2000" b="1" i="0">
-                <a:solidFill>
-                  <a:srgbClr val="1F2C56"/>
-                </a:solidFill>
-                <a:latin typeface="Source Serif 4"/>
-              </a:rPr>
-              <a:t>Strategie-Landkarte</a:t>
-            </a:r>
+              <a:t>M15  ·  INHALT</a:t>
+            </a:r>
+          </a:p>
+        </p:txBody>
+      </p:sp>
+      <p:sp>
+        <p:nvSpPr>
+          <p:cNvPr id="5" name="Rectangle 4"/>
+          <p:cNvSpPr/>
+          <p:nvPr/>
+        </p:nvSpPr>
+        <p:spPr>
+          <a:xfrm>
+            <a:off x="0" y="1234440"/>
+            <a:ext cx="12188952" cy="12700"/>
+          </a:xfrm>
+          <a:prstGeom prst="rect">
+            <a:avLst/>
+          </a:prstGeom>
+          <a:solidFill>
+            <a:srgbClr val="D8DFE4"/>
+          </a:solidFill>
+          <a:ln>
+            <a:noFill/>
+          </a:ln>
+        </p:spPr>
+        <p:style>
+          <a:lnRef idx="1">
+            <a:schemeClr val="accent1"/>
+          </a:lnRef>
+          <a:fillRef idx="3">
+            <a:schemeClr val="accent1"/>
+          </a:fillRef>
+          <a:effectRef idx="2">
+            <a:schemeClr val="accent1"/>
+          </a:effectRef>
+          <a:fontRef idx="minor">
+            <a:schemeClr val="lt1"/>
+          </a:fontRef>
+        </p:style>
+        <p:txBody>
+          <a:bodyPr rtlCol="0" anchor="ctr"/>
+          <a:lstStyle/>
+          <a:p>
+            <a:pPr algn="ctr"/>
           </a:p>
         </p:txBody>
       </p:sp>
@@ -6547,8 +8070,8 @@
         </p:nvSpPr>
         <p:spPr>
           <a:xfrm>
-            <a:off x="685800" y="1143000"/>
-            <a:ext cx="10817352" cy="25400"/>
+            <a:off x="685800" y="502920"/>
+            <a:ext cx="36576" cy="658368"/>
           </a:xfrm>
           <a:prstGeom prst="rect">
             <a:avLst/>
@@ -6582,33 +8105,181 @@
           </a:p>
         </p:txBody>
       </p:sp>
-      <p:pic>
-        <p:nvPicPr>
-          <p:cNvPr id="7" name="Picture 6" descr="image.png"/>
-          <p:cNvPicPr>
-            <a:picLocks noChangeAspect="1"/>
-          </p:cNvPicPr>
-          <p:nvPr/>
-        </p:nvPicPr>
-        <p:blipFill>
-          <a:blip r:embed="rId2"/>
-          <a:stretch>
-            <a:fillRect/>
-          </a:stretch>
-        </p:blipFill>
-        <p:spPr>
-          <a:xfrm>
-            <a:off x="2303489" y="1325880"/>
-            <a:ext cx="7581973" cy="4937760"/>
-          </a:xfrm>
-          <a:prstGeom prst="rect">
-            <a:avLst/>
-          </a:prstGeom>
-        </p:spPr>
-      </p:pic>
-      <p:sp>
-        <p:nvSpPr>
-          <p:cNvPr id="8" name="Rectangle 7"/>
+      <p:sp>
+        <p:nvSpPr>
+          <p:cNvPr id="7" name="TextBox 6"/>
+          <p:cNvSpPr txBox="1"/>
+          <p:nvPr/>
+        </p:nvSpPr>
+        <p:spPr>
+          <a:xfrm>
+            <a:off x="813816" y="502920"/>
+            <a:ext cx="10634472" cy="685800"/>
+          </a:xfrm>
+          <a:prstGeom prst="rect">
+            <a:avLst/>
+          </a:prstGeom>
+          <a:noFill/>
+        </p:spPr>
+        <p:txBody>
+          <a:bodyPr wrap="square">
+            <a:spAutoFit/>
+          </a:bodyPr>
+          <a:lstStyle/>
+          <a:p>
+            <a:pPr algn="l"/>
+            <a:r>
+              <a:rPr sz="2400" b="1" i="0">
+                <a:solidFill>
+                  <a:srgbClr val="1F2C56"/>
+                </a:solidFill>
+                <a:latin typeface="Source Serif 4"/>
+              </a:rPr>
+              <a:t>Vom reaktiven zum strategischen Vertrieb</a:t>
+            </a:r>
+          </a:p>
+        </p:txBody>
+      </p:sp>
+      <p:sp>
+        <p:nvSpPr>
+          <p:cNvPr id="8" name="TextBox 7"/>
+          <p:cNvSpPr txBox="1"/>
+          <p:nvPr/>
+        </p:nvSpPr>
+        <p:spPr>
+          <a:xfrm>
+            <a:off x="685800" y="1417320"/>
+            <a:ext cx="10817352" cy="5029200"/>
+          </a:xfrm>
+          <a:prstGeom prst="rect">
+            <a:avLst/>
+          </a:prstGeom>
+          <a:noFill/>
+        </p:spPr>
+        <p:txBody>
+          <a:bodyPr wrap="square">
+            <a:spAutoFit/>
+          </a:bodyPr>
+          <a:lstStyle/>
+          <a:p>
+            <a:pPr>
+              <a:spcBef>
+                <a:spcPts val="400"/>
+              </a:spcBef>
+              <a:spcAft>
+                <a:spcPts val="200"/>
+              </a:spcAft>
+            </a:pPr>
+            <a:r>
+              <a:rPr sz="1200">
+                <a:solidFill>
+                  <a:srgbClr val="3D5466"/>
+                </a:solidFill>
+                <a:latin typeface="Arial"/>
+              </a:rPr>
+              <a:t>Eine Marktbearbeitungsstrategie beantwortet vier Fragen:</a:t>
+            </a:r>
+          </a:p>
+          <a:p>
+            <a:pPr>
+              <a:spcBef>
+                <a:spcPts val="400"/>
+              </a:spcBef>
+              <a:spcAft>
+                <a:spcPts val="200"/>
+              </a:spcAft>
+            </a:pPr>
+            <a:r>
+              <a:rPr sz="1300">
+                <a:solidFill>
+                  <a:srgbClr val="3D5466"/>
+                </a:solidFill>
+                <a:latin typeface="Arial"/>
+              </a:rPr>
+              <a:t>▸  Wen? – Welches Kundensegment bearbeite ich mit Priorität?</a:t>
+            </a:r>
+          </a:p>
+          <a:p>
+            <a:pPr>
+              <a:spcBef>
+                <a:spcPts val="400"/>
+              </a:spcBef>
+              <a:spcAft>
+                <a:spcPts val="200"/>
+              </a:spcAft>
+            </a:pPr>
+            <a:r>
+              <a:rPr sz="1300">
+                <a:solidFill>
+                  <a:srgbClr val="3D5466"/>
+                </a:solidFill>
+                <a:latin typeface="Arial"/>
+              </a:rPr>
+              <a:t>▸  Womit? – Was ist mein Wertversprechen für dieses Segment?</a:t>
+            </a:r>
+          </a:p>
+          <a:p>
+            <a:pPr>
+              <a:spcBef>
+                <a:spcPts val="400"/>
+              </a:spcBef>
+              <a:spcAft>
+                <a:spcPts val="200"/>
+              </a:spcAft>
+            </a:pPr>
+            <a:r>
+              <a:rPr sz="1300">
+                <a:solidFill>
+                  <a:srgbClr val="3D5466"/>
+                </a:solidFill>
+                <a:latin typeface="Arial"/>
+              </a:rPr>
+              <a:t>▸  Wie? – Über welche Kanäle und Maßnahmen erreiche ich diese Kunden?</a:t>
+            </a:r>
+          </a:p>
+          <a:p>
+            <a:pPr>
+              <a:spcBef>
+                <a:spcPts val="400"/>
+              </a:spcBef>
+              <a:spcAft>
+                <a:spcPts val="200"/>
+              </a:spcAft>
+            </a:pPr>
+            <a:r>
+              <a:rPr sz="1300">
+                <a:solidFill>
+                  <a:srgbClr val="3D5466"/>
+                </a:solidFill>
+                <a:latin typeface="Arial"/>
+              </a:rPr>
+              <a:t>▸  Wann? – Welche Meilensteine und Zielgrößen setze ich uns?</a:t>
+            </a:r>
+          </a:p>
+          <a:p>
+            <a:pPr>
+              <a:spcBef>
+                <a:spcPts val="400"/>
+              </a:spcBef>
+              <a:spcAft>
+                <a:spcPts val="200"/>
+              </a:spcAft>
+            </a:pPr>
+            <a:r>
+              <a:rPr sz="1200">
+                <a:solidFill>
+                  <a:srgbClr val="3D5466"/>
+                </a:solidFill>
+                <a:latin typeface="Arial"/>
+              </a:rPr>
+              <a:t>## 4.2 Marktsegmentierung im Firmenkundengeschäft</a:t>
+            </a:r>
+          </a:p>
+        </p:txBody>
+      </p:sp>
+      <p:sp>
+        <p:nvSpPr>
+          <p:cNvPr id="9" name="Rectangle 8"/>
           <p:cNvSpPr/>
           <p:nvPr/>
         </p:nvSpPr>
@@ -6651,7 +8322,7 @@
       </p:sp>
       <p:sp>
         <p:nvSpPr>
-          <p:cNvPr id="9" name="TextBox 8"/>
+          <p:cNvPr id="10" name="TextBox 9"/>
           <p:cNvSpPr txBox="1"/>
           <p:nvPr/>
         </p:nvSpPr>
@@ -6680,41 +8351,6 @@
                 <a:latin typeface="JetBrains Mono"/>
               </a:rPr>
               <a:t>Benedikt Zoller Coaching  ·  FKB Campus  ·  M15</a:t>
-            </a:r>
-          </a:p>
-        </p:txBody>
-      </p:sp>
-      <p:sp>
-        <p:nvSpPr>
-          <p:cNvPr id="10" name="TextBox 9"/>
-          <p:cNvSpPr txBox="1"/>
-          <p:nvPr/>
-        </p:nvSpPr>
-        <p:spPr>
-          <a:xfrm>
-            <a:off x="7176211" y="6583680"/>
-            <a:ext cx="4326940" cy="256032"/>
-          </a:xfrm>
-          <a:prstGeom prst="rect">
-            <a:avLst/>
-          </a:prstGeom>
-          <a:noFill/>
-        </p:spPr>
-        <p:txBody>
-          <a:bodyPr wrap="none">
-            <a:spAutoFit/>
-          </a:bodyPr>
-          <a:lstStyle/>
-          <a:p>
-            <a:pPr algn="r"/>
-            <a:r>
-              <a:rPr sz="700">
-                <a:solidFill>
-                  <a:srgbClr val="A0B4D2"/>
-                </a:solidFill>
-                <a:latin typeface="JetBrains Mono"/>
-              </a:rPr>
-              <a:t>Schaubild</a:t>
             </a:r>
           </a:p>
         </p:txBody>
@@ -6752,7 +8388,7 @@
             <a:avLst/>
           </a:prstGeom>
           <a:solidFill>
-            <a:srgbClr val="EDEDF3"/>
+            <a:srgbClr val="FFFFFF"/>
           </a:solidFill>
           <a:ln>
             <a:noFill/>
@@ -6853,51 +8489,43 @@
                 </a:solidFill>
                 <a:latin typeface="JetBrains Mono"/>
               </a:rPr>
-              <a:t>M15  ·  INHALT</a:t>
-            </a:r>
-          </a:p>
-        </p:txBody>
-      </p:sp>
-      <p:sp>
-        <p:nvSpPr>
-          <p:cNvPr id="5" name="Rectangle 4"/>
-          <p:cNvSpPr/>
-          <p:nvPr/>
-        </p:nvSpPr>
-        <p:spPr>
-          <a:xfrm>
-            <a:off x="0" y="1234440"/>
-            <a:ext cx="12188952" cy="12700"/>
-          </a:xfrm>
-          <a:prstGeom prst="rect">
-            <a:avLst/>
-          </a:prstGeom>
-          <a:solidFill>
-            <a:srgbClr val="D8DFE4"/>
-          </a:solidFill>
-          <a:ln>
-            <a:noFill/>
-          </a:ln>
-        </p:spPr>
-        <p:style>
-          <a:lnRef idx="1">
-            <a:schemeClr val="accent1"/>
-          </a:lnRef>
-          <a:fillRef idx="3">
-            <a:schemeClr val="accent1"/>
-          </a:fillRef>
-          <a:effectRef idx="2">
-            <a:schemeClr val="accent1"/>
-          </a:effectRef>
-          <a:fontRef idx="minor">
-            <a:schemeClr val="lt1"/>
-          </a:fontRef>
-        </p:style>
-        <p:txBody>
-          <a:bodyPr rtlCol="0" anchor="ctr"/>
-          <a:lstStyle/>
-          <a:p>
-            <a:pPr algn="ctr"/>
+              <a:t>M15  ·  SCHAUBILD</a:t>
+            </a:r>
+          </a:p>
+        </p:txBody>
+      </p:sp>
+      <p:sp>
+        <p:nvSpPr>
+          <p:cNvPr id="5" name="TextBox 4"/>
+          <p:cNvSpPr txBox="1"/>
+          <p:nvPr/>
+        </p:nvSpPr>
+        <p:spPr>
+          <a:xfrm>
+            <a:off x="685800" y="502920"/>
+            <a:ext cx="10817352" cy="594360"/>
+          </a:xfrm>
+          <a:prstGeom prst="rect">
+            <a:avLst/>
+          </a:prstGeom>
+          <a:noFill/>
+        </p:spPr>
+        <p:txBody>
+          <a:bodyPr wrap="square">
+            <a:spAutoFit/>
+          </a:bodyPr>
+          <a:lstStyle/>
+          <a:p>
+            <a:pPr algn="l"/>
+            <a:r>
+              <a:rPr sz="2000" b="1" i="0">
+                <a:solidFill>
+                  <a:srgbClr val="1F2C56"/>
+                </a:solidFill>
+                <a:latin typeface="Source Serif 4"/>
+              </a:rPr>
+              <a:t>Strategie-Landkarte</a:t>
+            </a:r>
           </a:p>
         </p:txBody>
       </p:sp>
@@ -6909,8 +8537,8 @@
         </p:nvSpPr>
         <p:spPr>
           <a:xfrm>
-            <a:off x="685800" y="502920"/>
-            <a:ext cx="36576" cy="658368"/>
+            <a:off x="685800" y="1143000"/>
+            <a:ext cx="10817352" cy="25400"/>
           </a:xfrm>
           <a:prstGeom prst="rect">
             <a:avLst/>
@@ -6944,105 +8572,33 @@
           </a:p>
         </p:txBody>
       </p:sp>
-      <p:sp>
-        <p:nvSpPr>
-          <p:cNvPr id="7" name="TextBox 6"/>
-          <p:cNvSpPr txBox="1"/>
-          <p:nvPr/>
-        </p:nvSpPr>
-        <p:spPr>
-          <a:xfrm>
-            <a:off x="813816" y="502920"/>
-            <a:ext cx="10634472" cy="685800"/>
-          </a:xfrm>
-          <a:prstGeom prst="rect">
-            <a:avLst/>
-          </a:prstGeom>
-          <a:noFill/>
-        </p:spPr>
-        <p:txBody>
-          <a:bodyPr wrap="square">
-            <a:spAutoFit/>
-          </a:bodyPr>
-          <a:lstStyle/>
-          <a:p>
-            <a:pPr algn="l"/>
-            <a:r>
-              <a:rPr sz="2400" b="1" i="0">
-                <a:solidFill>
-                  <a:srgbClr val="1F2C56"/>
-                </a:solidFill>
-                <a:latin typeface="Source Serif 4"/>
-              </a:rPr>
-              <a:t>Segmentierungskriterien</a:t>
-            </a:r>
-          </a:p>
-        </p:txBody>
-      </p:sp>
-      <p:sp>
-        <p:nvSpPr>
-          <p:cNvPr id="8" name="TextBox 7"/>
-          <p:cNvSpPr txBox="1"/>
-          <p:nvPr/>
-        </p:nvSpPr>
-        <p:spPr>
-          <a:xfrm>
-            <a:off x="685800" y="1417320"/>
-            <a:ext cx="10817352" cy="5029200"/>
-          </a:xfrm>
-          <a:prstGeom prst="rect">
-            <a:avLst/>
-          </a:prstGeom>
-          <a:noFill/>
-        </p:spPr>
-        <p:txBody>
-          <a:bodyPr wrap="square">
-            <a:spAutoFit/>
-          </a:bodyPr>
-          <a:lstStyle/>
-          <a:p>
-            <a:pPr>
-              <a:spcBef>
-                <a:spcPts val="400"/>
-              </a:spcBef>
-              <a:spcAft>
-                <a:spcPts val="200"/>
-              </a:spcAft>
-            </a:pPr>
-            <a:r>
-              <a:rPr sz="1200">
-                <a:solidFill>
-                  <a:srgbClr val="3D5466"/>
-                </a:solidFill>
-                <a:latin typeface="Arial"/>
-              </a:rPr>
-              <a:t>Nicht jeder Firmenkunde ist gleich attraktiv. Eine sinnvolle Segmentierung kombiniert mehrere Kriterien:</a:t>
-            </a:r>
-          </a:p>
-          <a:p>
-            <a:pPr>
-              <a:spcBef>
-                <a:spcPts val="400"/>
-              </a:spcBef>
-              <a:spcAft>
-                <a:spcPts val="200"/>
-              </a:spcAft>
-            </a:pPr>
-            <a:r>
-              <a:rPr sz="1200">
-                <a:solidFill>
-                  <a:srgbClr val="3D5466"/>
-                </a:solidFill>
-                <a:latin typeface="Arial"/>
-              </a:rPr>
-              <a:t>Empfehlung: Wählen Sie maximal zwei Primärsegmente. Breite schlägt Tiefe nur in sehr seltenen Fällen.</a:t>
-            </a:r>
-          </a:p>
-        </p:txBody>
-      </p:sp>
-      <p:sp>
-        <p:nvSpPr>
-          <p:cNvPr id="9" name="Rectangle 8"/>
+      <p:pic>
+        <p:nvPicPr>
+          <p:cNvPr id="7" name="Picture 6" descr="image.png"/>
+          <p:cNvPicPr>
+            <a:picLocks noChangeAspect="1"/>
+          </p:cNvPicPr>
+          <p:nvPr/>
+        </p:nvPicPr>
+        <p:blipFill>
+          <a:blip r:embed="rId2"/>
+          <a:stretch>
+            <a:fillRect/>
+          </a:stretch>
+        </p:blipFill>
+        <p:spPr>
+          <a:xfrm>
+            <a:off x="2303489" y="1325880"/>
+            <a:ext cx="7581973" cy="4937760"/>
+          </a:xfrm>
+          <a:prstGeom prst="rect">
+            <a:avLst/>
+          </a:prstGeom>
+        </p:spPr>
+      </p:pic>
+      <p:sp>
+        <p:nvSpPr>
+          <p:cNvPr id="8" name="Rectangle 7"/>
           <p:cNvSpPr/>
           <p:nvPr/>
         </p:nvSpPr>
@@ -7085,7 +8641,7 @@
       </p:sp>
       <p:sp>
         <p:nvSpPr>
-          <p:cNvPr id="10" name="TextBox 9"/>
+          <p:cNvPr id="9" name="TextBox 8"/>
           <p:cNvSpPr txBox="1"/>
           <p:nvPr/>
         </p:nvSpPr>
@@ -7114,6 +8670,41 @@
                 <a:latin typeface="JetBrains Mono"/>
               </a:rPr>
               <a:t>Benedikt Zoller Coaching  ·  FKB Campus  ·  M15</a:t>
+            </a:r>
+          </a:p>
+        </p:txBody>
+      </p:sp>
+      <p:sp>
+        <p:nvSpPr>
+          <p:cNvPr id="10" name="TextBox 9"/>
+          <p:cNvSpPr txBox="1"/>
+          <p:nvPr/>
+        </p:nvSpPr>
+        <p:spPr>
+          <a:xfrm>
+            <a:off x="7176211" y="6583680"/>
+            <a:ext cx="4326940" cy="256032"/>
+          </a:xfrm>
+          <a:prstGeom prst="rect">
+            <a:avLst/>
+          </a:prstGeom>
+          <a:noFill/>
+        </p:spPr>
+        <p:txBody>
+          <a:bodyPr wrap="none">
+            <a:spAutoFit/>
+          </a:bodyPr>
+          <a:lstStyle/>
+          <a:p>
+            <a:pPr algn="r"/>
+            <a:r>
+              <a:rPr sz="700">
+                <a:solidFill>
+                  <a:srgbClr val="A0B4D2"/>
+                </a:solidFill>
+                <a:latin typeface="JetBrains Mono"/>
+              </a:rPr>
+              <a:t>Schaubild</a:t>
             </a:r>
           </a:p>
         </p:txBody>
@@ -7373,7 +8964,7 @@
                 </a:solidFill>
                 <a:latin typeface="Source Serif 4"/>
               </a:rPr>
-              <a:t>Das Scoring-Modell zur Segmentpriorisierung</a:t>
+              <a:t>Segmentierungskriterien</a:t>
             </a:r>
           </a:p>
         </p:txBody>
@@ -7415,7 +9006,7 @@
                 </a:solidFill>
                 <a:latin typeface="Arial"/>
               </a:rPr>
-              <a:t>Ein einfaches Scoring-Modell hilft bei der Auswahl des Primärsegments:</a:t>
+              <a:t>Nicht jeder Firmenkunde ist gleich attraktiv. Eine sinnvolle Segmentierung kombiniert mehrere Kriterien:</a:t>
             </a:r>
           </a:p>
           <a:p>
@@ -7434,26 +9025,7 @@
                 </a:solidFill>
                 <a:latin typeface="Arial"/>
               </a:rPr>
-              <a:t>Bewertung je Kriterium: 1 (schwach) bis 5 (sehr stark).</a:t>
-            </a:r>
-          </a:p>
-          <a:p>
-            <a:pPr>
-              <a:spcBef>
-                <a:spcPts val="400"/>
-              </a:spcBef>
-              <a:spcAft>
-                <a:spcPts val="200"/>
-              </a:spcAft>
-            </a:pPr>
-            <a:r>
-              <a:rPr sz="1200">
-                <a:solidFill>
-                  <a:srgbClr val="3D5466"/>
-                </a:solidFill>
-                <a:latin typeface="Arial"/>
-              </a:rPr>
-              <a:t>## 4.3 Marktpotenzialanalyse</a:t>
+              <a:t>Empfehlung: Wählen Sie maximal zwei Primärsegmente. Breite schlägt Tiefe nur in sehr seltenen Fällen.</a:t>
             </a:r>
           </a:p>
         </p:txBody>
@@ -7791,7 +9363,7 @@
                 </a:solidFill>
                 <a:latin typeface="Source Serif 4"/>
               </a:rPr>
-              <a:t>Wie groß ist mein adressierbarer Markt?</a:t>
+              <a:t>Das Scoring-Modell zur Segmentpriorisierung</a:t>
             </a:r>
           </a:p>
         </p:txBody>
@@ -7833,7 +9405,7 @@
                 </a:solidFill>
                 <a:latin typeface="Arial"/>
               </a:rPr>
-              <a:t>Vor dem strategischen Einstieg in ein Segment steht die Potenzialschätzung. Die Frage: Wie viele Unternehmen im Zielsegment gibt es in meiner Region, und wie viele davon betreuen wir noch nicht?</a:t>
+              <a:t>Ein einfaches Scoring-Modell hilft bei der Auswahl des Primärsegments:</a:t>
             </a:r>
           </a:p>
           <a:p>
@@ -7852,7 +9424,7 @@
                 </a:solidFill>
                 <a:latin typeface="Arial"/>
               </a:rPr>
-              <a:t>Datenquellen für die Potenzialschätzung:</a:t>
+              <a:t>Bewertung je Kriterium: 1 (schwach) bis 5 (sehr stark).</a:t>
             </a:r>
           </a:p>
           <a:p>
@@ -7871,121 +9443,7 @@
                 </a:solidFill>
                 <a:latin typeface="Arial"/>
               </a:rPr>
-              <a:t>Vereinfachte Potenzialrechnung:</a:t>
-            </a:r>
-          </a:p>
-          <a:p>
-            <a:pPr>
-              <a:spcBef>
-                <a:spcPts val="400"/>
-              </a:spcBef>
-              <a:spcAft>
-                <a:spcPts val="200"/>
-              </a:spcAft>
-            </a:pPr>
-            <a:r>
-              <a:rPr sz="1300">
-                <a:solidFill>
-                  <a:srgbClr val="3D5466"/>
-                </a:solidFill>
-                <a:latin typeface="Arial"/>
-              </a:rPr>
-              <a:t>▸  Zielunternehmen in Region: X</a:t>
-            </a:r>
-          </a:p>
-          <a:p>
-            <a:pPr>
-              <a:spcBef>
-                <a:spcPts val="400"/>
-              </a:spcBef>
-              <a:spcAft>
-                <a:spcPts val="200"/>
-              </a:spcAft>
-            </a:pPr>
-            <a:r>
-              <a:rPr sz="1300">
-                <a:solidFill>
-                  <a:srgbClr val="3D5466"/>
-                </a:solidFill>
-                <a:latin typeface="Arial"/>
-              </a:rPr>
-              <a:t>▸  Davon bereits Kunden: Y</a:t>
-            </a:r>
-          </a:p>
-          <a:p>
-            <a:pPr>
-              <a:spcBef>
-                <a:spcPts val="400"/>
-              </a:spcBef>
-              <a:spcAft>
-                <a:spcPts val="200"/>
-              </a:spcAft>
-            </a:pPr>
-            <a:r>
-              <a:rPr sz="1300">
-                <a:solidFill>
-                  <a:srgbClr val="3D5466"/>
-                </a:solidFill>
-                <a:latin typeface="Arial"/>
-              </a:rPr>
-              <a:t>▸  Adressierbares Neukundenpotenzial: X − Y</a:t>
-            </a:r>
-          </a:p>
-          <a:p>
-            <a:pPr>
-              <a:spcBef>
-                <a:spcPts val="400"/>
-              </a:spcBef>
-              <a:spcAft>
-                <a:spcPts val="200"/>
-              </a:spcAft>
-            </a:pPr>
-            <a:r>
-              <a:rPr sz="1300">
-                <a:solidFill>
-                  <a:srgbClr val="3D5466"/>
-                </a:solidFill>
-                <a:latin typeface="Arial"/>
-              </a:rPr>
-              <a:t>▸  Realistisch erreichbar in 12 Monaten (Marktdurchdringungsrate 2–5 %): Z</a:t>
-            </a:r>
-          </a:p>
-          <a:p>
-            <a:pPr>
-              <a:spcBef>
-                <a:spcPts val="600"/>
-              </a:spcBef>
-              <a:spcAft>
-                <a:spcPts val="200"/>
-              </a:spcAft>
-            </a:pPr>
-            <a:r>
-              <a:rPr sz="1200" i="1">
-                <a:solidFill>
-                  <a:srgbClr val="3D5466"/>
-                </a:solidFill>
-                <a:latin typeface="Arial"/>
-              </a:rPr>
-              <a:t>→  Praxistipp: Unterschätzen Sie die bestehenden Daten in agree nicht. Eine saubere Branchencodierung und ein aktuelles CRM sind die Basis jeder Potenzialanalyse.</a:t>
-            </a:r>
-          </a:p>
-          <a:p>
-            <a:pPr>
-              <a:spcBef>
-                <a:spcPts val="400"/>
-              </a:spcBef>
-              <a:spcAft>
-                <a:spcPts val="200"/>
-              </a:spcAft>
-            </a:pPr>
-            <a:r>
-              <a:rPr sz="1200">
-                <a:solidFill>
-                  <a:srgbClr val="3D5466"/>
-                </a:solidFill>
-                <a:latin typeface="Arial"/>
-              </a:rPr>
-              <a:t>## 4.4 Strategische Positionierung: Stärken-Schwächen vs. Wettbewerb</a:t>
+              <a:t>## 4.3 Marktpotenzialanalyse</a:t>
             </a:r>
           </a:p>
         </p:txBody>
@@ -8323,14 +9781,208 @@
                 </a:solidFill>
                 <a:latin typeface="Source Serif 4"/>
               </a:rPr>
-              <a:t>SWOT im Firmenkundensegment</a:t>
-            </a:r>
-          </a:p>
-        </p:txBody>
-      </p:sp>
-      <p:sp>
-        <p:nvSpPr>
-          <p:cNvPr id="8" name="Rectangle 7"/>
+              <a:t>Wie groß ist mein adressierbarer Markt?</a:t>
+            </a:r>
+          </a:p>
+        </p:txBody>
+      </p:sp>
+      <p:sp>
+        <p:nvSpPr>
+          <p:cNvPr id="8" name="TextBox 7"/>
+          <p:cNvSpPr txBox="1"/>
+          <p:nvPr/>
+        </p:nvSpPr>
+        <p:spPr>
+          <a:xfrm>
+            <a:off x="685800" y="1417320"/>
+            <a:ext cx="10817352" cy="5029200"/>
+          </a:xfrm>
+          <a:prstGeom prst="rect">
+            <a:avLst/>
+          </a:prstGeom>
+          <a:noFill/>
+        </p:spPr>
+        <p:txBody>
+          <a:bodyPr wrap="square">
+            <a:spAutoFit/>
+          </a:bodyPr>
+          <a:lstStyle/>
+          <a:p>
+            <a:pPr>
+              <a:spcBef>
+                <a:spcPts val="400"/>
+              </a:spcBef>
+              <a:spcAft>
+                <a:spcPts val="200"/>
+              </a:spcAft>
+            </a:pPr>
+            <a:r>
+              <a:rPr sz="1200">
+                <a:solidFill>
+                  <a:srgbClr val="3D5466"/>
+                </a:solidFill>
+                <a:latin typeface="Arial"/>
+              </a:rPr>
+              <a:t>Vor dem strategischen Einstieg in ein Segment steht die Potenzialschätzung. Die Frage: Wie viele Unternehmen im Zielsegment gibt es in meiner Region, und wie viele davon betreuen wir noch nicht?</a:t>
+            </a:r>
+          </a:p>
+          <a:p>
+            <a:pPr>
+              <a:spcBef>
+                <a:spcPts val="400"/>
+              </a:spcBef>
+              <a:spcAft>
+                <a:spcPts val="200"/>
+              </a:spcAft>
+            </a:pPr>
+            <a:r>
+              <a:rPr sz="1200">
+                <a:solidFill>
+                  <a:srgbClr val="3D5466"/>
+                </a:solidFill>
+                <a:latin typeface="Arial"/>
+              </a:rPr>
+              <a:t>Datenquellen für die Potenzialschätzung:</a:t>
+            </a:r>
+          </a:p>
+          <a:p>
+            <a:pPr>
+              <a:spcBef>
+                <a:spcPts val="400"/>
+              </a:spcBef>
+              <a:spcAft>
+                <a:spcPts val="200"/>
+              </a:spcAft>
+            </a:pPr>
+            <a:r>
+              <a:rPr sz="1200">
+                <a:solidFill>
+                  <a:srgbClr val="3D5466"/>
+                </a:solidFill>
+                <a:latin typeface="Arial"/>
+              </a:rPr>
+              <a:t>Vereinfachte Potenzialrechnung:</a:t>
+            </a:r>
+          </a:p>
+          <a:p>
+            <a:pPr>
+              <a:spcBef>
+                <a:spcPts val="400"/>
+              </a:spcBef>
+              <a:spcAft>
+                <a:spcPts val="200"/>
+              </a:spcAft>
+            </a:pPr>
+            <a:r>
+              <a:rPr sz="1300">
+                <a:solidFill>
+                  <a:srgbClr val="3D5466"/>
+                </a:solidFill>
+                <a:latin typeface="Arial"/>
+              </a:rPr>
+              <a:t>▸  Zielunternehmen in Region: X</a:t>
+            </a:r>
+          </a:p>
+          <a:p>
+            <a:pPr>
+              <a:spcBef>
+                <a:spcPts val="400"/>
+              </a:spcBef>
+              <a:spcAft>
+                <a:spcPts val="200"/>
+              </a:spcAft>
+            </a:pPr>
+            <a:r>
+              <a:rPr sz="1300">
+                <a:solidFill>
+                  <a:srgbClr val="3D5466"/>
+                </a:solidFill>
+                <a:latin typeface="Arial"/>
+              </a:rPr>
+              <a:t>▸  Davon bereits Kunden: Y</a:t>
+            </a:r>
+          </a:p>
+          <a:p>
+            <a:pPr>
+              <a:spcBef>
+                <a:spcPts val="400"/>
+              </a:spcBef>
+              <a:spcAft>
+                <a:spcPts val="200"/>
+              </a:spcAft>
+            </a:pPr>
+            <a:r>
+              <a:rPr sz="1300">
+                <a:solidFill>
+                  <a:srgbClr val="3D5466"/>
+                </a:solidFill>
+                <a:latin typeface="Arial"/>
+              </a:rPr>
+              <a:t>▸  Adressierbares Neukundenpotenzial: X − Y</a:t>
+            </a:r>
+          </a:p>
+          <a:p>
+            <a:pPr>
+              <a:spcBef>
+                <a:spcPts val="400"/>
+              </a:spcBef>
+              <a:spcAft>
+                <a:spcPts val="200"/>
+              </a:spcAft>
+            </a:pPr>
+            <a:r>
+              <a:rPr sz="1300">
+                <a:solidFill>
+                  <a:srgbClr val="3D5466"/>
+                </a:solidFill>
+                <a:latin typeface="Arial"/>
+              </a:rPr>
+              <a:t>▸  Realistisch erreichbar in 12 Monaten (Marktdurchdringungsrate 2–5 %): Z</a:t>
+            </a:r>
+          </a:p>
+          <a:p>
+            <a:pPr>
+              <a:spcBef>
+                <a:spcPts val="600"/>
+              </a:spcBef>
+              <a:spcAft>
+                <a:spcPts val="200"/>
+              </a:spcAft>
+            </a:pPr>
+            <a:r>
+              <a:rPr sz="1200" i="1">
+                <a:solidFill>
+                  <a:srgbClr val="3D5466"/>
+                </a:solidFill>
+                <a:latin typeface="Arial"/>
+              </a:rPr>
+              <a:t>→  Praxistipp: Unterschätzen Sie die bestehenden Daten in agree nicht. Eine saubere Branchencodierung und ein aktuelles CRM sind die Basis jeder Potenzialanalyse.</a:t>
+            </a:r>
+          </a:p>
+          <a:p>
+            <a:pPr>
+              <a:spcBef>
+                <a:spcPts val="400"/>
+              </a:spcBef>
+              <a:spcAft>
+                <a:spcPts val="200"/>
+              </a:spcAft>
+            </a:pPr>
+            <a:r>
+              <a:rPr sz="1200">
+                <a:solidFill>
+                  <a:srgbClr val="3D5466"/>
+                </a:solidFill>
+                <a:latin typeface="Arial"/>
+              </a:rPr>
+              <a:t>## 4.4 Strategische Positionierung: Stärken-Schwächen vs. Wettbewerb</a:t>
+            </a:r>
+          </a:p>
+        </p:txBody>
+      </p:sp>
+      <p:sp>
+        <p:nvSpPr>
+          <p:cNvPr id="9" name="Rectangle 8"/>
           <p:cNvSpPr/>
           <p:nvPr/>
         </p:nvSpPr>
@@ -8373,7 +10025,7 @@
       </p:sp>
       <p:sp>
         <p:nvSpPr>
-          <p:cNvPr id="9" name="TextBox 8"/>
+          <p:cNvPr id="10" name="TextBox 9"/>
           <p:cNvSpPr txBox="1"/>
           <p:nvPr/>
         </p:nvSpPr>
@@ -8661,151 +10313,14 @@
                 </a:solidFill>
                 <a:latin typeface="Source Serif 4"/>
               </a:rPr>
-              <a:t>Wertversprechen formulieren</a:t>
-            </a:r>
-          </a:p>
-        </p:txBody>
-      </p:sp>
-      <p:sp>
-        <p:nvSpPr>
-          <p:cNvPr id="8" name="TextBox 7"/>
-          <p:cNvSpPr txBox="1"/>
-          <p:nvPr/>
-        </p:nvSpPr>
-        <p:spPr>
-          <a:xfrm>
-            <a:off x="685800" y="1417320"/>
-            <a:ext cx="10817352" cy="5029200"/>
-          </a:xfrm>
-          <a:prstGeom prst="rect">
-            <a:avLst/>
-          </a:prstGeom>
-          <a:noFill/>
-        </p:spPr>
-        <p:txBody>
-          <a:bodyPr wrap="square">
-            <a:spAutoFit/>
-          </a:bodyPr>
-          <a:lstStyle/>
-          <a:p>
-            <a:pPr>
-              <a:spcBef>
-                <a:spcPts val="400"/>
-              </a:spcBef>
-              <a:spcAft>
-                <a:spcPts val="200"/>
-              </a:spcAft>
-            </a:pPr>
-            <a:r>
-              <a:rPr sz="1200">
-                <a:solidFill>
-                  <a:srgbClr val="3D5466"/>
-                </a:solidFill>
-                <a:latin typeface="Arial"/>
-              </a:rPr>
-              <a:t>Das Wertversprechen (Value Proposition) beantwortet: Warum sollte ein Unternehmen aus meinem Zielsegment zu uns wechseln – oder bleiben?</a:t>
-            </a:r>
-          </a:p>
-          <a:p>
-            <a:pPr>
-              <a:spcBef>
-                <a:spcPts val="400"/>
-              </a:spcBef>
-              <a:spcAft>
-                <a:spcPts val="200"/>
-              </a:spcAft>
-            </a:pPr>
-            <a:r>
-              <a:rPr sz="1200">
-                <a:solidFill>
-                  <a:srgbClr val="3D5466"/>
-                </a:solidFill>
-                <a:latin typeface="Arial"/>
-              </a:rPr>
-              <a:t>Ein wirksames Wertversprechen im Firmenkundengeschäft ist:</a:t>
-            </a:r>
-          </a:p>
-          <a:p>
-            <a:pPr>
-              <a:spcBef>
-                <a:spcPts val="400"/>
-              </a:spcBef>
-              <a:spcAft>
-                <a:spcPts val="200"/>
-              </a:spcAft>
-            </a:pPr>
-            <a:r>
-              <a:rPr sz="1300">
-                <a:solidFill>
-                  <a:srgbClr val="3D5466"/>
-                </a:solidFill>
-                <a:latin typeface="Arial"/>
-              </a:rPr>
-              <a:t>▸  Spezifisch (nicht „wir sind die beste Bank"): „Für Handwerksbetriebe in der Region sind wir der Partner, der Finanzierungsentscheidungen in 48 Stunden trifft."</a:t>
-            </a:r>
-          </a:p>
-          <a:p>
-            <a:pPr>
-              <a:spcBef>
-                <a:spcPts val="400"/>
-              </a:spcBef>
-              <a:spcAft>
-                <a:spcPts val="200"/>
-              </a:spcAft>
-            </a:pPr>
-            <a:r>
-              <a:rPr sz="1300">
-                <a:solidFill>
-                  <a:srgbClr val="3D5466"/>
-                </a:solidFill>
-                <a:latin typeface="Arial"/>
-              </a:rPr>
-              <a:t>▸  Belegbar: Konkrete Referenzen, Bearbeitungszeiten, Verbundpartner-Einbindung</a:t>
-            </a:r>
-          </a:p>
-          <a:p>
-            <a:pPr>
-              <a:spcBef>
-                <a:spcPts val="400"/>
-              </a:spcBef>
-              <a:spcAft>
-                <a:spcPts val="200"/>
-              </a:spcAft>
-            </a:pPr>
-            <a:r>
-              <a:rPr sz="1300">
-                <a:solidFill>
-                  <a:srgbClr val="3D5466"/>
-                </a:solidFill>
-                <a:latin typeface="Arial"/>
-              </a:rPr>
-              <a:t>▸  Differenzierend: Was kann ich, was die Sparkasse oder Commerzbank nicht kann?</a:t>
-            </a:r>
-          </a:p>
-          <a:p>
-            <a:pPr>
-              <a:spcBef>
-                <a:spcPts val="400"/>
-              </a:spcBef>
-              <a:spcAft>
-                <a:spcPts val="200"/>
-              </a:spcAft>
-            </a:pPr>
-            <a:r>
-              <a:rPr sz="1200">
-                <a:solidFill>
-                  <a:srgbClr val="3D5466"/>
-                </a:solidFill>
-                <a:latin typeface="Arial"/>
-              </a:rPr>
-              <a:t>## 4.5 Neukundenansprache: Kanäle und Maßnahmen</a:t>
-            </a:r>
-          </a:p>
-        </p:txBody>
-      </p:sp>
-      <p:sp>
-        <p:nvSpPr>
-          <p:cNvPr id="9" name="Rectangle 8"/>
+              <a:t>SWOT im Firmenkundensegment</a:t>
+            </a:r>
+          </a:p>
+        </p:txBody>
+      </p:sp>
+      <p:sp>
+        <p:nvSpPr>
+          <p:cNvPr id="8" name="Rectangle 7"/>
           <p:cNvSpPr/>
           <p:nvPr/>
         </p:nvSpPr>
@@ -8848,7 +10363,7 @@
       </p:sp>
       <p:sp>
         <p:nvSpPr>
-          <p:cNvPr id="10" name="TextBox 9"/>
+          <p:cNvPr id="9" name="TextBox 8"/>
           <p:cNvSpPr txBox="1"/>
           <p:nvPr/>
         </p:nvSpPr>
@@ -9207,4 +10722,324 @@
   </a:objectDefaults>
   <a:extraClrSchemeLst/>
 </a:theme>
+</file>
+
+<file path=ppt/theme/theme2.xml><?xml version="1.0" encoding="utf-8"?>
+<a:theme xmlns:a="http://schemas.openxmlformats.org/drawingml/2006/main" name="Office Theme">
+  <a:themeElements>
+    <a:clrScheme name="Office">
+      <a:dk1>
+        <a:sysClr val="windowText" lastClr="000000"/>
+      </a:dk1>
+      <a:lt1>
+        <a:sysClr val="window" lastClr="FFFFFF"/>
+      </a:lt1>
+      <a:dk2>
+        <a:srgbClr val="1F497D"/>
+      </a:dk2>
+      <a:lt2>
+        <a:srgbClr val="EEECE1"/>
+      </a:lt2>
+      <a:accent1>
+        <a:srgbClr val="4F81BD"/>
+      </a:accent1>
+      <a:accent2>
+        <a:srgbClr val="C0504D"/>
+      </a:accent2>
+      <a:accent3>
+        <a:srgbClr val="9BBB59"/>
+      </a:accent3>
+      <a:accent4>
+        <a:srgbClr val="8064A2"/>
+      </a:accent4>
+      <a:accent5>
+        <a:srgbClr val="4BACC6"/>
+      </a:accent5>
+      <a:accent6>
+        <a:srgbClr val="F79646"/>
+      </a:accent6>
+      <a:hlink>
+        <a:srgbClr val="0000FF"/>
+      </a:hlink>
+      <a:folHlink>
+        <a:srgbClr val="800080"/>
+      </a:folHlink>
+    </a:clrScheme>
+    <a:fontScheme name="Office">
+      <a:majorFont>
+        <a:latin typeface="Calibri"/>
+        <a:ea typeface=""/>
+        <a:cs typeface=""/>
+        <a:font script="Jpan" typeface="ＭＳ Ｐゴシック"/>
+        <a:font script="Hang" typeface="맑은 고딕"/>
+        <a:font script="Hans" typeface="宋体"/>
+        <a:font script="Hant" typeface="新細明體"/>
+        <a:font script="Arab" typeface="Times New Roman"/>
+        <a:font script="Hebr" typeface="Times New Roman"/>
+        <a:font script="Thai" typeface="Angsana New"/>
+        <a:font script="Ethi" typeface="Nyala"/>
+        <a:font script="Beng" typeface="Vrinda"/>
+        <a:font script="Gujr" typeface="Shruti"/>
+        <a:font script="Khmr" typeface="MoolBoran"/>
+        <a:font script="Knda" typeface="Tunga"/>
+        <a:font script="Guru" typeface="Raavi"/>
+        <a:font script="Cans" typeface="Euphemia"/>
+        <a:font script="Cher" typeface="Plantagenet Cherokee"/>
+        <a:font script="Yiii" typeface="Microsoft Yi Baiti"/>
+        <a:font script="Tibt" typeface="Microsoft Himalaya"/>
+        <a:font script="Thaa" typeface="MV Boli"/>
+        <a:font script="Deva" typeface="Mangal"/>
+        <a:font script="Telu" typeface="Gautami"/>
+        <a:font script="Taml" typeface="Latha"/>
+        <a:font script="Syrc" typeface="Estrangelo Edessa"/>
+        <a:font script="Orya" typeface="Kalinga"/>
+        <a:font script="Mlym" typeface="Kartika"/>
+        <a:font script="Laoo" typeface="DokChampa"/>
+        <a:font script="Sinh" typeface="Iskoola Pota"/>
+        <a:font script="Mong" typeface="Mongolian Baiti"/>
+        <a:font script="Viet" typeface="Times New Roman"/>
+        <a:font script="Uigh" typeface="Microsoft Uighur"/>
+        <a:font script="Geor" typeface="Sylfaen"/>
+      </a:majorFont>
+      <a:minorFont>
+        <a:latin typeface="Calibri"/>
+        <a:ea typeface=""/>
+        <a:cs typeface=""/>
+        <a:font script="Jpan" typeface="ＭＳ Ｐゴシック"/>
+        <a:font script="Hang" typeface="맑은 고딕"/>
+        <a:font script="Hans" typeface="宋体"/>
+        <a:font script="Hant" typeface="新細明體"/>
+        <a:font script="Arab" typeface="Arial"/>
+        <a:font script="Hebr" typeface="Arial"/>
+        <a:font script="Thai" typeface="Cordia New"/>
+        <a:font script="Ethi" typeface="Nyala"/>
+        <a:font script="Beng" typeface="Vrinda"/>
+        <a:font script="Gujr" typeface="Shruti"/>
+        <a:font script="Khmr" typeface="DaunPenh"/>
+        <a:font script="Knda" typeface="Tunga"/>
+        <a:font script="Guru" typeface="Raavi"/>
+        <a:font script="Cans" typeface="Euphemia"/>
+        <a:font script="Cher" typeface="Plantagenet Cherokee"/>
+        <a:font script="Yiii" typeface="Microsoft Yi Baiti"/>
+        <a:font script="Tibt" typeface="Microsoft Himalaya"/>
+        <a:font script="Thaa" typeface="MV Boli"/>
+        <a:font script="Deva" typeface="Mangal"/>
+        <a:font script="Telu" typeface="Gautami"/>
+        <a:font script="Taml" typeface="Latha"/>
+        <a:font script="Syrc" typeface="Estrangelo Edessa"/>
+        <a:font script="Orya" typeface="Kalinga"/>
+        <a:font script="Mlym" typeface="Kartika"/>
+        <a:font script="Laoo" typeface="DokChampa"/>
+        <a:font script="Sinh" typeface="Iskoola Pota"/>
+        <a:font script="Mong" typeface="Mongolian Baiti"/>
+        <a:font script="Viet" typeface="Arial"/>
+        <a:font script="Uigh" typeface="Microsoft Uighur"/>
+        <a:font script="Geor" typeface="Sylfaen"/>
+      </a:minorFont>
+    </a:fontScheme>
+    <a:fmtScheme name="Office">
+      <a:fillStyleLst>
+        <a:solidFill>
+          <a:schemeClr val="phClr"/>
+        </a:solidFill>
+        <a:gradFill rotWithShape="1">
+          <a:gsLst>
+            <a:gs pos="0">
+              <a:schemeClr val="phClr">
+                <a:tint val="50000"/>
+                <a:satMod val="300000"/>
+              </a:schemeClr>
+            </a:gs>
+            <a:gs pos="35000">
+              <a:schemeClr val="phClr">
+                <a:tint val="37000"/>
+                <a:satMod val="300000"/>
+              </a:schemeClr>
+            </a:gs>
+            <a:gs pos="100000">
+              <a:schemeClr val="phClr">
+                <a:tint val="15000"/>
+                <a:satMod val="350000"/>
+              </a:schemeClr>
+            </a:gs>
+          </a:gsLst>
+          <a:lin ang="16200000" scaled="1"/>
+        </a:gradFill>
+        <a:gradFill rotWithShape="1">
+          <a:gsLst>
+            <a:gs pos="0">
+              <a:schemeClr val="phClr">
+                <a:tint val="100000"/>
+                <a:shade val="100000"/>
+                <a:satMod val="130000"/>
+              </a:schemeClr>
+            </a:gs>
+            <a:gs pos="100000">
+              <a:schemeClr val="phClr">
+                <a:tint val="50000"/>
+                <a:shade val="100000"/>
+                <a:satMod val="350000"/>
+              </a:schemeClr>
+            </a:gs>
+          </a:gsLst>
+          <a:lin ang="16200000" scaled="0"/>
+        </a:gradFill>
+      </a:fillStyleLst>
+      <a:lnStyleLst>
+        <a:ln w="9525" cap="flat" cmpd="sng" algn="ctr">
+          <a:solidFill>
+            <a:schemeClr val="phClr">
+              <a:shade val="95000"/>
+              <a:satMod val="105000"/>
+            </a:schemeClr>
+          </a:solidFill>
+          <a:prstDash val="solid"/>
+        </a:ln>
+        <a:ln w="25400" cap="flat" cmpd="sng" algn="ctr">
+          <a:solidFill>
+            <a:schemeClr val="phClr"/>
+          </a:solidFill>
+          <a:prstDash val="solid"/>
+        </a:ln>
+        <a:ln w="38100" cap="flat" cmpd="sng" algn="ctr">
+          <a:solidFill>
+            <a:schemeClr val="phClr"/>
+          </a:solidFill>
+          <a:prstDash val="solid"/>
+        </a:ln>
+      </a:lnStyleLst>
+      <a:effectStyleLst>
+        <a:effectStyle>
+          <a:effectLst>
+            <a:outerShdw blurRad="40000" dist="20000" dir="5400000" rotWithShape="0">
+              <a:srgbClr val="000000">
+                <a:alpha val="38000"/>
+              </a:srgbClr>
+            </a:outerShdw>
+          </a:effectLst>
+        </a:effectStyle>
+        <a:effectStyle>
+          <a:effectLst>
+            <a:outerShdw blurRad="40000" dist="23000" dir="5400000" rotWithShape="0">
+              <a:srgbClr val="000000">
+                <a:alpha val="35000"/>
+              </a:srgbClr>
+            </a:outerShdw>
+          </a:effectLst>
+        </a:effectStyle>
+        <a:effectStyle>
+          <a:effectLst>
+            <a:outerShdw blurRad="40000" dist="23000" dir="5400000" rotWithShape="0">
+              <a:srgbClr val="000000">
+                <a:alpha val="35000"/>
+              </a:srgbClr>
+            </a:outerShdw>
+          </a:effectLst>
+          <a:scene3d>
+            <a:camera prst="orthographicFront">
+              <a:rot lat="0" lon="0" rev="0"/>
+            </a:camera>
+            <a:lightRig rig="threePt" dir="t">
+              <a:rot lat="0" lon="0" rev="1200000"/>
+            </a:lightRig>
+          </a:scene3d>
+          <a:sp3d>
+            <a:bevelT w="63500" h="25400"/>
+          </a:sp3d>
+        </a:effectStyle>
+      </a:effectStyleLst>
+      <a:bgFillStyleLst>
+        <a:solidFill>
+          <a:schemeClr val="phClr"/>
+        </a:solidFill>
+        <a:gradFill rotWithShape="1">
+          <a:gsLst>
+            <a:gs pos="0">
+              <a:schemeClr val="phClr">
+                <a:tint val="40000"/>
+                <a:satMod val="350000"/>
+              </a:schemeClr>
+            </a:gs>
+            <a:gs pos="40000">
+              <a:schemeClr val="phClr">
+                <a:tint val="45000"/>
+                <a:shade val="99000"/>
+                <a:satMod val="350000"/>
+              </a:schemeClr>
+            </a:gs>
+            <a:gs pos="100000">
+              <a:schemeClr val="phClr">
+                <a:shade val="20000"/>
+                <a:satMod val="255000"/>
+              </a:schemeClr>
+            </a:gs>
+          </a:gsLst>
+          <a:path path="circle">
+            <a:fillToRect l="50000" t="-80000" r="50000" b="180000"/>
+          </a:path>
+        </a:gradFill>
+        <a:gradFill rotWithShape="1">
+          <a:gsLst>
+            <a:gs pos="0">
+              <a:schemeClr val="phClr">
+                <a:tint val="80000"/>
+                <a:satMod val="300000"/>
+              </a:schemeClr>
+            </a:gs>
+            <a:gs pos="100000">
+              <a:schemeClr val="phClr">
+                <a:shade val="30000"/>
+                <a:satMod val="200000"/>
+              </a:schemeClr>
+            </a:gs>
+          </a:gsLst>
+          <a:path path="circle">
+            <a:fillToRect l="50000" t="50000" r="50000" b="50000"/>
+          </a:path>
+        </a:gradFill>
+      </a:bgFillStyleLst>
+    </a:fmtScheme>
+  </a:themeElements>
+  <a:objectDefaults>
+    <a:spDef>
+      <a:spPr/>
+      <a:bodyPr/>
+      <a:lstStyle/>
+      <a:style>
+        <a:lnRef idx="1">
+          <a:schemeClr val="accent1"/>
+        </a:lnRef>
+        <a:fillRef idx="3">
+          <a:schemeClr val="accent1"/>
+        </a:fillRef>
+        <a:effectRef idx="2">
+          <a:schemeClr val="accent1"/>
+        </a:effectRef>
+        <a:fontRef idx="minor">
+          <a:schemeClr val="lt1"/>
+        </a:fontRef>
+      </a:style>
+    </a:spDef>
+    <a:lnDef>
+      <a:spPr/>
+      <a:bodyPr/>
+      <a:lstStyle/>
+      <a:style>
+        <a:lnRef idx="2">
+          <a:schemeClr val="accent1"/>
+        </a:lnRef>
+        <a:fillRef idx="0">
+          <a:schemeClr val="accent1"/>
+        </a:fillRef>
+        <a:effectRef idx="1">
+          <a:schemeClr val="accent1"/>
+        </a:effectRef>
+        <a:fontRef idx="minor">
+          <a:schemeClr val="tx1"/>
+        </a:fontRef>
+      </a:style>
+    </a:lnDef>
+  </a:objectDefaults>
+  <a:extraClrSchemeLst/>
+</a:theme>
 </file>
--- a/protected-downloads/praesentation/M15.pptx
+++ b/protected-downloads/praesentation/M15.pptx
@@ -4590,7 +4590,7 @@
                 </a:solidFill>
                 <a:latin typeface="Arial"/>
               </a:rPr>
-              <a:t>Stratege</a:t>
+              <a:t>Strategischer Partner</a:t>
             </a:r>
           </a:p>
         </p:txBody>

--- a/protected-downloads/praesentation/M15.pptx
+++ b/protected-downloads/praesentation/M15.pptx
@@ -6858,25 +6858,6 @@
                 <a:latin typeface="Arial"/>
               </a:rPr>
               <a:t>Mein Wertversprechen (in einem Satz):</a:t>
-            </a:r>
-          </a:p>
-          <a:p>
-            <a:pPr>
-              <a:spcBef>
-                <a:spcPts val="400"/>
-              </a:spcBef>
-              <a:spcAft>
-                <a:spcPts val="200"/>
-              </a:spcAft>
-            </a:pPr>
-            <a:r>
-              <a:rPr sz="1200">
-                <a:solidFill>
-                  <a:srgbClr val="3D5466"/>
-                </a:solidFill>
-                <a:latin typeface="Arial"/>
-              </a:rPr>
-              <a:t># 5. PRAXISTRANSFER</a:t>
             </a:r>
           </a:p>
         </p:txBody>

--- a/protected-downloads/praesentation/M15.pptx
+++ b/protected-downloads/praesentation/M15.pptx
@@ -19,6 +19,7 @@
     <p:sldId id="267" r:id="rId19"/>
     <p:sldId id="268" r:id="rId20"/>
     <p:sldId id="269" r:id="rId21"/>
+    <p:sldId id="270" r:id="rId22"/>
   </p:sldIdLst>
   <p:sldSz cx="12188952" cy="6858000" type="screen4x3"/>
   <p:notesSz cx="6858000" cy="9144000"/>
@@ -5033,151 +5034,14 @@
                 </a:solidFill>
                 <a:latin typeface="Source Serif 4"/>
               </a:rPr>
-              <a:t>Wertversprechen formulieren</a:t>
-            </a:r>
-          </a:p>
-        </p:txBody>
-      </p:sp>
-      <p:sp>
-        <p:nvSpPr>
-          <p:cNvPr id="8" name="TextBox 7"/>
-          <p:cNvSpPr txBox="1"/>
-          <p:nvPr/>
-        </p:nvSpPr>
-        <p:spPr>
-          <a:xfrm>
-            <a:off x="685800" y="1417320"/>
-            <a:ext cx="10817352" cy="5029200"/>
-          </a:xfrm>
-          <a:prstGeom prst="rect">
-            <a:avLst/>
-          </a:prstGeom>
-          <a:noFill/>
-        </p:spPr>
-        <p:txBody>
-          <a:bodyPr wrap="square">
-            <a:spAutoFit/>
-          </a:bodyPr>
-          <a:lstStyle/>
-          <a:p>
-            <a:pPr>
-              <a:spcBef>
-                <a:spcPts val="400"/>
-              </a:spcBef>
-              <a:spcAft>
-                <a:spcPts val="200"/>
-              </a:spcAft>
-            </a:pPr>
-            <a:r>
-              <a:rPr sz="1200">
-                <a:solidFill>
-                  <a:srgbClr val="3D5466"/>
-                </a:solidFill>
-                <a:latin typeface="Arial"/>
-              </a:rPr>
-              <a:t>Das Wertversprechen (Value Proposition) beantwortet: Warum sollte ein Unternehmen aus meinem Zielsegment zu uns wechseln – oder bleiben?</a:t>
-            </a:r>
-          </a:p>
-          <a:p>
-            <a:pPr>
-              <a:spcBef>
-                <a:spcPts val="400"/>
-              </a:spcBef>
-              <a:spcAft>
-                <a:spcPts val="200"/>
-              </a:spcAft>
-            </a:pPr>
-            <a:r>
-              <a:rPr sz="1200">
-                <a:solidFill>
-                  <a:srgbClr val="3D5466"/>
-                </a:solidFill>
-                <a:latin typeface="Arial"/>
-              </a:rPr>
-              <a:t>Ein wirksames Wertversprechen im Firmenkundengeschäft ist:</a:t>
-            </a:r>
-          </a:p>
-          <a:p>
-            <a:pPr>
-              <a:spcBef>
-                <a:spcPts val="400"/>
-              </a:spcBef>
-              <a:spcAft>
-                <a:spcPts val="200"/>
-              </a:spcAft>
-            </a:pPr>
-            <a:r>
-              <a:rPr sz="1300">
-                <a:solidFill>
-                  <a:srgbClr val="3D5466"/>
-                </a:solidFill>
-                <a:latin typeface="Arial"/>
-              </a:rPr>
-              <a:t>▸  Spezifisch (nicht „wir sind die beste Bank"): „Für Handwerksbetriebe in der Region sind wir der Partner, der Finanzierungsentscheidungen in 48 Stunden trifft."</a:t>
-            </a:r>
-          </a:p>
-          <a:p>
-            <a:pPr>
-              <a:spcBef>
-                <a:spcPts val="400"/>
-              </a:spcBef>
-              <a:spcAft>
-                <a:spcPts val="200"/>
-              </a:spcAft>
-            </a:pPr>
-            <a:r>
-              <a:rPr sz="1300">
-                <a:solidFill>
-                  <a:srgbClr val="3D5466"/>
-                </a:solidFill>
-                <a:latin typeface="Arial"/>
-              </a:rPr>
-              <a:t>▸  Belegbar: Konkrete Referenzen, Bearbeitungszeiten, Verbundpartner-Einbindung</a:t>
-            </a:r>
-          </a:p>
-          <a:p>
-            <a:pPr>
-              <a:spcBef>
-                <a:spcPts val="400"/>
-              </a:spcBef>
-              <a:spcAft>
-                <a:spcPts val="200"/>
-              </a:spcAft>
-            </a:pPr>
-            <a:r>
-              <a:rPr sz="1300">
-                <a:solidFill>
-                  <a:srgbClr val="3D5466"/>
-                </a:solidFill>
-                <a:latin typeface="Arial"/>
-              </a:rPr>
-              <a:t>▸  Differenzierend: Was kann ich, was die Sparkasse oder Commerzbank nicht kann?</a:t>
-            </a:r>
-          </a:p>
-          <a:p>
-            <a:pPr>
-              <a:spcBef>
-                <a:spcPts val="400"/>
-              </a:spcBef>
-              <a:spcAft>
-                <a:spcPts val="200"/>
-              </a:spcAft>
-            </a:pPr>
-            <a:r>
-              <a:rPr sz="1200">
-                <a:solidFill>
-                  <a:srgbClr val="3D5466"/>
-                </a:solidFill>
-                <a:latin typeface="Arial"/>
-              </a:rPr>
-              <a:t>## 4.5 Neukundenansprache: Kanäle und Maßnahmen</a:t>
-            </a:r>
-          </a:p>
-        </p:txBody>
-      </p:sp>
-      <p:sp>
-        <p:nvSpPr>
-          <p:cNvPr id="9" name="Rectangle 8"/>
+              <a:t>SWOT im Firmenkundensegment</a:t>
+            </a:r>
+          </a:p>
+        </p:txBody>
+      </p:sp>
+      <p:sp>
+        <p:nvSpPr>
+          <p:cNvPr id="8" name="Rectangle 7"/>
           <p:cNvSpPr/>
           <p:nvPr/>
         </p:nvSpPr>
@@ -5220,7 +5084,7 @@
       </p:sp>
       <p:sp>
         <p:nvSpPr>
-          <p:cNvPr id="10" name="TextBox 9"/>
+          <p:cNvPr id="9" name="TextBox 8"/>
           <p:cNvSpPr txBox="1"/>
           <p:nvPr/>
         </p:nvSpPr>
@@ -5508,14 +5372,151 @@
                 </a:solidFill>
                 <a:latin typeface="Source Serif 4"/>
               </a:rPr>
-              <a:t>Welche Kanäle funktionieren wirklich?</a:t>
-            </a:r>
-          </a:p>
-        </p:txBody>
-      </p:sp>
-      <p:sp>
-        <p:nvSpPr>
-          <p:cNvPr id="8" name="Rectangle 7"/>
+              <a:t>Wertversprechen formulieren</a:t>
+            </a:r>
+          </a:p>
+        </p:txBody>
+      </p:sp>
+      <p:sp>
+        <p:nvSpPr>
+          <p:cNvPr id="8" name="TextBox 7"/>
+          <p:cNvSpPr txBox="1"/>
+          <p:nvPr/>
+        </p:nvSpPr>
+        <p:spPr>
+          <a:xfrm>
+            <a:off x="685800" y="1417320"/>
+            <a:ext cx="10817352" cy="5029200"/>
+          </a:xfrm>
+          <a:prstGeom prst="rect">
+            <a:avLst/>
+          </a:prstGeom>
+          <a:noFill/>
+        </p:spPr>
+        <p:txBody>
+          <a:bodyPr wrap="square">
+            <a:spAutoFit/>
+          </a:bodyPr>
+          <a:lstStyle/>
+          <a:p>
+            <a:pPr>
+              <a:spcBef>
+                <a:spcPts val="400"/>
+              </a:spcBef>
+              <a:spcAft>
+                <a:spcPts val="200"/>
+              </a:spcAft>
+            </a:pPr>
+            <a:r>
+              <a:rPr sz="1200">
+                <a:solidFill>
+                  <a:srgbClr val="3D5466"/>
+                </a:solidFill>
+                <a:latin typeface="Arial"/>
+              </a:rPr>
+              <a:t>Das Wertversprechen (Value Proposition) beantwortet: Warum sollte ein Unternehmen aus meinem Zielsegment zu uns wechseln – oder bleiben?</a:t>
+            </a:r>
+          </a:p>
+          <a:p>
+            <a:pPr>
+              <a:spcBef>
+                <a:spcPts val="400"/>
+              </a:spcBef>
+              <a:spcAft>
+                <a:spcPts val="200"/>
+              </a:spcAft>
+            </a:pPr>
+            <a:r>
+              <a:rPr sz="1200">
+                <a:solidFill>
+                  <a:srgbClr val="3D5466"/>
+                </a:solidFill>
+                <a:latin typeface="Arial"/>
+              </a:rPr>
+              <a:t>Ein wirksames Wertversprechen im Firmenkundengeschäft ist:</a:t>
+            </a:r>
+          </a:p>
+          <a:p>
+            <a:pPr>
+              <a:spcBef>
+                <a:spcPts val="400"/>
+              </a:spcBef>
+              <a:spcAft>
+                <a:spcPts val="200"/>
+              </a:spcAft>
+            </a:pPr>
+            <a:r>
+              <a:rPr sz="1300">
+                <a:solidFill>
+                  <a:srgbClr val="3D5466"/>
+                </a:solidFill>
+                <a:latin typeface="Arial"/>
+              </a:rPr>
+              <a:t>▸  Spezifisch (nicht „wir sind die beste Bank"): „Für Handwerksbetriebe in der Region sind wir der Partner, der Finanzierungsentscheidungen in 48 Stunden trifft."</a:t>
+            </a:r>
+          </a:p>
+          <a:p>
+            <a:pPr>
+              <a:spcBef>
+                <a:spcPts val="400"/>
+              </a:spcBef>
+              <a:spcAft>
+                <a:spcPts val="200"/>
+              </a:spcAft>
+            </a:pPr>
+            <a:r>
+              <a:rPr sz="1300">
+                <a:solidFill>
+                  <a:srgbClr val="3D5466"/>
+                </a:solidFill>
+                <a:latin typeface="Arial"/>
+              </a:rPr>
+              <a:t>▸  Belegbar: Konkrete Referenzen, Bearbeitungszeiten, Verbundpartner-Einbindung</a:t>
+            </a:r>
+          </a:p>
+          <a:p>
+            <a:pPr>
+              <a:spcBef>
+                <a:spcPts val="400"/>
+              </a:spcBef>
+              <a:spcAft>
+                <a:spcPts val="200"/>
+              </a:spcAft>
+            </a:pPr>
+            <a:r>
+              <a:rPr sz="1300">
+                <a:solidFill>
+                  <a:srgbClr val="3D5466"/>
+                </a:solidFill>
+                <a:latin typeface="Arial"/>
+              </a:rPr>
+              <a:t>▸  Differenzierend: Was kann ich, was die Sparkasse oder Commerzbank nicht kann?</a:t>
+            </a:r>
+          </a:p>
+          <a:p>
+            <a:pPr>
+              <a:spcBef>
+                <a:spcPts val="400"/>
+              </a:spcBef>
+              <a:spcAft>
+                <a:spcPts val="200"/>
+              </a:spcAft>
+            </a:pPr>
+            <a:r>
+              <a:rPr sz="1200">
+                <a:solidFill>
+                  <a:srgbClr val="3D5466"/>
+                </a:solidFill>
+                <a:latin typeface="Arial"/>
+              </a:rPr>
+              <a:t>## 4.5 Neukundenansprache: Kanäle und Maßnahmen</a:t>
+            </a:r>
+          </a:p>
+        </p:txBody>
+      </p:sp>
+      <p:sp>
+        <p:nvSpPr>
+          <p:cNvPr id="9" name="Rectangle 8"/>
           <p:cNvSpPr/>
           <p:nvPr/>
         </p:nvSpPr>
@@ -5558,7 +5559,7 @@
       </p:sp>
       <p:sp>
         <p:nvSpPr>
-          <p:cNvPr id="9" name="TextBox 8"/>
+          <p:cNvPr id="10" name="TextBox 9"/>
           <p:cNvSpPr txBox="1"/>
           <p:nvPr/>
         </p:nvSpPr>
@@ -5846,265 +5847,14 @@
                 </a:solidFill>
                 <a:latin typeface="Source Serif 4"/>
               </a:rPr>
-              <a:t>Empfehlungsmanagement systematisieren</a:t>
-            </a:r>
-          </a:p>
-        </p:txBody>
-      </p:sp>
-      <p:sp>
-        <p:nvSpPr>
-          <p:cNvPr id="8" name="TextBox 7"/>
-          <p:cNvSpPr txBox="1"/>
-          <p:nvPr/>
-        </p:nvSpPr>
-        <p:spPr>
-          <a:xfrm>
-            <a:off x="685800" y="1417320"/>
-            <a:ext cx="10817352" cy="5029200"/>
-          </a:xfrm>
-          <a:prstGeom prst="rect">
-            <a:avLst/>
-          </a:prstGeom>
-          <a:noFill/>
-        </p:spPr>
-        <p:txBody>
-          <a:bodyPr wrap="square">
-            <a:spAutoFit/>
-          </a:bodyPr>
-          <a:lstStyle/>
-          <a:p>
-            <a:pPr>
-              <a:spcBef>
-                <a:spcPts val="400"/>
-              </a:spcBef>
-              <a:spcAft>
-                <a:spcPts val="200"/>
-              </a:spcAft>
-            </a:pPr>
-            <a:r>
-              <a:rPr sz="1200">
-                <a:solidFill>
-                  <a:srgbClr val="3D5466"/>
-                </a:solidFill>
-                <a:latin typeface="Arial"/>
-              </a:rPr>
-              <a:t>Empfehlungen entstehen nicht zufällig. Ein aktives Empfehlungsmanagement umfasst:</a:t>
-            </a:r>
-          </a:p>
-          <a:p>
-            <a:pPr>
-              <a:spcBef>
-                <a:spcPts val="400"/>
-              </a:spcBef>
-              <a:spcAft>
-                <a:spcPts val="200"/>
-              </a:spcAft>
-            </a:pPr>
-            <a:r>
-              <a:rPr sz="1300">
-                <a:solidFill>
-                  <a:srgbClr val="3D5466"/>
-                </a:solidFill>
-                <a:latin typeface="Arial"/>
-              </a:rPr>
-              <a:t>▸  Identifizieren: Welche meiner Bestandskunden sind Meinungsführer in ihrem Branchenumfeld?</a:t>
-            </a:r>
-          </a:p>
-          <a:p>
-            <a:pPr>
-              <a:spcBef>
-                <a:spcPts val="400"/>
-              </a:spcBef>
-              <a:spcAft>
-                <a:spcPts val="200"/>
-              </a:spcAft>
-            </a:pPr>
-            <a:r>
-              <a:rPr sz="1300">
-                <a:solidFill>
-                  <a:srgbClr val="3D5466"/>
-                </a:solidFill>
-                <a:latin typeface="Arial"/>
-              </a:rPr>
-              <a:t>▸  Beziehung vertiefen: Diese Kunden erhalten besondere Aufmerksamkeit – nicht wegen der Empfehlung, sondern wegen ihres Werts.</a:t>
-            </a:r>
-          </a:p>
-          <a:p>
-            <a:pPr>
-              <a:spcBef>
-                <a:spcPts val="400"/>
-              </a:spcBef>
-              <a:spcAft>
-                <a:spcPts val="200"/>
-              </a:spcAft>
-            </a:pPr>
-            <a:r>
-              <a:rPr sz="1300">
-                <a:solidFill>
-                  <a:srgbClr val="3D5466"/>
-                </a:solidFill>
-                <a:latin typeface="Arial"/>
-              </a:rPr>
-              <a:t>▸  Aktiv bitten: Am Ende eines erfolgreichen Gesprächs: „Gibt es Unternehmen in Ihrem Umfeld, die unsere Zusammenarbeit kennenlernen sollten?"</a:t>
-            </a:r>
-          </a:p>
-          <a:p>
-            <a:pPr>
-              <a:spcBef>
-                <a:spcPts val="400"/>
-              </a:spcBef>
-              <a:spcAft>
-                <a:spcPts val="200"/>
-              </a:spcAft>
-            </a:pPr>
-            <a:r>
-              <a:rPr sz="1300">
-                <a:solidFill>
-                  <a:srgbClr val="3D5466"/>
-                </a:solidFill>
-                <a:latin typeface="Arial"/>
-              </a:rPr>
-              <a:t>▸  Danken und schließen: Rückmeldung geben, ob der Kontakt erfolgreich war.</a:t>
-            </a:r>
-          </a:p>
-          <a:p>
-            <a:pPr>
-              <a:spcBef>
-                <a:spcPts val="400"/>
-              </a:spcBef>
-              <a:spcAft>
-                <a:spcPts val="200"/>
-              </a:spcAft>
-            </a:pPr>
-            <a:r>
-              <a:rPr sz="1200">
-                <a:solidFill>
-                  <a:srgbClr val="3D5466"/>
-                </a:solidFill>
-                <a:latin typeface="Arial"/>
-              </a:rPr>
-              <a:t>## 4.6 Praxiscase: Thomas Gruber entwickelt seine Strategie für den Agrar-Markt</a:t>
-            </a:r>
-          </a:p>
-          <a:p>
-            <a:pPr>
-              <a:spcBef>
-                <a:spcPts val="400"/>
-              </a:spcBef>
-              <a:spcAft>
-                <a:spcPts val="200"/>
-              </a:spcAft>
-            </a:pPr>
-            <a:r>
-              <a:rPr sz="1200">
-                <a:solidFill>
-                  <a:srgbClr val="3D5466"/>
-                </a:solidFill>
-                <a:latin typeface="Arial"/>
-              </a:rPr>
-              <a:t>Ausgangssituation</a:t>
-            </a:r>
-          </a:p>
-          <a:p>
-            <a:pPr>
-              <a:spcBef>
-                <a:spcPts val="400"/>
-              </a:spcBef>
-              <a:spcAft>
-                <a:spcPts val="200"/>
-              </a:spcAft>
-            </a:pPr>
-            <a:r>
-              <a:rPr sz="1200">
-                <a:solidFill>
-                  <a:srgbClr val="3D5466"/>
-                </a:solidFill>
-                <a:latin typeface="Arial"/>
-              </a:rPr>
-              <a:t>Thomas entwickelt seine Marktbearbeitungsstrategie</a:t>
-            </a:r>
-          </a:p>
-          <a:p>
-            <a:pPr>
-              <a:spcBef>
-                <a:spcPts val="400"/>
-              </a:spcBef>
-              <a:spcAft>
-                <a:spcPts val="200"/>
-              </a:spcAft>
-            </a:pPr>
-            <a:r>
-              <a:rPr sz="1200">
-                <a:solidFill>
-                  <a:srgbClr val="3D5466"/>
-                </a:solidFill>
-                <a:latin typeface="Arial"/>
-              </a:rPr>
-              <a:t>Schritt 1: Segmentpriorisierung</a:t>
-            </a:r>
-          </a:p>
-          <a:p>
-            <a:pPr>
-              <a:spcBef>
-                <a:spcPts val="400"/>
-              </a:spcBef>
-              <a:spcAft>
-                <a:spcPts val="200"/>
-              </a:spcAft>
-            </a:pPr>
-            <a:r>
-              <a:rPr sz="1200">
-                <a:solidFill>
-                  <a:srgbClr val="3D5466"/>
-                </a:solidFill>
-                <a:latin typeface="Arial"/>
-              </a:rPr>
-              <a:t>Schritt 2: Marktpotenzial</a:t>
-            </a:r>
-          </a:p>
-          <a:p>
-            <a:pPr>
-              <a:spcBef>
-                <a:spcPts val="400"/>
-              </a:spcBef>
-              <a:spcAft>
-                <a:spcPts val="200"/>
-              </a:spcAft>
-            </a:pPr>
-            <a:r>
-              <a:rPr sz="1200">
-                <a:solidFill>
-                  <a:srgbClr val="3D5466"/>
-                </a:solidFill>
-                <a:latin typeface="Arial"/>
-              </a:rPr>
-              <a:t>Schritt 3: Wertversprechen</a:t>
-            </a:r>
-          </a:p>
-          <a:p>
-            <a:pPr>
-              <a:spcBef>
-                <a:spcPts val="400"/>
-              </a:spcBef>
-              <a:spcAft>
-                <a:spcPts val="200"/>
-              </a:spcAft>
-            </a:pPr>
-            <a:r>
-              <a:rPr sz="1200">
-                <a:solidFill>
-                  <a:srgbClr val="3D5466"/>
-                </a:solidFill>
-                <a:latin typeface="Arial"/>
-              </a:rPr>
-              <a:t>„Für landwirtschaftliche Betriebe in [Region] sind wir der Agrar-Spezialist der VR-Bank: schnelle Investitionsfinanzierungen, GAP-Expertise und ein Netzwerk in die wichtigsten Branchenverbände."</a:t>
-            </a:r>
-          </a:p>
-        </p:txBody>
-      </p:sp>
-      <p:sp>
-        <p:nvSpPr>
-          <p:cNvPr id="9" name="Rectangle 8"/>
+              <a:t>Welche Kanäle funktionieren wirklich?</a:t>
+            </a:r>
+          </a:p>
+        </p:txBody>
+      </p:sp>
+      <p:sp>
+        <p:nvSpPr>
+          <p:cNvPr id="8" name="Rectangle 7"/>
           <p:cNvSpPr/>
           <p:nvPr/>
         </p:nvSpPr>
@@ -6147,7 +5897,7 @@
       </p:sp>
       <p:sp>
         <p:nvSpPr>
-          <p:cNvPr id="10" name="TextBox 9"/>
+          <p:cNvPr id="9" name="TextBox 8"/>
           <p:cNvSpPr txBox="1"/>
           <p:nvPr/>
         </p:nvSpPr>
@@ -6435,7 +6185,7 @@
                 </a:solidFill>
                 <a:latin typeface="Source Serif 4"/>
               </a:rPr>
-              <a:t>Arbeitsblatt A: Segmentpriorisierung – Scoring</a:t>
+              <a:t>Empfehlungsmanagement systematisieren</a:t>
             </a:r>
           </a:p>
         </p:txBody>
@@ -6477,7 +6227,216 @@
                 </a:solidFill>
                 <a:latin typeface="Arial"/>
               </a:rPr>
-              <a:t>Meine drei Kandidatensegmente:</a:t>
+              <a:t>Empfehlungen entstehen nicht zufällig. Ein aktives Empfehlungsmanagement umfasst:</a:t>
+            </a:r>
+          </a:p>
+          <a:p>
+            <a:pPr>
+              <a:spcBef>
+                <a:spcPts val="400"/>
+              </a:spcBef>
+              <a:spcAft>
+                <a:spcPts val="200"/>
+              </a:spcAft>
+            </a:pPr>
+            <a:r>
+              <a:rPr sz="1300">
+                <a:solidFill>
+                  <a:srgbClr val="3D5466"/>
+                </a:solidFill>
+                <a:latin typeface="Arial"/>
+              </a:rPr>
+              <a:t>▸  Identifizieren: Welche meiner Bestandskunden sind Meinungsführer in ihrem Branchenumfeld?</a:t>
+            </a:r>
+          </a:p>
+          <a:p>
+            <a:pPr>
+              <a:spcBef>
+                <a:spcPts val="400"/>
+              </a:spcBef>
+              <a:spcAft>
+                <a:spcPts val="200"/>
+              </a:spcAft>
+            </a:pPr>
+            <a:r>
+              <a:rPr sz="1300">
+                <a:solidFill>
+                  <a:srgbClr val="3D5466"/>
+                </a:solidFill>
+                <a:latin typeface="Arial"/>
+              </a:rPr>
+              <a:t>▸  Beziehung vertiefen: Diese Kunden erhalten besondere Aufmerksamkeit – nicht wegen der Empfehlung, sondern wegen ihres Werts.</a:t>
+            </a:r>
+          </a:p>
+          <a:p>
+            <a:pPr>
+              <a:spcBef>
+                <a:spcPts val="400"/>
+              </a:spcBef>
+              <a:spcAft>
+                <a:spcPts val="200"/>
+              </a:spcAft>
+            </a:pPr>
+            <a:r>
+              <a:rPr sz="1300">
+                <a:solidFill>
+                  <a:srgbClr val="3D5466"/>
+                </a:solidFill>
+                <a:latin typeface="Arial"/>
+              </a:rPr>
+              <a:t>▸  Aktiv bitten: Am Ende eines erfolgreichen Gesprächs: „Gibt es Unternehmen in Ihrem Umfeld, die unsere Zusammenarbeit kennenlernen sollten?"</a:t>
+            </a:r>
+          </a:p>
+          <a:p>
+            <a:pPr>
+              <a:spcBef>
+                <a:spcPts val="400"/>
+              </a:spcBef>
+              <a:spcAft>
+                <a:spcPts val="200"/>
+              </a:spcAft>
+            </a:pPr>
+            <a:r>
+              <a:rPr sz="1300">
+                <a:solidFill>
+                  <a:srgbClr val="3D5466"/>
+                </a:solidFill>
+                <a:latin typeface="Arial"/>
+              </a:rPr>
+              <a:t>▸  Danken und schließen: Rückmeldung geben, ob der Kontakt erfolgreich war.</a:t>
+            </a:r>
+          </a:p>
+          <a:p>
+            <a:pPr>
+              <a:spcBef>
+                <a:spcPts val="400"/>
+              </a:spcBef>
+              <a:spcAft>
+                <a:spcPts val="200"/>
+              </a:spcAft>
+            </a:pPr>
+            <a:r>
+              <a:rPr sz="1200">
+                <a:solidFill>
+                  <a:srgbClr val="3D5466"/>
+                </a:solidFill>
+                <a:latin typeface="Arial"/>
+              </a:rPr>
+              <a:t>## 4.6 Praxiscase: Thomas Gruber entwickelt seine Strategie für den Agrar-Markt</a:t>
+            </a:r>
+          </a:p>
+          <a:p>
+            <a:pPr>
+              <a:spcBef>
+                <a:spcPts val="400"/>
+              </a:spcBef>
+              <a:spcAft>
+                <a:spcPts val="200"/>
+              </a:spcAft>
+            </a:pPr>
+            <a:r>
+              <a:rPr sz="1200">
+                <a:solidFill>
+                  <a:srgbClr val="3D5466"/>
+                </a:solidFill>
+                <a:latin typeface="Arial"/>
+              </a:rPr>
+              <a:t>Ausgangssituation</a:t>
+            </a:r>
+          </a:p>
+          <a:p>
+            <a:pPr>
+              <a:spcBef>
+                <a:spcPts val="400"/>
+              </a:spcBef>
+              <a:spcAft>
+                <a:spcPts val="200"/>
+              </a:spcAft>
+            </a:pPr>
+            <a:r>
+              <a:rPr sz="1200">
+                <a:solidFill>
+                  <a:srgbClr val="3D5466"/>
+                </a:solidFill>
+                <a:latin typeface="Arial"/>
+              </a:rPr>
+              <a:t>Thomas entwickelt seine Marktbearbeitungsstrategie</a:t>
+            </a:r>
+          </a:p>
+          <a:p>
+            <a:pPr>
+              <a:spcBef>
+                <a:spcPts val="400"/>
+              </a:spcBef>
+              <a:spcAft>
+                <a:spcPts val="200"/>
+              </a:spcAft>
+            </a:pPr>
+            <a:r>
+              <a:rPr sz="1200">
+                <a:solidFill>
+                  <a:srgbClr val="3D5466"/>
+                </a:solidFill>
+                <a:latin typeface="Arial"/>
+              </a:rPr>
+              <a:t>Schritt 1: Segmentpriorisierung</a:t>
+            </a:r>
+          </a:p>
+          <a:p>
+            <a:pPr>
+              <a:spcBef>
+                <a:spcPts val="400"/>
+              </a:spcBef>
+              <a:spcAft>
+                <a:spcPts val="200"/>
+              </a:spcAft>
+            </a:pPr>
+            <a:r>
+              <a:rPr sz="1200">
+                <a:solidFill>
+                  <a:srgbClr val="3D5466"/>
+                </a:solidFill>
+                <a:latin typeface="Arial"/>
+              </a:rPr>
+              <a:t>Schritt 2: Marktpotenzial</a:t>
+            </a:r>
+          </a:p>
+          <a:p>
+            <a:pPr>
+              <a:spcBef>
+                <a:spcPts val="400"/>
+              </a:spcBef>
+              <a:spcAft>
+                <a:spcPts val="200"/>
+              </a:spcAft>
+            </a:pPr>
+            <a:r>
+              <a:rPr sz="1200">
+                <a:solidFill>
+                  <a:srgbClr val="3D5466"/>
+                </a:solidFill>
+                <a:latin typeface="Arial"/>
+              </a:rPr>
+              <a:t>Schritt 3: Wertversprechen</a:t>
+            </a:r>
+          </a:p>
+          <a:p>
+            <a:pPr>
+              <a:spcBef>
+                <a:spcPts val="400"/>
+              </a:spcBef>
+              <a:spcAft>
+                <a:spcPts val="200"/>
+              </a:spcAft>
+            </a:pPr>
+            <a:r>
+              <a:rPr sz="1200">
+                <a:solidFill>
+                  <a:srgbClr val="3D5466"/>
+                </a:solidFill>
+                <a:latin typeface="Arial"/>
+              </a:rPr>
+              <a:t>„Für landwirtschaftliche Betriebe in [Region] sind wir der Agrar-Spezialist der VR-Bank: schnelle Investitionsfinanzierungen, GAP-Expertise und ein Netzwerk in die wichtigsten Branchenverbände."</a:t>
             </a:r>
           </a:p>
         </p:txBody>
@@ -6815,6 +6774,386 @@
                 </a:solidFill>
                 <a:latin typeface="Source Serif 4"/>
               </a:rPr>
+              <a:t>Arbeitsblatt A: Segmentpriorisierung – Scoring</a:t>
+            </a:r>
+          </a:p>
+        </p:txBody>
+      </p:sp>
+      <p:sp>
+        <p:nvSpPr>
+          <p:cNvPr id="8" name="TextBox 7"/>
+          <p:cNvSpPr txBox="1"/>
+          <p:nvPr/>
+        </p:nvSpPr>
+        <p:spPr>
+          <a:xfrm>
+            <a:off x="685800" y="1417320"/>
+            <a:ext cx="10817352" cy="5029200"/>
+          </a:xfrm>
+          <a:prstGeom prst="rect">
+            <a:avLst/>
+          </a:prstGeom>
+          <a:noFill/>
+        </p:spPr>
+        <p:txBody>
+          <a:bodyPr wrap="square">
+            <a:spAutoFit/>
+          </a:bodyPr>
+          <a:lstStyle/>
+          <a:p>
+            <a:pPr>
+              <a:spcBef>
+                <a:spcPts val="400"/>
+              </a:spcBef>
+              <a:spcAft>
+                <a:spcPts val="200"/>
+              </a:spcAft>
+            </a:pPr>
+            <a:r>
+              <a:rPr sz="1200">
+                <a:solidFill>
+                  <a:srgbClr val="3D5466"/>
+                </a:solidFill>
+                <a:latin typeface="Arial"/>
+              </a:rPr>
+              <a:t>Meine drei Kandidatensegmente:</a:t>
+            </a:r>
+          </a:p>
+        </p:txBody>
+      </p:sp>
+      <p:sp>
+        <p:nvSpPr>
+          <p:cNvPr id="9" name="Rectangle 8"/>
+          <p:cNvSpPr/>
+          <p:nvPr/>
+        </p:nvSpPr>
+        <p:spPr>
+          <a:xfrm>
+            <a:off x="0" y="6510528"/>
+            <a:ext cx="12188952" cy="347472"/>
+          </a:xfrm>
+          <a:prstGeom prst="rect">
+            <a:avLst/>
+          </a:prstGeom>
+          <a:solidFill>
+            <a:srgbClr val="0A1937"/>
+          </a:solidFill>
+          <a:ln>
+            <a:noFill/>
+          </a:ln>
+        </p:spPr>
+        <p:style>
+          <a:lnRef idx="1">
+            <a:schemeClr val="accent1"/>
+          </a:lnRef>
+          <a:fillRef idx="3">
+            <a:schemeClr val="accent1"/>
+          </a:fillRef>
+          <a:effectRef idx="2">
+            <a:schemeClr val="accent1"/>
+          </a:effectRef>
+          <a:fontRef idx="minor">
+            <a:schemeClr val="lt1"/>
+          </a:fontRef>
+        </p:style>
+        <p:txBody>
+          <a:bodyPr rtlCol="0" anchor="ctr"/>
+          <a:lstStyle/>
+          <a:p>
+            <a:pPr algn="ctr"/>
+          </a:p>
+        </p:txBody>
+      </p:sp>
+      <p:sp>
+        <p:nvSpPr>
+          <p:cNvPr id="10" name="TextBox 9"/>
+          <p:cNvSpPr txBox="1"/>
+          <p:nvPr/>
+        </p:nvSpPr>
+        <p:spPr>
+          <a:xfrm>
+            <a:off x="685800" y="6583680"/>
+            <a:ext cx="6490411" cy="256032"/>
+          </a:xfrm>
+          <a:prstGeom prst="rect">
+            <a:avLst/>
+          </a:prstGeom>
+          <a:noFill/>
+        </p:spPr>
+        <p:txBody>
+          <a:bodyPr wrap="none">
+            <a:spAutoFit/>
+          </a:bodyPr>
+          <a:lstStyle/>
+          <a:p>
+            <a:pPr algn="l"/>
+            <a:r>
+              <a:rPr sz="700">
+                <a:solidFill>
+                  <a:srgbClr val="A0B4D2"/>
+                </a:solidFill>
+                <a:latin typeface="JetBrains Mono"/>
+              </a:rPr>
+              <a:t>Benedikt Zoller Coaching  ·  FKB Campus  ·  M15</a:t>
+            </a:r>
+          </a:p>
+        </p:txBody>
+      </p:sp>
+    </p:spTree>
+  </p:cSld>
+  <p:clrMapOvr>
+    <a:masterClrMapping/>
+  </p:clrMapOvr>
+</p:sld>
+</file>
+
+<file path=ppt/slides/slide15.xml><?xml version="1.0" encoding="utf-8"?>
+<p:sld xmlns:a="http://schemas.openxmlformats.org/drawingml/2006/main" xmlns:p="http://schemas.openxmlformats.org/presentationml/2006/main" xmlns:r="http://schemas.openxmlformats.org/officeDocument/2006/relationships">
+  <p:cSld>
+    <p:spTree>
+      <p:nvGrpSpPr>
+        <p:cNvPr id="1" name=""/>
+        <p:cNvGrpSpPr/>
+        <p:nvPr/>
+      </p:nvGrpSpPr>
+      <p:grpSpPr/>
+      <p:sp>
+        <p:nvSpPr>
+          <p:cNvPr id="2" name="Rectangle 1"/>
+          <p:cNvSpPr/>
+          <p:nvPr/>
+        </p:nvSpPr>
+        <p:spPr>
+          <a:xfrm>
+            <a:off x="0" y="0"/>
+            <a:ext cx="12188952" cy="6858000"/>
+          </a:xfrm>
+          <a:prstGeom prst="rect">
+            <a:avLst/>
+          </a:prstGeom>
+          <a:solidFill>
+            <a:srgbClr val="EDEDF3"/>
+          </a:solidFill>
+          <a:ln>
+            <a:noFill/>
+          </a:ln>
+        </p:spPr>
+        <p:style>
+          <a:lnRef idx="1">
+            <a:schemeClr val="accent1"/>
+          </a:lnRef>
+          <a:fillRef idx="3">
+            <a:schemeClr val="accent1"/>
+          </a:fillRef>
+          <a:effectRef idx="2">
+            <a:schemeClr val="accent1"/>
+          </a:effectRef>
+          <a:fontRef idx="minor">
+            <a:schemeClr val="lt1"/>
+          </a:fontRef>
+        </p:style>
+        <p:txBody>
+          <a:bodyPr rtlCol="0" anchor="ctr"/>
+          <a:lstStyle/>
+          <a:p>
+            <a:pPr algn="ctr"/>
+          </a:p>
+        </p:txBody>
+      </p:sp>
+      <p:sp>
+        <p:nvSpPr>
+          <p:cNvPr id="3" name="Rectangle 2"/>
+          <p:cNvSpPr/>
+          <p:nvPr/>
+        </p:nvSpPr>
+        <p:spPr>
+          <a:xfrm>
+            <a:off x="0" y="0"/>
+            <a:ext cx="12188952" cy="50292"/>
+          </a:xfrm>
+          <a:prstGeom prst="rect">
+            <a:avLst/>
+          </a:prstGeom>
+          <a:solidFill>
+            <a:srgbClr val="1F2C56"/>
+          </a:solidFill>
+          <a:ln>
+            <a:noFill/>
+          </a:ln>
+        </p:spPr>
+        <p:style>
+          <a:lnRef idx="1">
+            <a:schemeClr val="accent1"/>
+          </a:lnRef>
+          <a:fillRef idx="3">
+            <a:schemeClr val="accent1"/>
+          </a:fillRef>
+          <a:effectRef idx="2">
+            <a:schemeClr val="accent1"/>
+          </a:effectRef>
+          <a:fontRef idx="minor">
+            <a:schemeClr val="lt1"/>
+          </a:fontRef>
+        </p:style>
+        <p:txBody>
+          <a:bodyPr rtlCol="0" anchor="ctr"/>
+          <a:lstStyle/>
+          <a:p>
+            <a:pPr algn="ctr"/>
+          </a:p>
+        </p:txBody>
+      </p:sp>
+      <p:sp>
+        <p:nvSpPr>
+          <p:cNvPr id="4" name="TextBox 3"/>
+          <p:cNvSpPr txBox="1"/>
+          <p:nvPr/>
+        </p:nvSpPr>
+        <p:spPr>
+          <a:xfrm>
+            <a:off x="685800" y="109728"/>
+            <a:ext cx="10817352" cy="228600"/>
+          </a:xfrm>
+          <a:prstGeom prst="rect">
+            <a:avLst/>
+          </a:prstGeom>
+          <a:noFill/>
+        </p:spPr>
+        <p:txBody>
+          <a:bodyPr wrap="none">
+            <a:spAutoFit/>
+          </a:bodyPr>
+          <a:lstStyle/>
+          <a:p>
+            <a:pPr algn="l"/>
+            <a:r>
+              <a:rPr sz="750">
+                <a:solidFill>
+                  <a:srgbClr val="78808C"/>
+                </a:solidFill>
+                <a:latin typeface="JetBrains Mono"/>
+              </a:rPr>
+              <a:t>M15  ·  INHALT</a:t>
+            </a:r>
+          </a:p>
+        </p:txBody>
+      </p:sp>
+      <p:sp>
+        <p:nvSpPr>
+          <p:cNvPr id="5" name="Rectangle 4"/>
+          <p:cNvSpPr/>
+          <p:nvPr/>
+        </p:nvSpPr>
+        <p:spPr>
+          <a:xfrm>
+            <a:off x="0" y="1234440"/>
+            <a:ext cx="12188952" cy="12700"/>
+          </a:xfrm>
+          <a:prstGeom prst="rect">
+            <a:avLst/>
+          </a:prstGeom>
+          <a:solidFill>
+            <a:srgbClr val="D8DFE4"/>
+          </a:solidFill>
+          <a:ln>
+            <a:noFill/>
+          </a:ln>
+        </p:spPr>
+        <p:style>
+          <a:lnRef idx="1">
+            <a:schemeClr val="accent1"/>
+          </a:lnRef>
+          <a:fillRef idx="3">
+            <a:schemeClr val="accent1"/>
+          </a:fillRef>
+          <a:effectRef idx="2">
+            <a:schemeClr val="accent1"/>
+          </a:effectRef>
+          <a:fontRef idx="minor">
+            <a:schemeClr val="lt1"/>
+          </a:fontRef>
+        </p:style>
+        <p:txBody>
+          <a:bodyPr rtlCol="0" anchor="ctr"/>
+          <a:lstStyle/>
+          <a:p>
+            <a:pPr algn="ctr"/>
+          </a:p>
+        </p:txBody>
+      </p:sp>
+      <p:sp>
+        <p:nvSpPr>
+          <p:cNvPr id="6" name="Rectangle 5"/>
+          <p:cNvSpPr/>
+          <p:nvPr/>
+        </p:nvSpPr>
+        <p:spPr>
+          <a:xfrm>
+            <a:off x="685800" y="502920"/>
+            <a:ext cx="36576" cy="658368"/>
+          </a:xfrm>
+          <a:prstGeom prst="rect">
+            <a:avLst/>
+          </a:prstGeom>
+          <a:solidFill>
+            <a:srgbClr val="D9C089"/>
+          </a:solidFill>
+          <a:ln>
+            <a:noFill/>
+          </a:ln>
+        </p:spPr>
+        <p:style>
+          <a:lnRef idx="1">
+            <a:schemeClr val="accent1"/>
+          </a:lnRef>
+          <a:fillRef idx="3">
+            <a:schemeClr val="accent1"/>
+          </a:fillRef>
+          <a:effectRef idx="2">
+            <a:schemeClr val="accent1"/>
+          </a:effectRef>
+          <a:fontRef idx="minor">
+            <a:schemeClr val="lt1"/>
+          </a:fontRef>
+        </p:style>
+        <p:txBody>
+          <a:bodyPr rtlCol="0" anchor="ctr"/>
+          <a:lstStyle/>
+          <a:p>
+            <a:pPr algn="ctr"/>
+          </a:p>
+        </p:txBody>
+      </p:sp>
+      <p:sp>
+        <p:nvSpPr>
+          <p:cNvPr id="7" name="TextBox 6"/>
+          <p:cNvSpPr txBox="1"/>
+          <p:nvPr/>
+        </p:nvSpPr>
+        <p:spPr>
+          <a:xfrm>
+            <a:off x="813816" y="502920"/>
+            <a:ext cx="10634472" cy="685800"/>
+          </a:xfrm>
+          <a:prstGeom prst="rect">
+            <a:avLst/>
+          </a:prstGeom>
+          <a:noFill/>
+        </p:spPr>
+        <p:txBody>
+          <a:bodyPr wrap="square">
+            <a:spAutoFit/>
+          </a:bodyPr>
+          <a:lstStyle/>
+          <a:p>
+            <a:pPr algn="l"/>
+            <a:r>
+              <a:rPr sz="2400" b="1" i="0">
+                <a:solidFill>
+                  <a:srgbClr val="1F2C56"/>
+                </a:solidFill>
+                <a:latin typeface="Source Serif 4"/>
+              </a:rPr>
               <a:t>Arbeitsblatt B: Marktbearbeitungs-Jahresplan</a:t>
             </a:r>
           </a:p>
@@ -8723,7 +9062,7 @@
             <a:avLst/>
           </a:prstGeom>
           <a:solidFill>
-            <a:srgbClr val="EDEDF3"/>
+            <a:srgbClr val="FFFFFF"/>
           </a:solidFill>
           <a:ln>
             <a:noFill/>
@@ -8824,51 +9163,43 @@
                 </a:solidFill>
                 <a:latin typeface="JetBrains Mono"/>
               </a:rPr>
-              <a:t>M15  ·  INHALT</a:t>
-            </a:r>
-          </a:p>
-        </p:txBody>
-      </p:sp>
-      <p:sp>
-        <p:nvSpPr>
-          <p:cNvPr id="5" name="Rectangle 4"/>
-          <p:cNvSpPr/>
-          <p:nvPr/>
-        </p:nvSpPr>
-        <p:spPr>
-          <a:xfrm>
-            <a:off x="0" y="1234440"/>
-            <a:ext cx="12188952" cy="12700"/>
-          </a:xfrm>
-          <a:prstGeom prst="rect">
-            <a:avLst/>
-          </a:prstGeom>
-          <a:solidFill>
-            <a:srgbClr val="D8DFE4"/>
-          </a:solidFill>
-          <a:ln>
-            <a:noFill/>
-          </a:ln>
-        </p:spPr>
-        <p:style>
-          <a:lnRef idx="1">
-            <a:schemeClr val="accent1"/>
-          </a:lnRef>
-          <a:fillRef idx="3">
-            <a:schemeClr val="accent1"/>
-          </a:fillRef>
-          <a:effectRef idx="2">
-            <a:schemeClr val="accent1"/>
-          </a:effectRef>
-          <a:fontRef idx="minor">
-            <a:schemeClr val="lt1"/>
-          </a:fontRef>
-        </p:style>
-        <p:txBody>
-          <a:bodyPr rtlCol="0" anchor="ctr"/>
-          <a:lstStyle/>
-          <a:p>
-            <a:pPr algn="ctr"/>
+              <a:t>M15  ·  SCHAUBILD</a:t>
+            </a:r>
+          </a:p>
+        </p:txBody>
+      </p:sp>
+      <p:sp>
+        <p:nvSpPr>
+          <p:cNvPr id="5" name="TextBox 4"/>
+          <p:cNvSpPr txBox="1"/>
+          <p:nvPr/>
+        </p:nvSpPr>
+        <p:spPr>
+          <a:xfrm>
+            <a:off x="685800" y="502920"/>
+            <a:ext cx="10817352" cy="594360"/>
+          </a:xfrm>
+          <a:prstGeom prst="rect">
+            <a:avLst/>
+          </a:prstGeom>
+          <a:noFill/>
+        </p:spPr>
+        <p:txBody>
+          <a:bodyPr wrap="square">
+            <a:spAutoFit/>
+          </a:bodyPr>
+          <a:lstStyle/>
+          <a:p>
+            <a:pPr algn="l"/>
+            <a:r>
+              <a:rPr sz="2000" b="1" i="0">
+                <a:solidFill>
+                  <a:srgbClr val="1F2C56"/>
+                </a:solidFill>
+                <a:latin typeface="Source Serif 4"/>
+              </a:rPr>
+              <a:t>Five-Forces-Modell nach Porter</a:t>
+            </a:r>
           </a:p>
         </p:txBody>
       </p:sp>
@@ -8880,8 +9211,8 @@
         </p:nvSpPr>
         <p:spPr>
           <a:xfrm>
-            <a:off x="685800" y="502920"/>
-            <a:ext cx="36576" cy="658368"/>
+            <a:off x="685800" y="1143000"/>
+            <a:ext cx="10817352" cy="25400"/>
           </a:xfrm>
           <a:prstGeom prst="rect">
             <a:avLst/>
@@ -8915,105 +9246,33 @@
           </a:p>
         </p:txBody>
       </p:sp>
-      <p:sp>
-        <p:nvSpPr>
-          <p:cNvPr id="7" name="TextBox 6"/>
-          <p:cNvSpPr txBox="1"/>
-          <p:nvPr/>
-        </p:nvSpPr>
-        <p:spPr>
-          <a:xfrm>
-            <a:off x="813816" y="502920"/>
-            <a:ext cx="10634472" cy="685800"/>
-          </a:xfrm>
-          <a:prstGeom prst="rect">
-            <a:avLst/>
-          </a:prstGeom>
-          <a:noFill/>
-        </p:spPr>
-        <p:txBody>
-          <a:bodyPr wrap="square">
-            <a:spAutoFit/>
-          </a:bodyPr>
-          <a:lstStyle/>
-          <a:p>
-            <a:pPr algn="l"/>
-            <a:r>
-              <a:rPr sz="2400" b="1" i="0">
-                <a:solidFill>
-                  <a:srgbClr val="1F2C56"/>
-                </a:solidFill>
-                <a:latin typeface="Source Serif 4"/>
-              </a:rPr>
-              <a:t>Segmentierungskriterien</a:t>
-            </a:r>
-          </a:p>
-        </p:txBody>
-      </p:sp>
-      <p:sp>
-        <p:nvSpPr>
-          <p:cNvPr id="8" name="TextBox 7"/>
-          <p:cNvSpPr txBox="1"/>
-          <p:nvPr/>
-        </p:nvSpPr>
-        <p:spPr>
-          <a:xfrm>
-            <a:off x="685800" y="1417320"/>
-            <a:ext cx="10817352" cy="5029200"/>
-          </a:xfrm>
-          <a:prstGeom prst="rect">
-            <a:avLst/>
-          </a:prstGeom>
-          <a:noFill/>
-        </p:spPr>
-        <p:txBody>
-          <a:bodyPr wrap="square">
-            <a:spAutoFit/>
-          </a:bodyPr>
-          <a:lstStyle/>
-          <a:p>
-            <a:pPr>
-              <a:spcBef>
-                <a:spcPts val="400"/>
-              </a:spcBef>
-              <a:spcAft>
-                <a:spcPts val="200"/>
-              </a:spcAft>
-            </a:pPr>
-            <a:r>
-              <a:rPr sz="1200">
-                <a:solidFill>
-                  <a:srgbClr val="3D5466"/>
-                </a:solidFill>
-                <a:latin typeface="Arial"/>
-              </a:rPr>
-              <a:t>Nicht jeder Firmenkunde ist gleich attraktiv. Eine sinnvolle Segmentierung kombiniert mehrere Kriterien:</a:t>
-            </a:r>
-          </a:p>
-          <a:p>
-            <a:pPr>
-              <a:spcBef>
-                <a:spcPts val="400"/>
-              </a:spcBef>
-              <a:spcAft>
-                <a:spcPts val="200"/>
-              </a:spcAft>
-            </a:pPr>
-            <a:r>
-              <a:rPr sz="1200">
-                <a:solidFill>
-                  <a:srgbClr val="3D5466"/>
-                </a:solidFill>
-                <a:latin typeface="Arial"/>
-              </a:rPr>
-              <a:t>Empfehlung: Wählen Sie maximal zwei Primärsegmente. Breite schlägt Tiefe nur in sehr seltenen Fällen.</a:t>
-            </a:r>
-          </a:p>
-        </p:txBody>
-      </p:sp>
-      <p:sp>
-        <p:nvSpPr>
-          <p:cNvPr id="9" name="Rectangle 8"/>
+      <p:pic>
+        <p:nvPicPr>
+          <p:cNvPr id="7" name="Picture 6" descr="image.png"/>
+          <p:cNvPicPr>
+            <a:picLocks noChangeAspect="1"/>
+          </p:cNvPicPr>
+          <p:nvPr/>
+        </p:nvPicPr>
+        <p:blipFill>
+          <a:blip r:embed="rId2"/>
+          <a:stretch>
+            <a:fillRect/>
+          </a:stretch>
+        </p:blipFill>
+        <p:spPr>
+          <a:xfrm>
+            <a:off x="2554863" y="1325880"/>
+            <a:ext cx="7079225" cy="4937760"/>
+          </a:xfrm>
+          <a:prstGeom prst="rect">
+            <a:avLst/>
+          </a:prstGeom>
+        </p:spPr>
+      </p:pic>
+      <p:sp>
+        <p:nvSpPr>
+          <p:cNvPr id="8" name="Rectangle 7"/>
           <p:cNvSpPr/>
           <p:nvPr/>
         </p:nvSpPr>
@@ -9056,7 +9315,7 @@
       </p:sp>
       <p:sp>
         <p:nvSpPr>
-          <p:cNvPr id="10" name="TextBox 9"/>
+          <p:cNvPr id="9" name="TextBox 8"/>
           <p:cNvSpPr txBox="1"/>
           <p:nvPr/>
         </p:nvSpPr>
@@ -9085,6 +9344,41 @@
                 <a:latin typeface="JetBrains Mono"/>
               </a:rPr>
               <a:t>Benedikt Zoller Coaching  ·  FKB Campus  ·  M15</a:t>
+            </a:r>
+          </a:p>
+        </p:txBody>
+      </p:sp>
+      <p:sp>
+        <p:nvSpPr>
+          <p:cNvPr id="10" name="TextBox 9"/>
+          <p:cNvSpPr txBox="1"/>
+          <p:nvPr/>
+        </p:nvSpPr>
+        <p:spPr>
+          <a:xfrm>
+            <a:off x="7176211" y="6583680"/>
+            <a:ext cx="4326940" cy="256032"/>
+          </a:xfrm>
+          <a:prstGeom prst="rect">
+            <a:avLst/>
+          </a:prstGeom>
+          <a:noFill/>
+        </p:spPr>
+        <p:txBody>
+          <a:bodyPr wrap="none">
+            <a:spAutoFit/>
+          </a:bodyPr>
+          <a:lstStyle/>
+          <a:p>
+            <a:pPr algn="r"/>
+            <a:r>
+              <a:rPr sz="700">
+                <a:solidFill>
+                  <a:srgbClr val="A0B4D2"/>
+                </a:solidFill>
+                <a:latin typeface="JetBrains Mono"/>
+              </a:rPr>
+              <a:t>Schaubild</a:t>
             </a:r>
           </a:p>
         </p:txBody>
@@ -9344,7 +9638,7 @@
                 </a:solidFill>
                 <a:latin typeface="Source Serif 4"/>
               </a:rPr>
-              <a:t>Das Scoring-Modell zur Segmentpriorisierung</a:t>
+              <a:t>Segmentierungskriterien</a:t>
             </a:r>
           </a:p>
         </p:txBody>
@@ -9386,7 +9680,7 @@
                 </a:solidFill>
                 <a:latin typeface="Arial"/>
               </a:rPr>
-              <a:t>Ein einfaches Scoring-Modell hilft bei der Auswahl des Primärsegments:</a:t>
+              <a:t>Nicht jeder Firmenkunde ist gleich attraktiv. Eine sinnvolle Segmentierung kombiniert mehrere Kriterien:</a:t>
             </a:r>
           </a:p>
           <a:p>
@@ -9405,26 +9699,7 @@
                 </a:solidFill>
                 <a:latin typeface="Arial"/>
               </a:rPr>
-              <a:t>Bewertung je Kriterium: 1 (schwach) bis 5 (sehr stark).</a:t>
-            </a:r>
-          </a:p>
-          <a:p>
-            <a:pPr>
-              <a:spcBef>
-                <a:spcPts val="400"/>
-              </a:spcBef>
-              <a:spcAft>
-                <a:spcPts val="200"/>
-              </a:spcAft>
-            </a:pPr>
-            <a:r>
-              <a:rPr sz="1200">
-                <a:solidFill>
-                  <a:srgbClr val="3D5466"/>
-                </a:solidFill>
-                <a:latin typeface="Arial"/>
-              </a:rPr>
-              <a:t>## 4.3 Marktpotenzialanalyse</a:t>
+              <a:t>Empfehlung: Wählen Sie maximal zwei Primärsegmente. Breite schlägt Tiefe nur in sehr seltenen Fällen.</a:t>
             </a:r>
           </a:p>
         </p:txBody>
@@ -9762,7 +10037,7 @@
                 </a:solidFill>
                 <a:latin typeface="Source Serif 4"/>
               </a:rPr>
-              <a:t>Wie groß ist mein adressierbarer Markt?</a:t>
+              <a:t>Das Scoring-Modell zur Segmentpriorisierung</a:t>
             </a:r>
           </a:p>
         </p:txBody>
@@ -9804,7 +10079,7 @@
                 </a:solidFill>
                 <a:latin typeface="Arial"/>
               </a:rPr>
-              <a:t>Vor dem strategischen Einstieg in ein Segment steht die Potenzialschätzung. Die Frage: Wie viele Unternehmen im Zielsegment gibt es in meiner Region, und wie viele davon betreuen wir noch nicht?</a:t>
+              <a:t>Ein einfaches Scoring-Modell hilft bei der Auswahl des Primärsegments:</a:t>
             </a:r>
           </a:p>
           <a:p>
@@ -9823,7 +10098,7 @@
                 </a:solidFill>
                 <a:latin typeface="Arial"/>
               </a:rPr>
-              <a:t>Datenquellen für die Potenzialschätzung:</a:t>
+              <a:t>Bewertung je Kriterium: 1 (schwach) bis 5 (sehr stark).</a:t>
             </a:r>
           </a:p>
           <a:p>
@@ -9842,121 +10117,7 @@
                 </a:solidFill>
                 <a:latin typeface="Arial"/>
               </a:rPr>
-              <a:t>Vereinfachte Potenzialrechnung:</a:t>
-            </a:r>
-          </a:p>
-          <a:p>
-            <a:pPr>
-              <a:spcBef>
-                <a:spcPts val="400"/>
-              </a:spcBef>
-              <a:spcAft>
-                <a:spcPts val="200"/>
-              </a:spcAft>
-            </a:pPr>
-            <a:r>
-              <a:rPr sz="1300">
-                <a:solidFill>
-                  <a:srgbClr val="3D5466"/>
-                </a:solidFill>
-                <a:latin typeface="Arial"/>
-              </a:rPr>
-              <a:t>▸  Zielunternehmen in Region: X</a:t>
-            </a:r>
-          </a:p>
-          <a:p>
-            <a:pPr>
-              <a:spcBef>
-                <a:spcPts val="400"/>
-              </a:spcBef>
-              <a:spcAft>
-                <a:spcPts val="200"/>
-              </a:spcAft>
-            </a:pPr>
-            <a:r>
-              <a:rPr sz="1300">
-                <a:solidFill>
-                  <a:srgbClr val="3D5466"/>
-                </a:solidFill>
-                <a:latin typeface="Arial"/>
-              </a:rPr>
-              <a:t>▸  Davon bereits Kunden: Y</a:t>
-            </a:r>
-          </a:p>
-          <a:p>
-            <a:pPr>
-              <a:spcBef>
-                <a:spcPts val="400"/>
-              </a:spcBef>
-              <a:spcAft>
-                <a:spcPts val="200"/>
-              </a:spcAft>
-            </a:pPr>
-            <a:r>
-              <a:rPr sz="1300">
-                <a:solidFill>
-                  <a:srgbClr val="3D5466"/>
-                </a:solidFill>
-                <a:latin typeface="Arial"/>
-              </a:rPr>
-              <a:t>▸  Adressierbares Neukundenpotenzial: X − Y</a:t>
-            </a:r>
-          </a:p>
-          <a:p>
-            <a:pPr>
-              <a:spcBef>
-                <a:spcPts val="400"/>
-              </a:spcBef>
-              <a:spcAft>
-                <a:spcPts val="200"/>
-              </a:spcAft>
-            </a:pPr>
-            <a:r>
-              <a:rPr sz="1300">
-                <a:solidFill>
-                  <a:srgbClr val="3D5466"/>
-                </a:solidFill>
-                <a:latin typeface="Arial"/>
-              </a:rPr>
-              <a:t>▸  Realistisch erreichbar in 12 Monaten (Marktdurchdringungsrate 2–5 %): Z</a:t>
-            </a:r>
-          </a:p>
-          <a:p>
-            <a:pPr>
-              <a:spcBef>
-                <a:spcPts val="600"/>
-              </a:spcBef>
-              <a:spcAft>
-                <a:spcPts val="200"/>
-              </a:spcAft>
-            </a:pPr>
-            <a:r>
-              <a:rPr sz="1200" i="1">
-                <a:solidFill>
-                  <a:srgbClr val="3D5466"/>
-                </a:solidFill>
-                <a:latin typeface="Arial"/>
-              </a:rPr>
-              <a:t>→  Praxistipp: Unterschätzen Sie die bestehenden Daten in agree nicht. Eine saubere Branchencodierung und ein aktuelles CRM sind die Basis jeder Potenzialanalyse.</a:t>
-            </a:r>
-          </a:p>
-          <a:p>
-            <a:pPr>
-              <a:spcBef>
-                <a:spcPts val="400"/>
-              </a:spcBef>
-              <a:spcAft>
-                <a:spcPts val="200"/>
-              </a:spcAft>
-            </a:pPr>
-            <a:r>
-              <a:rPr sz="1200">
-                <a:solidFill>
-                  <a:srgbClr val="3D5466"/>
-                </a:solidFill>
-                <a:latin typeface="Arial"/>
-              </a:rPr>
-              <a:t>## 4.4 Strategische Positionierung: Stärken-Schwächen vs. Wettbewerb</a:t>
+              <a:t>## 4.3 Marktpotenzialanalyse</a:t>
             </a:r>
           </a:p>
         </p:txBody>
@@ -10294,14 +10455,208 @@
                 </a:solidFill>
                 <a:latin typeface="Source Serif 4"/>
               </a:rPr>
-              <a:t>SWOT im Firmenkundensegment</a:t>
-            </a:r>
-          </a:p>
-        </p:txBody>
-      </p:sp>
-      <p:sp>
-        <p:nvSpPr>
-          <p:cNvPr id="8" name="Rectangle 7"/>
+              <a:t>Wie groß ist mein adressierbarer Markt?</a:t>
+            </a:r>
+          </a:p>
+        </p:txBody>
+      </p:sp>
+      <p:sp>
+        <p:nvSpPr>
+          <p:cNvPr id="8" name="TextBox 7"/>
+          <p:cNvSpPr txBox="1"/>
+          <p:nvPr/>
+        </p:nvSpPr>
+        <p:spPr>
+          <a:xfrm>
+            <a:off x="685800" y="1417320"/>
+            <a:ext cx="10817352" cy="5029200"/>
+          </a:xfrm>
+          <a:prstGeom prst="rect">
+            <a:avLst/>
+          </a:prstGeom>
+          <a:noFill/>
+        </p:spPr>
+        <p:txBody>
+          <a:bodyPr wrap="square">
+            <a:spAutoFit/>
+          </a:bodyPr>
+          <a:lstStyle/>
+          <a:p>
+            <a:pPr>
+              <a:spcBef>
+                <a:spcPts val="400"/>
+              </a:spcBef>
+              <a:spcAft>
+                <a:spcPts val="200"/>
+              </a:spcAft>
+            </a:pPr>
+            <a:r>
+              <a:rPr sz="1200">
+                <a:solidFill>
+                  <a:srgbClr val="3D5466"/>
+                </a:solidFill>
+                <a:latin typeface="Arial"/>
+              </a:rPr>
+              <a:t>Vor dem strategischen Einstieg in ein Segment steht die Potenzialschätzung. Die Frage: Wie viele Unternehmen im Zielsegment gibt es in meiner Region, und wie viele davon betreuen wir noch nicht?</a:t>
+            </a:r>
+          </a:p>
+          <a:p>
+            <a:pPr>
+              <a:spcBef>
+                <a:spcPts val="400"/>
+              </a:spcBef>
+              <a:spcAft>
+                <a:spcPts val="200"/>
+              </a:spcAft>
+            </a:pPr>
+            <a:r>
+              <a:rPr sz="1200">
+                <a:solidFill>
+                  <a:srgbClr val="3D5466"/>
+                </a:solidFill>
+                <a:latin typeface="Arial"/>
+              </a:rPr>
+              <a:t>Datenquellen für die Potenzialschätzung:</a:t>
+            </a:r>
+          </a:p>
+          <a:p>
+            <a:pPr>
+              <a:spcBef>
+                <a:spcPts val="400"/>
+              </a:spcBef>
+              <a:spcAft>
+                <a:spcPts val="200"/>
+              </a:spcAft>
+            </a:pPr>
+            <a:r>
+              <a:rPr sz="1200">
+                <a:solidFill>
+                  <a:srgbClr val="3D5466"/>
+                </a:solidFill>
+                <a:latin typeface="Arial"/>
+              </a:rPr>
+              <a:t>Vereinfachte Potenzialrechnung:</a:t>
+            </a:r>
+          </a:p>
+          <a:p>
+            <a:pPr>
+              <a:spcBef>
+                <a:spcPts val="400"/>
+              </a:spcBef>
+              <a:spcAft>
+                <a:spcPts val="200"/>
+              </a:spcAft>
+            </a:pPr>
+            <a:r>
+              <a:rPr sz="1300">
+                <a:solidFill>
+                  <a:srgbClr val="3D5466"/>
+                </a:solidFill>
+                <a:latin typeface="Arial"/>
+              </a:rPr>
+              <a:t>▸  Zielunternehmen in Region: X</a:t>
+            </a:r>
+          </a:p>
+          <a:p>
+            <a:pPr>
+              <a:spcBef>
+                <a:spcPts val="400"/>
+              </a:spcBef>
+              <a:spcAft>
+                <a:spcPts val="200"/>
+              </a:spcAft>
+            </a:pPr>
+            <a:r>
+              <a:rPr sz="1300">
+                <a:solidFill>
+                  <a:srgbClr val="3D5466"/>
+                </a:solidFill>
+                <a:latin typeface="Arial"/>
+              </a:rPr>
+              <a:t>▸  Davon bereits Kunden: Y</a:t>
+            </a:r>
+          </a:p>
+          <a:p>
+            <a:pPr>
+              <a:spcBef>
+                <a:spcPts val="400"/>
+              </a:spcBef>
+              <a:spcAft>
+                <a:spcPts val="200"/>
+              </a:spcAft>
+            </a:pPr>
+            <a:r>
+              <a:rPr sz="1300">
+                <a:solidFill>
+                  <a:srgbClr val="3D5466"/>
+                </a:solidFill>
+                <a:latin typeface="Arial"/>
+              </a:rPr>
+              <a:t>▸  Adressierbares Neukundenpotenzial: X − Y</a:t>
+            </a:r>
+          </a:p>
+          <a:p>
+            <a:pPr>
+              <a:spcBef>
+                <a:spcPts val="400"/>
+              </a:spcBef>
+              <a:spcAft>
+                <a:spcPts val="200"/>
+              </a:spcAft>
+            </a:pPr>
+            <a:r>
+              <a:rPr sz="1300">
+                <a:solidFill>
+                  <a:srgbClr val="3D5466"/>
+                </a:solidFill>
+                <a:latin typeface="Arial"/>
+              </a:rPr>
+              <a:t>▸  Realistisch erreichbar in 12 Monaten (Marktdurchdringungsrate 2–5 %): Z</a:t>
+            </a:r>
+          </a:p>
+          <a:p>
+            <a:pPr>
+              <a:spcBef>
+                <a:spcPts val="600"/>
+              </a:spcBef>
+              <a:spcAft>
+                <a:spcPts val="200"/>
+              </a:spcAft>
+            </a:pPr>
+            <a:r>
+              <a:rPr sz="1200" i="1">
+                <a:solidFill>
+                  <a:srgbClr val="3D5466"/>
+                </a:solidFill>
+                <a:latin typeface="Arial"/>
+              </a:rPr>
+              <a:t>→  Praxistipp: Unterschätzen Sie die bestehenden Daten in agree nicht. Eine saubere Branchencodierung und ein aktuelles CRM sind die Basis jeder Potenzialanalyse.</a:t>
+            </a:r>
+          </a:p>
+          <a:p>
+            <a:pPr>
+              <a:spcBef>
+                <a:spcPts val="400"/>
+              </a:spcBef>
+              <a:spcAft>
+                <a:spcPts val="200"/>
+              </a:spcAft>
+            </a:pPr>
+            <a:r>
+              <a:rPr sz="1200">
+                <a:solidFill>
+                  <a:srgbClr val="3D5466"/>
+                </a:solidFill>
+                <a:latin typeface="Arial"/>
+              </a:rPr>
+              <a:t>## 4.4 Strategische Positionierung: Stärken-Schwächen vs. Wettbewerb</a:t>
+            </a:r>
+          </a:p>
+        </p:txBody>
+      </p:sp>
+      <p:sp>
+        <p:nvSpPr>
+          <p:cNvPr id="9" name="Rectangle 8"/>
           <p:cNvSpPr/>
           <p:nvPr/>
         </p:nvSpPr>
@@ -10344,7 +10699,7 @@
       </p:sp>
       <p:sp>
         <p:nvSpPr>
-          <p:cNvPr id="9" name="TextBox 8"/>
+          <p:cNvPr id="10" name="TextBox 9"/>
           <p:cNvSpPr txBox="1"/>
           <p:nvPr/>
         </p:nvSpPr>

--- a/protected-downloads/praesentation/M15.pptx
+++ b/protected-downloads/praesentation/M15.pptx
@@ -8,7 +8,7 @@
     <p:sldId id="256" r:id="rId7"/>
     <p:sldId id="257" r:id="rId8"/>
     <p:sldId id="258" r:id="rId9"/>
-    <p:sldId id="259" r:id="rId11"/>
+    <p:sldId id="259" r:id="rId10"/>
     <p:sldId id="260" r:id="rId12"/>
     <p:sldId id="261" r:id="rId13"/>
     <p:sldId id="262" r:id="rId14"/>
@@ -20,6 +20,7 @@
     <p:sldId id="268" r:id="rId20"/>
     <p:sldId id="269" r:id="rId21"/>
     <p:sldId id="270" r:id="rId22"/>
+    <p:sldId id="271" r:id="rId23"/>
   </p:sldIdLst>
   <p:sldSz cx="12188952" cy="6858000" type="screen4x3"/>
   <p:notesSz cx="6858000" cy="9144000"/>
@@ -5034,14 +5035,208 @@
                 </a:solidFill>
                 <a:latin typeface="Source Serif 4"/>
               </a:rPr>
-              <a:t>SWOT im Firmenkundensegment</a:t>
-            </a:r>
-          </a:p>
-        </p:txBody>
-      </p:sp>
-      <p:sp>
-        <p:nvSpPr>
-          <p:cNvPr id="8" name="Rectangle 7"/>
+              <a:t>Wie groß ist mein adressierbarer Markt?</a:t>
+            </a:r>
+          </a:p>
+        </p:txBody>
+      </p:sp>
+      <p:sp>
+        <p:nvSpPr>
+          <p:cNvPr id="8" name="TextBox 7"/>
+          <p:cNvSpPr txBox="1"/>
+          <p:nvPr/>
+        </p:nvSpPr>
+        <p:spPr>
+          <a:xfrm>
+            <a:off x="685800" y="1417320"/>
+            <a:ext cx="10817352" cy="5029200"/>
+          </a:xfrm>
+          <a:prstGeom prst="rect">
+            <a:avLst/>
+          </a:prstGeom>
+          <a:noFill/>
+        </p:spPr>
+        <p:txBody>
+          <a:bodyPr wrap="square">
+            <a:spAutoFit/>
+          </a:bodyPr>
+          <a:lstStyle/>
+          <a:p>
+            <a:pPr>
+              <a:spcBef>
+                <a:spcPts val="400"/>
+              </a:spcBef>
+              <a:spcAft>
+                <a:spcPts val="200"/>
+              </a:spcAft>
+            </a:pPr>
+            <a:r>
+              <a:rPr sz="1200">
+                <a:solidFill>
+                  <a:srgbClr val="3D5466"/>
+                </a:solidFill>
+                <a:latin typeface="Arial"/>
+              </a:rPr>
+              <a:t>Vor dem strategischen Einstieg in ein Segment steht die Potenzialschätzung. Die Frage: Wie viele Unternehmen im Zielsegment gibt es in meiner Region, und wie viele davon betreuen wir noch nicht?</a:t>
+            </a:r>
+          </a:p>
+          <a:p>
+            <a:pPr>
+              <a:spcBef>
+                <a:spcPts val="400"/>
+              </a:spcBef>
+              <a:spcAft>
+                <a:spcPts val="200"/>
+              </a:spcAft>
+            </a:pPr>
+            <a:r>
+              <a:rPr sz="1200">
+                <a:solidFill>
+                  <a:srgbClr val="3D5466"/>
+                </a:solidFill>
+                <a:latin typeface="Arial"/>
+              </a:rPr>
+              <a:t>Datenquellen für die Potenzialschätzung:</a:t>
+            </a:r>
+          </a:p>
+          <a:p>
+            <a:pPr>
+              <a:spcBef>
+                <a:spcPts val="400"/>
+              </a:spcBef>
+              <a:spcAft>
+                <a:spcPts val="200"/>
+              </a:spcAft>
+            </a:pPr>
+            <a:r>
+              <a:rPr sz="1200">
+                <a:solidFill>
+                  <a:srgbClr val="3D5466"/>
+                </a:solidFill>
+                <a:latin typeface="Arial"/>
+              </a:rPr>
+              <a:t>Vereinfachte Potenzialrechnung:</a:t>
+            </a:r>
+          </a:p>
+          <a:p>
+            <a:pPr>
+              <a:spcBef>
+                <a:spcPts val="400"/>
+              </a:spcBef>
+              <a:spcAft>
+                <a:spcPts val="200"/>
+              </a:spcAft>
+            </a:pPr>
+            <a:r>
+              <a:rPr sz="1300">
+                <a:solidFill>
+                  <a:srgbClr val="3D5466"/>
+                </a:solidFill>
+                <a:latin typeface="Arial"/>
+              </a:rPr>
+              <a:t>▸  Zielunternehmen in Region: X</a:t>
+            </a:r>
+          </a:p>
+          <a:p>
+            <a:pPr>
+              <a:spcBef>
+                <a:spcPts val="400"/>
+              </a:spcBef>
+              <a:spcAft>
+                <a:spcPts val="200"/>
+              </a:spcAft>
+            </a:pPr>
+            <a:r>
+              <a:rPr sz="1300">
+                <a:solidFill>
+                  <a:srgbClr val="3D5466"/>
+                </a:solidFill>
+                <a:latin typeface="Arial"/>
+              </a:rPr>
+              <a:t>▸  Davon bereits Kunden: Y</a:t>
+            </a:r>
+          </a:p>
+          <a:p>
+            <a:pPr>
+              <a:spcBef>
+                <a:spcPts val="400"/>
+              </a:spcBef>
+              <a:spcAft>
+                <a:spcPts val="200"/>
+              </a:spcAft>
+            </a:pPr>
+            <a:r>
+              <a:rPr sz="1300">
+                <a:solidFill>
+                  <a:srgbClr val="3D5466"/>
+                </a:solidFill>
+                <a:latin typeface="Arial"/>
+              </a:rPr>
+              <a:t>▸  Adressierbares Neukundenpotenzial: X − Y</a:t>
+            </a:r>
+          </a:p>
+          <a:p>
+            <a:pPr>
+              <a:spcBef>
+                <a:spcPts val="400"/>
+              </a:spcBef>
+              <a:spcAft>
+                <a:spcPts val="200"/>
+              </a:spcAft>
+            </a:pPr>
+            <a:r>
+              <a:rPr sz="1300">
+                <a:solidFill>
+                  <a:srgbClr val="3D5466"/>
+                </a:solidFill>
+                <a:latin typeface="Arial"/>
+              </a:rPr>
+              <a:t>▸  Realistisch erreichbar in 12 Monaten (Marktdurchdringungsrate 2–5 %): Z</a:t>
+            </a:r>
+          </a:p>
+          <a:p>
+            <a:pPr>
+              <a:spcBef>
+                <a:spcPts val="600"/>
+              </a:spcBef>
+              <a:spcAft>
+                <a:spcPts val="200"/>
+              </a:spcAft>
+            </a:pPr>
+            <a:r>
+              <a:rPr sz="1200" i="1">
+                <a:solidFill>
+                  <a:srgbClr val="3D5466"/>
+                </a:solidFill>
+                <a:latin typeface="Arial"/>
+              </a:rPr>
+              <a:t>→  Praxistipp: Unterschätzen Sie die bestehenden Daten in agree nicht. Eine saubere Branchencodierung und ein aktuelles CRM sind die Basis jeder Potenzialanalyse.</a:t>
+            </a:r>
+          </a:p>
+          <a:p>
+            <a:pPr>
+              <a:spcBef>
+                <a:spcPts val="400"/>
+              </a:spcBef>
+              <a:spcAft>
+                <a:spcPts val="200"/>
+              </a:spcAft>
+            </a:pPr>
+            <a:r>
+              <a:rPr sz="1200">
+                <a:solidFill>
+                  <a:srgbClr val="3D5466"/>
+                </a:solidFill>
+                <a:latin typeface="Arial"/>
+              </a:rPr>
+              <a:t>## 4.4 Strategische Positionierung: Stärken-Schwächen vs. Wettbewerb</a:t>
+            </a:r>
+          </a:p>
+        </p:txBody>
+      </p:sp>
+      <p:sp>
+        <p:nvSpPr>
+          <p:cNvPr id="9" name="Rectangle 8"/>
           <p:cNvSpPr/>
           <p:nvPr/>
         </p:nvSpPr>
@@ -5084,7 +5279,7 @@
       </p:sp>
       <p:sp>
         <p:nvSpPr>
-          <p:cNvPr id="9" name="TextBox 8"/>
+          <p:cNvPr id="10" name="TextBox 9"/>
           <p:cNvSpPr txBox="1"/>
           <p:nvPr/>
         </p:nvSpPr>
@@ -5372,151 +5567,14 @@
                 </a:solidFill>
                 <a:latin typeface="Source Serif 4"/>
               </a:rPr>
-              <a:t>Wertversprechen formulieren</a:t>
-            </a:r>
-          </a:p>
-        </p:txBody>
-      </p:sp>
-      <p:sp>
-        <p:nvSpPr>
-          <p:cNvPr id="8" name="TextBox 7"/>
-          <p:cNvSpPr txBox="1"/>
-          <p:nvPr/>
-        </p:nvSpPr>
-        <p:spPr>
-          <a:xfrm>
-            <a:off x="685800" y="1417320"/>
-            <a:ext cx="10817352" cy="5029200"/>
-          </a:xfrm>
-          <a:prstGeom prst="rect">
-            <a:avLst/>
-          </a:prstGeom>
-          <a:noFill/>
-        </p:spPr>
-        <p:txBody>
-          <a:bodyPr wrap="square">
-            <a:spAutoFit/>
-          </a:bodyPr>
-          <a:lstStyle/>
-          <a:p>
-            <a:pPr>
-              <a:spcBef>
-                <a:spcPts val="400"/>
-              </a:spcBef>
-              <a:spcAft>
-                <a:spcPts val="200"/>
-              </a:spcAft>
-            </a:pPr>
-            <a:r>
-              <a:rPr sz="1200">
-                <a:solidFill>
-                  <a:srgbClr val="3D5466"/>
-                </a:solidFill>
-                <a:latin typeface="Arial"/>
-              </a:rPr>
-              <a:t>Das Wertversprechen (Value Proposition) beantwortet: Warum sollte ein Unternehmen aus meinem Zielsegment zu uns wechseln – oder bleiben?</a:t>
-            </a:r>
-          </a:p>
-          <a:p>
-            <a:pPr>
-              <a:spcBef>
-                <a:spcPts val="400"/>
-              </a:spcBef>
-              <a:spcAft>
-                <a:spcPts val="200"/>
-              </a:spcAft>
-            </a:pPr>
-            <a:r>
-              <a:rPr sz="1200">
-                <a:solidFill>
-                  <a:srgbClr val="3D5466"/>
-                </a:solidFill>
-                <a:latin typeface="Arial"/>
-              </a:rPr>
-              <a:t>Ein wirksames Wertversprechen im Firmenkundengeschäft ist:</a:t>
-            </a:r>
-          </a:p>
-          <a:p>
-            <a:pPr>
-              <a:spcBef>
-                <a:spcPts val="400"/>
-              </a:spcBef>
-              <a:spcAft>
-                <a:spcPts val="200"/>
-              </a:spcAft>
-            </a:pPr>
-            <a:r>
-              <a:rPr sz="1300">
-                <a:solidFill>
-                  <a:srgbClr val="3D5466"/>
-                </a:solidFill>
-                <a:latin typeface="Arial"/>
-              </a:rPr>
-              <a:t>▸  Spezifisch (nicht „wir sind die beste Bank"): „Für Handwerksbetriebe in der Region sind wir der Partner, der Finanzierungsentscheidungen in 48 Stunden trifft."</a:t>
-            </a:r>
-          </a:p>
-          <a:p>
-            <a:pPr>
-              <a:spcBef>
-                <a:spcPts val="400"/>
-              </a:spcBef>
-              <a:spcAft>
-                <a:spcPts val="200"/>
-              </a:spcAft>
-            </a:pPr>
-            <a:r>
-              <a:rPr sz="1300">
-                <a:solidFill>
-                  <a:srgbClr val="3D5466"/>
-                </a:solidFill>
-                <a:latin typeface="Arial"/>
-              </a:rPr>
-              <a:t>▸  Belegbar: Konkrete Referenzen, Bearbeitungszeiten, Verbundpartner-Einbindung</a:t>
-            </a:r>
-          </a:p>
-          <a:p>
-            <a:pPr>
-              <a:spcBef>
-                <a:spcPts val="400"/>
-              </a:spcBef>
-              <a:spcAft>
-                <a:spcPts val="200"/>
-              </a:spcAft>
-            </a:pPr>
-            <a:r>
-              <a:rPr sz="1300">
-                <a:solidFill>
-                  <a:srgbClr val="3D5466"/>
-                </a:solidFill>
-                <a:latin typeface="Arial"/>
-              </a:rPr>
-              <a:t>▸  Differenzierend: Was kann ich, was die Sparkasse oder Commerzbank nicht kann?</a:t>
-            </a:r>
-          </a:p>
-          <a:p>
-            <a:pPr>
-              <a:spcBef>
-                <a:spcPts val="400"/>
-              </a:spcBef>
-              <a:spcAft>
-                <a:spcPts val="200"/>
-              </a:spcAft>
-            </a:pPr>
-            <a:r>
-              <a:rPr sz="1200">
-                <a:solidFill>
-                  <a:srgbClr val="3D5466"/>
-                </a:solidFill>
-                <a:latin typeface="Arial"/>
-              </a:rPr>
-              <a:t>## 4.5 Neukundenansprache: Kanäle und Maßnahmen</a:t>
-            </a:r>
-          </a:p>
-        </p:txBody>
-      </p:sp>
-      <p:sp>
-        <p:nvSpPr>
-          <p:cNvPr id="9" name="Rectangle 8"/>
+              <a:t>SWOT im Firmenkundensegment</a:t>
+            </a:r>
+          </a:p>
+        </p:txBody>
+      </p:sp>
+      <p:sp>
+        <p:nvSpPr>
+          <p:cNvPr id="8" name="Rectangle 7"/>
           <p:cNvSpPr/>
           <p:nvPr/>
         </p:nvSpPr>
@@ -5559,7 +5617,7 @@
       </p:sp>
       <p:sp>
         <p:nvSpPr>
-          <p:cNvPr id="10" name="TextBox 9"/>
+          <p:cNvPr id="9" name="TextBox 8"/>
           <p:cNvSpPr txBox="1"/>
           <p:nvPr/>
         </p:nvSpPr>
@@ -5847,14 +5905,151 @@
                 </a:solidFill>
                 <a:latin typeface="Source Serif 4"/>
               </a:rPr>
-              <a:t>Welche Kanäle funktionieren wirklich?</a:t>
-            </a:r>
-          </a:p>
-        </p:txBody>
-      </p:sp>
-      <p:sp>
-        <p:nvSpPr>
-          <p:cNvPr id="8" name="Rectangle 7"/>
+              <a:t>Wertversprechen formulieren</a:t>
+            </a:r>
+          </a:p>
+        </p:txBody>
+      </p:sp>
+      <p:sp>
+        <p:nvSpPr>
+          <p:cNvPr id="8" name="TextBox 7"/>
+          <p:cNvSpPr txBox="1"/>
+          <p:nvPr/>
+        </p:nvSpPr>
+        <p:spPr>
+          <a:xfrm>
+            <a:off x="685800" y="1417320"/>
+            <a:ext cx="10817352" cy="5029200"/>
+          </a:xfrm>
+          <a:prstGeom prst="rect">
+            <a:avLst/>
+          </a:prstGeom>
+          <a:noFill/>
+        </p:spPr>
+        <p:txBody>
+          <a:bodyPr wrap="square">
+            <a:spAutoFit/>
+          </a:bodyPr>
+          <a:lstStyle/>
+          <a:p>
+            <a:pPr>
+              <a:spcBef>
+                <a:spcPts val="400"/>
+              </a:spcBef>
+              <a:spcAft>
+                <a:spcPts val="200"/>
+              </a:spcAft>
+            </a:pPr>
+            <a:r>
+              <a:rPr sz="1200">
+                <a:solidFill>
+                  <a:srgbClr val="3D5466"/>
+                </a:solidFill>
+                <a:latin typeface="Arial"/>
+              </a:rPr>
+              <a:t>Das Wertversprechen (Value Proposition) beantwortet: Warum sollte ein Unternehmen aus meinem Zielsegment zu uns wechseln – oder bleiben?</a:t>
+            </a:r>
+          </a:p>
+          <a:p>
+            <a:pPr>
+              <a:spcBef>
+                <a:spcPts val="400"/>
+              </a:spcBef>
+              <a:spcAft>
+                <a:spcPts val="200"/>
+              </a:spcAft>
+            </a:pPr>
+            <a:r>
+              <a:rPr sz="1200">
+                <a:solidFill>
+                  <a:srgbClr val="3D5466"/>
+                </a:solidFill>
+                <a:latin typeface="Arial"/>
+              </a:rPr>
+              <a:t>Ein wirksames Wertversprechen im Firmenkundengeschäft ist:</a:t>
+            </a:r>
+          </a:p>
+          <a:p>
+            <a:pPr>
+              <a:spcBef>
+                <a:spcPts val="400"/>
+              </a:spcBef>
+              <a:spcAft>
+                <a:spcPts val="200"/>
+              </a:spcAft>
+            </a:pPr>
+            <a:r>
+              <a:rPr sz="1300">
+                <a:solidFill>
+                  <a:srgbClr val="3D5466"/>
+                </a:solidFill>
+                <a:latin typeface="Arial"/>
+              </a:rPr>
+              <a:t>▸  Spezifisch (nicht „wir sind die beste Bank"): „Für Handwerksbetriebe in der Region sind wir der Partner, der Finanzierungsentscheidungen in 48 Stunden trifft."</a:t>
+            </a:r>
+          </a:p>
+          <a:p>
+            <a:pPr>
+              <a:spcBef>
+                <a:spcPts val="400"/>
+              </a:spcBef>
+              <a:spcAft>
+                <a:spcPts val="200"/>
+              </a:spcAft>
+            </a:pPr>
+            <a:r>
+              <a:rPr sz="1300">
+                <a:solidFill>
+                  <a:srgbClr val="3D5466"/>
+                </a:solidFill>
+                <a:latin typeface="Arial"/>
+              </a:rPr>
+              <a:t>▸  Belegbar: Konkrete Referenzen, Bearbeitungszeiten, Verbundpartner-Einbindung</a:t>
+            </a:r>
+          </a:p>
+          <a:p>
+            <a:pPr>
+              <a:spcBef>
+                <a:spcPts val="400"/>
+              </a:spcBef>
+              <a:spcAft>
+                <a:spcPts val="200"/>
+              </a:spcAft>
+            </a:pPr>
+            <a:r>
+              <a:rPr sz="1300">
+                <a:solidFill>
+                  <a:srgbClr val="3D5466"/>
+                </a:solidFill>
+                <a:latin typeface="Arial"/>
+              </a:rPr>
+              <a:t>▸  Differenzierend: Was kann ich, was die Sparkasse oder Commerzbank nicht kann?</a:t>
+            </a:r>
+          </a:p>
+          <a:p>
+            <a:pPr>
+              <a:spcBef>
+                <a:spcPts val="400"/>
+              </a:spcBef>
+              <a:spcAft>
+                <a:spcPts val="200"/>
+              </a:spcAft>
+            </a:pPr>
+            <a:r>
+              <a:rPr sz="1200">
+                <a:solidFill>
+                  <a:srgbClr val="3D5466"/>
+                </a:solidFill>
+                <a:latin typeface="Arial"/>
+              </a:rPr>
+              <a:t>## 4.5 Neukundenansprache: Kanäle und Maßnahmen</a:t>
+            </a:r>
+          </a:p>
+        </p:txBody>
+      </p:sp>
+      <p:sp>
+        <p:nvSpPr>
+          <p:cNvPr id="9" name="Rectangle 8"/>
           <p:cNvSpPr/>
           <p:nvPr/>
         </p:nvSpPr>
@@ -5897,7 +6092,7 @@
       </p:sp>
       <p:sp>
         <p:nvSpPr>
-          <p:cNvPr id="9" name="TextBox 8"/>
+          <p:cNvPr id="10" name="TextBox 9"/>
           <p:cNvSpPr txBox="1"/>
           <p:nvPr/>
         </p:nvSpPr>
@@ -6185,265 +6380,14 @@
                 </a:solidFill>
                 <a:latin typeface="Source Serif 4"/>
               </a:rPr>
-              <a:t>Empfehlungsmanagement systematisieren</a:t>
-            </a:r>
-          </a:p>
-        </p:txBody>
-      </p:sp>
-      <p:sp>
-        <p:nvSpPr>
-          <p:cNvPr id="8" name="TextBox 7"/>
-          <p:cNvSpPr txBox="1"/>
-          <p:nvPr/>
-        </p:nvSpPr>
-        <p:spPr>
-          <a:xfrm>
-            <a:off x="685800" y="1417320"/>
-            <a:ext cx="10817352" cy="5029200"/>
-          </a:xfrm>
-          <a:prstGeom prst="rect">
-            <a:avLst/>
-          </a:prstGeom>
-          <a:noFill/>
-        </p:spPr>
-        <p:txBody>
-          <a:bodyPr wrap="square">
-            <a:spAutoFit/>
-          </a:bodyPr>
-          <a:lstStyle/>
-          <a:p>
-            <a:pPr>
-              <a:spcBef>
-                <a:spcPts val="400"/>
-              </a:spcBef>
-              <a:spcAft>
-                <a:spcPts val="200"/>
-              </a:spcAft>
-            </a:pPr>
-            <a:r>
-              <a:rPr sz="1200">
-                <a:solidFill>
-                  <a:srgbClr val="3D5466"/>
-                </a:solidFill>
-                <a:latin typeface="Arial"/>
-              </a:rPr>
-              <a:t>Empfehlungen entstehen nicht zufällig. Ein aktives Empfehlungsmanagement umfasst:</a:t>
-            </a:r>
-          </a:p>
-          <a:p>
-            <a:pPr>
-              <a:spcBef>
-                <a:spcPts val="400"/>
-              </a:spcBef>
-              <a:spcAft>
-                <a:spcPts val="200"/>
-              </a:spcAft>
-            </a:pPr>
-            <a:r>
-              <a:rPr sz="1300">
-                <a:solidFill>
-                  <a:srgbClr val="3D5466"/>
-                </a:solidFill>
-                <a:latin typeface="Arial"/>
-              </a:rPr>
-              <a:t>▸  Identifizieren: Welche meiner Bestandskunden sind Meinungsführer in ihrem Branchenumfeld?</a:t>
-            </a:r>
-          </a:p>
-          <a:p>
-            <a:pPr>
-              <a:spcBef>
-                <a:spcPts val="400"/>
-              </a:spcBef>
-              <a:spcAft>
-                <a:spcPts val="200"/>
-              </a:spcAft>
-            </a:pPr>
-            <a:r>
-              <a:rPr sz="1300">
-                <a:solidFill>
-                  <a:srgbClr val="3D5466"/>
-                </a:solidFill>
-                <a:latin typeface="Arial"/>
-              </a:rPr>
-              <a:t>▸  Beziehung vertiefen: Diese Kunden erhalten besondere Aufmerksamkeit – nicht wegen der Empfehlung, sondern wegen ihres Werts.</a:t>
-            </a:r>
-          </a:p>
-          <a:p>
-            <a:pPr>
-              <a:spcBef>
-                <a:spcPts val="400"/>
-              </a:spcBef>
-              <a:spcAft>
-                <a:spcPts val="200"/>
-              </a:spcAft>
-            </a:pPr>
-            <a:r>
-              <a:rPr sz="1300">
-                <a:solidFill>
-                  <a:srgbClr val="3D5466"/>
-                </a:solidFill>
-                <a:latin typeface="Arial"/>
-              </a:rPr>
-              <a:t>▸  Aktiv bitten: Am Ende eines erfolgreichen Gesprächs: „Gibt es Unternehmen in Ihrem Umfeld, die unsere Zusammenarbeit kennenlernen sollten?"</a:t>
-            </a:r>
-          </a:p>
-          <a:p>
-            <a:pPr>
-              <a:spcBef>
-                <a:spcPts val="400"/>
-              </a:spcBef>
-              <a:spcAft>
-                <a:spcPts val="200"/>
-              </a:spcAft>
-            </a:pPr>
-            <a:r>
-              <a:rPr sz="1300">
-                <a:solidFill>
-                  <a:srgbClr val="3D5466"/>
-                </a:solidFill>
-                <a:latin typeface="Arial"/>
-              </a:rPr>
-              <a:t>▸  Danken und schließen: Rückmeldung geben, ob der Kontakt erfolgreich war.</a:t>
-            </a:r>
-          </a:p>
-          <a:p>
-            <a:pPr>
-              <a:spcBef>
-                <a:spcPts val="400"/>
-              </a:spcBef>
-              <a:spcAft>
-                <a:spcPts val="200"/>
-              </a:spcAft>
-            </a:pPr>
-            <a:r>
-              <a:rPr sz="1200">
-                <a:solidFill>
-                  <a:srgbClr val="3D5466"/>
-                </a:solidFill>
-                <a:latin typeface="Arial"/>
-              </a:rPr>
-              <a:t>## 4.6 Praxiscase: Thomas Gruber entwickelt seine Strategie für den Agrar-Markt</a:t>
-            </a:r>
-          </a:p>
-          <a:p>
-            <a:pPr>
-              <a:spcBef>
-                <a:spcPts val="400"/>
-              </a:spcBef>
-              <a:spcAft>
-                <a:spcPts val="200"/>
-              </a:spcAft>
-            </a:pPr>
-            <a:r>
-              <a:rPr sz="1200">
-                <a:solidFill>
-                  <a:srgbClr val="3D5466"/>
-                </a:solidFill>
-                <a:latin typeface="Arial"/>
-              </a:rPr>
-              <a:t>Ausgangssituation</a:t>
-            </a:r>
-          </a:p>
-          <a:p>
-            <a:pPr>
-              <a:spcBef>
-                <a:spcPts val="400"/>
-              </a:spcBef>
-              <a:spcAft>
-                <a:spcPts val="200"/>
-              </a:spcAft>
-            </a:pPr>
-            <a:r>
-              <a:rPr sz="1200">
-                <a:solidFill>
-                  <a:srgbClr val="3D5466"/>
-                </a:solidFill>
-                <a:latin typeface="Arial"/>
-              </a:rPr>
-              <a:t>Thomas entwickelt seine Marktbearbeitungsstrategie</a:t>
-            </a:r>
-          </a:p>
-          <a:p>
-            <a:pPr>
-              <a:spcBef>
-                <a:spcPts val="400"/>
-              </a:spcBef>
-              <a:spcAft>
-                <a:spcPts val="200"/>
-              </a:spcAft>
-            </a:pPr>
-            <a:r>
-              <a:rPr sz="1200">
-                <a:solidFill>
-                  <a:srgbClr val="3D5466"/>
-                </a:solidFill>
-                <a:latin typeface="Arial"/>
-              </a:rPr>
-              <a:t>Schritt 1: Segmentpriorisierung</a:t>
-            </a:r>
-          </a:p>
-          <a:p>
-            <a:pPr>
-              <a:spcBef>
-                <a:spcPts val="400"/>
-              </a:spcBef>
-              <a:spcAft>
-                <a:spcPts val="200"/>
-              </a:spcAft>
-            </a:pPr>
-            <a:r>
-              <a:rPr sz="1200">
-                <a:solidFill>
-                  <a:srgbClr val="3D5466"/>
-                </a:solidFill>
-                <a:latin typeface="Arial"/>
-              </a:rPr>
-              <a:t>Schritt 2: Marktpotenzial</a:t>
-            </a:r>
-          </a:p>
-          <a:p>
-            <a:pPr>
-              <a:spcBef>
-                <a:spcPts val="400"/>
-              </a:spcBef>
-              <a:spcAft>
-                <a:spcPts val="200"/>
-              </a:spcAft>
-            </a:pPr>
-            <a:r>
-              <a:rPr sz="1200">
-                <a:solidFill>
-                  <a:srgbClr val="3D5466"/>
-                </a:solidFill>
-                <a:latin typeface="Arial"/>
-              </a:rPr>
-              <a:t>Schritt 3: Wertversprechen</a:t>
-            </a:r>
-          </a:p>
-          <a:p>
-            <a:pPr>
-              <a:spcBef>
-                <a:spcPts val="400"/>
-              </a:spcBef>
-              <a:spcAft>
-                <a:spcPts val="200"/>
-              </a:spcAft>
-            </a:pPr>
-            <a:r>
-              <a:rPr sz="1200">
-                <a:solidFill>
-                  <a:srgbClr val="3D5466"/>
-                </a:solidFill>
-                <a:latin typeface="Arial"/>
-              </a:rPr>
-              <a:t>„Für landwirtschaftliche Betriebe in [Region] sind wir der Agrar-Spezialist der VR-Bank: schnelle Investitionsfinanzierungen, GAP-Expertise und ein Netzwerk in die wichtigsten Branchenverbände."</a:t>
-            </a:r>
-          </a:p>
-        </p:txBody>
-      </p:sp>
-      <p:sp>
-        <p:nvSpPr>
-          <p:cNvPr id="9" name="Rectangle 8"/>
+              <a:t>Welche Kanäle funktionieren wirklich?</a:t>
+            </a:r>
+          </a:p>
+        </p:txBody>
+      </p:sp>
+      <p:sp>
+        <p:nvSpPr>
+          <p:cNvPr id="8" name="Rectangle 7"/>
           <p:cNvSpPr/>
           <p:nvPr/>
         </p:nvSpPr>
@@ -6486,7 +6430,7 @@
       </p:sp>
       <p:sp>
         <p:nvSpPr>
-          <p:cNvPr id="10" name="TextBox 9"/>
+          <p:cNvPr id="9" name="TextBox 8"/>
           <p:cNvSpPr txBox="1"/>
           <p:nvPr/>
         </p:nvSpPr>
@@ -6774,7 +6718,7 @@
                 </a:solidFill>
                 <a:latin typeface="Source Serif 4"/>
               </a:rPr>
-              <a:t>Arbeitsblatt A: Segmentpriorisierung – Scoring</a:t>
+              <a:t>Empfehlungsmanagement systematisieren</a:t>
             </a:r>
           </a:p>
         </p:txBody>
@@ -6816,7 +6760,216 @@
                 </a:solidFill>
                 <a:latin typeface="Arial"/>
               </a:rPr>
-              <a:t>Meine drei Kandidatensegmente:</a:t>
+              <a:t>Empfehlungen entstehen nicht zufällig. Ein aktives Empfehlungsmanagement umfasst:</a:t>
+            </a:r>
+          </a:p>
+          <a:p>
+            <a:pPr>
+              <a:spcBef>
+                <a:spcPts val="400"/>
+              </a:spcBef>
+              <a:spcAft>
+                <a:spcPts val="200"/>
+              </a:spcAft>
+            </a:pPr>
+            <a:r>
+              <a:rPr sz="1300">
+                <a:solidFill>
+                  <a:srgbClr val="3D5466"/>
+                </a:solidFill>
+                <a:latin typeface="Arial"/>
+              </a:rPr>
+              <a:t>▸  Identifizieren: Welche meiner Bestandskunden sind Meinungsführer in ihrem Branchenumfeld?</a:t>
+            </a:r>
+          </a:p>
+          <a:p>
+            <a:pPr>
+              <a:spcBef>
+                <a:spcPts val="400"/>
+              </a:spcBef>
+              <a:spcAft>
+                <a:spcPts val="200"/>
+              </a:spcAft>
+            </a:pPr>
+            <a:r>
+              <a:rPr sz="1300">
+                <a:solidFill>
+                  <a:srgbClr val="3D5466"/>
+                </a:solidFill>
+                <a:latin typeface="Arial"/>
+              </a:rPr>
+              <a:t>▸  Beziehung vertiefen: Diese Kunden erhalten besondere Aufmerksamkeit – nicht wegen der Empfehlung, sondern wegen ihres Werts.</a:t>
+            </a:r>
+          </a:p>
+          <a:p>
+            <a:pPr>
+              <a:spcBef>
+                <a:spcPts val="400"/>
+              </a:spcBef>
+              <a:spcAft>
+                <a:spcPts val="200"/>
+              </a:spcAft>
+            </a:pPr>
+            <a:r>
+              <a:rPr sz="1300">
+                <a:solidFill>
+                  <a:srgbClr val="3D5466"/>
+                </a:solidFill>
+                <a:latin typeface="Arial"/>
+              </a:rPr>
+              <a:t>▸  Aktiv bitten: Am Ende eines erfolgreichen Gesprächs: „Gibt es Unternehmen in Ihrem Umfeld, die unsere Zusammenarbeit kennenlernen sollten?"</a:t>
+            </a:r>
+          </a:p>
+          <a:p>
+            <a:pPr>
+              <a:spcBef>
+                <a:spcPts val="400"/>
+              </a:spcBef>
+              <a:spcAft>
+                <a:spcPts val="200"/>
+              </a:spcAft>
+            </a:pPr>
+            <a:r>
+              <a:rPr sz="1300">
+                <a:solidFill>
+                  <a:srgbClr val="3D5466"/>
+                </a:solidFill>
+                <a:latin typeface="Arial"/>
+              </a:rPr>
+              <a:t>▸  Danken und schließen: Rückmeldung geben, ob der Kontakt erfolgreich war.</a:t>
+            </a:r>
+          </a:p>
+          <a:p>
+            <a:pPr>
+              <a:spcBef>
+                <a:spcPts val="400"/>
+              </a:spcBef>
+              <a:spcAft>
+                <a:spcPts val="200"/>
+              </a:spcAft>
+            </a:pPr>
+            <a:r>
+              <a:rPr sz="1200">
+                <a:solidFill>
+                  <a:srgbClr val="3D5466"/>
+                </a:solidFill>
+                <a:latin typeface="Arial"/>
+              </a:rPr>
+              <a:t>## 4.6 Praxiscase: Thomas Gruber entwickelt seine Strategie für den Agrar-Markt</a:t>
+            </a:r>
+          </a:p>
+          <a:p>
+            <a:pPr>
+              <a:spcBef>
+                <a:spcPts val="400"/>
+              </a:spcBef>
+              <a:spcAft>
+                <a:spcPts val="200"/>
+              </a:spcAft>
+            </a:pPr>
+            <a:r>
+              <a:rPr sz="1200">
+                <a:solidFill>
+                  <a:srgbClr val="3D5466"/>
+                </a:solidFill>
+                <a:latin typeface="Arial"/>
+              </a:rPr>
+              <a:t>Ausgangssituation</a:t>
+            </a:r>
+          </a:p>
+          <a:p>
+            <a:pPr>
+              <a:spcBef>
+                <a:spcPts val="400"/>
+              </a:spcBef>
+              <a:spcAft>
+                <a:spcPts val="200"/>
+              </a:spcAft>
+            </a:pPr>
+            <a:r>
+              <a:rPr sz="1200">
+                <a:solidFill>
+                  <a:srgbClr val="3D5466"/>
+                </a:solidFill>
+                <a:latin typeface="Arial"/>
+              </a:rPr>
+              <a:t>Thomas entwickelt seine Marktbearbeitungsstrategie</a:t>
+            </a:r>
+          </a:p>
+          <a:p>
+            <a:pPr>
+              <a:spcBef>
+                <a:spcPts val="400"/>
+              </a:spcBef>
+              <a:spcAft>
+                <a:spcPts val="200"/>
+              </a:spcAft>
+            </a:pPr>
+            <a:r>
+              <a:rPr sz="1200">
+                <a:solidFill>
+                  <a:srgbClr val="3D5466"/>
+                </a:solidFill>
+                <a:latin typeface="Arial"/>
+              </a:rPr>
+              <a:t>Schritt 1: Segmentpriorisierung</a:t>
+            </a:r>
+          </a:p>
+          <a:p>
+            <a:pPr>
+              <a:spcBef>
+                <a:spcPts val="400"/>
+              </a:spcBef>
+              <a:spcAft>
+                <a:spcPts val="200"/>
+              </a:spcAft>
+            </a:pPr>
+            <a:r>
+              <a:rPr sz="1200">
+                <a:solidFill>
+                  <a:srgbClr val="3D5466"/>
+                </a:solidFill>
+                <a:latin typeface="Arial"/>
+              </a:rPr>
+              <a:t>Schritt 2: Marktpotenzial</a:t>
+            </a:r>
+          </a:p>
+          <a:p>
+            <a:pPr>
+              <a:spcBef>
+                <a:spcPts val="400"/>
+              </a:spcBef>
+              <a:spcAft>
+                <a:spcPts val="200"/>
+              </a:spcAft>
+            </a:pPr>
+            <a:r>
+              <a:rPr sz="1200">
+                <a:solidFill>
+                  <a:srgbClr val="3D5466"/>
+                </a:solidFill>
+                <a:latin typeface="Arial"/>
+              </a:rPr>
+              <a:t>Schritt 3: Wertversprechen</a:t>
+            </a:r>
+          </a:p>
+          <a:p>
+            <a:pPr>
+              <a:spcBef>
+                <a:spcPts val="400"/>
+              </a:spcBef>
+              <a:spcAft>
+                <a:spcPts val="200"/>
+              </a:spcAft>
+            </a:pPr>
+            <a:r>
+              <a:rPr sz="1200">
+                <a:solidFill>
+                  <a:srgbClr val="3D5466"/>
+                </a:solidFill>
+                <a:latin typeface="Arial"/>
+              </a:rPr>
+              <a:t>„Für landwirtschaftliche Betriebe in [Region] sind wir der Agrar-Spezialist der VR-Bank: schnelle Investitionsfinanzierungen, GAP-Expertise und ein Netzwerk in die wichtigsten Branchenverbände."</a:t>
             </a:r>
           </a:p>
         </p:txBody>
@@ -7154,6 +7307,386 @@
                 </a:solidFill>
                 <a:latin typeface="Source Serif 4"/>
               </a:rPr>
+              <a:t>Arbeitsblatt A: Segmentpriorisierung – Scoring</a:t>
+            </a:r>
+          </a:p>
+        </p:txBody>
+      </p:sp>
+      <p:sp>
+        <p:nvSpPr>
+          <p:cNvPr id="8" name="TextBox 7"/>
+          <p:cNvSpPr txBox="1"/>
+          <p:nvPr/>
+        </p:nvSpPr>
+        <p:spPr>
+          <a:xfrm>
+            <a:off x="685800" y="1417320"/>
+            <a:ext cx="10817352" cy="5029200"/>
+          </a:xfrm>
+          <a:prstGeom prst="rect">
+            <a:avLst/>
+          </a:prstGeom>
+          <a:noFill/>
+        </p:spPr>
+        <p:txBody>
+          <a:bodyPr wrap="square">
+            <a:spAutoFit/>
+          </a:bodyPr>
+          <a:lstStyle/>
+          <a:p>
+            <a:pPr>
+              <a:spcBef>
+                <a:spcPts val="400"/>
+              </a:spcBef>
+              <a:spcAft>
+                <a:spcPts val="200"/>
+              </a:spcAft>
+            </a:pPr>
+            <a:r>
+              <a:rPr sz="1200">
+                <a:solidFill>
+                  <a:srgbClr val="3D5466"/>
+                </a:solidFill>
+                <a:latin typeface="Arial"/>
+              </a:rPr>
+              <a:t>Meine drei Kandidatensegmente:</a:t>
+            </a:r>
+          </a:p>
+        </p:txBody>
+      </p:sp>
+      <p:sp>
+        <p:nvSpPr>
+          <p:cNvPr id="9" name="Rectangle 8"/>
+          <p:cNvSpPr/>
+          <p:nvPr/>
+        </p:nvSpPr>
+        <p:spPr>
+          <a:xfrm>
+            <a:off x="0" y="6510528"/>
+            <a:ext cx="12188952" cy="347472"/>
+          </a:xfrm>
+          <a:prstGeom prst="rect">
+            <a:avLst/>
+          </a:prstGeom>
+          <a:solidFill>
+            <a:srgbClr val="0A1937"/>
+          </a:solidFill>
+          <a:ln>
+            <a:noFill/>
+          </a:ln>
+        </p:spPr>
+        <p:style>
+          <a:lnRef idx="1">
+            <a:schemeClr val="accent1"/>
+          </a:lnRef>
+          <a:fillRef idx="3">
+            <a:schemeClr val="accent1"/>
+          </a:fillRef>
+          <a:effectRef idx="2">
+            <a:schemeClr val="accent1"/>
+          </a:effectRef>
+          <a:fontRef idx="minor">
+            <a:schemeClr val="lt1"/>
+          </a:fontRef>
+        </p:style>
+        <p:txBody>
+          <a:bodyPr rtlCol="0" anchor="ctr"/>
+          <a:lstStyle/>
+          <a:p>
+            <a:pPr algn="ctr"/>
+          </a:p>
+        </p:txBody>
+      </p:sp>
+      <p:sp>
+        <p:nvSpPr>
+          <p:cNvPr id="10" name="TextBox 9"/>
+          <p:cNvSpPr txBox="1"/>
+          <p:nvPr/>
+        </p:nvSpPr>
+        <p:spPr>
+          <a:xfrm>
+            <a:off x="685800" y="6583680"/>
+            <a:ext cx="6490411" cy="256032"/>
+          </a:xfrm>
+          <a:prstGeom prst="rect">
+            <a:avLst/>
+          </a:prstGeom>
+          <a:noFill/>
+        </p:spPr>
+        <p:txBody>
+          <a:bodyPr wrap="none">
+            <a:spAutoFit/>
+          </a:bodyPr>
+          <a:lstStyle/>
+          <a:p>
+            <a:pPr algn="l"/>
+            <a:r>
+              <a:rPr sz="700">
+                <a:solidFill>
+                  <a:srgbClr val="A0B4D2"/>
+                </a:solidFill>
+                <a:latin typeface="JetBrains Mono"/>
+              </a:rPr>
+              <a:t>Benedikt Zoller Coaching  ·  FKB Campus  ·  M15</a:t>
+            </a:r>
+          </a:p>
+        </p:txBody>
+      </p:sp>
+    </p:spTree>
+  </p:cSld>
+  <p:clrMapOvr>
+    <a:masterClrMapping/>
+  </p:clrMapOvr>
+</p:sld>
+</file>
+
+<file path=ppt/slides/slide16.xml><?xml version="1.0" encoding="utf-8"?>
+<p:sld xmlns:a="http://schemas.openxmlformats.org/drawingml/2006/main" xmlns:p="http://schemas.openxmlformats.org/presentationml/2006/main" xmlns:r="http://schemas.openxmlformats.org/officeDocument/2006/relationships">
+  <p:cSld>
+    <p:spTree>
+      <p:nvGrpSpPr>
+        <p:cNvPr id="1" name=""/>
+        <p:cNvGrpSpPr/>
+        <p:nvPr/>
+      </p:nvGrpSpPr>
+      <p:grpSpPr/>
+      <p:sp>
+        <p:nvSpPr>
+          <p:cNvPr id="2" name="Rectangle 1"/>
+          <p:cNvSpPr/>
+          <p:nvPr/>
+        </p:nvSpPr>
+        <p:spPr>
+          <a:xfrm>
+            <a:off x="0" y="0"/>
+            <a:ext cx="12188952" cy="6858000"/>
+          </a:xfrm>
+          <a:prstGeom prst="rect">
+            <a:avLst/>
+          </a:prstGeom>
+          <a:solidFill>
+            <a:srgbClr val="EDEDF3"/>
+          </a:solidFill>
+          <a:ln>
+            <a:noFill/>
+          </a:ln>
+        </p:spPr>
+        <p:style>
+          <a:lnRef idx="1">
+            <a:schemeClr val="accent1"/>
+          </a:lnRef>
+          <a:fillRef idx="3">
+            <a:schemeClr val="accent1"/>
+          </a:fillRef>
+          <a:effectRef idx="2">
+            <a:schemeClr val="accent1"/>
+          </a:effectRef>
+          <a:fontRef idx="minor">
+            <a:schemeClr val="lt1"/>
+          </a:fontRef>
+        </p:style>
+        <p:txBody>
+          <a:bodyPr rtlCol="0" anchor="ctr"/>
+          <a:lstStyle/>
+          <a:p>
+            <a:pPr algn="ctr"/>
+          </a:p>
+        </p:txBody>
+      </p:sp>
+      <p:sp>
+        <p:nvSpPr>
+          <p:cNvPr id="3" name="Rectangle 2"/>
+          <p:cNvSpPr/>
+          <p:nvPr/>
+        </p:nvSpPr>
+        <p:spPr>
+          <a:xfrm>
+            <a:off x="0" y="0"/>
+            <a:ext cx="12188952" cy="50292"/>
+          </a:xfrm>
+          <a:prstGeom prst="rect">
+            <a:avLst/>
+          </a:prstGeom>
+          <a:solidFill>
+            <a:srgbClr val="1F2C56"/>
+          </a:solidFill>
+          <a:ln>
+            <a:noFill/>
+          </a:ln>
+        </p:spPr>
+        <p:style>
+          <a:lnRef idx="1">
+            <a:schemeClr val="accent1"/>
+          </a:lnRef>
+          <a:fillRef idx="3">
+            <a:schemeClr val="accent1"/>
+          </a:fillRef>
+          <a:effectRef idx="2">
+            <a:schemeClr val="accent1"/>
+          </a:effectRef>
+          <a:fontRef idx="minor">
+            <a:schemeClr val="lt1"/>
+          </a:fontRef>
+        </p:style>
+        <p:txBody>
+          <a:bodyPr rtlCol="0" anchor="ctr"/>
+          <a:lstStyle/>
+          <a:p>
+            <a:pPr algn="ctr"/>
+          </a:p>
+        </p:txBody>
+      </p:sp>
+      <p:sp>
+        <p:nvSpPr>
+          <p:cNvPr id="4" name="TextBox 3"/>
+          <p:cNvSpPr txBox="1"/>
+          <p:nvPr/>
+        </p:nvSpPr>
+        <p:spPr>
+          <a:xfrm>
+            <a:off x="685800" y="109728"/>
+            <a:ext cx="10817352" cy="228600"/>
+          </a:xfrm>
+          <a:prstGeom prst="rect">
+            <a:avLst/>
+          </a:prstGeom>
+          <a:noFill/>
+        </p:spPr>
+        <p:txBody>
+          <a:bodyPr wrap="none">
+            <a:spAutoFit/>
+          </a:bodyPr>
+          <a:lstStyle/>
+          <a:p>
+            <a:pPr algn="l"/>
+            <a:r>
+              <a:rPr sz="750">
+                <a:solidFill>
+                  <a:srgbClr val="78808C"/>
+                </a:solidFill>
+                <a:latin typeface="JetBrains Mono"/>
+              </a:rPr>
+              <a:t>M15  ·  INHALT</a:t>
+            </a:r>
+          </a:p>
+        </p:txBody>
+      </p:sp>
+      <p:sp>
+        <p:nvSpPr>
+          <p:cNvPr id="5" name="Rectangle 4"/>
+          <p:cNvSpPr/>
+          <p:nvPr/>
+        </p:nvSpPr>
+        <p:spPr>
+          <a:xfrm>
+            <a:off x="0" y="1234440"/>
+            <a:ext cx="12188952" cy="12700"/>
+          </a:xfrm>
+          <a:prstGeom prst="rect">
+            <a:avLst/>
+          </a:prstGeom>
+          <a:solidFill>
+            <a:srgbClr val="D8DFE4"/>
+          </a:solidFill>
+          <a:ln>
+            <a:noFill/>
+          </a:ln>
+        </p:spPr>
+        <p:style>
+          <a:lnRef idx="1">
+            <a:schemeClr val="accent1"/>
+          </a:lnRef>
+          <a:fillRef idx="3">
+            <a:schemeClr val="accent1"/>
+          </a:fillRef>
+          <a:effectRef idx="2">
+            <a:schemeClr val="accent1"/>
+          </a:effectRef>
+          <a:fontRef idx="minor">
+            <a:schemeClr val="lt1"/>
+          </a:fontRef>
+        </p:style>
+        <p:txBody>
+          <a:bodyPr rtlCol="0" anchor="ctr"/>
+          <a:lstStyle/>
+          <a:p>
+            <a:pPr algn="ctr"/>
+          </a:p>
+        </p:txBody>
+      </p:sp>
+      <p:sp>
+        <p:nvSpPr>
+          <p:cNvPr id="6" name="Rectangle 5"/>
+          <p:cNvSpPr/>
+          <p:nvPr/>
+        </p:nvSpPr>
+        <p:spPr>
+          <a:xfrm>
+            <a:off x="685800" y="502920"/>
+            <a:ext cx="36576" cy="658368"/>
+          </a:xfrm>
+          <a:prstGeom prst="rect">
+            <a:avLst/>
+          </a:prstGeom>
+          <a:solidFill>
+            <a:srgbClr val="D9C089"/>
+          </a:solidFill>
+          <a:ln>
+            <a:noFill/>
+          </a:ln>
+        </p:spPr>
+        <p:style>
+          <a:lnRef idx="1">
+            <a:schemeClr val="accent1"/>
+          </a:lnRef>
+          <a:fillRef idx="3">
+            <a:schemeClr val="accent1"/>
+          </a:fillRef>
+          <a:effectRef idx="2">
+            <a:schemeClr val="accent1"/>
+          </a:effectRef>
+          <a:fontRef idx="minor">
+            <a:schemeClr val="lt1"/>
+          </a:fontRef>
+        </p:style>
+        <p:txBody>
+          <a:bodyPr rtlCol="0" anchor="ctr"/>
+          <a:lstStyle/>
+          <a:p>
+            <a:pPr algn="ctr"/>
+          </a:p>
+        </p:txBody>
+      </p:sp>
+      <p:sp>
+        <p:nvSpPr>
+          <p:cNvPr id="7" name="TextBox 6"/>
+          <p:cNvSpPr txBox="1"/>
+          <p:nvPr/>
+        </p:nvSpPr>
+        <p:spPr>
+          <a:xfrm>
+            <a:off x="813816" y="502920"/>
+            <a:ext cx="10634472" cy="685800"/>
+          </a:xfrm>
+          <a:prstGeom prst="rect">
+            <a:avLst/>
+          </a:prstGeom>
+          <a:noFill/>
+        </p:spPr>
+        <p:txBody>
+          <a:bodyPr wrap="square">
+            <a:spAutoFit/>
+          </a:bodyPr>
+          <a:lstStyle/>
+          <a:p>
+            <a:pPr algn="l"/>
+            <a:r>
+              <a:rPr sz="2400" b="1" i="0">
+                <a:solidFill>
+                  <a:srgbClr val="1F2C56"/>
+                </a:solidFill>
+                <a:latin typeface="Source Serif 4"/>
+              </a:rPr>
               <a:t>Arbeitsblatt B: Marktbearbeitungs-Jahresplan</a:t>
             </a:r>
           </a:p>
@@ -7413,7 +7946,7 @@
                 </a:solidFill>
                 <a:latin typeface="JetBrains Mono"/>
               </a:rPr>
-              <a:t>LERNZIELE  ·  M15</a:t>
+              <a:t>ÜBERBLICK  ·  M15</a:t>
             </a:r>
           </a:p>
         </p:txBody>
@@ -7491,7 +8024,7 @@
                 </a:solidFill>
                 <a:latin typeface="Source Serif 4"/>
               </a:rPr>
-              <a:t>Was Sie heute mitnehmen</a:t>
+              <a:t>Worum geht es heute</a:t>
             </a:r>
           </a:p>
         </p:txBody>
@@ -7504,8 +8037,8 @@
         </p:nvSpPr>
         <p:spPr>
           <a:xfrm>
-            <a:off x="685800" y="1371600"/>
-            <a:ext cx="10817352" cy="5120640"/>
+            <a:off x="685800" y="1737360"/>
+            <a:ext cx="9720072" cy="4206240"/>
           </a:xfrm>
           <a:prstGeom prst="rect">
             <a:avLst/>
@@ -7519,97 +8052,50 @@
           <a:lstStyle/>
           <a:p>
             <a:pPr>
-              <a:spcBef>
-                <a:spcPts val="800"/>
-              </a:spcBef>
               <a:spcAft>
-                <a:spcPts val="200"/>
+                <a:spcPts val="1200"/>
               </a:spcAft>
             </a:pPr>
             <a:r>
-              <a:rPr sz="1400">
+              <a:rPr sz="1700">
                 <a:solidFill>
                   <a:srgbClr val="3D5466"/>
                 </a:solidFill>
                 <a:latin typeface="Arial"/>
               </a:rPr>
-              <a:t>▸  Das Marktpotenzial in einem selbstgewählten Zielsegment analysieren und adressierbare Neukunden-Opportunitäten schätzen</a:t>
+              <a:t>Wer jeden Kunden gleich bedient, verzettelt seine Marktbearbeitung.</a:t>
             </a:r>
           </a:p>
           <a:p>
             <a:pPr>
-              <a:spcBef>
-                <a:spcPts val="800"/>
-              </a:spcBef>
               <a:spcAft>
-                <a:spcPts val="200"/>
+                <a:spcPts val="1200"/>
               </a:spcAft>
             </a:pPr>
             <a:r>
-              <a:rPr sz="1400">
+              <a:rPr sz="1700">
                 <a:solidFill>
                   <a:srgbClr val="3D5466"/>
                 </a:solidFill>
                 <a:latin typeface="Arial"/>
               </a:rPr>
-              <a:t>▸  Die Wettbewerbsposition der eigenen Bank im Zielsegment anhand von Stärken, Schwächen und Differenzierungspotenzialen bewerten</a:t>
+              <a:t>In diesem Strategieworkshop segmentieren Sie Ihren Markt, analysieren Wettbewerb und eigene Stärken (Porter, SWOT) und entwickeln einen konkreten Maßnahmenplan.</a:t>
             </a:r>
           </a:p>
           <a:p>
             <a:pPr>
-              <a:spcBef>
-                <a:spcPts val="800"/>
-              </a:spcBef>
               <a:spcAft>
-                <a:spcPts val="200"/>
+                <a:spcPts val="1200"/>
               </a:spcAft>
             </a:pPr>
             <a:r>
-              <a:rPr sz="1400">
+              <a:rPr sz="1700">
                 <a:solidFill>
                   <a:srgbClr val="3D5466"/>
                 </a:solidFill>
                 <a:latin typeface="Arial"/>
               </a:rPr>
-              <a:t>▸  Eine Marktbearbeitungsstrategie mit Zielkunden-Kriterien, Wertversprechen und Anspracheansatz entwickeln</a:t>
-            </a:r>
-          </a:p>
-          <a:p>
-            <a:pPr>
-              <a:spcBef>
-                <a:spcPts val="800"/>
-              </a:spcBef>
-              <a:spcAft>
-                <a:spcPts val="200"/>
-              </a:spcAft>
-            </a:pPr>
-            <a:r>
-              <a:rPr sz="1400">
-                <a:solidFill>
-                  <a:srgbClr val="3D5466"/>
-                </a:solidFill>
-                <a:latin typeface="Arial"/>
-              </a:rPr>
-              <a:t>▸  Die Eignung verschiedener Neukundenansprache-Kanäle für das Zielsegment bewerten und die zwei effektivsten wählen</a:t>
-            </a:r>
-          </a:p>
-          <a:p>
-            <a:pPr>
-              <a:spcBef>
-                <a:spcPts val="800"/>
-              </a:spcBef>
-              <a:spcAft>
-                <a:spcPts val="200"/>
-              </a:spcAft>
-            </a:pPr>
-            <a:r>
-              <a:rPr sz="1400">
-                <a:solidFill>
-                  <a:srgbClr val="3D5466"/>
-                </a:solidFill>
-                <a:latin typeface="Arial"/>
-              </a:rPr>
-              <a:t>▸  Einen strukturierten Jahresplan mit Zielgrößen, Maßnahmen und Meilensteinen erstellen</a:t>
+              <a:t>Danach haben Sie eine priorisierte Marktbearbeitungsstrategie für Ihr Geschäftsgebiet – mit Meilensteinen und Zielgrößen.</a:t>
             </a:r>
           </a:p>
         </p:txBody>
@@ -7826,7 +8312,7 @@
                 </a:solidFill>
                 <a:latin typeface="JetBrains Mono"/>
               </a:rPr>
-              <a:t>AGENDA  ·  M15</a:t>
+              <a:t>LERNZIELE  ·  M15</a:t>
             </a:r>
           </a:p>
         </p:txBody>
@@ -7904,7 +8390,7 @@
                 </a:solidFill>
                 <a:latin typeface="Source Serif 4"/>
               </a:rPr>
-              <a:t>Agenda</a:t>
+              <a:t>Was Sie heute mitnehmen</a:t>
             </a:r>
           </a:p>
         </p:txBody>
@@ -7917,8 +8403,8 @@
         </p:nvSpPr>
         <p:spPr>
           <a:xfrm>
-            <a:off x="685800" y="1463040"/>
-            <a:ext cx="10817352" cy="4937760"/>
+            <a:off x="685800" y="1371600"/>
+            <a:ext cx="10817352" cy="5120640"/>
           </a:xfrm>
           <a:prstGeom prst="rect">
             <a:avLst/>
@@ -7940,13 +8426,13 @@
               </a:spcAft>
             </a:pPr>
             <a:r>
-              <a:rPr sz="1500">
+              <a:rPr sz="1400">
                 <a:solidFill>
                   <a:srgbClr val="3D5466"/>
                 </a:solidFill>
                 <a:latin typeface="Arial"/>
               </a:rPr>
-              <a:t>01   Vom reaktiven zum strategischen Vertrieb</a:t>
+              <a:t>▸  Das Marktpotenzial in einem selbstgewählten Zielsegment analysieren und adressierbare Neukunden-Opportunitäten schätzen</a:t>
             </a:r>
           </a:p>
           <a:p>
@@ -7959,13 +8445,13 @@
               </a:spcAft>
             </a:pPr>
             <a:r>
-              <a:rPr sz="1500">
+              <a:rPr sz="1400">
                 <a:solidFill>
                   <a:srgbClr val="3D5466"/>
                 </a:solidFill>
                 <a:latin typeface="Arial"/>
               </a:rPr>
-              <a:t>02   Segmentierungskriterien</a:t>
+              <a:t>▸  Die Wettbewerbsposition der eigenen Bank im Zielsegment anhand von Stärken, Schwächen und Differenzierungspotenzialen bewerten</a:t>
             </a:r>
           </a:p>
           <a:p>
@@ -7978,13 +8464,13 @@
               </a:spcAft>
             </a:pPr>
             <a:r>
-              <a:rPr sz="1500">
+              <a:rPr sz="1400">
                 <a:solidFill>
                   <a:srgbClr val="3D5466"/>
                 </a:solidFill>
                 <a:latin typeface="Arial"/>
               </a:rPr>
-              <a:t>03   Das Scoring-Modell zur Segmentpriorisierung</a:t>
+              <a:t>▸  Eine Marktbearbeitungsstrategie mit Zielkunden-Kriterien, Wertversprechen und Anspracheansatz entwickeln</a:t>
             </a:r>
           </a:p>
           <a:p>
@@ -7997,13 +8483,13 @@
               </a:spcAft>
             </a:pPr>
             <a:r>
-              <a:rPr sz="1500">
+              <a:rPr sz="1400">
                 <a:solidFill>
                   <a:srgbClr val="3D5466"/>
                 </a:solidFill>
                 <a:latin typeface="Arial"/>
               </a:rPr>
-              <a:t>04   Wie groß ist mein adressierbarer Markt?</a:t>
+              <a:t>▸  Die Eignung verschiedener Neukundenansprache-Kanäle für das Zielsegment bewerten und die zwei effektivsten wählen</a:t>
             </a:r>
           </a:p>
           <a:p>
@@ -8016,108 +8502,13 @@
               </a:spcAft>
             </a:pPr>
             <a:r>
-              <a:rPr sz="1500">
+              <a:rPr sz="1400">
                 <a:solidFill>
                   <a:srgbClr val="3D5466"/>
                 </a:solidFill>
                 <a:latin typeface="Arial"/>
               </a:rPr>
-              <a:t>05   SWOT im Firmenkundensegment</a:t>
-            </a:r>
-          </a:p>
-          <a:p>
-            <a:pPr>
-              <a:spcBef>
-                <a:spcPts val="800"/>
-              </a:spcBef>
-              <a:spcAft>
-                <a:spcPts val="200"/>
-              </a:spcAft>
-            </a:pPr>
-            <a:r>
-              <a:rPr sz="1500">
-                <a:solidFill>
-                  <a:srgbClr val="3D5466"/>
-                </a:solidFill>
-                <a:latin typeface="Arial"/>
-              </a:rPr>
-              <a:t>06   Wertversprechen formulieren</a:t>
-            </a:r>
-          </a:p>
-          <a:p>
-            <a:pPr>
-              <a:spcBef>
-                <a:spcPts val="800"/>
-              </a:spcBef>
-              <a:spcAft>
-                <a:spcPts val="200"/>
-              </a:spcAft>
-            </a:pPr>
-            <a:r>
-              <a:rPr sz="1500">
-                <a:solidFill>
-                  <a:srgbClr val="3D5466"/>
-                </a:solidFill>
-                <a:latin typeface="Arial"/>
-              </a:rPr>
-              <a:t>07   Welche Kanäle funktionieren wirklich?</a:t>
-            </a:r>
-          </a:p>
-          <a:p>
-            <a:pPr>
-              <a:spcBef>
-                <a:spcPts val="800"/>
-              </a:spcBef>
-              <a:spcAft>
-                <a:spcPts val="200"/>
-              </a:spcAft>
-            </a:pPr>
-            <a:r>
-              <a:rPr sz="1500">
-                <a:solidFill>
-                  <a:srgbClr val="3D5466"/>
-                </a:solidFill>
-                <a:latin typeface="Arial"/>
-              </a:rPr>
-              <a:t>08   Empfehlungsmanagement systematisieren</a:t>
-            </a:r>
-          </a:p>
-          <a:p>
-            <a:pPr>
-              <a:spcBef>
-                <a:spcPts val="800"/>
-              </a:spcBef>
-              <a:spcAft>
-                <a:spcPts val="200"/>
-              </a:spcAft>
-            </a:pPr>
-            <a:r>
-              <a:rPr sz="1500">
-                <a:solidFill>
-                  <a:srgbClr val="3D5466"/>
-                </a:solidFill>
-                <a:latin typeface="Arial"/>
-              </a:rPr>
-              <a:t>09   Arbeitsblatt A: Segmentpriorisierung – Scoring</a:t>
-            </a:r>
-          </a:p>
-          <a:p>
-            <a:pPr>
-              <a:spcBef>
-                <a:spcPts val="800"/>
-              </a:spcBef>
-              <a:spcAft>
-                <a:spcPts val="200"/>
-              </a:spcAft>
-            </a:pPr>
-            <a:r>
-              <a:rPr sz="1500">
-                <a:solidFill>
-                  <a:srgbClr val="3D5466"/>
-                </a:solidFill>
-                <a:latin typeface="Arial"/>
-              </a:rPr>
-              <a:t>10   Arbeitsblatt B: Marktbearbeitungs-Jahresplan</a:t>
+              <a:t>▸  Einen strukturierten Jahresplan mit Zielgrößen, Maßnahmen und Meilensteinen erstellen</a:t>
             </a:r>
           </a:p>
         </p:txBody>
@@ -8334,7 +8725,7 @@
                 </a:solidFill>
                 <a:latin typeface="JetBrains Mono"/>
               </a:rPr>
-              <a:t>M15  ·  INHALT</a:t>
+              <a:t>AGENDA  ·  M15</a:t>
             </a:r>
           </a:p>
         </p:txBody>
@@ -8384,57 +8775,14 @@
       </p:sp>
       <p:sp>
         <p:nvSpPr>
-          <p:cNvPr id="6" name="Rectangle 5"/>
-          <p:cNvSpPr/>
+          <p:cNvPr id="6" name="TextBox 5"/>
+          <p:cNvSpPr txBox="1"/>
           <p:nvPr/>
         </p:nvSpPr>
         <p:spPr>
           <a:xfrm>
             <a:off x="685800" y="502920"/>
-            <a:ext cx="36576" cy="658368"/>
-          </a:xfrm>
-          <a:prstGeom prst="rect">
-            <a:avLst/>
-          </a:prstGeom>
-          <a:solidFill>
-            <a:srgbClr val="D9C089"/>
-          </a:solidFill>
-          <a:ln>
-            <a:noFill/>
-          </a:ln>
-        </p:spPr>
-        <p:style>
-          <a:lnRef idx="1">
-            <a:schemeClr val="accent1"/>
-          </a:lnRef>
-          <a:fillRef idx="3">
-            <a:schemeClr val="accent1"/>
-          </a:fillRef>
-          <a:effectRef idx="2">
-            <a:schemeClr val="accent1"/>
-          </a:effectRef>
-          <a:fontRef idx="minor">
-            <a:schemeClr val="lt1"/>
-          </a:fontRef>
-        </p:style>
-        <p:txBody>
-          <a:bodyPr rtlCol="0" anchor="ctr"/>
-          <a:lstStyle/>
-          <a:p>
-            <a:pPr algn="ctr"/>
-          </a:p>
-        </p:txBody>
-      </p:sp>
-      <p:sp>
-        <p:nvSpPr>
-          <p:cNvPr id="7" name="TextBox 6"/>
-          <p:cNvSpPr txBox="1"/>
-          <p:nvPr/>
-        </p:nvSpPr>
-        <p:spPr>
-          <a:xfrm>
-            <a:off x="813816" y="502920"/>
-            <a:ext cx="10634472" cy="685800"/>
+            <a:ext cx="10817352" cy="658368"/>
           </a:xfrm>
           <a:prstGeom prst="rect">
             <a:avLst/>
@@ -8449,27 +8797,27 @@
           <a:p>
             <a:pPr algn="l"/>
             <a:r>
-              <a:rPr sz="2400" b="1" i="0">
+              <a:rPr sz="2600" b="1" i="0">
                 <a:solidFill>
                   <a:srgbClr val="1F2C56"/>
                 </a:solidFill>
                 <a:latin typeface="Source Serif 4"/>
               </a:rPr>
-              <a:t>Vom reaktiven zum strategischen Vertrieb</a:t>
-            </a:r>
-          </a:p>
-        </p:txBody>
-      </p:sp>
-      <p:sp>
-        <p:nvSpPr>
-          <p:cNvPr id="8" name="TextBox 7"/>
+              <a:t>Agenda</a:t>
+            </a:r>
+          </a:p>
+        </p:txBody>
+      </p:sp>
+      <p:sp>
+        <p:nvSpPr>
+          <p:cNvPr id="7" name="TextBox 6"/>
           <p:cNvSpPr txBox="1"/>
           <p:nvPr/>
         </p:nvSpPr>
         <p:spPr>
           <a:xfrm>
-            <a:off x="685800" y="1417320"/>
-            <a:ext cx="10817352" cy="5029200"/>
+            <a:off x="685800" y="1463040"/>
+            <a:ext cx="10817352" cy="4937760"/>
           </a:xfrm>
           <a:prstGeom prst="rect">
             <a:avLst/>
@@ -8484,122 +8832,198 @@
           <a:p>
             <a:pPr>
               <a:spcBef>
-                <a:spcPts val="400"/>
+                <a:spcPts val="800"/>
               </a:spcBef>
               <a:spcAft>
                 <a:spcPts val="200"/>
               </a:spcAft>
             </a:pPr>
             <a:r>
-              <a:rPr sz="1200">
+              <a:rPr sz="1500">
                 <a:solidFill>
                   <a:srgbClr val="3D5466"/>
                 </a:solidFill>
                 <a:latin typeface="Arial"/>
               </a:rPr>
-              <a:t>Eine Marktbearbeitungsstrategie beantwortet vier Fragen:</a:t>
+              <a:t>01   Vom reaktiven zum strategischen Vertrieb</a:t>
             </a:r>
           </a:p>
           <a:p>
             <a:pPr>
               <a:spcBef>
-                <a:spcPts val="400"/>
+                <a:spcPts val="800"/>
               </a:spcBef>
               <a:spcAft>
                 <a:spcPts val="200"/>
               </a:spcAft>
             </a:pPr>
             <a:r>
-              <a:rPr sz="1300">
+              <a:rPr sz="1500">
                 <a:solidFill>
                   <a:srgbClr val="3D5466"/>
                 </a:solidFill>
                 <a:latin typeface="Arial"/>
               </a:rPr>
-              <a:t>▸  Wen? – Welches Kundensegment bearbeite ich mit Priorität?</a:t>
+              <a:t>02   Segmentierungskriterien</a:t>
             </a:r>
           </a:p>
           <a:p>
             <a:pPr>
               <a:spcBef>
-                <a:spcPts val="400"/>
+                <a:spcPts val="800"/>
               </a:spcBef>
               <a:spcAft>
                 <a:spcPts val="200"/>
               </a:spcAft>
             </a:pPr>
             <a:r>
-              <a:rPr sz="1300">
+              <a:rPr sz="1500">
                 <a:solidFill>
                   <a:srgbClr val="3D5466"/>
                 </a:solidFill>
                 <a:latin typeface="Arial"/>
               </a:rPr>
-              <a:t>▸  Womit? – Was ist mein Wertversprechen für dieses Segment?</a:t>
+              <a:t>03   Das Scoring-Modell zur Segmentpriorisierung</a:t>
             </a:r>
           </a:p>
           <a:p>
             <a:pPr>
               <a:spcBef>
-                <a:spcPts val="400"/>
+                <a:spcPts val="800"/>
               </a:spcBef>
               <a:spcAft>
                 <a:spcPts val="200"/>
               </a:spcAft>
             </a:pPr>
             <a:r>
-              <a:rPr sz="1300">
+              <a:rPr sz="1500">
                 <a:solidFill>
                   <a:srgbClr val="3D5466"/>
                 </a:solidFill>
                 <a:latin typeface="Arial"/>
               </a:rPr>
-              <a:t>▸  Wie? – Über welche Kanäle und Maßnahmen erreiche ich diese Kunden?</a:t>
+              <a:t>04   Wie groß ist mein adressierbarer Markt?</a:t>
             </a:r>
           </a:p>
           <a:p>
             <a:pPr>
               <a:spcBef>
-                <a:spcPts val="400"/>
+                <a:spcPts val="800"/>
               </a:spcBef>
               <a:spcAft>
                 <a:spcPts val="200"/>
               </a:spcAft>
             </a:pPr>
             <a:r>
-              <a:rPr sz="1300">
+              <a:rPr sz="1500">
                 <a:solidFill>
                   <a:srgbClr val="3D5466"/>
                 </a:solidFill>
                 <a:latin typeface="Arial"/>
               </a:rPr>
-              <a:t>▸  Wann? – Welche Meilensteine und Zielgrößen setze ich uns?</a:t>
+              <a:t>05   SWOT im Firmenkundensegment</a:t>
             </a:r>
           </a:p>
           <a:p>
             <a:pPr>
               <a:spcBef>
-                <a:spcPts val="400"/>
+                <a:spcPts val="800"/>
               </a:spcBef>
               <a:spcAft>
                 <a:spcPts val="200"/>
               </a:spcAft>
             </a:pPr>
             <a:r>
-              <a:rPr sz="1200">
+              <a:rPr sz="1500">
                 <a:solidFill>
                   <a:srgbClr val="3D5466"/>
                 </a:solidFill>
                 <a:latin typeface="Arial"/>
               </a:rPr>
-              <a:t>## 4.2 Marktsegmentierung im Firmenkundengeschäft</a:t>
-            </a:r>
-          </a:p>
-        </p:txBody>
-      </p:sp>
-      <p:sp>
-        <p:nvSpPr>
-          <p:cNvPr id="9" name="Rectangle 8"/>
+              <a:t>06   Wertversprechen formulieren</a:t>
+            </a:r>
+          </a:p>
+          <a:p>
+            <a:pPr>
+              <a:spcBef>
+                <a:spcPts val="800"/>
+              </a:spcBef>
+              <a:spcAft>
+                <a:spcPts val="200"/>
+              </a:spcAft>
+            </a:pPr>
+            <a:r>
+              <a:rPr sz="1500">
+                <a:solidFill>
+                  <a:srgbClr val="3D5466"/>
+                </a:solidFill>
+                <a:latin typeface="Arial"/>
+              </a:rPr>
+              <a:t>07   Welche Kanäle funktionieren wirklich?</a:t>
+            </a:r>
+          </a:p>
+          <a:p>
+            <a:pPr>
+              <a:spcBef>
+                <a:spcPts val="800"/>
+              </a:spcBef>
+              <a:spcAft>
+                <a:spcPts val="200"/>
+              </a:spcAft>
+            </a:pPr>
+            <a:r>
+              <a:rPr sz="1500">
+                <a:solidFill>
+                  <a:srgbClr val="3D5466"/>
+                </a:solidFill>
+                <a:latin typeface="Arial"/>
+              </a:rPr>
+              <a:t>08   Empfehlungsmanagement systematisieren</a:t>
+            </a:r>
+          </a:p>
+          <a:p>
+            <a:pPr>
+              <a:spcBef>
+                <a:spcPts val="800"/>
+              </a:spcBef>
+              <a:spcAft>
+                <a:spcPts val="200"/>
+              </a:spcAft>
+            </a:pPr>
+            <a:r>
+              <a:rPr sz="1500">
+                <a:solidFill>
+                  <a:srgbClr val="3D5466"/>
+                </a:solidFill>
+                <a:latin typeface="Arial"/>
+              </a:rPr>
+              <a:t>09   Arbeitsblatt A: Segmentpriorisierung – Scoring</a:t>
+            </a:r>
+          </a:p>
+          <a:p>
+            <a:pPr>
+              <a:spcBef>
+                <a:spcPts val="800"/>
+              </a:spcBef>
+              <a:spcAft>
+                <a:spcPts val="200"/>
+              </a:spcAft>
+            </a:pPr>
+            <a:r>
+              <a:rPr sz="1500">
+                <a:solidFill>
+                  <a:srgbClr val="3D5466"/>
+                </a:solidFill>
+                <a:latin typeface="Arial"/>
+              </a:rPr>
+              <a:t>10   Arbeitsblatt B: Marktbearbeitungs-Jahresplan</a:t>
+            </a:r>
+          </a:p>
+        </p:txBody>
+      </p:sp>
+      <p:sp>
+        <p:nvSpPr>
+          <p:cNvPr id="8" name="Rectangle 7"/>
           <p:cNvSpPr/>
           <p:nvPr/>
         </p:nvSpPr>
@@ -8642,7 +9066,7 @@
       </p:sp>
       <p:sp>
         <p:nvSpPr>
-          <p:cNvPr id="10" name="TextBox 9"/>
+          <p:cNvPr id="9" name="TextBox 8"/>
           <p:cNvSpPr txBox="1"/>
           <p:nvPr/>
         </p:nvSpPr>
@@ -8708,7 +9132,7 @@
             <a:avLst/>
           </a:prstGeom>
           <a:solidFill>
-            <a:srgbClr val="FFFFFF"/>
+            <a:srgbClr val="EDEDF3"/>
           </a:solidFill>
           <a:ln>
             <a:noFill/>
@@ -8809,43 +9233,51 @@
                 </a:solidFill>
                 <a:latin typeface="JetBrains Mono"/>
               </a:rPr>
-              <a:t>M15  ·  SCHAUBILD</a:t>
-            </a:r>
-          </a:p>
-        </p:txBody>
-      </p:sp>
-      <p:sp>
-        <p:nvSpPr>
-          <p:cNvPr id="5" name="TextBox 4"/>
-          <p:cNvSpPr txBox="1"/>
-          <p:nvPr/>
-        </p:nvSpPr>
-        <p:spPr>
-          <a:xfrm>
-            <a:off x="685800" y="502920"/>
-            <a:ext cx="10817352" cy="594360"/>
-          </a:xfrm>
-          <a:prstGeom prst="rect">
-            <a:avLst/>
-          </a:prstGeom>
-          <a:noFill/>
-        </p:spPr>
-        <p:txBody>
-          <a:bodyPr wrap="square">
-            <a:spAutoFit/>
-          </a:bodyPr>
-          <a:lstStyle/>
-          <a:p>
-            <a:pPr algn="l"/>
-            <a:r>
-              <a:rPr sz="2000" b="1" i="0">
-                <a:solidFill>
-                  <a:srgbClr val="1F2C56"/>
-                </a:solidFill>
-                <a:latin typeface="Source Serif 4"/>
-              </a:rPr>
-              <a:t>Strategie-Landkarte</a:t>
-            </a:r>
+              <a:t>M15  ·  INHALT</a:t>
+            </a:r>
+          </a:p>
+        </p:txBody>
+      </p:sp>
+      <p:sp>
+        <p:nvSpPr>
+          <p:cNvPr id="5" name="Rectangle 4"/>
+          <p:cNvSpPr/>
+          <p:nvPr/>
+        </p:nvSpPr>
+        <p:spPr>
+          <a:xfrm>
+            <a:off x="0" y="1234440"/>
+            <a:ext cx="12188952" cy="12700"/>
+          </a:xfrm>
+          <a:prstGeom prst="rect">
+            <a:avLst/>
+          </a:prstGeom>
+          <a:solidFill>
+            <a:srgbClr val="D8DFE4"/>
+          </a:solidFill>
+          <a:ln>
+            <a:noFill/>
+          </a:ln>
+        </p:spPr>
+        <p:style>
+          <a:lnRef idx="1">
+            <a:schemeClr val="accent1"/>
+          </a:lnRef>
+          <a:fillRef idx="3">
+            <a:schemeClr val="accent1"/>
+          </a:fillRef>
+          <a:effectRef idx="2">
+            <a:schemeClr val="accent1"/>
+          </a:effectRef>
+          <a:fontRef idx="minor">
+            <a:schemeClr val="lt1"/>
+          </a:fontRef>
+        </p:style>
+        <p:txBody>
+          <a:bodyPr rtlCol="0" anchor="ctr"/>
+          <a:lstStyle/>
+          <a:p>
+            <a:pPr algn="ctr"/>
           </a:p>
         </p:txBody>
       </p:sp>
@@ -8857,8 +9289,8 @@
         </p:nvSpPr>
         <p:spPr>
           <a:xfrm>
-            <a:off x="685800" y="1143000"/>
-            <a:ext cx="10817352" cy="25400"/>
+            <a:off x="685800" y="502920"/>
+            <a:ext cx="36576" cy="658368"/>
           </a:xfrm>
           <a:prstGeom prst="rect">
             <a:avLst/>
@@ -8892,33 +9324,181 @@
           </a:p>
         </p:txBody>
       </p:sp>
-      <p:pic>
-        <p:nvPicPr>
-          <p:cNvPr id="7" name="Picture 6" descr="image.png"/>
-          <p:cNvPicPr>
-            <a:picLocks noChangeAspect="1"/>
-          </p:cNvPicPr>
-          <p:nvPr/>
-        </p:nvPicPr>
-        <p:blipFill>
-          <a:blip r:embed="rId2"/>
-          <a:stretch>
-            <a:fillRect/>
-          </a:stretch>
-        </p:blipFill>
-        <p:spPr>
-          <a:xfrm>
-            <a:off x="2303489" y="1325880"/>
-            <a:ext cx="7581973" cy="4937760"/>
-          </a:xfrm>
-          <a:prstGeom prst="rect">
-            <a:avLst/>
-          </a:prstGeom>
-        </p:spPr>
-      </p:pic>
-      <p:sp>
-        <p:nvSpPr>
-          <p:cNvPr id="8" name="Rectangle 7"/>
+      <p:sp>
+        <p:nvSpPr>
+          <p:cNvPr id="7" name="TextBox 6"/>
+          <p:cNvSpPr txBox="1"/>
+          <p:nvPr/>
+        </p:nvSpPr>
+        <p:spPr>
+          <a:xfrm>
+            <a:off x="813816" y="502920"/>
+            <a:ext cx="10634472" cy="685800"/>
+          </a:xfrm>
+          <a:prstGeom prst="rect">
+            <a:avLst/>
+          </a:prstGeom>
+          <a:noFill/>
+        </p:spPr>
+        <p:txBody>
+          <a:bodyPr wrap="square">
+            <a:spAutoFit/>
+          </a:bodyPr>
+          <a:lstStyle/>
+          <a:p>
+            <a:pPr algn="l"/>
+            <a:r>
+              <a:rPr sz="2400" b="1" i="0">
+                <a:solidFill>
+                  <a:srgbClr val="1F2C56"/>
+                </a:solidFill>
+                <a:latin typeface="Source Serif 4"/>
+              </a:rPr>
+              <a:t>Vom reaktiven zum strategischen Vertrieb</a:t>
+            </a:r>
+          </a:p>
+        </p:txBody>
+      </p:sp>
+      <p:sp>
+        <p:nvSpPr>
+          <p:cNvPr id="8" name="TextBox 7"/>
+          <p:cNvSpPr txBox="1"/>
+          <p:nvPr/>
+        </p:nvSpPr>
+        <p:spPr>
+          <a:xfrm>
+            <a:off x="685800" y="1417320"/>
+            <a:ext cx="10817352" cy="5029200"/>
+          </a:xfrm>
+          <a:prstGeom prst="rect">
+            <a:avLst/>
+          </a:prstGeom>
+          <a:noFill/>
+        </p:spPr>
+        <p:txBody>
+          <a:bodyPr wrap="square">
+            <a:spAutoFit/>
+          </a:bodyPr>
+          <a:lstStyle/>
+          <a:p>
+            <a:pPr>
+              <a:spcBef>
+                <a:spcPts val="400"/>
+              </a:spcBef>
+              <a:spcAft>
+                <a:spcPts val="200"/>
+              </a:spcAft>
+            </a:pPr>
+            <a:r>
+              <a:rPr sz="1200">
+                <a:solidFill>
+                  <a:srgbClr val="3D5466"/>
+                </a:solidFill>
+                <a:latin typeface="Arial"/>
+              </a:rPr>
+              <a:t>Eine Marktbearbeitungsstrategie beantwortet vier Fragen:</a:t>
+            </a:r>
+          </a:p>
+          <a:p>
+            <a:pPr>
+              <a:spcBef>
+                <a:spcPts val="400"/>
+              </a:spcBef>
+              <a:spcAft>
+                <a:spcPts val="200"/>
+              </a:spcAft>
+            </a:pPr>
+            <a:r>
+              <a:rPr sz="1300">
+                <a:solidFill>
+                  <a:srgbClr val="3D5466"/>
+                </a:solidFill>
+                <a:latin typeface="Arial"/>
+              </a:rPr>
+              <a:t>▸  Wen? – Welches Kundensegment bearbeite ich mit Priorität?</a:t>
+            </a:r>
+          </a:p>
+          <a:p>
+            <a:pPr>
+              <a:spcBef>
+                <a:spcPts val="400"/>
+              </a:spcBef>
+              <a:spcAft>
+                <a:spcPts val="200"/>
+              </a:spcAft>
+            </a:pPr>
+            <a:r>
+              <a:rPr sz="1300">
+                <a:solidFill>
+                  <a:srgbClr val="3D5466"/>
+                </a:solidFill>
+                <a:latin typeface="Arial"/>
+              </a:rPr>
+              <a:t>▸  Womit? – Was ist mein Wertversprechen für dieses Segment?</a:t>
+            </a:r>
+          </a:p>
+          <a:p>
+            <a:pPr>
+              <a:spcBef>
+                <a:spcPts val="400"/>
+              </a:spcBef>
+              <a:spcAft>
+                <a:spcPts val="200"/>
+              </a:spcAft>
+            </a:pPr>
+            <a:r>
+              <a:rPr sz="1300">
+                <a:solidFill>
+                  <a:srgbClr val="3D5466"/>
+                </a:solidFill>
+                <a:latin typeface="Arial"/>
+              </a:rPr>
+              <a:t>▸  Wie? – Über welche Kanäle und Maßnahmen erreiche ich diese Kunden?</a:t>
+            </a:r>
+          </a:p>
+          <a:p>
+            <a:pPr>
+              <a:spcBef>
+                <a:spcPts val="400"/>
+              </a:spcBef>
+              <a:spcAft>
+                <a:spcPts val="200"/>
+              </a:spcAft>
+            </a:pPr>
+            <a:r>
+              <a:rPr sz="1300">
+                <a:solidFill>
+                  <a:srgbClr val="3D5466"/>
+                </a:solidFill>
+                <a:latin typeface="Arial"/>
+              </a:rPr>
+              <a:t>▸  Wann? – Welche Meilensteine und Zielgrößen setze ich uns?</a:t>
+            </a:r>
+          </a:p>
+          <a:p>
+            <a:pPr>
+              <a:spcBef>
+                <a:spcPts val="400"/>
+              </a:spcBef>
+              <a:spcAft>
+                <a:spcPts val="200"/>
+              </a:spcAft>
+            </a:pPr>
+            <a:r>
+              <a:rPr sz="1200">
+                <a:solidFill>
+                  <a:srgbClr val="3D5466"/>
+                </a:solidFill>
+                <a:latin typeface="Arial"/>
+              </a:rPr>
+              <a:t>## 4.2 Marktsegmentierung im Firmenkundengeschäft</a:t>
+            </a:r>
+          </a:p>
+        </p:txBody>
+      </p:sp>
+      <p:sp>
+        <p:nvSpPr>
+          <p:cNvPr id="9" name="Rectangle 8"/>
           <p:cNvSpPr/>
           <p:nvPr/>
         </p:nvSpPr>
@@ -8961,7 +9541,7 @@
       </p:sp>
       <p:sp>
         <p:nvSpPr>
-          <p:cNvPr id="9" name="TextBox 8"/>
+          <p:cNvPr id="10" name="TextBox 9"/>
           <p:cNvSpPr txBox="1"/>
           <p:nvPr/>
         </p:nvSpPr>
@@ -8990,41 +9570,6 @@
                 <a:latin typeface="JetBrains Mono"/>
               </a:rPr>
               <a:t>Benedikt Zoller Coaching  ·  FKB Campus  ·  M15</a:t>
-            </a:r>
-          </a:p>
-        </p:txBody>
-      </p:sp>
-      <p:sp>
-        <p:nvSpPr>
-          <p:cNvPr id="10" name="TextBox 9"/>
-          <p:cNvSpPr txBox="1"/>
-          <p:nvPr/>
-        </p:nvSpPr>
-        <p:spPr>
-          <a:xfrm>
-            <a:off x="7176211" y="6583680"/>
-            <a:ext cx="4326940" cy="256032"/>
-          </a:xfrm>
-          <a:prstGeom prst="rect">
-            <a:avLst/>
-          </a:prstGeom>
-          <a:noFill/>
-        </p:spPr>
-        <p:txBody>
-          <a:bodyPr wrap="none">
-            <a:spAutoFit/>
-          </a:bodyPr>
-          <a:lstStyle/>
-          <a:p>
-            <a:pPr algn="r"/>
-            <a:r>
-              <a:rPr sz="700">
-                <a:solidFill>
-                  <a:srgbClr val="A0B4D2"/>
-                </a:solidFill>
-                <a:latin typeface="JetBrains Mono"/>
-              </a:rPr>
-              <a:t>Schaubild</a:t>
             </a:r>
           </a:p>
         </p:txBody>
@@ -9198,7 +9743,7 @@
                 </a:solidFill>
                 <a:latin typeface="Source Serif 4"/>
               </a:rPr>
-              <a:t>Five-Forces-Modell nach Porter</a:t>
+              <a:t>Strategie-Landkarte</a:t>
             </a:r>
           </a:p>
         </p:txBody>
@@ -9262,8 +9807,8 @@
         </p:blipFill>
         <p:spPr>
           <a:xfrm>
-            <a:off x="2554863" y="1325880"/>
-            <a:ext cx="7079225" cy="4937760"/>
+            <a:off x="2303489" y="1325880"/>
+            <a:ext cx="7581973" cy="4937760"/>
           </a:xfrm>
           <a:prstGeom prst="rect">
             <a:avLst/>
@@ -9416,7 +9961,7 @@
             <a:avLst/>
           </a:prstGeom>
           <a:solidFill>
-            <a:srgbClr val="EDEDF3"/>
+            <a:srgbClr val="FFFFFF"/>
           </a:solidFill>
           <a:ln>
             <a:noFill/>
@@ -9517,51 +10062,43 @@
                 </a:solidFill>
                 <a:latin typeface="JetBrains Mono"/>
               </a:rPr>
-              <a:t>M15  ·  INHALT</a:t>
-            </a:r>
-          </a:p>
-        </p:txBody>
-      </p:sp>
-      <p:sp>
-        <p:nvSpPr>
-          <p:cNvPr id="5" name="Rectangle 4"/>
-          <p:cNvSpPr/>
-          <p:nvPr/>
-        </p:nvSpPr>
-        <p:spPr>
-          <a:xfrm>
-            <a:off x="0" y="1234440"/>
-            <a:ext cx="12188952" cy="12700"/>
-          </a:xfrm>
-          <a:prstGeom prst="rect">
-            <a:avLst/>
-          </a:prstGeom>
-          <a:solidFill>
-            <a:srgbClr val="D8DFE4"/>
-          </a:solidFill>
-          <a:ln>
-            <a:noFill/>
-          </a:ln>
-        </p:spPr>
-        <p:style>
-          <a:lnRef idx="1">
-            <a:schemeClr val="accent1"/>
-          </a:lnRef>
-          <a:fillRef idx="3">
-            <a:schemeClr val="accent1"/>
-          </a:fillRef>
-          <a:effectRef idx="2">
-            <a:schemeClr val="accent1"/>
-          </a:effectRef>
-          <a:fontRef idx="minor">
-            <a:schemeClr val="lt1"/>
-          </a:fontRef>
-        </p:style>
-        <p:txBody>
-          <a:bodyPr rtlCol="0" anchor="ctr"/>
-          <a:lstStyle/>
-          <a:p>
-            <a:pPr algn="ctr"/>
+              <a:t>M15  ·  SCHAUBILD</a:t>
+            </a:r>
+          </a:p>
+        </p:txBody>
+      </p:sp>
+      <p:sp>
+        <p:nvSpPr>
+          <p:cNvPr id="5" name="TextBox 4"/>
+          <p:cNvSpPr txBox="1"/>
+          <p:nvPr/>
+        </p:nvSpPr>
+        <p:spPr>
+          <a:xfrm>
+            <a:off x="685800" y="502920"/>
+            <a:ext cx="10817352" cy="594360"/>
+          </a:xfrm>
+          <a:prstGeom prst="rect">
+            <a:avLst/>
+          </a:prstGeom>
+          <a:noFill/>
+        </p:spPr>
+        <p:txBody>
+          <a:bodyPr wrap="square">
+            <a:spAutoFit/>
+          </a:bodyPr>
+          <a:lstStyle/>
+          <a:p>
+            <a:pPr algn="l"/>
+            <a:r>
+              <a:rPr sz="2000" b="1" i="0">
+                <a:solidFill>
+                  <a:srgbClr val="1F2C56"/>
+                </a:solidFill>
+                <a:latin typeface="Source Serif 4"/>
+              </a:rPr>
+              <a:t>Five-Forces-Modell nach Porter</a:t>
+            </a:r>
           </a:p>
         </p:txBody>
       </p:sp>
@@ -9573,8 +10110,8 @@
         </p:nvSpPr>
         <p:spPr>
           <a:xfrm>
-            <a:off x="685800" y="502920"/>
-            <a:ext cx="36576" cy="658368"/>
+            <a:off x="685800" y="1143000"/>
+            <a:ext cx="10817352" cy="25400"/>
           </a:xfrm>
           <a:prstGeom prst="rect">
             <a:avLst/>
@@ -9608,105 +10145,33 @@
           </a:p>
         </p:txBody>
       </p:sp>
-      <p:sp>
-        <p:nvSpPr>
-          <p:cNvPr id="7" name="TextBox 6"/>
-          <p:cNvSpPr txBox="1"/>
-          <p:nvPr/>
-        </p:nvSpPr>
-        <p:spPr>
-          <a:xfrm>
-            <a:off x="813816" y="502920"/>
-            <a:ext cx="10634472" cy="685800"/>
-          </a:xfrm>
-          <a:prstGeom prst="rect">
-            <a:avLst/>
-          </a:prstGeom>
-          <a:noFill/>
-        </p:spPr>
-        <p:txBody>
-          <a:bodyPr wrap="square">
-            <a:spAutoFit/>
-          </a:bodyPr>
-          <a:lstStyle/>
-          <a:p>
-            <a:pPr algn="l"/>
-            <a:r>
-              <a:rPr sz="2400" b="1" i="0">
-                <a:solidFill>
-                  <a:srgbClr val="1F2C56"/>
-                </a:solidFill>
-                <a:latin typeface="Source Serif 4"/>
-              </a:rPr>
-              <a:t>Segmentierungskriterien</a:t>
-            </a:r>
-          </a:p>
-        </p:txBody>
-      </p:sp>
-      <p:sp>
-        <p:nvSpPr>
-          <p:cNvPr id="8" name="TextBox 7"/>
-          <p:cNvSpPr txBox="1"/>
-          <p:nvPr/>
-        </p:nvSpPr>
-        <p:spPr>
-          <a:xfrm>
-            <a:off x="685800" y="1417320"/>
-            <a:ext cx="10817352" cy="5029200"/>
-          </a:xfrm>
-          <a:prstGeom prst="rect">
-            <a:avLst/>
-          </a:prstGeom>
-          <a:noFill/>
-        </p:spPr>
-        <p:txBody>
-          <a:bodyPr wrap="square">
-            <a:spAutoFit/>
-          </a:bodyPr>
-          <a:lstStyle/>
-          <a:p>
-            <a:pPr>
-              <a:spcBef>
-                <a:spcPts val="400"/>
-              </a:spcBef>
-              <a:spcAft>
-                <a:spcPts val="200"/>
-              </a:spcAft>
-            </a:pPr>
-            <a:r>
-              <a:rPr sz="1200">
-                <a:solidFill>
-                  <a:srgbClr val="3D5466"/>
-                </a:solidFill>
-                <a:latin typeface="Arial"/>
-              </a:rPr>
-              <a:t>Nicht jeder Firmenkunde ist gleich attraktiv. Eine sinnvolle Segmentierung kombiniert mehrere Kriterien:</a:t>
-            </a:r>
-          </a:p>
-          <a:p>
-            <a:pPr>
-              <a:spcBef>
-                <a:spcPts val="400"/>
-              </a:spcBef>
-              <a:spcAft>
-                <a:spcPts val="200"/>
-              </a:spcAft>
-            </a:pPr>
-            <a:r>
-              <a:rPr sz="1200">
-                <a:solidFill>
-                  <a:srgbClr val="3D5466"/>
-                </a:solidFill>
-                <a:latin typeface="Arial"/>
-              </a:rPr>
-              <a:t>Empfehlung: Wählen Sie maximal zwei Primärsegmente. Breite schlägt Tiefe nur in sehr seltenen Fällen.</a:t>
-            </a:r>
-          </a:p>
-        </p:txBody>
-      </p:sp>
-      <p:sp>
-        <p:nvSpPr>
-          <p:cNvPr id="9" name="Rectangle 8"/>
+      <p:pic>
+        <p:nvPicPr>
+          <p:cNvPr id="7" name="Picture 6" descr="image.png"/>
+          <p:cNvPicPr>
+            <a:picLocks noChangeAspect="1"/>
+          </p:cNvPicPr>
+          <p:nvPr/>
+        </p:nvPicPr>
+        <p:blipFill>
+          <a:blip r:embed="rId2"/>
+          <a:stretch>
+            <a:fillRect/>
+          </a:stretch>
+        </p:blipFill>
+        <p:spPr>
+          <a:xfrm>
+            <a:off x="2554863" y="1325880"/>
+            <a:ext cx="7079225" cy="4937760"/>
+          </a:xfrm>
+          <a:prstGeom prst="rect">
+            <a:avLst/>
+          </a:prstGeom>
+        </p:spPr>
+      </p:pic>
+      <p:sp>
+        <p:nvSpPr>
+          <p:cNvPr id="8" name="Rectangle 7"/>
           <p:cNvSpPr/>
           <p:nvPr/>
         </p:nvSpPr>
@@ -9749,7 +10214,7 @@
       </p:sp>
       <p:sp>
         <p:nvSpPr>
-          <p:cNvPr id="10" name="TextBox 9"/>
+          <p:cNvPr id="9" name="TextBox 8"/>
           <p:cNvSpPr txBox="1"/>
           <p:nvPr/>
         </p:nvSpPr>
@@ -9778,6 +10243,41 @@
                 <a:latin typeface="JetBrains Mono"/>
               </a:rPr>
               <a:t>Benedikt Zoller Coaching  ·  FKB Campus  ·  M15</a:t>
+            </a:r>
+          </a:p>
+        </p:txBody>
+      </p:sp>
+      <p:sp>
+        <p:nvSpPr>
+          <p:cNvPr id="10" name="TextBox 9"/>
+          <p:cNvSpPr txBox="1"/>
+          <p:nvPr/>
+        </p:nvSpPr>
+        <p:spPr>
+          <a:xfrm>
+            <a:off x="7176211" y="6583680"/>
+            <a:ext cx="4326940" cy="256032"/>
+          </a:xfrm>
+          <a:prstGeom prst="rect">
+            <a:avLst/>
+          </a:prstGeom>
+          <a:noFill/>
+        </p:spPr>
+        <p:txBody>
+          <a:bodyPr wrap="none">
+            <a:spAutoFit/>
+          </a:bodyPr>
+          <a:lstStyle/>
+          <a:p>
+            <a:pPr algn="r"/>
+            <a:r>
+              <a:rPr sz="700">
+                <a:solidFill>
+                  <a:srgbClr val="A0B4D2"/>
+                </a:solidFill>
+                <a:latin typeface="JetBrains Mono"/>
+              </a:rPr>
+              <a:t>Schaubild</a:t>
             </a:r>
           </a:p>
         </p:txBody>
@@ -10037,7 +10537,7 @@
                 </a:solidFill>
                 <a:latin typeface="Source Serif 4"/>
               </a:rPr>
-              <a:t>Das Scoring-Modell zur Segmentpriorisierung</a:t>
+              <a:t>Segmentierungskriterien</a:t>
             </a:r>
           </a:p>
         </p:txBody>
@@ -10079,7 +10579,7 @@
                 </a:solidFill>
                 <a:latin typeface="Arial"/>
               </a:rPr>
-              <a:t>Ein einfaches Scoring-Modell hilft bei der Auswahl des Primärsegments:</a:t>
+              <a:t>Nicht jeder Firmenkunde ist gleich attraktiv. Eine sinnvolle Segmentierung kombiniert mehrere Kriterien:</a:t>
             </a:r>
           </a:p>
           <a:p>
@@ -10098,26 +10598,7 @@
                 </a:solidFill>
                 <a:latin typeface="Arial"/>
               </a:rPr>
-              <a:t>Bewertung je Kriterium: 1 (schwach) bis 5 (sehr stark).</a:t>
-            </a:r>
-          </a:p>
-          <a:p>
-            <a:pPr>
-              <a:spcBef>
-                <a:spcPts val="400"/>
-              </a:spcBef>
-              <a:spcAft>
-                <a:spcPts val="200"/>
-              </a:spcAft>
-            </a:pPr>
-            <a:r>
-              <a:rPr sz="1200">
-                <a:solidFill>
-                  <a:srgbClr val="3D5466"/>
-                </a:solidFill>
-                <a:latin typeface="Arial"/>
-              </a:rPr>
-              <a:t>## 4.3 Marktpotenzialanalyse</a:t>
+              <a:t>Empfehlung: Wählen Sie maximal zwei Primärsegmente. Breite schlägt Tiefe nur in sehr seltenen Fällen.</a:t>
             </a:r>
           </a:p>
         </p:txBody>
@@ -10455,7 +10936,7 @@
                 </a:solidFill>
                 <a:latin typeface="Source Serif 4"/>
               </a:rPr>
-              <a:t>Wie groß ist mein adressierbarer Markt?</a:t>
+              <a:t>Das Scoring-Modell zur Segmentpriorisierung</a:t>
             </a:r>
           </a:p>
         </p:txBody>
@@ -10497,7 +10978,7 @@
                 </a:solidFill>
                 <a:latin typeface="Arial"/>
               </a:rPr>
-              <a:t>Vor dem strategischen Einstieg in ein Segment steht die Potenzialschätzung. Die Frage: Wie viele Unternehmen im Zielsegment gibt es in meiner Region, und wie viele davon betreuen wir noch nicht?</a:t>
+              <a:t>Ein einfaches Scoring-Modell hilft bei der Auswahl des Primärsegments:</a:t>
             </a:r>
           </a:p>
           <a:p>
@@ -10516,7 +10997,7 @@
                 </a:solidFill>
                 <a:latin typeface="Arial"/>
               </a:rPr>
-              <a:t>Datenquellen für die Potenzialschätzung:</a:t>
+              <a:t>Bewertung je Kriterium: 1 (schwach) bis 5 (sehr stark).</a:t>
             </a:r>
           </a:p>
           <a:p>
@@ -10535,121 +11016,7 @@
                 </a:solidFill>
                 <a:latin typeface="Arial"/>
               </a:rPr>
-              <a:t>Vereinfachte Potenzialrechnung:</a:t>
-            </a:r>
-          </a:p>
-          <a:p>
-            <a:pPr>
-              <a:spcBef>
-                <a:spcPts val="400"/>
-              </a:spcBef>
-              <a:spcAft>
-                <a:spcPts val="200"/>
-              </a:spcAft>
-            </a:pPr>
-            <a:r>
-              <a:rPr sz="1300">
-                <a:solidFill>
-                  <a:srgbClr val="3D5466"/>
-                </a:solidFill>
-                <a:latin typeface="Arial"/>
-              </a:rPr>
-              <a:t>▸  Zielunternehmen in Region: X</a:t>
-            </a:r>
-          </a:p>
-          <a:p>
-            <a:pPr>
-              <a:spcBef>
-                <a:spcPts val="400"/>
-              </a:spcBef>
-              <a:spcAft>
-                <a:spcPts val="200"/>
-              </a:spcAft>
-            </a:pPr>
-            <a:r>
-              <a:rPr sz="1300">
-                <a:solidFill>
-                  <a:srgbClr val="3D5466"/>
-                </a:solidFill>
-                <a:latin typeface="Arial"/>
-              </a:rPr>
-              <a:t>▸  Davon bereits Kunden: Y</a:t>
-            </a:r>
-          </a:p>
-          <a:p>
-            <a:pPr>
-              <a:spcBef>
-                <a:spcPts val="400"/>
-              </a:spcBef>
-              <a:spcAft>
-                <a:spcPts val="200"/>
-              </a:spcAft>
-            </a:pPr>
-            <a:r>
-              <a:rPr sz="1300">
-                <a:solidFill>
-                  <a:srgbClr val="3D5466"/>
-                </a:solidFill>
-                <a:latin typeface="Arial"/>
-              </a:rPr>
-              <a:t>▸  Adressierbares Neukundenpotenzial: X − Y</a:t>
-            </a:r>
-          </a:p>
-          <a:p>
-            <a:pPr>
-              <a:spcBef>
-                <a:spcPts val="400"/>
-              </a:spcBef>
-              <a:spcAft>
-                <a:spcPts val="200"/>
-              </a:spcAft>
-            </a:pPr>
-            <a:r>
-              <a:rPr sz="1300">
-                <a:solidFill>
-                  <a:srgbClr val="3D5466"/>
-                </a:solidFill>
-                <a:latin typeface="Arial"/>
-              </a:rPr>
-              <a:t>▸  Realistisch erreichbar in 12 Monaten (Marktdurchdringungsrate 2–5 %): Z</a:t>
-            </a:r>
-          </a:p>
-          <a:p>
-            <a:pPr>
-              <a:spcBef>
-                <a:spcPts val="600"/>
-              </a:spcBef>
-              <a:spcAft>
-                <a:spcPts val="200"/>
-              </a:spcAft>
-            </a:pPr>
-            <a:r>
-              <a:rPr sz="1200" i="1">
-                <a:solidFill>
-                  <a:srgbClr val="3D5466"/>
-                </a:solidFill>
-                <a:latin typeface="Arial"/>
-              </a:rPr>
-              <a:t>→  Praxistipp: Unterschätzen Sie die bestehenden Daten in agree nicht. Eine saubere Branchencodierung und ein aktuelles CRM sind die Basis jeder Potenzialanalyse.</a:t>
-            </a:r>
-          </a:p>
-          <a:p>
-            <a:pPr>
-              <a:spcBef>
-                <a:spcPts val="400"/>
-              </a:spcBef>
-              <a:spcAft>
-                <a:spcPts val="200"/>
-              </a:spcAft>
-            </a:pPr>
-            <a:r>
-              <a:rPr sz="1200">
-                <a:solidFill>
-                  <a:srgbClr val="3D5466"/>
-                </a:solidFill>
-                <a:latin typeface="Arial"/>
-              </a:rPr>
-              <a:t>## 4.4 Strategische Positionierung: Stärken-Schwächen vs. Wettbewerb</a:t>
+              <a:t>## 4.3 Marktpotenzialanalyse</a:t>
             </a:r>
           </a:p>
         </p:txBody>

--- a/protected-downloads/praesentation/M15.pptx
+++ b/protected-downloads/praesentation/M15.pptx
@@ -21,6 +21,7 @@
     <p:sldId id="269" r:id="rId21"/>
     <p:sldId id="270" r:id="rId22"/>
     <p:sldId id="271" r:id="rId23"/>
+    <p:sldId id="272" r:id="rId24"/>
   </p:sldIdLst>
   <p:sldSz cx="12188952" cy="6858000" type="screen4x3"/>
   <p:notesSz cx="6858000" cy="9144000"/>
@@ -517,147 +518,7 @@
           <a:lstStyle/>
           <a:p>
             <a:r>
-              <a:t>Agenda-Überblick. Timing und Pausen siehe Ablaufplan im Trainerhandbuch (Sektion 3).</a:t>
-            </a:r>
-          </a:p>
-        </p:txBody>
-      </p:sp>
-      <p:sp>
-        <p:nvSpPr>
-          <p:cNvPr id="4" name="Slide Number Placeholder 3"/>
-          <p:cNvSpPr>
-            <a:spLocks noGrp="1"/>
-          </p:cNvSpPr>
-          <p:nvPr>
-            <p:ph type="sldNum" idx="5" sz="quarter"/>
-          </p:nvPr>
-        </p:nvSpPr>
-        <p:spPr/>
-      </p:sp>
-    </p:spTree>
-  </p:cSld>
-  <p:clrMapOvr>
-    <a:masterClrMapping/>
-  </p:clrMapOvr>
-</p:notes>
-</file>
-
-<file path=ppt/notesSlides/notesSlide10.xml><?xml version="1.0" encoding="utf-8"?>
-<p:notes xmlns:a="http://schemas.openxmlformats.org/drawingml/2006/main" xmlns:p="http://schemas.openxmlformats.org/presentationml/2006/main" xmlns:r="http://schemas.openxmlformats.org/officeDocument/2006/relationships">
-  <p:cSld>
-    <p:spTree>
-      <p:nvGrpSpPr>
-        <p:cNvPr id="1" name=""/>
-        <p:cNvGrpSpPr/>
-        <p:nvPr/>
-      </p:nvGrpSpPr>
-      <p:grpSpPr>
-        <a:xfrm>
-          <a:off x="0" y="0"/>
-          <a:ext cx="0" cy="0"/>
-          <a:chOff x="0" y="0"/>
-          <a:chExt cx="0" cy="0"/>
-        </a:xfrm>
-      </p:grpSpPr>
-      <p:sp>
-        <p:nvSpPr>
-          <p:cNvPr id="2" name="Slide Image Placeholder 1"/>
-          <p:cNvSpPr>
-            <a:spLocks noGrp="1"/>
-          </p:cNvSpPr>
-          <p:nvPr>
-            <p:ph type="sldImg" idx="2"/>
-          </p:nvPr>
-        </p:nvSpPr>
-        <p:spPr/>
-      </p:sp>
-      <p:sp>
-        <p:nvSpPr>
-          <p:cNvPr id="3" name="Notes Placeholder 2"/>
-          <p:cNvSpPr>
-            <a:spLocks noGrp="1"/>
-          </p:cNvSpPr>
-          <p:nvPr>
-            <p:ph type="body" idx="3" sz="quarter"/>
-          </p:nvPr>
-        </p:nvSpPr>
-        <p:spPr/>
-        <p:txBody>
-          <a:bodyPr/>
-          <a:lstStyle/>
-          <a:p>
-            <a:r>
-              <a:t>Siehe Trainerhandbuch (Sektion 3) für Moderationshinweise, Timing und erwartete Teilnehmerreaktionen.</a:t>
-            </a:r>
-          </a:p>
-        </p:txBody>
-      </p:sp>
-      <p:sp>
-        <p:nvSpPr>
-          <p:cNvPr id="4" name="Slide Number Placeholder 3"/>
-          <p:cNvSpPr>
-            <a:spLocks noGrp="1"/>
-          </p:cNvSpPr>
-          <p:nvPr>
-            <p:ph type="sldNum" idx="5" sz="quarter"/>
-          </p:nvPr>
-        </p:nvSpPr>
-        <p:spPr/>
-      </p:sp>
-    </p:spTree>
-  </p:cSld>
-  <p:clrMapOvr>
-    <a:masterClrMapping/>
-  </p:clrMapOvr>
-</p:notes>
-</file>
-
-<file path=ppt/notesSlides/notesSlide11.xml><?xml version="1.0" encoding="utf-8"?>
-<p:notes xmlns:a="http://schemas.openxmlformats.org/drawingml/2006/main" xmlns:p="http://schemas.openxmlformats.org/presentationml/2006/main" xmlns:r="http://schemas.openxmlformats.org/officeDocument/2006/relationships">
-  <p:cSld>
-    <p:spTree>
-      <p:nvGrpSpPr>
-        <p:cNvPr id="1" name=""/>
-        <p:cNvGrpSpPr/>
-        <p:nvPr/>
-      </p:nvGrpSpPr>
-      <p:grpSpPr>
-        <a:xfrm>
-          <a:off x="0" y="0"/>
-          <a:ext cx="0" cy="0"/>
-          <a:chOff x="0" y="0"/>
-          <a:chExt cx="0" cy="0"/>
-        </a:xfrm>
-      </p:grpSpPr>
-      <p:sp>
-        <p:nvSpPr>
-          <p:cNvPr id="2" name="Slide Image Placeholder 1"/>
-          <p:cNvSpPr>
-            <a:spLocks noGrp="1"/>
-          </p:cNvSpPr>
-          <p:nvPr>
-            <p:ph type="sldImg" idx="2"/>
-          </p:nvPr>
-        </p:nvSpPr>
-        <p:spPr/>
-      </p:sp>
-      <p:sp>
-        <p:nvSpPr>
-          <p:cNvPr id="3" name="Notes Placeholder 2"/>
-          <p:cNvSpPr>
-            <a:spLocks noGrp="1"/>
-          </p:cNvSpPr>
-          <p:nvPr>
-            <p:ph type="body" idx="3" sz="quarter"/>
-          </p:nvPr>
-        </p:nvSpPr>
-        <p:spPr/>
-        <p:txBody>
-          <a:bodyPr/>
-          <a:lstStyle/>
-          <a:p>
-            <a:r>
-              <a:t>Siehe Trainerhandbuch (Sektion 3) für Moderationshinweise, Timing und erwartete Teilnehmerreaktionen.</a:t>
+              <a:t>Agenda aus dem Ablaufplan (Sektion 3.1). Timing und Pausen siehe Trainerhandbuch.</a:t>
             </a:r>
           </a:p>
         </p:txBody>
@@ -1077,7 +938,7 @@
           <a:lstStyle/>
           <a:p>
             <a:r>
-              <a:t>Siehe Trainerhandbuch (Sektion 3) für Moderationshinweise, Timing und erwartete Teilnehmerreaktionen.</a:t>
+              <a:t>Trainer-Hinweis: Für die Jahresplanung rechnen wir konservativ mit 15–20 %, damit keine unrealistischen Ziele entstehen. 33 % sind möglich bei sehr qualifizierten Verbundpartner-Leads – als Planungsbasis aber zu optimistisch.</a:t>
             </a:r>
           </a:p>
         </p:txBody>
@@ -1217,7 +1078,7 @@
           <a:lstStyle/>
           <a:p>
             <a:r>
-              <a:t>Trainer-Hinweis: Für die Jahresplanung rechnen wir konservativ mit 15–20 %, damit keine unrealistischen Ziele entstehen. 33 % sind möglich bei sehr qualifizierten Verbundpartner-Leads – als Planungsbasis aber zu optimistisch.</a:t>
+              <a:t>Siehe Trainerhandbuch (Sektion 3) für Moderationshinweise, Timing und erwartete Teilnehmerreaktionen.</a:t>
             </a:r>
           </a:p>
         </p:txBody>
@@ -4813,7 +4674,7 @@
             <a:avLst/>
           </a:prstGeom>
           <a:solidFill>
-            <a:srgbClr val="EDEDF3"/>
+            <a:srgbClr val="FFFFFF"/>
           </a:solidFill>
           <a:ln>
             <a:noFill/>
@@ -4914,51 +4775,43 @@
                 </a:solidFill>
                 <a:latin typeface="JetBrains Mono"/>
               </a:rPr>
-              <a:t>M15  ·  INHALT</a:t>
-            </a:r>
-          </a:p>
-        </p:txBody>
-      </p:sp>
-      <p:sp>
-        <p:nvSpPr>
-          <p:cNvPr id="5" name="Rectangle 4"/>
-          <p:cNvSpPr/>
-          <p:nvPr/>
-        </p:nvSpPr>
-        <p:spPr>
-          <a:xfrm>
-            <a:off x="0" y="1234440"/>
-            <a:ext cx="12188952" cy="12700"/>
-          </a:xfrm>
-          <a:prstGeom prst="rect">
-            <a:avLst/>
-          </a:prstGeom>
-          <a:solidFill>
-            <a:srgbClr val="D8DFE4"/>
-          </a:solidFill>
-          <a:ln>
-            <a:noFill/>
-          </a:ln>
-        </p:spPr>
-        <p:style>
-          <a:lnRef idx="1">
-            <a:schemeClr val="accent1"/>
-          </a:lnRef>
-          <a:fillRef idx="3">
-            <a:schemeClr val="accent1"/>
-          </a:fillRef>
-          <a:effectRef idx="2">
-            <a:schemeClr val="accent1"/>
-          </a:effectRef>
-          <a:fontRef idx="minor">
-            <a:schemeClr val="lt1"/>
-          </a:fontRef>
-        </p:style>
-        <p:txBody>
-          <a:bodyPr rtlCol="0" anchor="ctr"/>
-          <a:lstStyle/>
-          <a:p>
-            <a:pPr algn="ctr"/>
+              <a:t>M15  ·  ÜBERSICHT</a:t>
+            </a:r>
+          </a:p>
+        </p:txBody>
+      </p:sp>
+      <p:sp>
+        <p:nvSpPr>
+          <p:cNvPr id="5" name="TextBox 4"/>
+          <p:cNvSpPr txBox="1"/>
+          <p:nvPr/>
+        </p:nvSpPr>
+        <p:spPr>
+          <a:xfrm>
+            <a:off x="685800" y="502920"/>
+            <a:ext cx="10817352" cy="594360"/>
+          </a:xfrm>
+          <a:prstGeom prst="rect">
+            <a:avLst/>
+          </a:prstGeom>
+          <a:noFill/>
+        </p:spPr>
+        <p:txBody>
+          <a:bodyPr wrap="square">
+            <a:spAutoFit/>
+          </a:bodyPr>
+          <a:lstStyle/>
+          <a:p>
+            <a:pPr algn="l"/>
+            <a:r>
+              <a:rPr sz="2000" b="1" i="0">
+                <a:solidFill>
+                  <a:srgbClr val="1F2C56"/>
+                </a:solidFill>
+                <a:latin typeface="Source Serif 4"/>
+              </a:rPr>
+              <a:t>Das Scoring-Modell zur Segmentpriorisierung</a:t>
+            </a:r>
           </a:p>
         </p:txBody>
       </p:sp>
@@ -4970,8 +4823,8 @@
         </p:nvSpPr>
         <p:spPr>
           <a:xfrm>
-            <a:off x="685800" y="502920"/>
-            <a:ext cx="36576" cy="658368"/>
+            <a:off x="685800" y="1143000"/>
+            <a:ext cx="10817352" cy="25400"/>
           </a:xfrm>
           <a:prstGeom prst="rect">
             <a:avLst/>
@@ -5005,238 +4858,460 @@
           </a:p>
         </p:txBody>
       </p:sp>
-      <p:sp>
-        <p:nvSpPr>
-          <p:cNvPr id="7" name="TextBox 6"/>
-          <p:cNvSpPr txBox="1"/>
-          <p:nvPr/>
-        </p:nvSpPr>
-        <p:spPr>
-          <a:xfrm>
-            <a:off x="813816" y="502920"/>
-            <a:ext cx="10634472" cy="685800"/>
-          </a:xfrm>
-          <a:prstGeom prst="rect">
-            <a:avLst/>
-          </a:prstGeom>
-          <a:noFill/>
-        </p:spPr>
-        <p:txBody>
-          <a:bodyPr wrap="square">
-            <a:spAutoFit/>
-          </a:bodyPr>
-          <a:lstStyle/>
-          <a:p>
-            <a:pPr algn="l"/>
-            <a:r>
-              <a:rPr sz="2400" b="1" i="0">
-                <a:solidFill>
-                  <a:srgbClr val="1F2C56"/>
-                </a:solidFill>
-                <a:latin typeface="Source Serif 4"/>
-              </a:rPr>
-              <a:t>Wie groß ist mein adressierbarer Markt?</a:t>
-            </a:r>
-          </a:p>
-        </p:txBody>
-      </p:sp>
-      <p:sp>
-        <p:nvSpPr>
-          <p:cNvPr id="8" name="TextBox 7"/>
-          <p:cNvSpPr txBox="1"/>
-          <p:nvPr/>
-        </p:nvSpPr>
-        <p:spPr>
-          <a:xfrm>
-            <a:off x="685800" y="1417320"/>
-            <a:ext cx="10817352" cy="5029200"/>
-          </a:xfrm>
-          <a:prstGeom prst="rect">
-            <a:avLst/>
-          </a:prstGeom>
-          <a:noFill/>
-        </p:spPr>
-        <p:txBody>
-          <a:bodyPr wrap="square">
-            <a:spAutoFit/>
-          </a:bodyPr>
-          <a:lstStyle/>
-          <a:p>
-            <a:pPr>
-              <a:spcBef>
-                <a:spcPts val="400"/>
-              </a:spcBef>
-              <a:spcAft>
-                <a:spcPts val="200"/>
-              </a:spcAft>
-            </a:pPr>
-            <a:r>
-              <a:rPr sz="1200">
-                <a:solidFill>
-                  <a:srgbClr val="3D5466"/>
-                </a:solidFill>
-                <a:latin typeface="Arial"/>
-              </a:rPr>
-              <a:t>Vor dem strategischen Einstieg in ein Segment steht die Potenzialschätzung. Die Frage: Wie viele Unternehmen im Zielsegment gibt es in meiner Region, und wie viele davon betreuen wir noch nicht?</a:t>
-            </a:r>
-          </a:p>
-          <a:p>
-            <a:pPr>
-              <a:spcBef>
-                <a:spcPts val="400"/>
-              </a:spcBef>
-              <a:spcAft>
-                <a:spcPts val="200"/>
-              </a:spcAft>
-            </a:pPr>
-            <a:r>
-              <a:rPr sz="1200">
-                <a:solidFill>
-                  <a:srgbClr val="3D5466"/>
-                </a:solidFill>
-                <a:latin typeface="Arial"/>
-              </a:rPr>
-              <a:t>Datenquellen für die Potenzialschätzung:</a:t>
-            </a:r>
-          </a:p>
-          <a:p>
-            <a:pPr>
-              <a:spcBef>
-                <a:spcPts val="400"/>
-              </a:spcBef>
-              <a:spcAft>
-                <a:spcPts val="200"/>
-              </a:spcAft>
-            </a:pPr>
-            <a:r>
-              <a:rPr sz="1200">
-                <a:solidFill>
-                  <a:srgbClr val="3D5466"/>
-                </a:solidFill>
-                <a:latin typeface="Arial"/>
-              </a:rPr>
-              <a:t>Vereinfachte Potenzialrechnung:</a:t>
-            </a:r>
-          </a:p>
-          <a:p>
-            <a:pPr>
-              <a:spcBef>
-                <a:spcPts val="400"/>
-              </a:spcBef>
-              <a:spcAft>
-                <a:spcPts val="200"/>
-              </a:spcAft>
-            </a:pPr>
-            <a:r>
-              <a:rPr sz="1300">
-                <a:solidFill>
-                  <a:srgbClr val="3D5466"/>
-                </a:solidFill>
-                <a:latin typeface="Arial"/>
-              </a:rPr>
-              <a:t>▸  Zielunternehmen in Region: X</a:t>
-            </a:r>
-          </a:p>
-          <a:p>
-            <a:pPr>
-              <a:spcBef>
-                <a:spcPts val="400"/>
-              </a:spcBef>
-              <a:spcAft>
-                <a:spcPts val="200"/>
-              </a:spcAft>
-            </a:pPr>
-            <a:r>
-              <a:rPr sz="1300">
-                <a:solidFill>
-                  <a:srgbClr val="3D5466"/>
-                </a:solidFill>
-                <a:latin typeface="Arial"/>
-              </a:rPr>
-              <a:t>▸  Davon bereits Kunden: Y</a:t>
-            </a:r>
-          </a:p>
-          <a:p>
-            <a:pPr>
-              <a:spcBef>
-                <a:spcPts val="400"/>
-              </a:spcBef>
-              <a:spcAft>
-                <a:spcPts val="200"/>
-              </a:spcAft>
-            </a:pPr>
-            <a:r>
-              <a:rPr sz="1300">
-                <a:solidFill>
-                  <a:srgbClr val="3D5466"/>
-                </a:solidFill>
-                <a:latin typeface="Arial"/>
-              </a:rPr>
-              <a:t>▸  Adressierbares Neukundenpotenzial: X − Y</a:t>
-            </a:r>
-          </a:p>
-          <a:p>
-            <a:pPr>
-              <a:spcBef>
-                <a:spcPts val="400"/>
-              </a:spcBef>
-              <a:spcAft>
-                <a:spcPts val="200"/>
-              </a:spcAft>
-            </a:pPr>
-            <a:r>
-              <a:rPr sz="1300">
-                <a:solidFill>
-                  <a:srgbClr val="3D5466"/>
-                </a:solidFill>
-                <a:latin typeface="Arial"/>
-              </a:rPr>
-              <a:t>▸  Realistisch erreichbar in 12 Monaten (Marktdurchdringungsrate 2–5 %): Z</a:t>
-            </a:r>
-          </a:p>
-          <a:p>
-            <a:pPr>
-              <a:spcBef>
-                <a:spcPts val="600"/>
-              </a:spcBef>
-              <a:spcAft>
-                <a:spcPts val="200"/>
-              </a:spcAft>
-            </a:pPr>
-            <a:r>
-              <a:rPr sz="1200" i="1">
-                <a:solidFill>
-                  <a:srgbClr val="3D5466"/>
-                </a:solidFill>
-                <a:latin typeface="Arial"/>
-              </a:rPr>
-              <a:t>→  Praxistipp: Unterschätzen Sie die bestehenden Daten in agree nicht. Eine saubere Branchencodierung und ein aktuelles CRM sind die Basis jeder Potenzialanalyse.</a:t>
-            </a:r>
-          </a:p>
-          <a:p>
-            <a:pPr>
-              <a:spcBef>
-                <a:spcPts val="400"/>
-              </a:spcBef>
-              <a:spcAft>
-                <a:spcPts val="200"/>
-              </a:spcAft>
-            </a:pPr>
-            <a:r>
-              <a:rPr sz="1200">
-                <a:solidFill>
-                  <a:srgbClr val="3D5466"/>
-                </a:solidFill>
-                <a:latin typeface="Arial"/>
-              </a:rPr>
-              <a:t>## 4.4 Strategische Positionierung: Stärken-Schwächen vs. Wettbewerb</a:t>
-            </a:r>
-          </a:p>
-        </p:txBody>
-      </p:sp>
-      <p:sp>
-        <p:nvSpPr>
-          <p:cNvPr id="9" name="Rectangle 8"/>
+      <p:graphicFrame>
+        <p:nvGraphicFramePr>
+          <p:cNvPr id="7" name="Table 6"/>
+          <p:cNvGraphicFramePr>
+            <a:graphicFrameLocks noGrp="1"/>
+          </p:cNvGraphicFramePr>
+          <p:nvPr/>
+        </p:nvGraphicFramePr>
+        <p:xfrm>
+          <a:off x="685800" y="1417320"/>
+          <a:ext cx="10817352" cy="2304288"/>
+        </p:xfrm>
+        <a:graphic>
+          <a:graphicData uri="http://schemas.openxmlformats.org/drawingml/2006/table">
+            <a:tbl>
+              <a:tblPr firstRow="1" bandRow="1">
+                <a:tableStyleId>{5C22544A-7EE6-4342-B048-85BDC9FD1C3A}</a:tableStyleId>
+              </a:tblPr>
+              <a:tblGrid>
+                <a:gridCol w="2163470"/>
+                <a:gridCol w="2163470"/>
+                <a:gridCol w="2163470"/>
+                <a:gridCol w="2163470"/>
+                <a:gridCol w="2163472"/>
+              </a:tblGrid>
+              <a:tr h="384048">
+                <a:tc>
+                  <a:txBody>
+                    <a:bodyPr/>
+                    <a:lstStyle/>
+                    <a:p>
+                      <a:r>
+                        <a:rPr sz="1100" b="1">
+                          <a:solidFill>
+                            <a:srgbClr val="FFFFFF"/>
+                          </a:solidFill>
+                          <a:latin typeface="Arial"/>
+                        </a:rPr>
+                        <a:t>Kriterium</a:t>
+                      </a:r>
+                    </a:p>
+                  </a:txBody>
+                  <a:tcPr>
+                    <a:solidFill>
+                      <a:srgbClr val="1F2C56"/>
+                    </a:solidFill>
+                  </a:tcPr>
+                </a:tc>
+                <a:tc>
+                  <a:txBody>
+                    <a:bodyPr/>
+                    <a:lstStyle/>
+                    <a:p>
+                      <a:r>
+                        <a:rPr sz="1100" b="1">
+                          <a:solidFill>
+                            <a:srgbClr val="FFFFFF"/>
+                          </a:solidFill>
+                          <a:latin typeface="Arial"/>
+                        </a:rPr>
+                        <a:t>Gewichtung</a:t>
+                      </a:r>
+                    </a:p>
+                  </a:txBody>
+                  <a:tcPr>
+                    <a:solidFill>
+                      <a:srgbClr val="1F2C56"/>
+                    </a:solidFill>
+                  </a:tcPr>
+                </a:tc>
+                <a:tc>
+                  <a:txBody>
+                    <a:bodyPr/>
+                    <a:lstStyle/>
+                    <a:p>
+                      <a:r>
+                        <a:rPr sz="1100" b="1">
+                          <a:solidFill>
+                            <a:srgbClr val="FFFFFF"/>
+                          </a:solidFill>
+                          <a:latin typeface="Arial"/>
+                        </a:rPr>
+                        <a:t>Segment A</a:t>
+                      </a:r>
+                    </a:p>
+                  </a:txBody>
+                  <a:tcPr>
+                    <a:solidFill>
+                      <a:srgbClr val="1F2C56"/>
+                    </a:solidFill>
+                  </a:tcPr>
+                </a:tc>
+                <a:tc>
+                  <a:txBody>
+                    <a:bodyPr/>
+                    <a:lstStyle/>
+                    <a:p>
+                      <a:r>
+                        <a:rPr sz="1100" b="1">
+                          <a:solidFill>
+                            <a:srgbClr val="FFFFFF"/>
+                          </a:solidFill>
+                          <a:latin typeface="Arial"/>
+                        </a:rPr>
+                        <a:t>Segment B</a:t>
+                      </a:r>
+                    </a:p>
+                  </a:txBody>
+                  <a:tcPr>
+                    <a:solidFill>
+                      <a:srgbClr val="1F2C56"/>
+                    </a:solidFill>
+                  </a:tcPr>
+                </a:tc>
+                <a:tc>
+                  <a:txBody>
+                    <a:bodyPr/>
+                    <a:lstStyle/>
+                    <a:p>
+                      <a:r>
+                        <a:rPr sz="1100" b="1">
+                          <a:solidFill>
+                            <a:srgbClr val="FFFFFF"/>
+                          </a:solidFill>
+                          <a:latin typeface="Arial"/>
+                        </a:rPr>
+                        <a:t>Segment C</a:t>
+                      </a:r>
+                    </a:p>
+                  </a:txBody>
+                  <a:tcPr>
+                    <a:solidFill>
+                      <a:srgbClr val="1F2C56"/>
+                    </a:solidFill>
+                  </a:tcPr>
+                </a:tc>
+              </a:tr>
+              <a:tr h="384048">
+                <a:tc>
+                  <a:txBody>
+                    <a:bodyPr/>
+                    <a:lstStyle/>
+                    <a:p>
+                      <a:r>
+                        <a:rPr sz="1050">
+                          <a:solidFill>
+                            <a:srgbClr val="3D5466"/>
+                          </a:solidFill>
+                          <a:latin typeface="Arial"/>
+                        </a:rPr>
+                        <a:t>Marktgröße (Anzahl Unternehmen in Region)</a:t>
+                      </a:r>
+                    </a:p>
+                  </a:txBody>
+                  <a:tcPr/>
+                </a:tc>
+                <a:tc>
+                  <a:txBody>
+                    <a:bodyPr/>
+                    <a:lstStyle/>
+                    <a:p>
+                      <a:r>
+                        <a:rPr sz="1050">
+                          <a:solidFill>
+                            <a:srgbClr val="3D5466"/>
+                          </a:solidFill>
+                          <a:latin typeface="Arial"/>
+                        </a:rPr>
+                        <a:t>25 %</a:t>
+                      </a:r>
+                    </a:p>
+                  </a:txBody>
+                  <a:tcPr/>
+                </a:tc>
+                <a:tc>
+                  <a:txBody>
+                    <a:bodyPr/>
+                    <a:lstStyle/>
+                    <a:p/>
+                  </a:txBody>
+                  <a:tcPr/>
+                </a:tc>
+                <a:tc>
+                  <a:txBody>
+                    <a:bodyPr/>
+                    <a:lstStyle/>
+                    <a:p/>
+                  </a:txBody>
+                  <a:tcPr/>
+                </a:tc>
+                <a:tc>
+                  <a:txBody>
+                    <a:bodyPr/>
+                    <a:lstStyle/>
+                    <a:p/>
+                  </a:txBody>
+                  <a:tcPr/>
+                </a:tc>
+              </a:tr>
+              <a:tr h="384048">
+                <a:tc>
+                  <a:txBody>
+                    <a:bodyPr/>
+                    <a:lstStyle/>
+                    <a:p>
+                      <a:r>
+                        <a:rPr sz="1050">
+                          <a:solidFill>
+                            <a:srgbClr val="3D5466"/>
+                          </a:solidFill>
+                          <a:latin typeface="Arial"/>
+                        </a:rPr>
+                        <a:t>Durchschnittlicher Ertragspotenzial (DB)</a:t>
+                      </a:r>
+                    </a:p>
+                  </a:txBody>
+                  <a:tcPr/>
+                </a:tc>
+                <a:tc>
+                  <a:txBody>
+                    <a:bodyPr/>
+                    <a:lstStyle/>
+                    <a:p>
+                      <a:r>
+                        <a:rPr sz="1050">
+                          <a:solidFill>
+                            <a:srgbClr val="3D5466"/>
+                          </a:solidFill>
+                          <a:latin typeface="Arial"/>
+                        </a:rPr>
+                        <a:t>30 %</a:t>
+                      </a:r>
+                    </a:p>
+                  </a:txBody>
+                  <a:tcPr/>
+                </a:tc>
+                <a:tc>
+                  <a:txBody>
+                    <a:bodyPr/>
+                    <a:lstStyle/>
+                    <a:p/>
+                  </a:txBody>
+                  <a:tcPr/>
+                </a:tc>
+                <a:tc>
+                  <a:txBody>
+                    <a:bodyPr/>
+                    <a:lstStyle/>
+                    <a:p/>
+                  </a:txBody>
+                  <a:tcPr/>
+                </a:tc>
+                <a:tc>
+                  <a:txBody>
+                    <a:bodyPr/>
+                    <a:lstStyle/>
+                    <a:p/>
+                  </a:txBody>
+                  <a:tcPr/>
+                </a:tc>
+              </a:tr>
+              <a:tr h="384048">
+                <a:tc>
+                  <a:txBody>
+                    <a:bodyPr/>
+                    <a:lstStyle/>
+                    <a:p>
+                      <a:r>
+                        <a:rPr sz="1050">
+                          <a:solidFill>
+                            <a:srgbClr val="3D5466"/>
+                          </a:solidFill>
+                          <a:latin typeface="Arial"/>
+                        </a:rPr>
+                        <a:t>Eigene Expertise/Stärke in diesem Segment</a:t>
+                      </a:r>
+                    </a:p>
+                  </a:txBody>
+                  <a:tcPr/>
+                </a:tc>
+                <a:tc>
+                  <a:txBody>
+                    <a:bodyPr/>
+                    <a:lstStyle/>
+                    <a:p>
+                      <a:r>
+                        <a:rPr sz="1050">
+                          <a:solidFill>
+                            <a:srgbClr val="3D5466"/>
+                          </a:solidFill>
+                          <a:latin typeface="Arial"/>
+                        </a:rPr>
+                        <a:t>25 %</a:t>
+                      </a:r>
+                    </a:p>
+                  </a:txBody>
+                  <a:tcPr/>
+                </a:tc>
+                <a:tc>
+                  <a:txBody>
+                    <a:bodyPr/>
+                    <a:lstStyle/>
+                    <a:p/>
+                  </a:txBody>
+                  <a:tcPr/>
+                </a:tc>
+                <a:tc>
+                  <a:txBody>
+                    <a:bodyPr/>
+                    <a:lstStyle/>
+                    <a:p/>
+                  </a:txBody>
+                  <a:tcPr/>
+                </a:tc>
+                <a:tc>
+                  <a:txBody>
+                    <a:bodyPr/>
+                    <a:lstStyle/>
+                    <a:p/>
+                  </a:txBody>
+                  <a:tcPr/>
+                </a:tc>
+              </a:tr>
+              <a:tr h="384048">
+                <a:tc>
+                  <a:txBody>
+                    <a:bodyPr/>
+                    <a:lstStyle/>
+                    <a:p>
+                      <a:r>
+                        <a:rPr sz="1050">
+                          <a:solidFill>
+                            <a:srgbClr val="3D5466"/>
+                          </a:solidFill>
+                          <a:latin typeface="Arial"/>
+                        </a:rPr>
+                        <a:t>Wettbewerbsintensität (gering = gut)</a:t>
+                      </a:r>
+                    </a:p>
+                  </a:txBody>
+                  <a:tcPr/>
+                </a:tc>
+                <a:tc>
+                  <a:txBody>
+                    <a:bodyPr/>
+                    <a:lstStyle/>
+                    <a:p>
+                      <a:r>
+                        <a:rPr sz="1050">
+                          <a:solidFill>
+                            <a:srgbClr val="3D5466"/>
+                          </a:solidFill>
+                          <a:latin typeface="Arial"/>
+                        </a:rPr>
+                        <a:t>20 %</a:t>
+                      </a:r>
+                    </a:p>
+                  </a:txBody>
+                  <a:tcPr/>
+                </a:tc>
+                <a:tc>
+                  <a:txBody>
+                    <a:bodyPr/>
+                    <a:lstStyle/>
+                    <a:p/>
+                  </a:txBody>
+                  <a:tcPr/>
+                </a:tc>
+                <a:tc>
+                  <a:txBody>
+                    <a:bodyPr/>
+                    <a:lstStyle/>
+                    <a:p/>
+                  </a:txBody>
+                  <a:tcPr/>
+                </a:tc>
+                <a:tc>
+                  <a:txBody>
+                    <a:bodyPr/>
+                    <a:lstStyle/>
+                    <a:p/>
+                  </a:txBody>
+                  <a:tcPr/>
+                </a:tc>
+              </a:tr>
+              <a:tr h="384048">
+                <a:tc>
+                  <a:txBody>
+                    <a:bodyPr/>
+                    <a:lstStyle/>
+                    <a:p>
+                      <a:r>
+                        <a:rPr sz="1050">
+                          <a:solidFill>
+                            <a:srgbClr val="3D5466"/>
+                          </a:solidFill>
+                          <a:latin typeface="Arial"/>
+                        </a:rPr>
+                        <a:t>Gesamtscore</a:t>
+                      </a:r>
+                    </a:p>
+                  </a:txBody>
+                  <a:tcPr/>
+                </a:tc>
+                <a:tc>
+                  <a:txBody>
+                    <a:bodyPr/>
+                    <a:lstStyle/>
+                    <a:p>
+                      <a:r>
+                        <a:rPr sz="1050">
+                          <a:solidFill>
+                            <a:srgbClr val="3D5466"/>
+                          </a:solidFill>
+                          <a:latin typeface="Arial"/>
+                        </a:rPr>
+                        <a:t>100 %</a:t>
+                      </a:r>
+                    </a:p>
+                  </a:txBody>
+                  <a:tcPr/>
+                </a:tc>
+                <a:tc>
+                  <a:txBody>
+                    <a:bodyPr/>
+                    <a:lstStyle/>
+                    <a:p/>
+                  </a:txBody>
+                  <a:tcPr/>
+                </a:tc>
+                <a:tc>
+                  <a:txBody>
+                    <a:bodyPr/>
+                    <a:lstStyle/>
+                    <a:p/>
+                  </a:txBody>
+                  <a:tcPr/>
+                </a:tc>
+                <a:tc>
+                  <a:txBody>
+                    <a:bodyPr/>
+                    <a:lstStyle/>
+                    <a:p/>
+                  </a:txBody>
+                  <a:tcPr/>
+                </a:tc>
+              </a:tr>
+            </a:tbl>
+          </a:graphicData>
+        </a:graphic>
+      </p:graphicFrame>
+      <p:sp>
+        <p:nvSpPr>
+          <p:cNvPr id="8" name="Rectangle 7"/>
           <p:cNvSpPr/>
           <p:nvPr/>
         </p:nvSpPr>
@@ -5279,7 +5354,7 @@
       </p:sp>
       <p:sp>
         <p:nvSpPr>
-          <p:cNvPr id="10" name="TextBox 9"/>
+          <p:cNvPr id="9" name="TextBox 8"/>
           <p:cNvSpPr txBox="1"/>
           <p:nvPr/>
         </p:nvSpPr>
@@ -5308,6 +5383,41 @@
                 <a:latin typeface="JetBrains Mono"/>
               </a:rPr>
               <a:t>Benedikt Zoller Coaching  ·  FKB Campus  ·  M15</a:t>
+            </a:r>
+          </a:p>
+        </p:txBody>
+      </p:sp>
+      <p:sp>
+        <p:nvSpPr>
+          <p:cNvPr id="10" name="TextBox 9"/>
+          <p:cNvSpPr txBox="1"/>
+          <p:nvPr/>
+        </p:nvSpPr>
+        <p:spPr>
+          <a:xfrm>
+            <a:off x="7176211" y="6583680"/>
+            <a:ext cx="4326940" cy="256032"/>
+          </a:xfrm>
+          <a:prstGeom prst="rect">
+            <a:avLst/>
+          </a:prstGeom>
+          <a:noFill/>
+        </p:spPr>
+        <p:txBody>
+          <a:bodyPr wrap="none">
+            <a:spAutoFit/>
+          </a:bodyPr>
+          <a:lstStyle/>
+          <a:p>
+            <a:pPr algn="r"/>
+            <a:r>
+              <a:rPr sz="700">
+                <a:solidFill>
+                  <a:srgbClr val="A0B4D2"/>
+                </a:solidFill>
+                <a:latin typeface="JetBrains Mono"/>
+              </a:rPr>
+              <a:t>Übersicht</a:t>
             </a:r>
           </a:p>
         </p:txBody>
@@ -5567,14 +5677,208 @@
                 </a:solidFill>
                 <a:latin typeface="Source Serif 4"/>
               </a:rPr>
-              <a:t>SWOT im Firmenkundensegment</a:t>
-            </a:r>
-          </a:p>
-        </p:txBody>
-      </p:sp>
-      <p:sp>
-        <p:nvSpPr>
-          <p:cNvPr id="8" name="Rectangle 7"/>
+              <a:t>Wie groß ist mein adressierbarer Markt?</a:t>
+            </a:r>
+          </a:p>
+        </p:txBody>
+      </p:sp>
+      <p:sp>
+        <p:nvSpPr>
+          <p:cNvPr id="8" name="TextBox 7"/>
+          <p:cNvSpPr txBox="1"/>
+          <p:nvPr/>
+        </p:nvSpPr>
+        <p:spPr>
+          <a:xfrm>
+            <a:off x="685800" y="1417320"/>
+            <a:ext cx="10817352" cy="5029200"/>
+          </a:xfrm>
+          <a:prstGeom prst="rect">
+            <a:avLst/>
+          </a:prstGeom>
+          <a:noFill/>
+        </p:spPr>
+        <p:txBody>
+          <a:bodyPr wrap="square">
+            <a:spAutoFit/>
+          </a:bodyPr>
+          <a:lstStyle/>
+          <a:p>
+            <a:pPr>
+              <a:spcBef>
+                <a:spcPts val="400"/>
+              </a:spcBef>
+              <a:spcAft>
+                <a:spcPts val="200"/>
+              </a:spcAft>
+            </a:pPr>
+            <a:r>
+              <a:rPr sz="1300">
+                <a:solidFill>
+                  <a:srgbClr val="3D5466"/>
+                </a:solidFill>
+                <a:latin typeface="Arial"/>
+              </a:rPr>
+              <a:t>▸  Vor dem strategischen Einstieg in ein Segment steht die Potenzialschätzung. Die Frage: Wie viele Unternehmen im Zielsegment gibt es in meiner Region, und wie viele davon betreuen wir noch nicht?</a:t>
+            </a:r>
+          </a:p>
+          <a:p>
+            <a:pPr>
+              <a:spcBef>
+                <a:spcPts val="400"/>
+              </a:spcBef>
+              <a:spcAft>
+                <a:spcPts val="200"/>
+              </a:spcAft>
+            </a:pPr>
+            <a:r>
+              <a:rPr sz="1300">
+                <a:solidFill>
+                  <a:srgbClr val="3D5466"/>
+                </a:solidFill>
+                <a:latin typeface="Arial"/>
+              </a:rPr>
+              <a:t>▸  Datenquellen für die Potenzialschätzung:</a:t>
+            </a:r>
+          </a:p>
+          <a:p>
+            <a:pPr>
+              <a:spcBef>
+                <a:spcPts val="400"/>
+              </a:spcBef>
+              <a:spcAft>
+                <a:spcPts val="200"/>
+              </a:spcAft>
+            </a:pPr>
+            <a:r>
+              <a:rPr sz="1300">
+                <a:solidFill>
+                  <a:srgbClr val="3D5466"/>
+                </a:solidFill>
+                <a:latin typeface="Arial"/>
+              </a:rPr>
+              <a:t>▸  Vereinfachte Potenzialrechnung:</a:t>
+            </a:r>
+          </a:p>
+          <a:p>
+            <a:pPr>
+              <a:spcBef>
+                <a:spcPts val="400"/>
+              </a:spcBef>
+              <a:spcAft>
+                <a:spcPts val="200"/>
+              </a:spcAft>
+            </a:pPr>
+            <a:r>
+              <a:rPr sz="1300">
+                <a:solidFill>
+                  <a:srgbClr val="3D5466"/>
+                </a:solidFill>
+                <a:latin typeface="Arial"/>
+              </a:rPr>
+              <a:t>▸  Zielunternehmen in Region: X</a:t>
+            </a:r>
+          </a:p>
+          <a:p>
+            <a:pPr>
+              <a:spcBef>
+                <a:spcPts val="400"/>
+              </a:spcBef>
+              <a:spcAft>
+                <a:spcPts val="200"/>
+              </a:spcAft>
+            </a:pPr>
+            <a:r>
+              <a:rPr sz="1300">
+                <a:solidFill>
+                  <a:srgbClr val="3D5466"/>
+                </a:solidFill>
+                <a:latin typeface="Arial"/>
+              </a:rPr>
+              <a:t>▸  Davon bereits Kunden: Y</a:t>
+            </a:r>
+          </a:p>
+          <a:p>
+            <a:pPr>
+              <a:spcBef>
+                <a:spcPts val="400"/>
+              </a:spcBef>
+              <a:spcAft>
+                <a:spcPts val="200"/>
+              </a:spcAft>
+            </a:pPr>
+            <a:r>
+              <a:rPr sz="1300">
+                <a:solidFill>
+                  <a:srgbClr val="3D5466"/>
+                </a:solidFill>
+                <a:latin typeface="Arial"/>
+              </a:rPr>
+              <a:t>▸  Adressierbares Neukundenpotenzial: X − Y</a:t>
+            </a:r>
+          </a:p>
+          <a:p>
+            <a:pPr>
+              <a:spcBef>
+                <a:spcPts val="400"/>
+              </a:spcBef>
+              <a:spcAft>
+                <a:spcPts val="200"/>
+              </a:spcAft>
+            </a:pPr>
+            <a:r>
+              <a:rPr sz="1300">
+                <a:solidFill>
+                  <a:srgbClr val="3D5466"/>
+                </a:solidFill>
+                <a:latin typeface="Arial"/>
+              </a:rPr>
+              <a:t>▸  Realistisch erreichbar in 12 Monaten (Marktdurchdringungsrate 2–5 %): Z</a:t>
+            </a:r>
+          </a:p>
+          <a:p>
+            <a:pPr>
+              <a:spcBef>
+                <a:spcPts val="600"/>
+              </a:spcBef>
+              <a:spcAft>
+                <a:spcPts val="200"/>
+              </a:spcAft>
+            </a:pPr>
+            <a:r>
+              <a:rPr sz="1200" i="1">
+                <a:solidFill>
+                  <a:srgbClr val="3D5466"/>
+                </a:solidFill>
+                <a:latin typeface="Arial"/>
+              </a:rPr>
+              <a:t>→  Praxistipp: Unterschätzen Sie die bestehenden Daten in agree nicht. Eine saubere Branchencodierung und ein aktuelles CRM sind die Basis jeder Potenzialanalyse.</a:t>
+            </a:r>
+          </a:p>
+          <a:p>
+            <a:pPr>
+              <a:spcBef>
+                <a:spcPts val="400"/>
+              </a:spcBef>
+              <a:spcAft>
+                <a:spcPts val="200"/>
+              </a:spcAft>
+            </a:pPr>
+            <a:r>
+              <a:rPr sz="1300">
+                <a:solidFill>
+                  <a:srgbClr val="3D5466"/>
+                </a:solidFill>
+                <a:latin typeface="Arial"/>
+              </a:rPr>
+              <a:t>▸  ## 4.4 Strategische Positionierung: Stärken-Schwächen vs. Wettbewerb</a:t>
+            </a:r>
+          </a:p>
+        </p:txBody>
+      </p:sp>
+      <p:sp>
+        <p:nvSpPr>
+          <p:cNvPr id="9" name="Rectangle 8"/>
           <p:cNvSpPr/>
           <p:nvPr/>
         </p:nvSpPr>
@@ -5617,7 +5921,7 @@
       </p:sp>
       <p:sp>
         <p:nvSpPr>
-          <p:cNvPr id="9" name="TextBox 8"/>
+          <p:cNvPr id="10" name="TextBox 9"/>
           <p:cNvSpPr txBox="1"/>
           <p:nvPr/>
         </p:nvSpPr>
@@ -5941,13 +6245,13 @@
               </a:spcAft>
             </a:pPr>
             <a:r>
-              <a:rPr sz="1200">
+              <a:rPr sz="1300">
                 <a:solidFill>
                   <a:srgbClr val="3D5466"/>
                 </a:solidFill>
                 <a:latin typeface="Arial"/>
               </a:rPr>
-              <a:t>Das Wertversprechen (Value Proposition) beantwortet: Warum sollte ein Unternehmen aus meinem Zielsegment zu uns wechseln – oder bleiben?</a:t>
+              <a:t>▸  Das Wertversprechen (Value Proposition) beantwortet: Warum sollte ein Unternehmen aus meinem Zielsegment zu uns wechseln – oder bleiben?</a:t>
             </a:r>
           </a:p>
           <a:p>
@@ -5960,13 +6264,13 @@
               </a:spcAft>
             </a:pPr>
             <a:r>
-              <a:rPr sz="1200">
+              <a:rPr sz="1300">
                 <a:solidFill>
                   <a:srgbClr val="3D5466"/>
                 </a:solidFill>
                 <a:latin typeface="Arial"/>
               </a:rPr>
-              <a:t>Ein wirksames Wertversprechen im Firmenkundengeschäft ist:</a:t>
+              <a:t>▸  Ein wirksames Wertversprechen im Firmenkundengeschäft ist:</a:t>
             </a:r>
           </a:p>
           <a:p>
@@ -6036,13 +6340,13 @@
               </a:spcAft>
             </a:pPr>
             <a:r>
-              <a:rPr sz="1200">
+              <a:rPr sz="1300">
                 <a:solidFill>
                   <a:srgbClr val="3D5466"/>
                 </a:solidFill>
                 <a:latin typeface="Arial"/>
               </a:rPr>
-              <a:t>## 4.5 Neukundenansprache: Kanäle und Maßnahmen</a:t>
+              <a:t>▸  ## 4.5 Neukundenansprache: Kanäle und Maßnahmen</a:t>
             </a:r>
           </a:p>
         </p:txBody>
@@ -6380,14 +6684,265 @@
                 </a:solidFill>
                 <a:latin typeface="Source Serif 4"/>
               </a:rPr>
-              <a:t>Welche Kanäle funktionieren wirklich?</a:t>
-            </a:r>
-          </a:p>
-        </p:txBody>
-      </p:sp>
-      <p:sp>
-        <p:nvSpPr>
-          <p:cNvPr id="8" name="Rectangle 7"/>
+              <a:t>Empfehlungsmanagement systematisieren</a:t>
+            </a:r>
+          </a:p>
+        </p:txBody>
+      </p:sp>
+      <p:sp>
+        <p:nvSpPr>
+          <p:cNvPr id="8" name="TextBox 7"/>
+          <p:cNvSpPr txBox="1"/>
+          <p:nvPr/>
+        </p:nvSpPr>
+        <p:spPr>
+          <a:xfrm>
+            <a:off x="685800" y="1417320"/>
+            <a:ext cx="10817352" cy="5029200"/>
+          </a:xfrm>
+          <a:prstGeom prst="rect">
+            <a:avLst/>
+          </a:prstGeom>
+          <a:noFill/>
+        </p:spPr>
+        <p:txBody>
+          <a:bodyPr wrap="square">
+            <a:spAutoFit/>
+          </a:bodyPr>
+          <a:lstStyle/>
+          <a:p>
+            <a:pPr>
+              <a:spcBef>
+                <a:spcPts val="400"/>
+              </a:spcBef>
+              <a:spcAft>
+                <a:spcPts val="200"/>
+              </a:spcAft>
+            </a:pPr>
+            <a:r>
+              <a:rPr sz="1300">
+                <a:solidFill>
+                  <a:srgbClr val="3D5466"/>
+                </a:solidFill>
+                <a:latin typeface="Arial"/>
+              </a:rPr>
+              <a:t>▸  Empfehlungen entstehen nicht zufällig. Ein aktives Empfehlungsmanagement umfasst:</a:t>
+            </a:r>
+          </a:p>
+          <a:p>
+            <a:pPr>
+              <a:spcBef>
+                <a:spcPts val="400"/>
+              </a:spcBef>
+              <a:spcAft>
+                <a:spcPts val="200"/>
+              </a:spcAft>
+            </a:pPr>
+            <a:r>
+              <a:rPr sz="1300">
+                <a:solidFill>
+                  <a:srgbClr val="3D5466"/>
+                </a:solidFill>
+                <a:latin typeface="Arial"/>
+              </a:rPr>
+              <a:t>▸  Identifizieren: Welche meiner Bestandskunden sind Meinungsführer in ihrem Branchenumfeld?</a:t>
+            </a:r>
+          </a:p>
+          <a:p>
+            <a:pPr>
+              <a:spcBef>
+                <a:spcPts val="400"/>
+              </a:spcBef>
+              <a:spcAft>
+                <a:spcPts val="200"/>
+              </a:spcAft>
+            </a:pPr>
+            <a:r>
+              <a:rPr sz="1300">
+                <a:solidFill>
+                  <a:srgbClr val="3D5466"/>
+                </a:solidFill>
+                <a:latin typeface="Arial"/>
+              </a:rPr>
+              <a:t>▸  Beziehung vertiefen: Diese Kunden erhalten besondere Aufmerksamkeit – nicht wegen der Empfehlung, sondern wegen ihres Werts.</a:t>
+            </a:r>
+          </a:p>
+          <a:p>
+            <a:pPr>
+              <a:spcBef>
+                <a:spcPts val="400"/>
+              </a:spcBef>
+              <a:spcAft>
+                <a:spcPts val="200"/>
+              </a:spcAft>
+            </a:pPr>
+            <a:r>
+              <a:rPr sz="1300">
+                <a:solidFill>
+                  <a:srgbClr val="3D5466"/>
+                </a:solidFill>
+                <a:latin typeface="Arial"/>
+              </a:rPr>
+              <a:t>▸  Aktiv bitten: Am Ende eines erfolgreichen Gesprächs: „Gibt es Unternehmen in Ihrem Umfeld, die unsere Zusammenarbeit kennenlernen sollten?"</a:t>
+            </a:r>
+          </a:p>
+          <a:p>
+            <a:pPr>
+              <a:spcBef>
+                <a:spcPts val="400"/>
+              </a:spcBef>
+              <a:spcAft>
+                <a:spcPts val="200"/>
+              </a:spcAft>
+            </a:pPr>
+            <a:r>
+              <a:rPr sz="1300">
+                <a:solidFill>
+                  <a:srgbClr val="3D5466"/>
+                </a:solidFill>
+                <a:latin typeface="Arial"/>
+              </a:rPr>
+              <a:t>▸  Danken und schließen: Rückmeldung geben, ob der Kontakt erfolgreich war.</a:t>
+            </a:r>
+          </a:p>
+          <a:p>
+            <a:pPr>
+              <a:spcBef>
+                <a:spcPts val="400"/>
+              </a:spcBef>
+              <a:spcAft>
+                <a:spcPts val="200"/>
+              </a:spcAft>
+            </a:pPr>
+            <a:r>
+              <a:rPr sz="1300">
+                <a:solidFill>
+                  <a:srgbClr val="3D5466"/>
+                </a:solidFill>
+                <a:latin typeface="Arial"/>
+              </a:rPr>
+              <a:t>▸  ## 4.6 Praxiscase: Thomas Gruber entwickelt seine Strategie für den Agrar-Markt</a:t>
+            </a:r>
+          </a:p>
+          <a:p>
+            <a:pPr>
+              <a:spcBef>
+                <a:spcPts val="400"/>
+              </a:spcBef>
+              <a:spcAft>
+                <a:spcPts val="200"/>
+              </a:spcAft>
+            </a:pPr>
+            <a:r>
+              <a:rPr sz="1300">
+                <a:solidFill>
+                  <a:srgbClr val="3D5466"/>
+                </a:solidFill>
+                <a:latin typeface="Arial"/>
+              </a:rPr>
+              <a:t>▸  Ausgangssituation</a:t>
+            </a:r>
+          </a:p>
+          <a:p>
+            <a:pPr>
+              <a:spcBef>
+                <a:spcPts val="400"/>
+              </a:spcBef>
+              <a:spcAft>
+                <a:spcPts val="200"/>
+              </a:spcAft>
+            </a:pPr>
+            <a:r>
+              <a:rPr sz="1300">
+                <a:solidFill>
+                  <a:srgbClr val="3D5466"/>
+                </a:solidFill>
+                <a:latin typeface="Arial"/>
+              </a:rPr>
+              <a:t>▸  Thomas entwickelt seine Marktbearbeitungsstrategie</a:t>
+            </a:r>
+          </a:p>
+          <a:p>
+            <a:pPr>
+              <a:spcBef>
+                <a:spcPts val="400"/>
+              </a:spcBef>
+              <a:spcAft>
+                <a:spcPts val="200"/>
+              </a:spcAft>
+            </a:pPr>
+            <a:r>
+              <a:rPr sz="1300">
+                <a:solidFill>
+                  <a:srgbClr val="3D5466"/>
+                </a:solidFill>
+                <a:latin typeface="Arial"/>
+              </a:rPr>
+              <a:t>▸  Schritt 1: Segmentpriorisierung</a:t>
+            </a:r>
+          </a:p>
+          <a:p>
+            <a:pPr>
+              <a:spcBef>
+                <a:spcPts val="400"/>
+              </a:spcBef>
+              <a:spcAft>
+                <a:spcPts val="200"/>
+              </a:spcAft>
+            </a:pPr>
+            <a:r>
+              <a:rPr sz="1300">
+                <a:solidFill>
+                  <a:srgbClr val="3D5466"/>
+                </a:solidFill>
+                <a:latin typeface="Arial"/>
+              </a:rPr>
+              <a:t>▸  Schritt 2: Marktpotenzial</a:t>
+            </a:r>
+          </a:p>
+          <a:p>
+            <a:pPr>
+              <a:spcBef>
+                <a:spcPts val="400"/>
+              </a:spcBef>
+              <a:spcAft>
+                <a:spcPts val="200"/>
+              </a:spcAft>
+            </a:pPr>
+            <a:r>
+              <a:rPr sz="1300">
+                <a:solidFill>
+                  <a:srgbClr val="3D5466"/>
+                </a:solidFill>
+                <a:latin typeface="Arial"/>
+              </a:rPr>
+              <a:t>▸  Schritt 3: Wertversprechen</a:t>
+            </a:r>
+          </a:p>
+          <a:p>
+            <a:pPr>
+              <a:spcBef>
+                <a:spcPts val="400"/>
+              </a:spcBef>
+              <a:spcAft>
+                <a:spcPts val="200"/>
+              </a:spcAft>
+            </a:pPr>
+            <a:r>
+              <a:rPr sz="1300">
+                <a:solidFill>
+                  <a:srgbClr val="3D5466"/>
+                </a:solidFill>
+                <a:latin typeface="Arial"/>
+              </a:rPr>
+              <a:t>▸  „Für landwirtschaftliche Betriebe in [Region] sind wir der Agrar-Spezialist der VR-Bank: schnelle Investitionsfinanzierungen, GAP-Expertise und ein Netzwerk in die wichtigsten Branchenverbände."</a:t>
+            </a:r>
+          </a:p>
+        </p:txBody>
+      </p:sp>
+      <p:sp>
+        <p:nvSpPr>
+          <p:cNvPr id="9" name="Rectangle 8"/>
           <p:cNvSpPr/>
           <p:nvPr/>
         </p:nvSpPr>
@@ -6430,7 +6985,7 @@
       </p:sp>
       <p:sp>
         <p:nvSpPr>
-          <p:cNvPr id="9" name="TextBox 8"/>
+          <p:cNvPr id="10" name="TextBox 9"/>
           <p:cNvSpPr txBox="1"/>
           <p:nvPr/>
         </p:nvSpPr>
@@ -6718,7 +7273,7 @@
                 </a:solidFill>
                 <a:latin typeface="Source Serif 4"/>
               </a:rPr>
-              <a:t>Empfehlungsmanagement systematisieren</a:t>
+              <a:t>Arbeitsblatt A: Segmentpriorisierung – Scoring</a:t>
             </a:r>
           </a:p>
         </p:txBody>
@@ -6754,222 +7309,13 @@
               </a:spcAft>
             </a:pPr>
             <a:r>
-              <a:rPr sz="1200">
+              <a:rPr sz="1300">
                 <a:solidFill>
                   <a:srgbClr val="3D5466"/>
                 </a:solidFill>
                 <a:latin typeface="Arial"/>
               </a:rPr>
-              <a:t>Empfehlungen entstehen nicht zufällig. Ein aktives Empfehlungsmanagement umfasst:</a:t>
-            </a:r>
-          </a:p>
-          <a:p>
-            <a:pPr>
-              <a:spcBef>
-                <a:spcPts val="400"/>
-              </a:spcBef>
-              <a:spcAft>
-                <a:spcPts val="200"/>
-              </a:spcAft>
-            </a:pPr>
-            <a:r>
-              <a:rPr sz="1300">
-                <a:solidFill>
-                  <a:srgbClr val="3D5466"/>
-                </a:solidFill>
-                <a:latin typeface="Arial"/>
-              </a:rPr>
-              <a:t>▸  Identifizieren: Welche meiner Bestandskunden sind Meinungsführer in ihrem Branchenumfeld?</a:t>
-            </a:r>
-          </a:p>
-          <a:p>
-            <a:pPr>
-              <a:spcBef>
-                <a:spcPts val="400"/>
-              </a:spcBef>
-              <a:spcAft>
-                <a:spcPts val="200"/>
-              </a:spcAft>
-            </a:pPr>
-            <a:r>
-              <a:rPr sz="1300">
-                <a:solidFill>
-                  <a:srgbClr val="3D5466"/>
-                </a:solidFill>
-                <a:latin typeface="Arial"/>
-              </a:rPr>
-              <a:t>▸  Beziehung vertiefen: Diese Kunden erhalten besondere Aufmerksamkeit – nicht wegen der Empfehlung, sondern wegen ihres Werts.</a:t>
-            </a:r>
-          </a:p>
-          <a:p>
-            <a:pPr>
-              <a:spcBef>
-                <a:spcPts val="400"/>
-              </a:spcBef>
-              <a:spcAft>
-                <a:spcPts val="200"/>
-              </a:spcAft>
-            </a:pPr>
-            <a:r>
-              <a:rPr sz="1300">
-                <a:solidFill>
-                  <a:srgbClr val="3D5466"/>
-                </a:solidFill>
-                <a:latin typeface="Arial"/>
-              </a:rPr>
-              <a:t>▸  Aktiv bitten: Am Ende eines erfolgreichen Gesprächs: „Gibt es Unternehmen in Ihrem Umfeld, die unsere Zusammenarbeit kennenlernen sollten?"</a:t>
-            </a:r>
-          </a:p>
-          <a:p>
-            <a:pPr>
-              <a:spcBef>
-                <a:spcPts val="400"/>
-              </a:spcBef>
-              <a:spcAft>
-                <a:spcPts val="200"/>
-              </a:spcAft>
-            </a:pPr>
-            <a:r>
-              <a:rPr sz="1300">
-                <a:solidFill>
-                  <a:srgbClr val="3D5466"/>
-                </a:solidFill>
-                <a:latin typeface="Arial"/>
-              </a:rPr>
-              <a:t>▸  Danken und schließen: Rückmeldung geben, ob der Kontakt erfolgreich war.</a:t>
-            </a:r>
-          </a:p>
-          <a:p>
-            <a:pPr>
-              <a:spcBef>
-                <a:spcPts val="400"/>
-              </a:spcBef>
-              <a:spcAft>
-                <a:spcPts val="200"/>
-              </a:spcAft>
-            </a:pPr>
-            <a:r>
-              <a:rPr sz="1200">
-                <a:solidFill>
-                  <a:srgbClr val="3D5466"/>
-                </a:solidFill>
-                <a:latin typeface="Arial"/>
-              </a:rPr>
-              <a:t>## 4.6 Praxiscase: Thomas Gruber entwickelt seine Strategie für den Agrar-Markt</a:t>
-            </a:r>
-          </a:p>
-          <a:p>
-            <a:pPr>
-              <a:spcBef>
-                <a:spcPts val="400"/>
-              </a:spcBef>
-              <a:spcAft>
-                <a:spcPts val="200"/>
-              </a:spcAft>
-            </a:pPr>
-            <a:r>
-              <a:rPr sz="1200">
-                <a:solidFill>
-                  <a:srgbClr val="3D5466"/>
-                </a:solidFill>
-                <a:latin typeface="Arial"/>
-              </a:rPr>
-              <a:t>Ausgangssituation</a:t>
-            </a:r>
-          </a:p>
-          <a:p>
-            <a:pPr>
-              <a:spcBef>
-                <a:spcPts val="400"/>
-              </a:spcBef>
-              <a:spcAft>
-                <a:spcPts val="200"/>
-              </a:spcAft>
-            </a:pPr>
-            <a:r>
-              <a:rPr sz="1200">
-                <a:solidFill>
-                  <a:srgbClr val="3D5466"/>
-                </a:solidFill>
-                <a:latin typeface="Arial"/>
-              </a:rPr>
-              <a:t>Thomas entwickelt seine Marktbearbeitungsstrategie</a:t>
-            </a:r>
-          </a:p>
-          <a:p>
-            <a:pPr>
-              <a:spcBef>
-                <a:spcPts val="400"/>
-              </a:spcBef>
-              <a:spcAft>
-                <a:spcPts val="200"/>
-              </a:spcAft>
-            </a:pPr>
-            <a:r>
-              <a:rPr sz="1200">
-                <a:solidFill>
-                  <a:srgbClr val="3D5466"/>
-                </a:solidFill>
-                <a:latin typeface="Arial"/>
-              </a:rPr>
-              <a:t>Schritt 1: Segmentpriorisierung</a:t>
-            </a:r>
-          </a:p>
-          <a:p>
-            <a:pPr>
-              <a:spcBef>
-                <a:spcPts val="400"/>
-              </a:spcBef>
-              <a:spcAft>
-                <a:spcPts val="200"/>
-              </a:spcAft>
-            </a:pPr>
-            <a:r>
-              <a:rPr sz="1200">
-                <a:solidFill>
-                  <a:srgbClr val="3D5466"/>
-                </a:solidFill>
-                <a:latin typeface="Arial"/>
-              </a:rPr>
-              <a:t>Schritt 2: Marktpotenzial</a:t>
-            </a:r>
-          </a:p>
-          <a:p>
-            <a:pPr>
-              <a:spcBef>
-                <a:spcPts val="400"/>
-              </a:spcBef>
-              <a:spcAft>
-                <a:spcPts val="200"/>
-              </a:spcAft>
-            </a:pPr>
-            <a:r>
-              <a:rPr sz="1200">
-                <a:solidFill>
-                  <a:srgbClr val="3D5466"/>
-                </a:solidFill>
-                <a:latin typeface="Arial"/>
-              </a:rPr>
-              <a:t>Schritt 3: Wertversprechen</a:t>
-            </a:r>
-          </a:p>
-          <a:p>
-            <a:pPr>
-              <a:spcBef>
-                <a:spcPts val="400"/>
-              </a:spcBef>
-              <a:spcAft>
-                <a:spcPts val="200"/>
-              </a:spcAft>
-            </a:pPr>
-            <a:r>
-              <a:rPr sz="1200">
-                <a:solidFill>
-                  <a:srgbClr val="3D5466"/>
-                </a:solidFill>
-                <a:latin typeface="Arial"/>
-              </a:rPr>
-              <a:t>„Für landwirtschaftliche Betriebe in [Region] sind wir der Agrar-Spezialist der VR-Bank: schnelle Investitionsfinanzierungen, GAP-Expertise und ein Netzwerk in die wichtigsten Branchenverbände."</a:t>
+              <a:t>▸  Meine drei Kandidatensegmente:</a:t>
             </a:r>
           </a:p>
         </p:txBody>
@@ -7085,7 +7431,7 @@
             <a:avLst/>
           </a:prstGeom>
           <a:solidFill>
-            <a:srgbClr val="EDEDF3"/>
+            <a:srgbClr val="FFFFFF"/>
           </a:solidFill>
           <a:ln>
             <a:noFill/>
@@ -7186,51 +7532,43 @@
                 </a:solidFill>
                 <a:latin typeface="JetBrains Mono"/>
               </a:rPr>
-              <a:t>M15  ·  INHALT</a:t>
-            </a:r>
-          </a:p>
-        </p:txBody>
-      </p:sp>
-      <p:sp>
-        <p:nvSpPr>
-          <p:cNvPr id="5" name="Rectangle 4"/>
-          <p:cNvSpPr/>
-          <p:nvPr/>
-        </p:nvSpPr>
-        <p:spPr>
-          <a:xfrm>
-            <a:off x="0" y="1234440"/>
-            <a:ext cx="12188952" cy="12700"/>
-          </a:xfrm>
-          <a:prstGeom prst="rect">
-            <a:avLst/>
-          </a:prstGeom>
-          <a:solidFill>
-            <a:srgbClr val="D8DFE4"/>
-          </a:solidFill>
-          <a:ln>
-            <a:noFill/>
-          </a:ln>
-        </p:spPr>
-        <p:style>
-          <a:lnRef idx="1">
-            <a:schemeClr val="accent1"/>
-          </a:lnRef>
-          <a:fillRef idx="3">
-            <a:schemeClr val="accent1"/>
-          </a:fillRef>
-          <a:effectRef idx="2">
-            <a:schemeClr val="accent1"/>
-          </a:effectRef>
-          <a:fontRef idx="minor">
-            <a:schemeClr val="lt1"/>
-          </a:fontRef>
-        </p:style>
-        <p:txBody>
-          <a:bodyPr rtlCol="0" anchor="ctr"/>
-          <a:lstStyle/>
-          <a:p>
-            <a:pPr algn="ctr"/>
+              <a:t>M15  ·  ÜBERSICHT</a:t>
+            </a:r>
+          </a:p>
+        </p:txBody>
+      </p:sp>
+      <p:sp>
+        <p:nvSpPr>
+          <p:cNvPr id="5" name="TextBox 4"/>
+          <p:cNvSpPr txBox="1"/>
+          <p:nvPr/>
+        </p:nvSpPr>
+        <p:spPr>
+          <a:xfrm>
+            <a:off x="685800" y="502920"/>
+            <a:ext cx="10817352" cy="594360"/>
+          </a:xfrm>
+          <a:prstGeom prst="rect">
+            <a:avLst/>
+          </a:prstGeom>
+          <a:noFill/>
+        </p:spPr>
+        <p:txBody>
+          <a:bodyPr wrap="square">
+            <a:spAutoFit/>
+          </a:bodyPr>
+          <a:lstStyle/>
+          <a:p>
+            <a:pPr algn="l"/>
+            <a:r>
+              <a:rPr sz="2000" b="1" i="0">
+                <a:solidFill>
+                  <a:srgbClr val="1F2C56"/>
+                </a:solidFill>
+                <a:latin typeface="Source Serif 4"/>
+              </a:rPr>
+              <a:t>Arbeitsblatt A: Segmentpriorisierung – Scoring</a:t>
+            </a:r>
           </a:p>
         </p:txBody>
       </p:sp>
@@ -7242,8 +7580,8 @@
         </p:nvSpPr>
         <p:spPr>
           <a:xfrm>
-            <a:off x="685800" y="502920"/>
-            <a:ext cx="36576" cy="658368"/>
+            <a:off x="685800" y="1143000"/>
+            <a:ext cx="10817352" cy="25400"/>
           </a:xfrm>
           <a:prstGeom prst="rect">
             <a:avLst/>
@@ -7277,86 +7615,450 @@
           </a:p>
         </p:txBody>
       </p:sp>
-      <p:sp>
-        <p:nvSpPr>
-          <p:cNvPr id="7" name="TextBox 6"/>
-          <p:cNvSpPr txBox="1"/>
-          <p:nvPr/>
-        </p:nvSpPr>
-        <p:spPr>
-          <a:xfrm>
-            <a:off x="813816" y="502920"/>
-            <a:ext cx="10634472" cy="685800"/>
-          </a:xfrm>
-          <a:prstGeom prst="rect">
-            <a:avLst/>
-          </a:prstGeom>
-          <a:noFill/>
-        </p:spPr>
-        <p:txBody>
-          <a:bodyPr wrap="square">
-            <a:spAutoFit/>
-          </a:bodyPr>
-          <a:lstStyle/>
-          <a:p>
-            <a:pPr algn="l"/>
-            <a:r>
-              <a:rPr sz="2400" b="1" i="0">
-                <a:solidFill>
-                  <a:srgbClr val="1F2C56"/>
-                </a:solidFill>
-                <a:latin typeface="Source Serif 4"/>
-              </a:rPr>
-              <a:t>Arbeitsblatt A: Segmentpriorisierung – Scoring</a:t>
-            </a:r>
-          </a:p>
-        </p:txBody>
-      </p:sp>
-      <p:sp>
-        <p:nvSpPr>
-          <p:cNvPr id="8" name="TextBox 7"/>
-          <p:cNvSpPr txBox="1"/>
-          <p:nvPr/>
-        </p:nvSpPr>
-        <p:spPr>
-          <a:xfrm>
-            <a:off x="685800" y="1417320"/>
-            <a:ext cx="10817352" cy="5029200"/>
-          </a:xfrm>
-          <a:prstGeom prst="rect">
-            <a:avLst/>
-          </a:prstGeom>
-          <a:noFill/>
-        </p:spPr>
-        <p:txBody>
-          <a:bodyPr wrap="square">
-            <a:spAutoFit/>
-          </a:bodyPr>
-          <a:lstStyle/>
-          <a:p>
-            <a:pPr>
-              <a:spcBef>
-                <a:spcPts val="400"/>
-              </a:spcBef>
-              <a:spcAft>
-                <a:spcPts val="200"/>
-              </a:spcAft>
-            </a:pPr>
-            <a:r>
-              <a:rPr sz="1200">
-                <a:solidFill>
-                  <a:srgbClr val="3D5466"/>
-                </a:solidFill>
-                <a:latin typeface="Arial"/>
-              </a:rPr>
-              <a:t>Meine drei Kandidatensegmente:</a:t>
-            </a:r>
-          </a:p>
-        </p:txBody>
-      </p:sp>
-      <p:sp>
-        <p:nvSpPr>
-          <p:cNvPr id="9" name="Rectangle 8"/>
+      <p:graphicFrame>
+        <p:nvGraphicFramePr>
+          <p:cNvPr id="7" name="Table 6"/>
+          <p:cNvGraphicFramePr>
+            <a:graphicFrameLocks noGrp="1"/>
+          </p:cNvGraphicFramePr>
+          <p:nvPr/>
+        </p:nvGraphicFramePr>
+        <p:xfrm>
+          <a:off x="685800" y="1417320"/>
+          <a:ext cx="10817352" cy="2304288"/>
+        </p:xfrm>
+        <a:graphic>
+          <a:graphicData uri="http://schemas.openxmlformats.org/drawingml/2006/table">
+            <a:tbl>
+              <a:tblPr firstRow="1" bandRow="1">
+                <a:tableStyleId>{5C22544A-7EE6-4342-B048-85BDC9FD1C3A}</a:tableStyleId>
+              </a:tblPr>
+              <a:tblGrid>
+                <a:gridCol w="2163470"/>
+                <a:gridCol w="2163470"/>
+                <a:gridCol w="2163470"/>
+                <a:gridCol w="2163470"/>
+                <a:gridCol w="2163472"/>
+              </a:tblGrid>
+              <a:tr h="384048">
+                <a:tc>
+                  <a:txBody>
+                    <a:bodyPr/>
+                    <a:lstStyle/>
+                    <a:p>
+                      <a:r>
+                        <a:rPr sz="1100" b="1">
+                          <a:solidFill>
+                            <a:srgbClr val="FFFFFF"/>
+                          </a:solidFill>
+                          <a:latin typeface="Arial"/>
+                        </a:rPr>
+                        <a:t>Kriterium</a:t>
+                      </a:r>
+                    </a:p>
+                  </a:txBody>
+                  <a:tcPr>
+                    <a:solidFill>
+                      <a:srgbClr val="1F2C56"/>
+                    </a:solidFill>
+                  </a:tcPr>
+                </a:tc>
+                <a:tc>
+                  <a:txBody>
+                    <a:bodyPr/>
+                    <a:lstStyle/>
+                    <a:p>
+                      <a:r>
+                        <a:rPr sz="1100" b="1">
+                          <a:solidFill>
+                            <a:srgbClr val="FFFFFF"/>
+                          </a:solidFill>
+                          <a:latin typeface="Arial"/>
+                        </a:rPr>
+                        <a:t>Gewichtung</a:t>
+                      </a:r>
+                    </a:p>
+                  </a:txBody>
+                  <a:tcPr>
+                    <a:solidFill>
+                      <a:srgbClr val="1F2C56"/>
+                    </a:solidFill>
+                  </a:tcPr>
+                </a:tc>
+                <a:tc>
+                  <a:txBody>
+                    <a:bodyPr/>
+                    <a:lstStyle/>
+                    <a:p>
+                      <a:r>
+                        <a:rPr sz="1100" b="1">
+                          <a:solidFill>
+                            <a:srgbClr val="FFFFFF"/>
+                          </a:solidFill>
+                          <a:latin typeface="Arial"/>
+                        </a:rPr>
+                        <a:t>Segment 1: _____</a:t>
+                      </a:r>
+                    </a:p>
+                  </a:txBody>
+                  <a:tcPr>
+                    <a:solidFill>
+                      <a:srgbClr val="1F2C56"/>
+                    </a:solidFill>
+                  </a:tcPr>
+                </a:tc>
+                <a:tc>
+                  <a:txBody>
+                    <a:bodyPr/>
+                    <a:lstStyle/>
+                    <a:p>
+                      <a:r>
+                        <a:rPr sz="1100" b="1">
+                          <a:solidFill>
+                            <a:srgbClr val="FFFFFF"/>
+                          </a:solidFill>
+                          <a:latin typeface="Arial"/>
+                        </a:rPr>
+                        <a:t>Segment 2: _____</a:t>
+                      </a:r>
+                    </a:p>
+                  </a:txBody>
+                  <a:tcPr>
+                    <a:solidFill>
+                      <a:srgbClr val="1F2C56"/>
+                    </a:solidFill>
+                  </a:tcPr>
+                </a:tc>
+                <a:tc>
+                  <a:txBody>
+                    <a:bodyPr/>
+                    <a:lstStyle/>
+                    <a:p>
+                      <a:r>
+                        <a:rPr sz="1100" b="1">
+                          <a:solidFill>
+                            <a:srgbClr val="FFFFFF"/>
+                          </a:solidFill>
+                          <a:latin typeface="Arial"/>
+                        </a:rPr>
+                        <a:t>Segment 3: _____</a:t>
+                      </a:r>
+                    </a:p>
+                  </a:txBody>
+                  <a:tcPr>
+                    <a:solidFill>
+                      <a:srgbClr val="1F2C56"/>
+                    </a:solidFill>
+                  </a:tcPr>
+                </a:tc>
+              </a:tr>
+              <a:tr h="384048">
+                <a:tc>
+                  <a:txBody>
+                    <a:bodyPr/>
+                    <a:lstStyle/>
+                    <a:p>
+                      <a:r>
+                        <a:rPr sz="1050">
+                          <a:solidFill>
+                            <a:srgbClr val="3D5466"/>
+                          </a:solidFill>
+                          <a:latin typeface="Arial"/>
+                        </a:rPr>
+                        <a:t>Marktgröße in Region</a:t>
+                      </a:r>
+                    </a:p>
+                  </a:txBody>
+                  <a:tcPr/>
+                </a:tc>
+                <a:tc>
+                  <a:txBody>
+                    <a:bodyPr/>
+                    <a:lstStyle/>
+                    <a:p>
+                      <a:r>
+                        <a:rPr sz="1050">
+                          <a:solidFill>
+                            <a:srgbClr val="3D5466"/>
+                          </a:solidFill>
+                          <a:latin typeface="Arial"/>
+                        </a:rPr>
+                        <a:t>25 %</a:t>
+                      </a:r>
+                    </a:p>
+                  </a:txBody>
+                  <a:tcPr/>
+                </a:tc>
+                <a:tc>
+                  <a:txBody>
+                    <a:bodyPr/>
+                    <a:lstStyle/>
+                    <a:p/>
+                  </a:txBody>
+                  <a:tcPr/>
+                </a:tc>
+                <a:tc>
+                  <a:txBody>
+                    <a:bodyPr/>
+                    <a:lstStyle/>
+                    <a:p/>
+                  </a:txBody>
+                  <a:tcPr/>
+                </a:tc>
+                <a:tc>
+                  <a:txBody>
+                    <a:bodyPr/>
+                    <a:lstStyle/>
+                    <a:p/>
+                  </a:txBody>
+                  <a:tcPr/>
+                </a:tc>
+              </a:tr>
+              <a:tr h="384048">
+                <a:tc>
+                  <a:txBody>
+                    <a:bodyPr/>
+                    <a:lstStyle/>
+                    <a:p>
+                      <a:r>
+                        <a:rPr sz="1050">
+                          <a:solidFill>
+                            <a:srgbClr val="3D5466"/>
+                          </a:solidFill>
+                          <a:latin typeface="Arial"/>
+                        </a:rPr>
+                        <a:t>Ertragspotenzial (DB)</a:t>
+                      </a:r>
+                    </a:p>
+                  </a:txBody>
+                  <a:tcPr/>
+                </a:tc>
+                <a:tc>
+                  <a:txBody>
+                    <a:bodyPr/>
+                    <a:lstStyle/>
+                    <a:p>
+                      <a:r>
+                        <a:rPr sz="1050">
+                          <a:solidFill>
+                            <a:srgbClr val="3D5466"/>
+                          </a:solidFill>
+                          <a:latin typeface="Arial"/>
+                        </a:rPr>
+                        <a:t>30 %</a:t>
+                      </a:r>
+                    </a:p>
+                  </a:txBody>
+                  <a:tcPr/>
+                </a:tc>
+                <a:tc>
+                  <a:txBody>
+                    <a:bodyPr/>
+                    <a:lstStyle/>
+                    <a:p/>
+                  </a:txBody>
+                  <a:tcPr/>
+                </a:tc>
+                <a:tc>
+                  <a:txBody>
+                    <a:bodyPr/>
+                    <a:lstStyle/>
+                    <a:p/>
+                  </a:txBody>
+                  <a:tcPr/>
+                </a:tc>
+                <a:tc>
+                  <a:txBody>
+                    <a:bodyPr/>
+                    <a:lstStyle/>
+                    <a:p/>
+                  </a:txBody>
+                  <a:tcPr/>
+                </a:tc>
+              </a:tr>
+              <a:tr h="384048">
+                <a:tc>
+                  <a:txBody>
+                    <a:bodyPr/>
+                    <a:lstStyle/>
+                    <a:p>
+                      <a:r>
+                        <a:rPr sz="1050">
+                          <a:solidFill>
+                            <a:srgbClr val="3D5466"/>
+                          </a:solidFill>
+                          <a:latin typeface="Arial"/>
+                        </a:rPr>
+                        <a:t>Eigene Stärke/Expertise</a:t>
+                      </a:r>
+                    </a:p>
+                  </a:txBody>
+                  <a:tcPr/>
+                </a:tc>
+                <a:tc>
+                  <a:txBody>
+                    <a:bodyPr/>
+                    <a:lstStyle/>
+                    <a:p>
+                      <a:r>
+                        <a:rPr sz="1050">
+                          <a:solidFill>
+                            <a:srgbClr val="3D5466"/>
+                          </a:solidFill>
+                          <a:latin typeface="Arial"/>
+                        </a:rPr>
+                        <a:t>25 %</a:t>
+                      </a:r>
+                    </a:p>
+                  </a:txBody>
+                  <a:tcPr/>
+                </a:tc>
+                <a:tc>
+                  <a:txBody>
+                    <a:bodyPr/>
+                    <a:lstStyle/>
+                    <a:p/>
+                  </a:txBody>
+                  <a:tcPr/>
+                </a:tc>
+                <a:tc>
+                  <a:txBody>
+                    <a:bodyPr/>
+                    <a:lstStyle/>
+                    <a:p/>
+                  </a:txBody>
+                  <a:tcPr/>
+                </a:tc>
+                <a:tc>
+                  <a:txBody>
+                    <a:bodyPr/>
+                    <a:lstStyle/>
+                    <a:p/>
+                  </a:txBody>
+                  <a:tcPr/>
+                </a:tc>
+              </a:tr>
+              <a:tr h="384048">
+                <a:tc>
+                  <a:txBody>
+                    <a:bodyPr/>
+                    <a:lstStyle/>
+                    <a:p>
+                      <a:r>
+                        <a:rPr sz="1050">
+                          <a:solidFill>
+                            <a:srgbClr val="3D5466"/>
+                          </a:solidFill>
+                          <a:latin typeface="Arial"/>
+                        </a:rPr>
+                        <a:t>Wettbewerbsintensität (inv.)</a:t>
+                      </a:r>
+                    </a:p>
+                  </a:txBody>
+                  <a:tcPr/>
+                </a:tc>
+                <a:tc>
+                  <a:txBody>
+                    <a:bodyPr/>
+                    <a:lstStyle/>
+                    <a:p>
+                      <a:r>
+                        <a:rPr sz="1050">
+                          <a:solidFill>
+                            <a:srgbClr val="3D5466"/>
+                          </a:solidFill>
+                          <a:latin typeface="Arial"/>
+                        </a:rPr>
+                        <a:t>20 %</a:t>
+                      </a:r>
+                    </a:p>
+                  </a:txBody>
+                  <a:tcPr/>
+                </a:tc>
+                <a:tc>
+                  <a:txBody>
+                    <a:bodyPr/>
+                    <a:lstStyle/>
+                    <a:p/>
+                  </a:txBody>
+                  <a:tcPr/>
+                </a:tc>
+                <a:tc>
+                  <a:txBody>
+                    <a:bodyPr/>
+                    <a:lstStyle/>
+                    <a:p/>
+                  </a:txBody>
+                  <a:tcPr/>
+                </a:tc>
+                <a:tc>
+                  <a:txBody>
+                    <a:bodyPr/>
+                    <a:lstStyle/>
+                    <a:p/>
+                  </a:txBody>
+                  <a:tcPr/>
+                </a:tc>
+              </a:tr>
+              <a:tr h="384048">
+                <a:tc>
+                  <a:txBody>
+                    <a:bodyPr/>
+                    <a:lstStyle/>
+                    <a:p>
+                      <a:r>
+                        <a:rPr sz="1050">
+                          <a:solidFill>
+                            <a:srgbClr val="3D5466"/>
+                          </a:solidFill>
+                          <a:latin typeface="Arial"/>
+                        </a:rPr>
+                        <a:t>Gesamtscore</a:t>
+                      </a:r>
+                    </a:p>
+                  </a:txBody>
+                  <a:tcPr/>
+                </a:tc>
+                <a:tc>
+                  <a:txBody>
+                    <a:bodyPr/>
+                    <a:lstStyle/>
+                    <a:p/>
+                  </a:txBody>
+                  <a:tcPr/>
+                </a:tc>
+                <a:tc>
+                  <a:txBody>
+                    <a:bodyPr/>
+                    <a:lstStyle/>
+                    <a:p/>
+                  </a:txBody>
+                  <a:tcPr/>
+                </a:tc>
+                <a:tc>
+                  <a:txBody>
+                    <a:bodyPr/>
+                    <a:lstStyle/>
+                    <a:p/>
+                  </a:txBody>
+                  <a:tcPr/>
+                </a:tc>
+                <a:tc>
+                  <a:txBody>
+                    <a:bodyPr/>
+                    <a:lstStyle/>
+                    <a:p/>
+                  </a:txBody>
+                  <a:tcPr/>
+                </a:tc>
+              </a:tr>
+            </a:tbl>
+          </a:graphicData>
+        </a:graphic>
+      </p:graphicFrame>
+      <p:sp>
+        <p:nvSpPr>
+          <p:cNvPr id="8" name="Rectangle 7"/>
           <p:cNvSpPr/>
           <p:nvPr/>
         </p:nvSpPr>
@@ -7399,7 +8101,7 @@
       </p:sp>
       <p:sp>
         <p:nvSpPr>
-          <p:cNvPr id="10" name="TextBox 9"/>
+          <p:cNvPr id="9" name="TextBox 8"/>
           <p:cNvSpPr txBox="1"/>
           <p:nvPr/>
         </p:nvSpPr>
@@ -7428,6 +8130,41 @@
                 <a:latin typeface="JetBrains Mono"/>
               </a:rPr>
               <a:t>Benedikt Zoller Coaching  ·  FKB Campus  ·  M15</a:t>
+            </a:r>
+          </a:p>
+        </p:txBody>
+      </p:sp>
+      <p:sp>
+        <p:nvSpPr>
+          <p:cNvPr id="10" name="TextBox 9"/>
+          <p:cNvSpPr txBox="1"/>
+          <p:nvPr/>
+        </p:nvSpPr>
+        <p:spPr>
+          <a:xfrm>
+            <a:off x="7176211" y="6583680"/>
+            <a:ext cx="4326940" cy="256032"/>
+          </a:xfrm>
+          <a:prstGeom prst="rect">
+            <a:avLst/>
+          </a:prstGeom>
+          <a:noFill/>
+        </p:spPr>
+        <p:txBody>
+          <a:bodyPr wrap="none">
+            <a:spAutoFit/>
+          </a:bodyPr>
+          <a:lstStyle/>
+          <a:p>
+            <a:pPr algn="r"/>
+            <a:r>
+              <a:rPr sz="700">
+                <a:solidFill>
+                  <a:srgbClr val="A0B4D2"/>
+                </a:solidFill>
+                <a:latin typeface="JetBrains Mono"/>
+              </a:rPr>
+              <a:t>Übersicht</a:t>
             </a:r>
           </a:p>
         </p:txBody>
@@ -7723,13 +8460,13 @@
               </a:spcAft>
             </a:pPr>
             <a:r>
-              <a:rPr sz="1200">
+              <a:rPr sz="1300">
                 <a:solidFill>
                   <a:srgbClr val="3D5466"/>
                 </a:solidFill>
                 <a:latin typeface="Arial"/>
               </a:rPr>
-              <a:t>Mein Wertversprechen (in einem Satz):</a:t>
+              <a:t>▸  Mein Wertversprechen (in einem Satz):</a:t>
             </a:r>
           </a:p>
         </p:txBody>
@@ -7808,6 +8545,685 @@
                 <a:latin typeface="JetBrains Mono"/>
               </a:rPr>
               <a:t>Benedikt Zoller Coaching  ·  FKB Campus  ·  M15</a:t>
+            </a:r>
+          </a:p>
+        </p:txBody>
+      </p:sp>
+    </p:spTree>
+  </p:cSld>
+  <p:clrMapOvr>
+    <a:masterClrMapping/>
+  </p:clrMapOvr>
+</p:sld>
+</file>
+
+<file path=ppt/slides/slide17.xml><?xml version="1.0" encoding="utf-8"?>
+<p:sld xmlns:a="http://schemas.openxmlformats.org/drawingml/2006/main" xmlns:p="http://schemas.openxmlformats.org/presentationml/2006/main" xmlns:r="http://schemas.openxmlformats.org/officeDocument/2006/relationships">
+  <p:cSld>
+    <p:spTree>
+      <p:nvGrpSpPr>
+        <p:cNvPr id="1" name=""/>
+        <p:cNvGrpSpPr/>
+        <p:nvPr/>
+      </p:nvGrpSpPr>
+      <p:grpSpPr/>
+      <p:sp>
+        <p:nvSpPr>
+          <p:cNvPr id="2" name="Rectangle 1"/>
+          <p:cNvSpPr/>
+          <p:nvPr/>
+        </p:nvSpPr>
+        <p:spPr>
+          <a:xfrm>
+            <a:off x="0" y="0"/>
+            <a:ext cx="12188952" cy="6858000"/>
+          </a:xfrm>
+          <a:prstGeom prst="rect">
+            <a:avLst/>
+          </a:prstGeom>
+          <a:solidFill>
+            <a:srgbClr val="FFFFFF"/>
+          </a:solidFill>
+          <a:ln>
+            <a:noFill/>
+          </a:ln>
+        </p:spPr>
+        <p:style>
+          <a:lnRef idx="1">
+            <a:schemeClr val="accent1"/>
+          </a:lnRef>
+          <a:fillRef idx="3">
+            <a:schemeClr val="accent1"/>
+          </a:fillRef>
+          <a:effectRef idx="2">
+            <a:schemeClr val="accent1"/>
+          </a:effectRef>
+          <a:fontRef idx="minor">
+            <a:schemeClr val="lt1"/>
+          </a:fontRef>
+        </p:style>
+        <p:txBody>
+          <a:bodyPr rtlCol="0" anchor="ctr"/>
+          <a:lstStyle/>
+          <a:p>
+            <a:pPr algn="ctr"/>
+          </a:p>
+        </p:txBody>
+      </p:sp>
+      <p:sp>
+        <p:nvSpPr>
+          <p:cNvPr id="3" name="Rectangle 2"/>
+          <p:cNvSpPr/>
+          <p:nvPr/>
+        </p:nvSpPr>
+        <p:spPr>
+          <a:xfrm>
+            <a:off x="0" y="0"/>
+            <a:ext cx="12188952" cy="50292"/>
+          </a:xfrm>
+          <a:prstGeom prst="rect">
+            <a:avLst/>
+          </a:prstGeom>
+          <a:solidFill>
+            <a:srgbClr val="1F2C56"/>
+          </a:solidFill>
+          <a:ln>
+            <a:noFill/>
+          </a:ln>
+        </p:spPr>
+        <p:style>
+          <a:lnRef idx="1">
+            <a:schemeClr val="accent1"/>
+          </a:lnRef>
+          <a:fillRef idx="3">
+            <a:schemeClr val="accent1"/>
+          </a:fillRef>
+          <a:effectRef idx="2">
+            <a:schemeClr val="accent1"/>
+          </a:effectRef>
+          <a:fontRef idx="minor">
+            <a:schemeClr val="lt1"/>
+          </a:fontRef>
+        </p:style>
+        <p:txBody>
+          <a:bodyPr rtlCol="0" anchor="ctr"/>
+          <a:lstStyle/>
+          <a:p>
+            <a:pPr algn="ctr"/>
+          </a:p>
+        </p:txBody>
+      </p:sp>
+      <p:sp>
+        <p:nvSpPr>
+          <p:cNvPr id="4" name="TextBox 3"/>
+          <p:cNvSpPr txBox="1"/>
+          <p:nvPr/>
+        </p:nvSpPr>
+        <p:spPr>
+          <a:xfrm>
+            <a:off x="685800" y="109728"/>
+            <a:ext cx="10817352" cy="228600"/>
+          </a:xfrm>
+          <a:prstGeom prst="rect">
+            <a:avLst/>
+          </a:prstGeom>
+          <a:noFill/>
+        </p:spPr>
+        <p:txBody>
+          <a:bodyPr wrap="none">
+            <a:spAutoFit/>
+          </a:bodyPr>
+          <a:lstStyle/>
+          <a:p>
+            <a:pPr algn="l"/>
+            <a:r>
+              <a:rPr sz="750">
+                <a:solidFill>
+                  <a:srgbClr val="78808C"/>
+                </a:solidFill>
+                <a:latin typeface="JetBrains Mono"/>
+              </a:rPr>
+              <a:t>M15  ·  ÜBERSICHT</a:t>
+            </a:r>
+          </a:p>
+        </p:txBody>
+      </p:sp>
+      <p:sp>
+        <p:nvSpPr>
+          <p:cNvPr id="5" name="TextBox 4"/>
+          <p:cNvSpPr txBox="1"/>
+          <p:nvPr/>
+        </p:nvSpPr>
+        <p:spPr>
+          <a:xfrm>
+            <a:off x="685800" y="502920"/>
+            <a:ext cx="10817352" cy="594360"/>
+          </a:xfrm>
+          <a:prstGeom prst="rect">
+            <a:avLst/>
+          </a:prstGeom>
+          <a:noFill/>
+        </p:spPr>
+        <p:txBody>
+          <a:bodyPr wrap="square">
+            <a:spAutoFit/>
+          </a:bodyPr>
+          <a:lstStyle/>
+          <a:p>
+            <a:pPr algn="l"/>
+            <a:r>
+              <a:rPr sz="2000" b="1" i="0">
+                <a:solidFill>
+                  <a:srgbClr val="1F2C56"/>
+                </a:solidFill>
+                <a:latin typeface="Source Serif 4"/>
+              </a:rPr>
+              <a:t>Arbeitsblatt B: Marktbearbeitungs-Jahresplan</a:t>
+            </a:r>
+          </a:p>
+        </p:txBody>
+      </p:sp>
+      <p:sp>
+        <p:nvSpPr>
+          <p:cNvPr id="6" name="Rectangle 5"/>
+          <p:cNvSpPr/>
+          <p:nvPr/>
+        </p:nvSpPr>
+        <p:spPr>
+          <a:xfrm>
+            <a:off x="685800" y="1143000"/>
+            <a:ext cx="10817352" cy="25400"/>
+          </a:xfrm>
+          <a:prstGeom prst="rect">
+            <a:avLst/>
+          </a:prstGeom>
+          <a:solidFill>
+            <a:srgbClr val="D9C089"/>
+          </a:solidFill>
+          <a:ln>
+            <a:noFill/>
+          </a:ln>
+        </p:spPr>
+        <p:style>
+          <a:lnRef idx="1">
+            <a:schemeClr val="accent1"/>
+          </a:lnRef>
+          <a:fillRef idx="3">
+            <a:schemeClr val="accent1"/>
+          </a:fillRef>
+          <a:effectRef idx="2">
+            <a:schemeClr val="accent1"/>
+          </a:effectRef>
+          <a:fontRef idx="minor">
+            <a:schemeClr val="lt1"/>
+          </a:fontRef>
+        </p:style>
+        <p:txBody>
+          <a:bodyPr rtlCol="0" anchor="ctr"/>
+          <a:lstStyle/>
+          <a:p>
+            <a:pPr algn="ctr"/>
+          </a:p>
+        </p:txBody>
+      </p:sp>
+      <p:graphicFrame>
+        <p:nvGraphicFramePr>
+          <p:cNvPr id="7" name="Table 6"/>
+          <p:cNvGraphicFramePr>
+            <a:graphicFrameLocks noGrp="1"/>
+          </p:cNvGraphicFramePr>
+          <p:nvPr/>
+        </p:nvGraphicFramePr>
+        <p:xfrm>
+          <a:off x="685800" y="1417320"/>
+          <a:ext cx="10817352" cy="1920240"/>
+        </p:xfrm>
+        <a:graphic>
+          <a:graphicData uri="http://schemas.openxmlformats.org/drawingml/2006/table">
+            <a:tbl>
+              <a:tblPr firstRow="1" bandRow="1">
+                <a:tableStyleId>{5C22544A-7EE6-4342-B048-85BDC9FD1C3A}</a:tableStyleId>
+              </a:tblPr>
+              <a:tblGrid>
+                <a:gridCol w="2163470"/>
+                <a:gridCol w="2163470"/>
+                <a:gridCol w="2163470"/>
+                <a:gridCol w="2163470"/>
+                <a:gridCol w="2163472"/>
+              </a:tblGrid>
+              <a:tr h="384048">
+                <a:tc>
+                  <a:txBody>
+                    <a:bodyPr/>
+                    <a:lstStyle/>
+                    <a:p>
+                      <a:r>
+                        <a:rPr sz="1100" b="1">
+                          <a:solidFill>
+                            <a:srgbClr val="FFFFFF"/>
+                          </a:solidFill>
+                          <a:latin typeface="Arial"/>
+                        </a:rPr>
+                        <a:t>Quartal</a:t>
+                      </a:r>
+                    </a:p>
+                  </a:txBody>
+                  <a:tcPr>
+                    <a:solidFill>
+                      <a:srgbClr val="1F2C56"/>
+                    </a:solidFill>
+                  </a:tcPr>
+                </a:tc>
+                <a:tc>
+                  <a:txBody>
+                    <a:bodyPr/>
+                    <a:lstStyle/>
+                    <a:p>
+                      <a:r>
+                        <a:rPr sz="1100" b="1">
+                          <a:solidFill>
+                            <a:srgbClr val="FFFFFF"/>
+                          </a:solidFill>
+                          <a:latin typeface="Arial"/>
+                        </a:rPr>
+                        <a:t>Maßnahme</a:t>
+                      </a:r>
+                    </a:p>
+                  </a:txBody>
+                  <a:tcPr>
+                    <a:solidFill>
+                      <a:srgbClr val="1F2C56"/>
+                    </a:solidFill>
+                  </a:tcPr>
+                </a:tc>
+                <a:tc>
+                  <a:txBody>
+                    <a:bodyPr/>
+                    <a:lstStyle/>
+                    <a:p>
+                      <a:r>
+                        <a:rPr sz="1100" b="1">
+                          <a:solidFill>
+                            <a:srgbClr val="FFFFFF"/>
+                          </a:solidFill>
+                          <a:latin typeface="Arial"/>
+                        </a:rPr>
+                        <a:t>Kanal</a:t>
+                      </a:r>
+                    </a:p>
+                  </a:txBody>
+                  <a:tcPr>
+                    <a:solidFill>
+                      <a:srgbClr val="1F2C56"/>
+                    </a:solidFill>
+                  </a:tcPr>
+                </a:tc>
+                <a:tc>
+                  <a:txBody>
+                    <a:bodyPr/>
+                    <a:lstStyle/>
+                    <a:p>
+                      <a:r>
+                        <a:rPr sz="1100" b="1">
+                          <a:solidFill>
+                            <a:srgbClr val="FFFFFF"/>
+                          </a:solidFill>
+                          <a:latin typeface="Arial"/>
+                        </a:rPr>
+                        <a:t>Ziel</a:t>
+                      </a:r>
+                    </a:p>
+                  </a:txBody>
+                  <a:tcPr>
+                    <a:solidFill>
+                      <a:srgbClr val="1F2C56"/>
+                    </a:solidFill>
+                  </a:tcPr>
+                </a:tc>
+                <a:tc>
+                  <a:txBody>
+                    <a:bodyPr/>
+                    <a:lstStyle/>
+                    <a:p>
+                      <a:r>
+                        <a:rPr sz="1100" b="1">
+                          <a:solidFill>
+                            <a:srgbClr val="FFFFFF"/>
+                          </a:solidFill>
+                          <a:latin typeface="Arial"/>
+                        </a:rPr>
+                        <a:t>Messgröße</a:t>
+                      </a:r>
+                    </a:p>
+                  </a:txBody>
+                  <a:tcPr>
+                    <a:solidFill>
+                      <a:srgbClr val="1F2C56"/>
+                    </a:solidFill>
+                  </a:tcPr>
+                </a:tc>
+              </a:tr>
+              <a:tr h="384048">
+                <a:tc>
+                  <a:txBody>
+                    <a:bodyPr/>
+                    <a:lstStyle/>
+                    <a:p>
+                      <a:r>
+                        <a:rPr sz="1050">
+                          <a:solidFill>
+                            <a:srgbClr val="3D5466"/>
+                          </a:solidFill>
+                          <a:latin typeface="Arial"/>
+                        </a:rPr>
+                        <a:t>Q1</a:t>
+                      </a:r>
+                    </a:p>
+                  </a:txBody>
+                  <a:tcPr/>
+                </a:tc>
+                <a:tc>
+                  <a:txBody>
+                    <a:bodyPr/>
+                    <a:lstStyle/>
+                    <a:p/>
+                  </a:txBody>
+                  <a:tcPr/>
+                </a:tc>
+                <a:tc>
+                  <a:txBody>
+                    <a:bodyPr/>
+                    <a:lstStyle/>
+                    <a:p/>
+                  </a:txBody>
+                  <a:tcPr/>
+                </a:tc>
+                <a:tc>
+                  <a:txBody>
+                    <a:bodyPr/>
+                    <a:lstStyle/>
+                    <a:p/>
+                  </a:txBody>
+                  <a:tcPr/>
+                </a:tc>
+                <a:tc>
+                  <a:txBody>
+                    <a:bodyPr/>
+                    <a:lstStyle/>
+                    <a:p/>
+                  </a:txBody>
+                  <a:tcPr/>
+                </a:tc>
+              </a:tr>
+              <a:tr h="384048">
+                <a:tc>
+                  <a:txBody>
+                    <a:bodyPr/>
+                    <a:lstStyle/>
+                    <a:p>
+                      <a:r>
+                        <a:rPr sz="1050">
+                          <a:solidFill>
+                            <a:srgbClr val="3D5466"/>
+                          </a:solidFill>
+                          <a:latin typeface="Arial"/>
+                        </a:rPr>
+                        <a:t>Q2</a:t>
+                      </a:r>
+                    </a:p>
+                  </a:txBody>
+                  <a:tcPr/>
+                </a:tc>
+                <a:tc>
+                  <a:txBody>
+                    <a:bodyPr/>
+                    <a:lstStyle/>
+                    <a:p/>
+                  </a:txBody>
+                  <a:tcPr/>
+                </a:tc>
+                <a:tc>
+                  <a:txBody>
+                    <a:bodyPr/>
+                    <a:lstStyle/>
+                    <a:p/>
+                  </a:txBody>
+                  <a:tcPr/>
+                </a:tc>
+                <a:tc>
+                  <a:txBody>
+                    <a:bodyPr/>
+                    <a:lstStyle/>
+                    <a:p/>
+                  </a:txBody>
+                  <a:tcPr/>
+                </a:tc>
+                <a:tc>
+                  <a:txBody>
+                    <a:bodyPr/>
+                    <a:lstStyle/>
+                    <a:p/>
+                  </a:txBody>
+                  <a:tcPr/>
+                </a:tc>
+              </a:tr>
+              <a:tr h="384048">
+                <a:tc>
+                  <a:txBody>
+                    <a:bodyPr/>
+                    <a:lstStyle/>
+                    <a:p>
+                      <a:r>
+                        <a:rPr sz="1050">
+                          <a:solidFill>
+                            <a:srgbClr val="3D5466"/>
+                          </a:solidFill>
+                          <a:latin typeface="Arial"/>
+                        </a:rPr>
+                        <a:t>Q3</a:t>
+                      </a:r>
+                    </a:p>
+                  </a:txBody>
+                  <a:tcPr/>
+                </a:tc>
+                <a:tc>
+                  <a:txBody>
+                    <a:bodyPr/>
+                    <a:lstStyle/>
+                    <a:p/>
+                  </a:txBody>
+                  <a:tcPr/>
+                </a:tc>
+                <a:tc>
+                  <a:txBody>
+                    <a:bodyPr/>
+                    <a:lstStyle/>
+                    <a:p/>
+                  </a:txBody>
+                  <a:tcPr/>
+                </a:tc>
+                <a:tc>
+                  <a:txBody>
+                    <a:bodyPr/>
+                    <a:lstStyle/>
+                    <a:p/>
+                  </a:txBody>
+                  <a:tcPr/>
+                </a:tc>
+                <a:tc>
+                  <a:txBody>
+                    <a:bodyPr/>
+                    <a:lstStyle/>
+                    <a:p/>
+                  </a:txBody>
+                  <a:tcPr/>
+                </a:tc>
+              </a:tr>
+              <a:tr h="384048">
+                <a:tc>
+                  <a:txBody>
+                    <a:bodyPr/>
+                    <a:lstStyle/>
+                    <a:p>
+                      <a:r>
+                        <a:rPr sz="1050">
+                          <a:solidFill>
+                            <a:srgbClr val="3D5466"/>
+                          </a:solidFill>
+                          <a:latin typeface="Arial"/>
+                        </a:rPr>
+                        <a:t>Q4</a:t>
+                      </a:r>
+                    </a:p>
+                  </a:txBody>
+                  <a:tcPr/>
+                </a:tc>
+                <a:tc>
+                  <a:txBody>
+                    <a:bodyPr/>
+                    <a:lstStyle/>
+                    <a:p/>
+                  </a:txBody>
+                  <a:tcPr/>
+                </a:tc>
+                <a:tc>
+                  <a:txBody>
+                    <a:bodyPr/>
+                    <a:lstStyle/>
+                    <a:p/>
+                  </a:txBody>
+                  <a:tcPr/>
+                </a:tc>
+                <a:tc>
+                  <a:txBody>
+                    <a:bodyPr/>
+                    <a:lstStyle/>
+                    <a:p/>
+                  </a:txBody>
+                  <a:tcPr/>
+                </a:tc>
+                <a:tc>
+                  <a:txBody>
+                    <a:bodyPr/>
+                    <a:lstStyle/>
+                    <a:p/>
+                  </a:txBody>
+                  <a:tcPr/>
+                </a:tc>
+              </a:tr>
+            </a:tbl>
+          </a:graphicData>
+        </a:graphic>
+      </p:graphicFrame>
+      <p:sp>
+        <p:nvSpPr>
+          <p:cNvPr id="8" name="Rectangle 7"/>
+          <p:cNvSpPr/>
+          <p:nvPr/>
+        </p:nvSpPr>
+        <p:spPr>
+          <a:xfrm>
+            <a:off x="0" y="6510528"/>
+            <a:ext cx="12188952" cy="347472"/>
+          </a:xfrm>
+          <a:prstGeom prst="rect">
+            <a:avLst/>
+          </a:prstGeom>
+          <a:solidFill>
+            <a:srgbClr val="0A1937"/>
+          </a:solidFill>
+          <a:ln>
+            <a:noFill/>
+          </a:ln>
+        </p:spPr>
+        <p:style>
+          <a:lnRef idx="1">
+            <a:schemeClr val="accent1"/>
+          </a:lnRef>
+          <a:fillRef idx="3">
+            <a:schemeClr val="accent1"/>
+          </a:fillRef>
+          <a:effectRef idx="2">
+            <a:schemeClr val="accent1"/>
+          </a:effectRef>
+          <a:fontRef idx="minor">
+            <a:schemeClr val="lt1"/>
+          </a:fontRef>
+        </p:style>
+        <p:txBody>
+          <a:bodyPr rtlCol="0" anchor="ctr"/>
+          <a:lstStyle/>
+          <a:p>
+            <a:pPr algn="ctr"/>
+          </a:p>
+        </p:txBody>
+      </p:sp>
+      <p:sp>
+        <p:nvSpPr>
+          <p:cNvPr id="9" name="TextBox 8"/>
+          <p:cNvSpPr txBox="1"/>
+          <p:nvPr/>
+        </p:nvSpPr>
+        <p:spPr>
+          <a:xfrm>
+            <a:off x="685800" y="6583680"/>
+            <a:ext cx="6490411" cy="256032"/>
+          </a:xfrm>
+          <a:prstGeom prst="rect">
+            <a:avLst/>
+          </a:prstGeom>
+          <a:noFill/>
+        </p:spPr>
+        <p:txBody>
+          <a:bodyPr wrap="none">
+            <a:spAutoFit/>
+          </a:bodyPr>
+          <a:lstStyle/>
+          <a:p>
+            <a:pPr algn="l"/>
+            <a:r>
+              <a:rPr sz="700">
+                <a:solidFill>
+                  <a:srgbClr val="A0B4D2"/>
+                </a:solidFill>
+                <a:latin typeface="JetBrains Mono"/>
+              </a:rPr>
+              <a:t>Benedikt Zoller Coaching  ·  FKB Campus  ·  M15</a:t>
+            </a:r>
+          </a:p>
+        </p:txBody>
+      </p:sp>
+      <p:sp>
+        <p:nvSpPr>
+          <p:cNvPr id="10" name="TextBox 9"/>
+          <p:cNvSpPr txBox="1"/>
+          <p:nvPr/>
+        </p:nvSpPr>
+        <p:spPr>
+          <a:xfrm>
+            <a:off x="7176211" y="6583680"/>
+            <a:ext cx="4326940" cy="256032"/>
+          </a:xfrm>
+          <a:prstGeom prst="rect">
+            <a:avLst/>
+          </a:prstGeom>
+          <a:noFill/>
+        </p:spPr>
+        <p:txBody>
+          <a:bodyPr wrap="none">
+            <a:spAutoFit/>
+          </a:bodyPr>
+          <a:lstStyle/>
+          <a:p>
+            <a:pPr algn="r"/>
+            <a:r>
+              <a:rPr sz="700">
+                <a:solidFill>
+                  <a:srgbClr val="A0B4D2"/>
+                </a:solidFill>
+                <a:latin typeface="JetBrains Mono"/>
+              </a:rPr>
+              <a:t>Übersicht</a:t>
             </a:r>
           </a:p>
         </p:txBody>
@@ -8803,7 +10219,7 @@
                 </a:solidFill>
                 <a:latin typeface="Source Serif 4"/>
               </a:rPr>
-              <a:t>Agenda</a:t>
+              <a:t>So läuft das Modul</a:t>
             </a:r>
           </a:p>
         </p:txBody>
@@ -8832,191 +10248,594 @@
           <a:p>
             <a:pPr>
               <a:spcBef>
-                <a:spcPts val="800"/>
+                <a:spcPts val="400"/>
               </a:spcBef>
               <a:spcAft>
-                <a:spcPts val="200"/>
+                <a:spcPts val="100"/>
               </a:spcAft>
             </a:pPr>
             <a:r>
-              <a:rPr sz="1500">
+              <a:rPr sz="900">
+                <a:solidFill>
+                  <a:srgbClr val="78808C"/>
+                </a:solidFill>
+                <a:latin typeface="Consolas"/>
+              </a:rPr>
+              <a:t>09:00       </a:t>
+            </a:r>
+            <a:r>
+              <a:rPr sz="1200" b="1">
                 <a:solidFill>
                   <a:srgbClr val="3D5466"/>
                 </a:solidFill>
                 <a:latin typeface="Arial"/>
               </a:rPr>
-              <a:t>01   Vom reaktiven zum strategischen Vertrieb</a:t>
+              <a:t>  Begrüßung &amp; Orientierung</a:t>
+            </a:r>
+            <a:r>
+              <a:rPr sz="900">
+                <a:solidFill>
+                  <a:srgbClr val="78808C"/>
+                </a:solidFill>
+                <a:latin typeface="Arial"/>
+              </a:rPr>
+              <a:t>  ·  Plenum</a:t>
             </a:r>
           </a:p>
           <a:p>
             <a:pPr>
               <a:spcBef>
-                <a:spcPts val="800"/>
+                <a:spcPts val="400"/>
               </a:spcBef>
               <a:spcAft>
-                <a:spcPts val="200"/>
+                <a:spcPts val="100"/>
               </a:spcAft>
             </a:pPr>
             <a:r>
-              <a:rPr sz="1500">
+              <a:rPr sz="900">
+                <a:solidFill>
+                  <a:srgbClr val="78808C"/>
+                </a:solidFill>
+                <a:latin typeface="Consolas"/>
+              </a:rPr>
+              <a:t>09:15       </a:t>
+            </a:r>
+            <a:r>
+              <a:rPr sz="1200" b="1">
                 <a:solidFill>
                   <a:srgbClr val="3D5466"/>
                 </a:solidFill>
                 <a:latin typeface="Arial"/>
               </a:rPr>
-              <a:t>02   Segmentierungskriterien</a:t>
+              <a:t>  Warm-up: „Mein Markt"</a:t>
+            </a:r>
+            <a:r>
+              <a:rPr sz="900">
+                <a:solidFill>
+                  <a:srgbClr val="78808C"/>
+                </a:solidFill>
+                <a:latin typeface="Arial"/>
+              </a:rPr>
+              <a:t>  ·  2er-Austausch + Plenum</a:t>
             </a:r>
           </a:p>
           <a:p>
             <a:pPr>
               <a:spcBef>
-                <a:spcPts val="800"/>
+                <a:spcPts val="400"/>
               </a:spcBef>
               <a:spcAft>
-                <a:spcPts val="200"/>
+                <a:spcPts val="100"/>
               </a:spcAft>
             </a:pPr>
             <a:r>
-              <a:rPr sz="1500">
+              <a:rPr sz="900">
+                <a:solidFill>
+                  <a:srgbClr val="78808C"/>
+                </a:solidFill>
+                <a:latin typeface="Consolas"/>
+              </a:rPr>
+              <a:t>09:35       </a:t>
+            </a:r>
+            <a:r>
+              <a:rPr sz="1200" b="1">
                 <a:solidFill>
                   <a:srgbClr val="3D5466"/>
                 </a:solidFill>
                 <a:latin typeface="Arial"/>
               </a:rPr>
-              <a:t>03   Das Scoring-Modell zur Segmentpriorisierung</a:t>
+              <a:t>  Theorie-Block I</a:t>
+            </a:r>
+            <a:r>
+              <a:rPr sz="900">
+                <a:solidFill>
+                  <a:srgbClr val="78808C"/>
+                </a:solidFill>
+                <a:latin typeface="Arial"/>
+              </a:rPr>
+              <a:t>  ·  Vortrag + Diskussion</a:t>
             </a:r>
           </a:p>
           <a:p>
             <a:pPr>
               <a:spcBef>
-                <a:spcPts val="800"/>
+                <a:spcPts val="400"/>
               </a:spcBef>
               <a:spcAft>
-                <a:spcPts val="200"/>
+                <a:spcPts val="100"/>
               </a:spcAft>
             </a:pPr>
             <a:r>
-              <a:rPr sz="1500">
+              <a:rPr sz="900">
+                <a:solidFill>
+                  <a:srgbClr val="78808C"/>
+                </a:solidFill>
+                <a:latin typeface="Consolas"/>
+              </a:rPr>
+              <a:t>10:15       </a:t>
+            </a:r>
+            <a:r>
+              <a:rPr sz="1200" b="1">
                 <a:solidFill>
                   <a:srgbClr val="3D5466"/>
                 </a:solidFill>
                 <a:latin typeface="Arial"/>
               </a:rPr>
-              <a:t>04   Wie groß ist mein adressierbarer Markt?</a:t>
+              <a:t>  Werkzeug-Einführung</a:t>
+            </a:r>
+            <a:r>
+              <a:rPr sz="900">
+                <a:solidFill>
+                  <a:srgbClr val="78808C"/>
+                </a:solidFill>
+                <a:latin typeface="Arial"/>
+              </a:rPr>
+              <a:t>  ·  Demonstration</a:t>
             </a:r>
           </a:p>
           <a:p>
             <a:pPr>
               <a:spcBef>
-                <a:spcPts val="800"/>
+                <a:spcPts val="400"/>
               </a:spcBef>
               <a:spcAft>
-                <a:spcPts val="200"/>
+                <a:spcPts val="100"/>
               </a:spcAft>
             </a:pPr>
             <a:r>
-              <a:rPr sz="1500">
+              <a:rPr sz="900">
+                <a:solidFill>
+                  <a:srgbClr val="78808C"/>
+                </a:solidFill>
+                <a:latin typeface="Consolas"/>
+              </a:rPr>
+              <a:t>10:35       </a:t>
+            </a:r>
+            <a:r>
+              <a:rPr sz="1200" b="1">
                 <a:solidFill>
                   <a:srgbClr val="3D5466"/>
                 </a:solidFill>
                 <a:latin typeface="Arial"/>
               </a:rPr>
-              <a:t>05   SWOT im Firmenkundensegment</a:t>
+              <a:t>  Pause</a:t>
             </a:r>
           </a:p>
           <a:p>
             <a:pPr>
               <a:spcBef>
-                <a:spcPts val="800"/>
+                <a:spcPts val="400"/>
               </a:spcBef>
               <a:spcAft>
-                <a:spcPts val="200"/>
+                <a:spcPts val="100"/>
               </a:spcAft>
             </a:pPr>
             <a:r>
-              <a:rPr sz="1500">
+              <a:rPr sz="900">
+                <a:solidFill>
+                  <a:srgbClr val="78808C"/>
+                </a:solidFill>
+                <a:latin typeface="Consolas"/>
+              </a:rPr>
+              <a:t>10:50       </a:t>
+            </a:r>
+            <a:r>
+              <a:rPr sz="1200" b="1">
                 <a:solidFill>
                   <a:srgbClr val="3D5466"/>
                 </a:solidFill>
                 <a:latin typeface="Arial"/>
               </a:rPr>
-              <a:t>06   Wertversprechen formulieren</a:t>
+              <a:t>  Einzelarbeit I: Marktanalyse</a:t>
+            </a:r>
+            <a:r>
+              <a:rPr sz="900">
+                <a:solidFill>
+                  <a:srgbClr val="78808C"/>
+                </a:solidFill>
+                <a:latin typeface="Arial"/>
+              </a:rPr>
+              <a:t>  ·  Stille Einzelarbeit + Check-in</a:t>
             </a:r>
           </a:p>
           <a:p>
             <a:pPr>
               <a:spcBef>
-                <a:spcPts val="800"/>
+                <a:spcPts val="400"/>
               </a:spcBef>
               <a:spcAft>
-                <a:spcPts val="200"/>
+                <a:spcPts val="100"/>
               </a:spcAft>
             </a:pPr>
             <a:r>
-              <a:rPr sz="1500">
+              <a:rPr sz="900">
+                <a:solidFill>
+                  <a:srgbClr val="78808C"/>
+                </a:solidFill>
+                <a:latin typeface="Consolas"/>
+              </a:rPr>
+              <a:t>11:50       </a:t>
+            </a:r>
+            <a:r>
+              <a:rPr sz="1200" b="1">
                 <a:solidFill>
                   <a:srgbClr val="3D5466"/>
                 </a:solidFill>
                 <a:latin typeface="Arial"/>
               </a:rPr>
-              <a:t>07   Welche Kanäle funktionieren wirklich?</a:t>
+              <a:t>  Partnercheck</a:t>
+            </a:r>
+            <a:r>
+              <a:rPr sz="900">
+                <a:solidFill>
+                  <a:srgbClr val="78808C"/>
+                </a:solidFill>
+                <a:latin typeface="Arial"/>
+              </a:rPr>
+              <a:t>  ·  Partnerarbeit</a:t>
             </a:r>
           </a:p>
           <a:p>
             <a:pPr>
               <a:spcBef>
-                <a:spcPts val="800"/>
+                <a:spcPts val="400"/>
               </a:spcBef>
               <a:spcAft>
-                <a:spcPts val="200"/>
+                <a:spcPts val="100"/>
               </a:spcAft>
             </a:pPr>
             <a:r>
-              <a:rPr sz="1500">
+              <a:rPr sz="900">
+                <a:solidFill>
+                  <a:srgbClr val="78808C"/>
+                </a:solidFill>
+                <a:latin typeface="Consolas"/>
+              </a:rPr>
+              <a:t>12:10       </a:t>
+            </a:r>
+            <a:r>
+              <a:rPr sz="1200" b="1">
                 <a:solidFill>
                   <a:srgbClr val="3D5466"/>
                 </a:solidFill>
                 <a:latin typeface="Arial"/>
               </a:rPr>
-              <a:t>08   Empfehlungsmanagement systematisieren</a:t>
+              <a:t>  Mittagspause</a:t>
             </a:r>
           </a:p>
           <a:p>
             <a:pPr>
               <a:spcBef>
-                <a:spcPts val="800"/>
+                <a:spcPts val="400"/>
               </a:spcBef>
               <a:spcAft>
-                <a:spcPts val="200"/>
+                <a:spcPts val="100"/>
               </a:spcAft>
             </a:pPr>
             <a:r>
-              <a:rPr sz="1500">
+              <a:rPr sz="900">
+                <a:solidFill>
+                  <a:srgbClr val="78808C"/>
+                </a:solidFill>
+                <a:latin typeface="Consolas"/>
+              </a:rPr>
+              <a:t>13:10       </a:t>
+            </a:r>
+            <a:r>
+              <a:rPr sz="1200" b="1">
                 <a:solidFill>
                   <a:srgbClr val="3D5466"/>
                 </a:solidFill>
                 <a:latin typeface="Arial"/>
               </a:rPr>
-              <a:t>09   Arbeitsblatt A: Segmentpriorisierung – Scoring</a:t>
+              <a:t>  Theorie-Block II</a:t>
+            </a:r>
+            <a:r>
+              <a:rPr sz="900">
+                <a:solidFill>
+                  <a:srgbClr val="78808C"/>
+                </a:solidFill>
+                <a:latin typeface="Arial"/>
+              </a:rPr>
+              <a:t>  ·  Vortrag + Praxisbeispiele</a:t>
             </a:r>
           </a:p>
           <a:p>
             <a:pPr>
               <a:spcBef>
-                <a:spcPts val="800"/>
+                <a:spcPts val="400"/>
               </a:spcBef>
               <a:spcAft>
-                <a:spcPts val="200"/>
+                <a:spcPts val="100"/>
               </a:spcAft>
             </a:pPr>
             <a:r>
-              <a:rPr sz="1500">
+              <a:rPr sz="900">
+                <a:solidFill>
+                  <a:srgbClr val="78808C"/>
+                </a:solidFill>
+                <a:latin typeface="Consolas"/>
+              </a:rPr>
+              <a:t>13:45       </a:t>
+            </a:r>
+            <a:r>
+              <a:rPr sz="1200" b="1">
                 <a:solidFill>
                   <a:srgbClr val="3D5466"/>
                 </a:solidFill>
                 <a:latin typeface="Arial"/>
               </a:rPr>
-              <a:t>10   Arbeitsblatt B: Marktbearbeitungs-Jahresplan</a:t>
+              <a:t>  Einzelarbeit II: Strategieentwicklung</a:t>
+            </a:r>
+            <a:r>
+              <a:rPr sz="900">
+                <a:solidFill>
+                  <a:srgbClr val="78808C"/>
+                </a:solidFill>
+                <a:latin typeface="Arial"/>
+              </a:rPr>
+              <a:t>  ·  Stille Einzelarbeit</a:t>
+            </a:r>
+          </a:p>
+          <a:p>
+            <a:pPr>
+              <a:spcBef>
+                <a:spcPts val="400"/>
+              </a:spcBef>
+              <a:spcAft>
+                <a:spcPts val="100"/>
+              </a:spcAft>
+            </a:pPr>
+            <a:r>
+              <a:rPr sz="900">
+                <a:solidFill>
+                  <a:srgbClr val="78808C"/>
+                </a:solidFill>
+                <a:latin typeface="Consolas"/>
+              </a:rPr>
+              <a:t>14:45       </a:t>
+            </a:r>
+            <a:r>
+              <a:rPr sz="1200" b="1">
+                <a:solidFill>
+                  <a:srgbClr val="3D5466"/>
+                </a:solidFill>
+                <a:latin typeface="Arial"/>
+              </a:rPr>
+              <a:t>  Pause</a:t>
+            </a:r>
+          </a:p>
+          <a:p>
+            <a:pPr>
+              <a:spcBef>
+                <a:spcPts val="400"/>
+              </a:spcBef>
+              <a:spcAft>
+                <a:spcPts val="100"/>
+              </a:spcAft>
+            </a:pPr>
+            <a:r>
+              <a:rPr sz="900">
+                <a:solidFill>
+                  <a:srgbClr val="78808C"/>
+                </a:solidFill>
+                <a:latin typeface="Consolas"/>
+              </a:rPr>
+              <a:t>15:00       </a:t>
+            </a:r>
+            <a:r>
+              <a:rPr sz="1200" b="1">
+                <a:solidFill>
+                  <a:srgbClr val="3D5466"/>
+                </a:solidFill>
+                <a:latin typeface="Arial"/>
+              </a:rPr>
+              <a:t>  Einzelarbeit III: Jahresplan</a:t>
+            </a:r>
+            <a:r>
+              <a:rPr sz="900">
+                <a:solidFill>
+                  <a:srgbClr val="78808C"/>
+                </a:solidFill>
+                <a:latin typeface="Arial"/>
+              </a:rPr>
+              <a:t>  ·  Einzelarbeit</a:t>
+            </a:r>
+          </a:p>
+          <a:p>
+            <a:pPr>
+              <a:spcBef>
+                <a:spcPts val="400"/>
+              </a:spcBef>
+              <a:spcAft>
+                <a:spcPts val="100"/>
+              </a:spcAft>
+            </a:pPr>
+            <a:r>
+              <a:rPr sz="900">
+                <a:solidFill>
+                  <a:srgbClr val="78808C"/>
+                </a:solidFill>
+                <a:latin typeface="Consolas"/>
+              </a:rPr>
+              <a:t>15:40       </a:t>
+            </a:r>
+            <a:r>
+              <a:rPr sz="1200" b="1">
+                <a:solidFill>
+                  <a:srgbClr val="3D5466"/>
+                </a:solidFill>
+                <a:latin typeface="Arial"/>
+              </a:rPr>
+              <a:t>  Peer-Präsentation</a:t>
+            </a:r>
+            <a:r>
+              <a:rPr sz="900">
+                <a:solidFill>
+                  <a:srgbClr val="78808C"/>
+                </a:solidFill>
+                <a:latin typeface="Arial"/>
+              </a:rPr>
+              <a:t>  ·  Galerie-Runde</a:t>
+            </a:r>
+          </a:p>
+          <a:p>
+            <a:pPr>
+              <a:spcBef>
+                <a:spcPts val="400"/>
+              </a:spcBef>
+              <a:spcAft>
+                <a:spcPts val="100"/>
+              </a:spcAft>
+            </a:pPr>
+            <a:r>
+              <a:rPr sz="900">
+                <a:solidFill>
+                  <a:srgbClr val="78808C"/>
+                </a:solidFill>
+                <a:latin typeface="Consolas"/>
+              </a:rPr>
+              <a:t>16:50       </a:t>
+            </a:r>
+            <a:r>
+              <a:rPr sz="1200" b="1">
+                <a:solidFill>
+                  <a:srgbClr val="3D5466"/>
+                </a:solidFill>
+                <a:latin typeface="Arial"/>
+              </a:rPr>
+              <a:t>  Konsolidierung</a:t>
+            </a:r>
+            <a:r>
+              <a:rPr sz="900">
+                <a:solidFill>
+                  <a:srgbClr val="78808C"/>
+                </a:solidFill>
+                <a:latin typeface="Arial"/>
+              </a:rPr>
+              <a:t>  ·  Einzelarbeit</a:t>
+            </a:r>
+          </a:p>
+          <a:p>
+            <a:pPr>
+              <a:spcBef>
+                <a:spcPts val="400"/>
+              </a:spcBef>
+              <a:spcAft>
+                <a:spcPts val="100"/>
+              </a:spcAft>
+            </a:pPr>
+            <a:r>
+              <a:rPr sz="900">
+                <a:solidFill>
+                  <a:srgbClr val="78808C"/>
+                </a:solidFill>
+                <a:latin typeface="Consolas"/>
+              </a:rPr>
+              <a:t>17:10       </a:t>
+            </a:r>
+            <a:r>
+              <a:rPr sz="1200" b="1">
+                <a:solidFill>
+                  <a:srgbClr val="3D5466"/>
+                </a:solidFill>
+                <a:latin typeface="Arial"/>
+              </a:rPr>
+              <a:t>  Abschluss &amp; Transfer</a:t>
+            </a:r>
+            <a:r>
+              <a:rPr sz="900">
+                <a:solidFill>
+                  <a:srgbClr val="78808C"/>
+                </a:solidFill>
+                <a:latin typeface="Arial"/>
+              </a:rPr>
+              <a:t>  ·  Plenum</a:t>
+            </a:r>
+          </a:p>
+          <a:p>
+            <a:pPr>
+              <a:spcBef>
+                <a:spcPts val="400"/>
+              </a:spcBef>
+              <a:spcAft>
+                <a:spcPts val="100"/>
+              </a:spcAft>
+            </a:pPr>
+            <a:r>
+              <a:rPr sz="900">
+                <a:solidFill>
+                  <a:srgbClr val="78808C"/>
+                </a:solidFill>
+                <a:latin typeface="Consolas"/>
+              </a:rPr>
+              <a:t>17:25       </a:t>
+            </a:r>
+            <a:r>
+              <a:rPr sz="1200" b="1">
+                <a:solidFill>
+                  <a:srgbClr val="3D5466"/>
+                </a:solidFill>
+                <a:latin typeface="Arial"/>
+              </a:rPr>
+              <a:t>  Feedbackbogen</a:t>
+            </a:r>
+            <a:r>
+              <a:rPr sz="900">
+                <a:solidFill>
+                  <a:srgbClr val="78808C"/>
+                </a:solidFill>
+                <a:latin typeface="Arial"/>
+              </a:rPr>
+              <a:t>  ·  Einzeln</a:t>
+            </a:r>
+          </a:p>
+          <a:p>
+            <a:pPr>
+              <a:spcBef>
+                <a:spcPts val="400"/>
+              </a:spcBef>
+              <a:spcAft>
+                <a:spcPts val="100"/>
+              </a:spcAft>
+            </a:pPr>
+            <a:r>
+              <a:rPr sz="900">
+                <a:solidFill>
+                  <a:srgbClr val="78808C"/>
+                </a:solidFill>
+                <a:latin typeface="Consolas"/>
+              </a:rPr>
+              <a:t>17:30       </a:t>
+            </a:r>
+            <a:r>
+              <a:rPr sz="1200" b="1">
+                <a:solidFill>
+                  <a:srgbClr val="3D5466"/>
+                </a:solidFill>
+                <a:latin typeface="Arial"/>
+              </a:rPr>
+              <a:t>  Ende</a:t>
             </a:r>
           </a:p>
         </p:txBody>
@@ -9390,13 +11209,13 @@
               </a:spcAft>
             </a:pPr>
             <a:r>
-              <a:rPr sz="1200">
+              <a:rPr sz="1300">
                 <a:solidFill>
                   <a:srgbClr val="3D5466"/>
                 </a:solidFill>
                 <a:latin typeface="Arial"/>
               </a:rPr>
-              <a:t>Eine Marktbearbeitungsstrategie beantwortet vier Fragen:</a:t>
+              <a:t>▸  Eine Marktbearbeitungsstrategie beantwortet vier Fragen:</a:t>
             </a:r>
           </a:p>
           <a:p>
@@ -9485,13 +11304,13 @@
               </a:spcAft>
             </a:pPr>
             <a:r>
-              <a:rPr sz="1200">
+              <a:rPr sz="1300">
                 <a:solidFill>
                   <a:srgbClr val="3D5466"/>
                 </a:solidFill>
                 <a:latin typeface="Arial"/>
               </a:rPr>
-              <a:t>## 4.2 Marktsegmentierung im Firmenkundengeschäft</a:t>
+              <a:t>▸  ## 4.2 Marktsegmentierung im Firmenkundengeschäft</a:t>
             </a:r>
           </a:p>
         </p:txBody>
@@ -10573,13 +12392,13 @@
               </a:spcAft>
             </a:pPr>
             <a:r>
-              <a:rPr sz="1200">
+              <a:rPr sz="1300">
                 <a:solidFill>
                   <a:srgbClr val="3D5466"/>
                 </a:solidFill>
                 <a:latin typeface="Arial"/>
               </a:rPr>
-              <a:t>Nicht jeder Firmenkunde ist gleich attraktiv. Eine sinnvolle Segmentierung kombiniert mehrere Kriterien:</a:t>
+              <a:t>▸  Nicht jeder Firmenkunde ist gleich attraktiv. Eine sinnvolle Segmentierung kombiniert mehrere Kriterien:</a:t>
             </a:r>
           </a:p>
           <a:p>
@@ -10592,13 +12411,13 @@
               </a:spcAft>
             </a:pPr>
             <a:r>
-              <a:rPr sz="1200">
+              <a:rPr sz="1300">
                 <a:solidFill>
                   <a:srgbClr val="3D5466"/>
                 </a:solidFill>
                 <a:latin typeface="Arial"/>
               </a:rPr>
-              <a:t>Empfehlung: Wählen Sie maximal zwei Primärsegmente. Breite schlägt Tiefe nur in sehr seltenen Fällen.</a:t>
+              <a:t>▸  Empfehlung: Wählen Sie maximal zwei Primärsegmente. Breite schlägt Tiefe nur in sehr seltenen Fällen.</a:t>
             </a:r>
           </a:p>
         </p:txBody>
@@ -10972,13 +12791,13 @@
               </a:spcAft>
             </a:pPr>
             <a:r>
-              <a:rPr sz="1200">
+              <a:rPr sz="1300">
                 <a:solidFill>
                   <a:srgbClr val="3D5466"/>
                 </a:solidFill>
                 <a:latin typeface="Arial"/>
               </a:rPr>
-              <a:t>Ein einfaches Scoring-Modell hilft bei der Auswahl des Primärsegments:</a:t>
+              <a:t>▸  Ein einfaches Scoring-Modell hilft bei der Auswahl des Primärsegments:</a:t>
             </a:r>
           </a:p>
           <a:p>
@@ -10991,13 +12810,13 @@
               </a:spcAft>
             </a:pPr>
             <a:r>
-              <a:rPr sz="1200">
+              <a:rPr sz="1300">
                 <a:solidFill>
                   <a:srgbClr val="3D5466"/>
                 </a:solidFill>
                 <a:latin typeface="Arial"/>
               </a:rPr>
-              <a:t>Bewertung je Kriterium: 1 (schwach) bis 5 (sehr stark).</a:t>
+              <a:t>▸  Bewertung je Kriterium: 1 (schwach) bis 5 (sehr stark).</a:t>
             </a:r>
           </a:p>
           <a:p>
@@ -11010,13 +12829,13 @@
               </a:spcAft>
             </a:pPr>
             <a:r>
-              <a:rPr sz="1200">
+              <a:rPr sz="1300">
                 <a:solidFill>
                   <a:srgbClr val="3D5466"/>
                 </a:solidFill>
                 <a:latin typeface="Arial"/>
               </a:rPr>
-              <a:t>## 4.3 Marktpotenzialanalyse</a:t>
+              <a:t>▸  ## 4.3 Marktpotenzialanalyse</a:t>
             </a:r>
           </a:p>
         </p:txBody>

--- a/protected-downloads/praesentation/M15.pptx
+++ b/protected-downloads/praesentation/M15.pptx
@@ -4601,7 +4601,7 @@
                 </a:solidFill>
                 <a:latin typeface="JetBrains Mono"/>
               </a:rPr>
-              <a:t>Benedikt Zoller Coaching  ·  FKB Campus  ·  2026</a:t>
+              <a:t>FKB Campus  ·  2026</a:t>
             </a:r>
           </a:p>
         </p:txBody>
@@ -5382,7 +5382,7 @@
                 </a:solidFill>
                 <a:latin typeface="JetBrains Mono"/>
               </a:rPr>
-              <a:t>Benedikt Zoller Coaching  ·  FKB Campus  ·  M15</a:t>
+              <a:t>FKB Campus  ·  M15</a:t>
             </a:r>
           </a:p>
         </p:txBody>
@@ -5949,7 +5949,7 @@
                 </a:solidFill>
                 <a:latin typeface="JetBrains Mono"/>
               </a:rPr>
-              <a:t>Benedikt Zoller Coaching  ·  FKB Campus  ·  M15</a:t>
+              <a:t>FKB Campus  ·  M15</a:t>
             </a:r>
           </a:p>
         </p:txBody>
@@ -6424,7 +6424,7 @@
                 </a:solidFill>
                 <a:latin typeface="JetBrains Mono"/>
               </a:rPr>
-              <a:t>Benedikt Zoller Coaching  ·  FKB Campus  ·  M15</a:t>
+              <a:t>FKB Campus  ·  M15</a:t>
             </a:r>
           </a:p>
         </p:txBody>
@@ -7013,7 +7013,7 @@
                 </a:solidFill>
                 <a:latin typeface="JetBrains Mono"/>
               </a:rPr>
-              <a:t>Benedikt Zoller Coaching  ·  FKB Campus  ·  M15</a:t>
+              <a:t>FKB Campus  ·  M15</a:t>
             </a:r>
           </a:p>
         </p:txBody>
@@ -7393,7 +7393,7 @@
                 </a:solidFill>
                 <a:latin typeface="JetBrains Mono"/>
               </a:rPr>
-              <a:t>Benedikt Zoller Coaching  ·  FKB Campus  ·  M15</a:t>
+              <a:t>FKB Campus  ·  M15</a:t>
             </a:r>
           </a:p>
         </p:txBody>
@@ -8129,7 +8129,7 @@
                 </a:solidFill>
                 <a:latin typeface="JetBrains Mono"/>
               </a:rPr>
-              <a:t>Benedikt Zoller Coaching  ·  FKB Campus  ·  M15</a:t>
+              <a:t>FKB Campus  ·  M15</a:t>
             </a:r>
           </a:p>
         </p:txBody>
@@ -8544,7 +8544,7 @@
                 </a:solidFill>
                 <a:latin typeface="JetBrains Mono"/>
               </a:rPr>
-              <a:t>Benedikt Zoller Coaching  ·  FKB Campus  ·  M15</a:t>
+              <a:t>FKB Campus  ·  M15</a:t>
             </a:r>
           </a:p>
         </p:txBody>
@@ -9188,7 +9188,7 @@
                 </a:solidFill>
                 <a:latin typeface="JetBrains Mono"/>
               </a:rPr>
-              <a:t>Benedikt Zoller Coaching  ·  FKB Campus  ·  M15</a:t>
+              <a:t>FKB Campus  ·  M15</a:t>
             </a:r>
           </a:p>
         </p:txBody>
@@ -9589,7 +9589,7 @@
                 </a:solidFill>
                 <a:latin typeface="JetBrains Mono"/>
               </a:rPr>
-              <a:t>Benedikt Zoller Coaching  ·  FKB Campus  ·  M15</a:t>
+              <a:t>FKB Campus  ·  M15</a:t>
             </a:r>
           </a:p>
         </p:txBody>
@@ -10002,7 +10002,7 @@
                 </a:solidFill>
                 <a:latin typeface="JetBrains Mono"/>
               </a:rPr>
-              <a:t>Benedikt Zoller Coaching  ·  FKB Campus  ·  M15</a:t>
+              <a:t>FKB Campus  ·  M15</a:t>
             </a:r>
           </a:p>
         </p:txBody>
@@ -10913,7 +10913,7 @@
                 </a:solidFill>
                 <a:latin typeface="JetBrains Mono"/>
               </a:rPr>
-              <a:t>Benedikt Zoller Coaching  ·  FKB Campus  ·  M15</a:t>
+              <a:t>FKB Campus  ·  M15</a:t>
             </a:r>
           </a:p>
         </p:txBody>
@@ -11388,7 +11388,7 @@
                 </a:solidFill>
                 <a:latin typeface="JetBrains Mono"/>
               </a:rPr>
-              <a:t>Benedikt Zoller Coaching  ·  FKB Campus  ·  M15</a:t>
+              <a:t>FKB Campus  ·  M15</a:t>
             </a:r>
           </a:p>
         </p:txBody>
@@ -11707,7 +11707,7 @@
                 </a:solidFill>
                 <a:latin typeface="JetBrains Mono"/>
               </a:rPr>
-              <a:t>Benedikt Zoller Coaching  ·  FKB Campus  ·  M15</a:t>
+              <a:t>FKB Campus  ·  M15</a:t>
             </a:r>
           </a:p>
         </p:txBody>
@@ -12061,7 +12061,7 @@
                 </a:solidFill>
                 <a:latin typeface="JetBrains Mono"/>
               </a:rPr>
-              <a:t>Benedikt Zoller Coaching  ·  FKB Campus  ·  M15</a:t>
+              <a:t>FKB Campus  ·  M15</a:t>
             </a:r>
           </a:p>
         </p:txBody>
@@ -12495,7 +12495,7 @@
                 </a:solidFill>
                 <a:latin typeface="JetBrains Mono"/>
               </a:rPr>
-              <a:t>Benedikt Zoller Coaching  ·  FKB Campus  ·  M15</a:t>
+              <a:t>FKB Campus  ·  M15</a:t>
             </a:r>
           </a:p>
         </p:txBody>
@@ -12913,7 +12913,7 @@
                 </a:solidFill>
                 <a:latin typeface="JetBrains Mono"/>
               </a:rPr>
-              <a:t>Benedikt Zoller Coaching  ·  FKB Campus  ·  M15</a:t>
+              <a:t>FKB Campus  ·  M15</a:t>
             </a:r>
           </a:p>
         </p:txBody>

--- a/protected-downloads/praesentation/M15.pptx
+++ b/protected-downloads/praesentation/M15.pptx
@@ -4523,7 +4523,7 @@
                 </a:solidFill>
                 <a:latin typeface="Arial"/>
               </a:rPr>
-              <a:t>v0.4</a:t>
+              <a:t>v1.0</a:t>
             </a:r>
           </a:p>
         </p:txBody>

--- a/protected-downloads/praesentation/M15.pptx
+++ b/protected-downloads/praesentation/M15.pptx
@@ -7273,7 +7273,7 @@
                 </a:solidFill>
                 <a:latin typeface="Source Serif 4"/>
               </a:rPr>
-              <a:t>Arbeitsblatt A: Segmentpriorisierung – Scoring</a:t>
+              <a:t>AB-1: Segmentpriorisierung – Scoring</a:t>
             </a:r>
           </a:p>
         </p:txBody>
@@ -7567,7 +7567,7 @@
                 </a:solidFill>
                 <a:latin typeface="Source Serif 4"/>
               </a:rPr>
-              <a:t>Arbeitsblatt A: Segmentpriorisierung – Scoring</a:t>
+              <a:t>AB-1: Segmentpriorisierung – Scoring</a:t>
             </a:r>
           </a:p>
         </p:txBody>
@@ -8424,7 +8424,7 @@
                 </a:solidFill>
                 <a:latin typeface="Source Serif 4"/>
               </a:rPr>
-              <a:t>Arbeitsblatt B: Marktbearbeitungs-Jahresplan</a:t>
+              <a:t>AB-2: Marktbearbeitungs-Jahresplan</a:t>
             </a:r>
           </a:p>
         </p:txBody>
@@ -8718,7 +8718,7 @@
                 </a:solidFill>
                 <a:latin typeface="Source Serif 4"/>
               </a:rPr>
-              <a:t>Arbeitsblatt B: Marktbearbeitungs-Jahresplan</a:t>
+              <a:t>AB-2: Marktbearbeitungs-Jahresplan</a:t>
             </a:r>
           </a:p>
         </p:txBody>

--- a/protected-downloads/praesentation/M15.pptx
+++ b/protected-downloads/praesentation/M15.pptx
@@ -8424,7 +8424,7 @@
                 </a:solidFill>
                 <a:latin typeface="Source Serif 4"/>
               </a:rPr>
-              <a:t>AB-2: Marktbearbeitungs-Jahresplan</a:t>
+              <a:t>AB-3: Marktbearbeitungs-Jahresplan</a:t>
             </a:r>
           </a:p>
         </p:txBody>
@@ -8718,7 +8718,7 @@
                 </a:solidFill>
                 <a:latin typeface="Source Serif 4"/>
               </a:rPr>
-              <a:t>AB-2: Marktbearbeitungs-Jahresplan</a:t>
+              <a:t>AB-3: Marktbearbeitungs-Jahresplan</a:t>
             </a:r>
           </a:p>
         </p:txBody>

--- a/protected-downloads/praesentation/M15.pptx
+++ b/protected-downloads/praesentation/M15.pptx
@@ -4198,7 +4198,7 @@
                 <a:solidFill>
                   <a:srgbClr val="C8D2E6"/>
                 </a:solidFill>
-                <a:latin typeface="JetBrains Mono"/>
+                <a:latin typeface="Consolas"/>
               </a:rPr>
               <a:t>FKB CAMPUS  ·  FIRMENKUNDENAKADEMIE  ·  M15</a:t>
             </a:r>
@@ -4233,7 +4233,7 @@
                 <a:solidFill>
                   <a:srgbClr val="FFFFFF"/>
                 </a:solidFill>
-                <a:latin typeface="Source Serif 4"/>
+                <a:latin typeface="Arial"/>
               </a:rPr>
               <a:t>Marktbearbeitungsstrategie</a:t>
             </a:r>
@@ -4268,7 +4268,7 @@
                 <a:solidFill>
                   <a:srgbClr val="BECDE6"/>
                 </a:solidFill>
-                <a:latin typeface="Source Serif 4"/>
+                <a:latin typeface="Arial"/>
               </a:rPr>
               <a:t>Zielsegmente definieren, Marktpotenziale analysieren und eine eigene Vertriebsstrategie entwickeln</a:t>
             </a:r>
@@ -4346,7 +4346,7 @@
                 <a:solidFill>
                   <a:srgbClr val="A0B4D2"/>
                 </a:solidFill>
-                <a:latin typeface="JetBrains Mono"/>
+                <a:latin typeface="Consolas"/>
               </a:rPr>
               <a:t>KOMPETENZFELD</a:t>
             </a:r>
@@ -4416,7 +4416,7 @@
                 <a:solidFill>
                   <a:srgbClr val="A0B4D2"/>
                 </a:solidFill>
-                <a:latin typeface="JetBrains Mono"/>
+                <a:latin typeface="Consolas"/>
               </a:rPr>
               <a:t>KOMPETENZSTUFE</a:t>
             </a:r>
@@ -4486,7 +4486,7 @@
                 <a:solidFill>
                   <a:srgbClr val="A0B4D2"/>
                 </a:solidFill>
-                <a:latin typeface="JetBrains Mono"/>
+                <a:latin typeface="Consolas"/>
               </a:rPr>
               <a:t>VERSION</a:t>
             </a:r>
@@ -4599,7 +4599,7 @@
                 <a:solidFill>
                   <a:srgbClr val="96A5BE"/>
                 </a:solidFill>
-                <a:latin typeface="JetBrains Mono"/>
+                <a:latin typeface="Consolas"/>
               </a:rPr>
               <a:t>FKB Campus  ·  2026</a:t>
             </a:r>
@@ -4634,7 +4634,7 @@
                 <a:solidFill>
                   <a:srgbClr val="96A5BE"/>
                 </a:solidFill>
-                <a:latin typeface="JetBrains Mono"/>
+                <a:latin typeface="Consolas"/>
               </a:rPr>
               <a:t>Trainer-Präsentation</a:t>
             </a:r>
@@ -4773,7 +4773,7 @@
                 <a:solidFill>
                   <a:srgbClr val="78808C"/>
                 </a:solidFill>
-                <a:latin typeface="JetBrains Mono"/>
+                <a:latin typeface="Consolas"/>
               </a:rPr>
               <a:t>M15  ·  ÜBERSICHT</a:t>
             </a:r>
@@ -4808,7 +4808,7 @@
                 <a:solidFill>
                   <a:srgbClr val="1F2C56"/>
                 </a:solidFill>
-                <a:latin typeface="Source Serif 4"/>
+                <a:latin typeface="Arial"/>
               </a:rPr>
               <a:t>Das Scoring-Modell zur Segmentpriorisierung</a:t>
             </a:r>
@@ -5380,7 +5380,7 @@
                 <a:solidFill>
                   <a:srgbClr val="A0B4D2"/>
                 </a:solidFill>
-                <a:latin typeface="JetBrains Mono"/>
+                <a:latin typeface="Consolas"/>
               </a:rPr>
               <a:t>FKB Campus  ·  M15</a:t>
             </a:r>
@@ -5415,7 +5415,7 @@
                 <a:solidFill>
                   <a:srgbClr val="A0B4D2"/>
                 </a:solidFill>
-                <a:latin typeface="JetBrains Mono"/>
+                <a:latin typeface="Consolas"/>
               </a:rPr>
               <a:t>Übersicht</a:t>
             </a:r>
@@ -5554,7 +5554,7 @@
                 <a:solidFill>
                   <a:srgbClr val="78808C"/>
                 </a:solidFill>
-                <a:latin typeface="JetBrains Mono"/>
+                <a:latin typeface="Consolas"/>
               </a:rPr>
               <a:t>M15  ·  INHALT</a:t>
             </a:r>
@@ -5675,7 +5675,7 @@
                 <a:solidFill>
                   <a:srgbClr val="1F2C56"/>
                 </a:solidFill>
-                <a:latin typeface="Source Serif 4"/>
+                <a:latin typeface="Arial"/>
               </a:rPr>
               <a:t>Wie groß ist mein adressierbarer Markt?</a:t>
             </a:r>
@@ -5691,7 +5691,7 @@
         <p:spPr>
           <a:xfrm>
             <a:off x="685800" y="1417320"/>
-            <a:ext cx="10817352" cy="5029200"/>
+            <a:ext cx="10817352" cy="4892040"/>
           </a:xfrm>
           <a:prstGeom prst="rect">
             <a:avLst/>
@@ -5704,7 +5704,7 @@
           </a:bodyPr>
           <a:lstStyle/>
           <a:p>
-            <a:pPr>
+            <a:pPr marL="190500" indent="-190500">
               <a:spcBef>
                 <a:spcPts val="400"/>
               </a:spcBef>
@@ -5723,7 +5723,7 @@
             </a:r>
           </a:p>
           <a:p>
-            <a:pPr>
+            <a:pPr marL="190500" indent="-190500">
               <a:spcBef>
                 <a:spcPts val="400"/>
               </a:spcBef>
@@ -5742,7 +5742,7 @@
             </a:r>
           </a:p>
           <a:p>
-            <a:pPr>
+            <a:pPr marL="190500" indent="-190500">
               <a:spcBef>
                 <a:spcPts val="400"/>
               </a:spcBef>
@@ -5761,7 +5761,7 @@
             </a:r>
           </a:p>
           <a:p>
-            <a:pPr>
+            <a:pPr marL="190500" indent="-190500">
               <a:spcBef>
                 <a:spcPts val="400"/>
               </a:spcBef>
@@ -5780,7 +5780,7 @@
             </a:r>
           </a:p>
           <a:p>
-            <a:pPr>
+            <a:pPr marL="190500" indent="-190500">
               <a:spcBef>
                 <a:spcPts val="400"/>
               </a:spcBef>
@@ -5799,7 +5799,7 @@
             </a:r>
           </a:p>
           <a:p>
-            <a:pPr>
+            <a:pPr marL="190500" indent="-190500">
               <a:spcBef>
                 <a:spcPts val="400"/>
               </a:spcBef>
@@ -5818,7 +5818,7 @@
             </a:r>
           </a:p>
           <a:p>
-            <a:pPr>
+            <a:pPr marL="190500" indent="-190500">
               <a:spcBef>
                 <a:spcPts val="400"/>
               </a:spcBef>
@@ -5837,7 +5837,7 @@
             </a:r>
           </a:p>
           <a:p>
-            <a:pPr>
+            <a:pPr marL="177800" indent="-177800">
               <a:spcBef>
                 <a:spcPts val="600"/>
               </a:spcBef>
@@ -5856,7 +5856,7 @@
             </a:r>
           </a:p>
           <a:p>
-            <a:pPr>
+            <a:pPr marL="190500" indent="-190500">
               <a:spcBef>
                 <a:spcPts val="400"/>
               </a:spcBef>
@@ -5947,7 +5947,7 @@
                 <a:solidFill>
                   <a:srgbClr val="A0B4D2"/>
                 </a:solidFill>
-                <a:latin typeface="JetBrains Mono"/>
+                <a:latin typeface="Consolas"/>
               </a:rPr>
               <a:t>FKB Campus  ·  M15</a:t>
             </a:r>
@@ -6086,7 +6086,7 @@
                 <a:solidFill>
                   <a:srgbClr val="78808C"/>
                 </a:solidFill>
-                <a:latin typeface="JetBrains Mono"/>
+                <a:latin typeface="Consolas"/>
               </a:rPr>
               <a:t>M15  ·  INHALT</a:t>
             </a:r>
@@ -6207,7 +6207,7 @@
                 <a:solidFill>
                   <a:srgbClr val="1F2C56"/>
                 </a:solidFill>
-                <a:latin typeface="Source Serif 4"/>
+                <a:latin typeface="Arial"/>
               </a:rPr>
               <a:t>Wertversprechen formulieren</a:t>
             </a:r>
@@ -6223,7 +6223,7 @@
         <p:spPr>
           <a:xfrm>
             <a:off x="685800" y="1417320"/>
-            <a:ext cx="10817352" cy="5029200"/>
+            <a:ext cx="10817352" cy="4892040"/>
           </a:xfrm>
           <a:prstGeom prst="rect">
             <a:avLst/>
@@ -6236,7 +6236,7 @@
           </a:bodyPr>
           <a:lstStyle/>
           <a:p>
-            <a:pPr>
+            <a:pPr marL="190500" indent="-190500">
               <a:spcBef>
                 <a:spcPts val="400"/>
               </a:spcBef>
@@ -6255,7 +6255,7 @@
             </a:r>
           </a:p>
           <a:p>
-            <a:pPr>
+            <a:pPr marL="190500" indent="-190500">
               <a:spcBef>
                 <a:spcPts val="400"/>
               </a:spcBef>
@@ -6274,7 +6274,7 @@
             </a:r>
           </a:p>
           <a:p>
-            <a:pPr>
+            <a:pPr marL="190500" indent="-190500">
               <a:spcBef>
                 <a:spcPts val="400"/>
               </a:spcBef>
@@ -6293,7 +6293,7 @@
             </a:r>
           </a:p>
           <a:p>
-            <a:pPr>
+            <a:pPr marL="190500" indent="-190500">
               <a:spcBef>
                 <a:spcPts val="400"/>
               </a:spcBef>
@@ -6312,7 +6312,7 @@
             </a:r>
           </a:p>
           <a:p>
-            <a:pPr>
+            <a:pPr marL="190500" indent="-190500">
               <a:spcBef>
                 <a:spcPts val="400"/>
               </a:spcBef>
@@ -6331,7 +6331,7 @@
             </a:r>
           </a:p>
           <a:p>
-            <a:pPr>
+            <a:pPr marL="190500" indent="-190500">
               <a:spcBef>
                 <a:spcPts val="400"/>
               </a:spcBef>
@@ -6422,7 +6422,7 @@
                 <a:solidFill>
                   <a:srgbClr val="A0B4D2"/>
                 </a:solidFill>
-                <a:latin typeface="JetBrains Mono"/>
+                <a:latin typeface="Consolas"/>
               </a:rPr>
               <a:t>FKB Campus  ·  M15</a:t>
             </a:r>
@@ -6561,7 +6561,7 @@
                 <a:solidFill>
                   <a:srgbClr val="78808C"/>
                 </a:solidFill>
-                <a:latin typeface="JetBrains Mono"/>
+                <a:latin typeface="Consolas"/>
               </a:rPr>
               <a:t>M15  ·  INHALT</a:t>
             </a:r>
@@ -6682,7 +6682,7 @@
                 <a:solidFill>
                   <a:srgbClr val="1F2C56"/>
                 </a:solidFill>
-                <a:latin typeface="Source Serif 4"/>
+                <a:latin typeface="Arial"/>
               </a:rPr>
               <a:t>Empfehlungsmanagement systematisieren</a:t>
             </a:r>
@@ -6698,7 +6698,7 @@
         <p:spPr>
           <a:xfrm>
             <a:off x="685800" y="1417320"/>
-            <a:ext cx="10817352" cy="5029200"/>
+            <a:ext cx="10817352" cy="4892040"/>
           </a:xfrm>
           <a:prstGeom prst="rect">
             <a:avLst/>
@@ -6711,7 +6711,7 @@
           </a:bodyPr>
           <a:lstStyle/>
           <a:p>
-            <a:pPr>
+            <a:pPr marL="190500" indent="-190500">
               <a:spcBef>
                 <a:spcPts val="400"/>
               </a:spcBef>
@@ -6730,7 +6730,7 @@
             </a:r>
           </a:p>
           <a:p>
-            <a:pPr>
+            <a:pPr marL="190500" indent="-190500">
               <a:spcBef>
                 <a:spcPts val="400"/>
               </a:spcBef>
@@ -6749,7 +6749,7 @@
             </a:r>
           </a:p>
           <a:p>
-            <a:pPr>
+            <a:pPr marL="190500" indent="-190500">
               <a:spcBef>
                 <a:spcPts val="400"/>
               </a:spcBef>
@@ -6768,7 +6768,7 @@
             </a:r>
           </a:p>
           <a:p>
-            <a:pPr>
+            <a:pPr marL="190500" indent="-190500">
               <a:spcBef>
                 <a:spcPts val="400"/>
               </a:spcBef>
@@ -6787,7 +6787,7 @@
             </a:r>
           </a:p>
           <a:p>
-            <a:pPr>
+            <a:pPr marL="190500" indent="-190500">
               <a:spcBef>
                 <a:spcPts val="400"/>
               </a:spcBef>
@@ -6806,7 +6806,7 @@
             </a:r>
           </a:p>
           <a:p>
-            <a:pPr>
+            <a:pPr marL="190500" indent="-190500">
               <a:spcBef>
                 <a:spcPts val="400"/>
               </a:spcBef>
@@ -6825,7 +6825,7 @@
             </a:r>
           </a:p>
           <a:p>
-            <a:pPr>
+            <a:pPr marL="190500" indent="-190500">
               <a:spcBef>
                 <a:spcPts val="400"/>
               </a:spcBef>
@@ -6844,7 +6844,7 @@
             </a:r>
           </a:p>
           <a:p>
-            <a:pPr>
+            <a:pPr marL="190500" indent="-190500">
               <a:spcBef>
                 <a:spcPts val="400"/>
               </a:spcBef>
@@ -6863,7 +6863,7 @@
             </a:r>
           </a:p>
           <a:p>
-            <a:pPr>
+            <a:pPr marL="190500" indent="-190500">
               <a:spcBef>
                 <a:spcPts val="400"/>
               </a:spcBef>
@@ -6882,7 +6882,7 @@
             </a:r>
           </a:p>
           <a:p>
-            <a:pPr>
+            <a:pPr marL="190500" indent="-190500">
               <a:spcBef>
                 <a:spcPts val="400"/>
               </a:spcBef>
@@ -6901,7 +6901,7 @@
             </a:r>
           </a:p>
           <a:p>
-            <a:pPr>
+            <a:pPr marL="190500" indent="-190500">
               <a:spcBef>
                 <a:spcPts val="400"/>
               </a:spcBef>
@@ -6920,7 +6920,7 @@
             </a:r>
           </a:p>
           <a:p>
-            <a:pPr>
+            <a:pPr marL="190500" indent="-190500">
               <a:spcBef>
                 <a:spcPts val="400"/>
               </a:spcBef>
@@ -7011,7 +7011,7 @@
                 <a:solidFill>
                   <a:srgbClr val="A0B4D2"/>
                 </a:solidFill>
-                <a:latin typeface="JetBrains Mono"/>
+                <a:latin typeface="Consolas"/>
               </a:rPr>
               <a:t>FKB Campus  ·  M15</a:t>
             </a:r>
@@ -7150,7 +7150,7 @@
                 <a:solidFill>
                   <a:srgbClr val="78808C"/>
                 </a:solidFill>
-                <a:latin typeface="JetBrains Mono"/>
+                <a:latin typeface="Consolas"/>
               </a:rPr>
               <a:t>M15  ·  INHALT</a:t>
             </a:r>
@@ -7271,7 +7271,7 @@
                 <a:solidFill>
                   <a:srgbClr val="1F2C56"/>
                 </a:solidFill>
-                <a:latin typeface="Source Serif 4"/>
+                <a:latin typeface="Arial"/>
               </a:rPr>
               <a:t>AB-1: Segmentpriorisierung – Scoring</a:t>
             </a:r>
@@ -7287,7 +7287,7 @@
         <p:spPr>
           <a:xfrm>
             <a:off x="685800" y="1417320"/>
-            <a:ext cx="10817352" cy="5029200"/>
+            <a:ext cx="10817352" cy="4892040"/>
           </a:xfrm>
           <a:prstGeom prst="rect">
             <a:avLst/>
@@ -7295,12 +7295,12 @@
           <a:noFill/>
         </p:spPr>
         <p:txBody>
-          <a:bodyPr wrap="square">
+          <a:bodyPr wrap="square" anchor="ctr">
             <a:spAutoFit/>
           </a:bodyPr>
           <a:lstStyle/>
           <a:p>
-            <a:pPr>
+            <a:pPr marL="190500" indent="-190500">
               <a:spcBef>
                 <a:spcPts val="400"/>
               </a:spcBef>
@@ -7391,7 +7391,7 @@
                 <a:solidFill>
                   <a:srgbClr val="A0B4D2"/>
                 </a:solidFill>
-                <a:latin typeface="JetBrains Mono"/>
+                <a:latin typeface="Consolas"/>
               </a:rPr>
               <a:t>FKB Campus  ·  M15</a:t>
             </a:r>
@@ -7530,7 +7530,7 @@
                 <a:solidFill>
                   <a:srgbClr val="78808C"/>
                 </a:solidFill>
-                <a:latin typeface="JetBrains Mono"/>
+                <a:latin typeface="Consolas"/>
               </a:rPr>
               <a:t>M15  ·  ÜBERSICHT</a:t>
             </a:r>
@@ -7565,7 +7565,7 @@
                 <a:solidFill>
                   <a:srgbClr val="1F2C56"/>
                 </a:solidFill>
-                <a:latin typeface="Source Serif 4"/>
+                <a:latin typeface="Arial"/>
               </a:rPr>
               <a:t>AB-1: Segmentpriorisierung – Scoring</a:t>
             </a:r>
@@ -8127,7 +8127,7 @@
                 <a:solidFill>
                   <a:srgbClr val="A0B4D2"/>
                 </a:solidFill>
-                <a:latin typeface="JetBrains Mono"/>
+                <a:latin typeface="Consolas"/>
               </a:rPr>
               <a:t>FKB Campus  ·  M15</a:t>
             </a:r>
@@ -8162,7 +8162,7 @@
                 <a:solidFill>
                   <a:srgbClr val="A0B4D2"/>
                 </a:solidFill>
-                <a:latin typeface="JetBrains Mono"/>
+                <a:latin typeface="Consolas"/>
               </a:rPr>
               <a:t>Übersicht</a:t>
             </a:r>
@@ -8301,7 +8301,7 @@
                 <a:solidFill>
                   <a:srgbClr val="78808C"/>
                 </a:solidFill>
-                <a:latin typeface="JetBrains Mono"/>
+                <a:latin typeface="Consolas"/>
               </a:rPr>
               <a:t>M15  ·  INHALT</a:t>
             </a:r>
@@ -8422,7 +8422,7 @@
                 <a:solidFill>
                   <a:srgbClr val="1F2C56"/>
                 </a:solidFill>
-                <a:latin typeface="Source Serif 4"/>
+                <a:latin typeface="Arial"/>
               </a:rPr>
               <a:t>AB-3: Marktbearbeitungs-Jahresplan</a:t>
             </a:r>
@@ -8438,7 +8438,7 @@
         <p:spPr>
           <a:xfrm>
             <a:off x="685800" y="1417320"/>
-            <a:ext cx="10817352" cy="5029200"/>
+            <a:ext cx="10817352" cy="4892040"/>
           </a:xfrm>
           <a:prstGeom prst="rect">
             <a:avLst/>
@@ -8446,12 +8446,12 @@
           <a:noFill/>
         </p:spPr>
         <p:txBody>
-          <a:bodyPr wrap="square">
+          <a:bodyPr wrap="square" anchor="ctr">
             <a:spAutoFit/>
           </a:bodyPr>
           <a:lstStyle/>
           <a:p>
-            <a:pPr>
+            <a:pPr marL="190500" indent="-190500">
               <a:spcBef>
                 <a:spcPts val="400"/>
               </a:spcBef>
@@ -8542,7 +8542,7 @@
                 <a:solidFill>
                   <a:srgbClr val="A0B4D2"/>
                 </a:solidFill>
-                <a:latin typeface="JetBrains Mono"/>
+                <a:latin typeface="Consolas"/>
               </a:rPr>
               <a:t>FKB Campus  ·  M15</a:t>
             </a:r>
@@ -8681,7 +8681,7 @@
                 <a:solidFill>
                   <a:srgbClr val="78808C"/>
                 </a:solidFill>
-                <a:latin typeface="JetBrains Mono"/>
+                <a:latin typeface="Consolas"/>
               </a:rPr>
               <a:t>M15  ·  ÜBERSICHT</a:t>
             </a:r>
@@ -8716,7 +8716,7 @@
                 <a:solidFill>
                   <a:srgbClr val="1F2C56"/>
                 </a:solidFill>
-                <a:latin typeface="Source Serif 4"/>
+                <a:latin typeface="Arial"/>
               </a:rPr>
               <a:t>AB-3: Marktbearbeitungs-Jahresplan</a:t>
             </a:r>
@@ -9186,7 +9186,7 @@
                 <a:solidFill>
                   <a:srgbClr val="A0B4D2"/>
                 </a:solidFill>
-                <a:latin typeface="JetBrains Mono"/>
+                <a:latin typeface="Consolas"/>
               </a:rPr>
               <a:t>FKB Campus  ·  M15</a:t>
             </a:r>
@@ -9221,7 +9221,7 @@
                 <a:solidFill>
                   <a:srgbClr val="A0B4D2"/>
                 </a:solidFill>
-                <a:latin typeface="JetBrains Mono"/>
+                <a:latin typeface="Consolas"/>
               </a:rPr>
               <a:t>Übersicht</a:t>
             </a:r>
@@ -9360,7 +9360,7 @@
                 <a:solidFill>
                   <a:srgbClr val="78808C"/>
                 </a:solidFill>
-                <a:latin typeface="JetBrains Mono"/>
+                <a:latin typeface="Consolas"/>
               </a:rPr>
               <a:t>ÜBERBLICK  ·  M15</a:t>
             </a:r>
@@ -9438,7 +9438,7 @@
                 <a:solidFill>
                   <a:srgbClr val="1F2C56"/>
                 </a:solidFill>
-                <a:latin typeface="Source Serif 4"/>
+                <a:latin typeface="Arial"/>
               </a:rPr>
               <a:t>Worum geht es heute</a:t>
             </a:r>
@@ -9587,7 +9587,7 @@
                 <a:solidFill>
                   <a:srgbClr val="A0B4D2"/>
                 </a:solidFill>
-                <a:latin typeface="JetBrains Mono"/>
+                <a:latin typeface="Consolas"/>
               </a:rPr>
               <a:t>FKB Campus  ·  M15</a:t>
             </a:r>
@@ -9726,7 +9726,7 @@
                 <a:solidFill>
                   <a:srgbClr val="78808C"/>
                 </a:solidFill>
-                <a:latin typeface="JetBrains Mono"/>
+                <a:latin typeface="Consolas"/>
               </a:rPr>
               <a:t>LERNZIELE  ·  M15</a:t>
             </a:r>
@@ -9804,7 +9804,7 @@
                 <a:solidFill>
                   <a:srgbClr val="1F2C56"/>
                 </a:solidFill>
-                <a:latin typeface="Source Serif 4"/>
+                <a:latin typeface="Arial"/>
               </a:rPr>
               <a:t>Was Sie heute mitnehmen</a:t>
             </a:r>
@@ -10000,7 +10000,7 @@
                 <a:solidFill>
                   <a:srgbClr val="A0B4D2"/>
                 </a:solidFill>
-                <a:latin typeface="JetBrains Mono"/>
+                <a:latin typeface="Consolas"/>
               </a:rPr>
               <a:t>FKB Campus  ·  M15</a:t>
             </a:r>
@@ -10139,7 +10139,7 @@
                 <a:solidFill>
                   <a:srgbClr val="78808C"/>
                 </a:solidFill>
-                <a:latin typeface="JetBrains Mono"/>
+                <a:latin typeface="Consolas"/>
               </a:rPr>
               <a:t>AGENDA  ·  M15</a:t>
             </a:r>
@@ -10217,7 +10217,7 @@
                 <a:solidFill>
                   <a:srgbClr val="1F2C56"/>
                 </a:solidFill>
-                <a:latin typeface="Source Serif 4"/>
+                <a:latin typeface="Arial"/>
               </a:rPr>
               <a:t>So läuft das Modul</a:t>
             </a:r>
@@ -10911,7 +10911,7 @@
                 <a:solidFill>
                   <a:srgbClr val="A0B4D2"/>
                 </a:solidFill>
-                <a:latin typeface="JetBrains Mono"/>
+                <a:latin typeface="Consolas"/>
               </a:rPr>
               <a:t>FKB Campus  ·  M15</a:t>
             </a:r>
@@ -11050,7 +11050,7 @@
                 <a:solidFill>
                   <a:srgbClr val="78808C"/>
                 </a:solidFill>
-                <a:latin typeface="JetBrains Mono"/>
+                <a:latin typeface="Consolas"/>
               </a:rPr>
               <a:t>M15  ·  INHALT</a:t>
             </a:r>
@@ -11171,7 +11171,7 @@
                 <a:solidFill>
                   <a:srgbClr val="1F2C56"/>
                 </a:solidFill>
-                <a:latin typeface="Source Serif 4"/>
+                <a:latin typeface="Arial"/>
               </a:rPr>
               <a:t>Vom reaktiven zum strategischen Vertrieb</a:t>
             </a:r>
@@ -11187,7 +11187,7 @@
         <p:spPr>
           <a:xfrm>
             <a:off x="685800" y="1417320"/>
-            <a:ext cx="10817352" cy="5029200"/>
+            <a:ext cx="10817352" cy="4892040"/>
           </a:xfrm>
           <a:prstGeom prst="rect">
             <a:avLst/>
@@ -11200,7 +11200,7 @@
           </a:bodyPr>
           <a:lstStyle/>
           <a:p>
-            <a:pPr>
+            <a:pPr marL="190500" indent="-190500">
               <a:spcBef>
                 <a:spcPts val="400"/>
               </a:spcBef>
@@ -11219,7 +11219,7 @@
             </a:r>
           </a:p>
           <a:p>
-            <a:pPr>
+            <a:pPr marL="190500" indent="-190500">
               <a:spcBef>
                 <a:spcPts val="400"/>
               </a:spcBef>
@@ -11238,7 +11238,7 @@
             </a:r>
           </a:p>
           <a:p>
-            <a:pPr>
+            <a:pPr marL="190500" indent="-190500">
               <a:spcBef>
                 <a:spcPts val="400"/>
               </a:spcBef>
@@ -11257,7 +11257,7 @@
             </a:r>
           </a:p>
           <a:p>
-            <a:pPr>
+            <a:pPr marL="190500" indent="-190500">
               <a:spcBef>
                 <a:spcPts val="400"/>
               </a:spcBef>
@@ -11276,7 +11276,7 @@
             </a:r>
           </a:p>
           <a:p>
-            <a:pPr>
+            <a:pPr marL="190500" indent="-190500">
               <a:spcBef>
                 <a:spcPts val="400"/>
               </a:spcBef>
@@ -11295,7 +11295,7 @@
             </a:r>
           </a:p>
           <a:p>
-            <a:pPr>
+            <a:pPr marL="190500" indent="-190500">
               <a:spcBef>
                 <a:spcPts val="400"/>
               </a:spcBef>
@@ -11386,7 +11386,7 @@
                 <a:solidFill>
                   <a:srgbClr val="A0B4D2"/>
                 </a:solidFill>
-                <a:latin typeface="JetBrains Mono"/>
+                <a:latin typeface="Consolas"/>
               </a:rPr>
               <a:t>FKB Campus  ·  M15</a:t>
             </a:r>
@@ -11525,7 +11525,7 @@
                 <a:solidFill>
                   <a:srgbClr val="78808C"/>
                 </a:solidFill>
-                <a:latin typeface="JetBrains Mono"/>
+                <a:latin typeface="Consolas"/>
               </a:rPr>
               <a:t>M15  ·  SCHAUBILD</a:t>
             </a:r>
@@ -11560,7 +11560,7 @@
                 <a:solidFill>
                   <a:srgbClr val="1F2C56"/>
                 </a:solidFill>
-                <a:latin typeface="Source Serif 4"/>
+                <a:latin typeface="Arial"/>
               </a:rPr>
               <a:t>Strategie-Landkarte</a:t>
             </a:r>
@@ -11705,7 +11705,7 @@
                 <a:solidFill>
                   <a:srgbClr val="A0B4D2"/>
                 </a:solidFill>
-                <a:latin typeface="JetBrains Mono"/>
+                <a:latin typeface="Consolas"/>
               </a:rPr>
               <a:t>FKB Campus  ·  M15</a:t>
             </a:r>
@@ -11740,7 +11740,7 @@
                 <a:solidFill>
                   <a:srgbClr val="A0B4D2"/>
                 </a:solidFill>
-                <a:latin typeface="JetBrains Mono"/>
+                <a:latin typeface="Consolas"/>
               </a:rPr>
               <a:t>Schaubild</a:t>
             </a:r>
@@ -11879,7 +11879,7 @@
                 <a:solidFill>
                   <a:srgbClr val="78808C"/>
                 </a:solidFill>
-                <a:latin typeface="JetBrains Mono"/>
+                <a:latin typeface="Consolas"/>
               </a:rPr>
               <a:t>M15  ·  SCHAUBILD</a:t>
             </a:r>
@@ -11914,7 +11914,7 @@
                 <a:solidFill>
                   <a:srgbClr val="1F2C56"/>
                 </a:solidFill>
-                <a:latin typeface="Source Serif 4"/>
+                <a:latin typeface="Arial"/>
               </a:rPr>
               <a:t>Five-Forces-Modell nach Porter</a:t>
             </a:r>
@@ -12059,7 +12059,7 @@
                 <a:solidFill>
                   <a:srgbClr val="A0B4D2"/>
                 </a:solidFill>
-                <a:latin typeface="JetBrains Mono"/>
+                <a:latin typeface="Consolas"/>
               </a:rPr>
               <a:t>FKB Campus  ·  M15</a:t>
             </a:r>
@@ -12094,7 +12094,7 @@
                 <a:solidFill>
                   <a:srgbClr val="A0B4D2"/>
                 </a:solidFill>
-                <a:latin typeface="JetBrains Mono"/>
+                <a:latin typeface="Consolas"/>
               </a:rPr>
               <a:t>Schaubild</a:t>
             </a:r>
@@ -12233,7 +12233,7 @@
                 <a:solidFill>
                   <a:srgbClr val="78808C"/>
                 </a:solidFill>
-                <a:latin typeface="JetBrains Mono"/>
+                <a:latin typeface="Consolas"/>
               </a:rPr>
               <a:t>M15  ·  INHALT</a:t>
             </a:r>
@@ -12354,7 +12354,7 @@
                 <a:solidFill>
                   <a:srgbClr val="1F2C56"/>
                 </a:solidFill>
-                <a:latin typeface="Source Serif 4"/>
+                <a:latin typeface="Arial"/>
               </a:rPr>
               <a:t>Segmentierungskriterien</a:t>
             </a:r>
@@ -12370,7 +12370,7 @@
         <p:spPr>
           <a:xfrm>
             <a:off x="685800" y="1417320"/>
-            <a:ext cx="10817352" cy="5029200"/>
+            <a:ext cx="10817352" cy="4892040"/>
           </a:xfrm>
           <a:prstGeom prst="rect">
             <a:avLst/>
@@ -12378,12 +12378,12 @@
           <a:noFill/>
         </p:spPr>
         <p:txBody>
-          <a:bodyPr wrap="square">
+          <a:bodyPr wrap="square" anchor="ctr">
             <a:spAutoFit/>
           </a:bodyPr>
           <a:lstStyle/>
           <a:p>
-            <a:pPr>
+            <a:pPr marL="190500" indent="-190500">
               <a:spcBef>
                 <a:spcPts val="400"/>
               </a:spcBef>
@@ -12402,7 +12402,7 @@
             </a:r>
           </a:p>
           <a:p>
-            <a:pPr>
+            <a:pPr marL="190500" indent="-190500">
               <a:spcBef>
                 <a:spcPts val="400"/>
               </a:spcBef>
@@ -12493,7 +12493,7 @@
                 <a:solidFill>
                   <a:srgbClr val="A0B4D2"/>
                 </a:solidFill>
-                <a:latin typeface="JetBrains Mono"/>
+                <a:latin typeface="Consolas"/>
               </a:rPr>
               <a:t>FKB Campus  ·  M15</a:t>
             </a:r>
@@ -12632,7 +12632,7 @@
                 <a:solidFill>
                   <a:srgbClr val="78808C"/>
                 </a:solidFill>
-                <a:latin typeface="JetBrains Mono"/>
+                <a:latin typeface="Consolas"/>
               </a:rPr>
               <a:t>M15  ·  INHALT</a:t>
             </a:r>
@@ -12753,7 +12753,7 @@
                 <a:solidFill>
                   <a:srgbClr val="1F2C56"/>
                 </a:solidFill>
-                <a:latin typeface="Source Serif 4"/>
+                <a:latin typeface="Arial"/>
               </a:rPr>
               <a:t>Das Scoring-Modell zur Segmentpriorisierung</a:t>
             </a:r>
@@ -12769,7 +12769,7 @@
         <p:spPr>
           <a:xfrm>
             <a:off x="685800" y="1417320"/>
-            <a:ext cx="10817352" cy="5029200"/>
+            <a:ext cx="10817352" cy="4892040"/>
           </a:xfrm>
           <a:prstGeom prst="rect">
             <a:avLst/>
@@ -12777,12 +12777,12 @@
           <a:noFill/>
         </p:spPr>
         <p:txBody>
-          <a:bodyPr wrap="square">
+          <a:bodyPr wrap="square" anchor="ctr">
             <a:spAutoFit/>
           </a:bodyPr>
           <a:lstStyle/>
           <a:p>
-            <a:pPr>
+            <a:pPr marL="190500" indent="-190500">
               <a:spcBef>
                 <a:spcPts val="400"/>
               </a:spcBef>
@@ -12801,7 +12801,7 @@
             </a:r>
           </a:p>
           <a:p>
-            <a:pPr>
+            <a:pPr marL="190500" indent="-190500">
               <a:spcBef>
                 <a:spcPts val="400"/>
               </a:spcBef>
@@ -12820,7 +12820,7 @@
             </a:r>
           </a:p>
           <a:p>
-            <a:pPr>
+            <a:pPr marL="190500" indent="-190500">
               <a:spcBef>
                 <a:spcPts val="400"/>
               </a:spcBef>
@@ -12911,7 +12911,7 @@
                 <a:solidFill>
                   <a:srgbClr val="A0B4D2"/>
                 </a:solidFill>
-                <a:latin typeface="JetBrains Mono"/>
+                <a:latin typeface="Consolas"/>
               </a:rPr>
               <a:t>FKB Campus  ·  M15</a:t>
             </a:r>

--- a/protected-downloads/praesentation/M15.pptx
+++ b/protected-downloads/praesentation/M15.pptx
@@ -22,6 +22,9 @@
     <p:sldId id="270" r:id="rId22"/>
     <p:sldId id="271" r:id="rId23"/>
     <p:sldId id="272" r:id="rId24"/>
+    <p:sldId id="273" r:id="rId25"/>
+    <p:sldId id="274" r:id="rId26"/>
+    <p:sldId id="275" r:id="rId27"/>
   </p:sldIdLst>
   <p:sldSz cx="12188952" cy="6858000" type="screen4x3"/>
   <p:notesSz cx="6858000" cy="9144000"/>
@@ -543,6 +546,216 @@
 </p:notes>
 </file>
 
+<file path=ppt/notesSlides/notesSlide10.xml><?xml version="1.0" encoding="utf-8"?>
+<p:notes xmlns:a="http://schemas.openxmlformats.org/drawingml/2006/main" xmlns:p="http://schemas.openxmlformats.org/presentationml/2006/main" xmlns:r="http://schemas.openxmlformats.org/officeDocument/2006/relationships">
+  <p:cSld>
+    <p:spTree>
+      <p:nvGrpSpPr>
+        <p:cNvPr id="1" name=""/>
+        <p:cNvGrpSpPr/>
+        <p:nvPr/>
+      </p:nvGrpSpPr>
+      <p:grpSpPr>
+        <a:xfrm>
+          <a:off x="0" y="0"/>
+          <a:ext cx="0" cy="0"/>
+          <a:chOff x="0" y="0"/>
+          <a:chExt cx="0" cy="0"/>
+        </a:xfrm>
+      </p:grpSpPr>
+      <p:sp>
+        <p:nvSpPr>
+          <p:cNvPr id="2" name="Slide Image Placeholder 1"/>
+          <p:cNvSpPr>
+            <a:spLocks noGrp="1"/>
+          </p:cNvSpPr>
+          <p:nvPr>
+            <p:ph type="sldImg" idx="2"/>
+          </p:nvPr>
+        </p:nvSpPr>
+        <p:spPr/>
+      </p:sp>
+      <p:sp>
+        <p:nvSpPr>
+          <p:cNvPr id="3" name="Notes Placeholder 2"/>
+          <p:cNvSpPr>
+            <a:spLocks noGrp="1"/>
+          </p:cNvSpPr>
+          <p:nvPr>
+            <p:ph type="body" idx="3" sz="quarter"/>
+          </p:nvPr>
+        </p:nvSpPr>
+        <p:spPr/>
+        <p:txBody>
+          <a:bodyPr/>
+          <a:lstStyle/>
+          <a:p>
+            <a:r>
+              <a:t>Einzelarbeit + Konsolidierung. Der Plan wird mit der Führungskraft besprochen – das ist Teil der Commitment-Karte.</a:t>
+            </a:r>
+          </a:p>
+        </p:txBody>
+      </p:sp>
+      <p:sp>
+        <p:nvSpPr>
+          <p:cNvPr id="4" name="Slide Number Placeholder 3"/>
+          <p:cNvSpPr>
+            <a:spLocks noGrp="1"/>
+          </p:cNvSpPr>
+          <p:nvPr>
+            <p:ph type="sldNum" idx="5" sz="quarter"/>
+          </p:nvPr>
+        </p:nvSpPr>
+        <p:spPr/>
+      </p:sp>
+    </p:spTree>
+  </p:cSld>
+  <p:clrMapOvr>
+    <a:masterClrMapping/>
+  </p:clrMapOvr>
+</p:notes>
+</file>
+
+<file path=ppt/notesSlides/notesSlide11.xml><?xml version="1.0" encoding="utf-8"?>
+<p:notes xmlns:a="http://schemas.openxmlformats.org/drawingml/2006/main" xmlns:p="http://schemas.openxmlformats.org/presentationml/2006/main" xmlns:r="http://schemas.openxmlformats.org/officeDocument/2006/relationships">
+  <p:cSld>
+    <p:spTree>
+      <p:nvGrpSpPr>
+        <p:cNvPr id="1" name=""/>
+        <p:cNvGrpSpPr/>
+        <p:nvPr/>
+      </p:nvGrpSpPr>
+      <p:grpSpPr>
+        <a:xfrm>
+          <a:off x="0" y="0"/>
+          <a:ext cx="0" cy="0"/>
+          <a:chOff x="0" y="0"/>
+          <a:chExt cx="0" cy="0"/>
+        </a:xfrm>
+      </p:grpSpPr>
+      <p:sp>
+        <p:nvSpPr>
+          <p:cNvPr id="2" name="Slide Image Placeholder 1"/>
+          <p:cNvSpPr>
+            <a:spLocks noGrp="1"/>
+          </p:cNvSpPr>
+          <p:nvPr>
+            <p:ph type="sldImg" idx="2"/>
+          </p:nvPr>
+        </p:nvSpPr>
+        <p:spPr/>
+      </p:sp>
+      <p:sp>
+        <p:nvSpPr>
+          <p:cNvPr id="3" name="Notes Placeholder 2"/>
+          <p:cNvSpPr>
+            <a:spLocks noGrp="1"/>
+          </p:cNvSpPr>
+          <p:nvPr>
+            <p:ph type="body" idx="3" sz="quarter"/>
+          </p:nvPr>
+        </p:nvSpPr>
+        <p:spPr/>
+        <p:txBody>
+          <a:bodyPr/>
+          <a:lstStyle/>
+          <a:p>
+            <a:r>
+              <a:t>Überleitung zur Commitment-Karte und zum Transfer.</a:t>
+            </a:r>
+          </a:p>
+        </p:txBody>
+      </p:sp>
+      <p:sp>
+        <p:nvSpPr>
+          <p:cNvPr id="4" name="Slide Number Placeholder 3"/>
+          <p:cNvSpPr>
+            <a:spLocks noGrp="1"/>
+          </p:cNvSpPr>
+          <p:nvPr>
+            <p:ph type="sldNum" idx="5" sz="quarter"/>
+          </p:nvPr>
+        </p:nvSpPr>
+        <p:spPr/>
+      </p:sp>
+    </p:spTree>
+  </p:cSld>
+  <p:clrMapOvr>
+    <a:masterClrMapping/>
+  </p:clrMapOvr>
+</p:notes>
+</file>
+
+<file path=ppt/notesSlides/notesSlide12.xml><?xml version="1.0" encoding="utf-8"?>
+<p:notes xmlns:a="http://schemas.openxmlformats.org/drawingml/2006/main" xmlns:p="http://schemas.openxmlformats.org/presentationml/2006/main" xmlns:r="http://schemas.openxmlformats.org/officeDocument/2006/relationships">
+  <p:cSld>
+    <p:spTree>
+      <p:nvGrpSpPr>
+        <p:cNvPr id="1" name=""/>
+        <p:cNvGrpSpPr/>
+        <p:nvPr/>
+      </p:nvGrpSpPr>
+      <p:grpSpPr>
+        <a:xfrm>
+          <a:off x="0" y="0"/>
+          <a:ext cx="0" cy="0"/>
+          <a:chOff x="0" y="0"/>
+          <a:chExt cx="0" cy="0"/>
+        </a:xfrm>
+      </p:grpSpPr>
+      <p:sp>
+        <p:nvSpPr>
+          <p:cNvPr id="2" name="Slide Image Placeholder 1"/>
+          <p:cNvSpPr>
+            <a:spLocks noGrp="1"/>
+          </p:cNvSpPr>
+          <p:nvPr>
+            <p:ph type="sldImg" idx="2"/>
+          </p:nvPr>
+        </p:nvSpPr>
+        <p:spPr/>
+      </p:sp>
+      <p:sp>
+        <p:nvSpPr>
+          <p:cNvPr id="3" name="Notes Placeholder 2"/>
+          <p:cNvSpPr>
+            <a:spLocks noGrp="1"/>
+          </p:cNvSpPr>
+          <p:nvPr>
+            <p:ph type="body" idx="3" sz="quarter"/>
+          </p:nvPr>
+        </p:nvSpPr>
+        <p:spPr/>
+        <p:txBody>
+          <a:bodyPr/>
+          <a:lstStyle/>
+          <a:p>
+            <a:r>
+              <a:t>Commitment-Karte mit zwei verbindlichen Fragen als Transferanker.</a:t>
+            </a:r>
+          </a:p>
+        </p:txBody>
+      </p:sp>
+      <p:sp>
+        <p:nvSpPr>
+          <p:cNvPr id="4" name="Slide Number Placeholder 3"/>
+          <p:cNvSpPr>
+            <a:spLocks noGrp="1"/>
+          </p:cNvSpPr>
+          <p:nvPr>
+            <p:ph type="sldNum" idx="5" sz="quarter"/>
+          </p:nvPr>
+        </p:nvSpPr>
+        <p:spPr/>
+      </p:sp>
+    </p:spTree>
+  </p:cSld>
+  <p:clrMapOvr>
+    <a:masterClrMapping/>
+  </p:clrMapOvr>
+</p:notes>
+</file>
+
 <file path=ppt/notesSlides/notesSlide2.xml><?xml version="1.0" encoding="utf-8"?>
 <p:notes xmlns:a="http://schemas.openxmlformats.org/drawingml/2006/main" xmlns:p="http://schemas.openxmlformats.org/presentationml/2006/main" xmlns:r="http://schemas.openxmlformats.org/officeDocument/2006/relationships">
   <p:cSld>
@@ -588,7 +801,7 @@
           <a:lstStyle/>
           <a:p>
             <a:r>
-              <a:t>Siehe Trainerhandbuch (Sektion 3) für Moderationshinweise, Timing und erwartete Teilnehmerreaktionen.</a:t>
+              <a:t>Definition Markt vs. Segment als erster Punkt (2 Min). Wettbewerbsstrategie nach Porter, strategische Segmentierung.</a:t>
             </a:r>
           </a:p>
         </p:txBody>
@@ -658,7 +871,7 @@
           <a:lstStyle/>
           <a:p>
             <a:r>
-              <a:t>Siehe Trainerhandbuch (Sektion 3) für Moderationshinweise, Timing und erwartete Teilnehmerreaktionen.</a:t>
+              <a:t>Markt vs. Segment sauber trennen – das ist die Grundlage jeder Priorisierung.</a:t>
             </a:r>
           </a:p>
         </p:txBody>
@@ -728,7 +941,7 @@
           <a:lstStyle/>
           <a:p>
             <a:r>
-              <a:t>Siehe Trainerhandbuch (Sektion 3) für Moderationshinweise, Timing und erwartete Teilnehmerreaktionen.</a:t>
+              <a:t>Live-Demo agree: Branchenfilter WZ-2008 → Umsatzklassen-Report; Schätzung Ertragspotenzial.</a:t>
             </a:r>
           </a:p>
         </p:txBody>
@@ -798,7 +1011,7 @@
           <a:lstStyle/>
           <a:p>
             <a:r>
-              <a:t>Siehe Trainerhandbuch (Sektion 3) für Moderationshinweise, Timing und erwartete Teilnehmerreaktionen.</a:t>
+              <a:t>Marktpotenzial-Schätzer und Segmentierungsraster einführen (AB-1).</a:t>
             </a:r>
           </a:p>
         </p:txBody>
@@ -868,7 +1081,7 @@
           <a:lstStyle/>
           <a:p>
             <a:r>
-              <a:t>Siehe Trainerhandbuch (Sektion 3) für Moderationshinweise, Timing und erwartete Teilnehmerreaktionen.</a:t>
+              <a:t>Gewichtete Summe ergibt die Priorität. Das Primärsegment ist das mit dem höchsten Score – nicht das größte.</a:t>
             </a:r>
           </a:p>
         </p:txBody>
@@ -938,7 +1151,7 @@
           <a:lstStyle/>
           <a:p>
             <a:r>
-              <a:t>Trainer-Hinweis: Für die Jahresplanung rechnen wir konservativ mit 15–20 %, damit keine unrealistischen Ziele entstehen. 33 % sind möglich bei sehr qualifizierten Verbundpartner-Leads – als Planungsbasis aber zu optimistisch.</a:t>
+              <a:t>Stille Einzelarbeit (30 Min.) + Check-in: „Wer hat sein Primärsegment definiert?"</a:t>
             </a:r>
           </a:p>
         </p:txBody>
@@ -1008,7 +1221,7 @@
           <a:lstStyle/>
           <a:p>
             <a:r>
-              <a:t>Siehe Trainerhandbuch (Sektion 3) für Moderationshinweise, Timing und erwartete Teilnehmerreaktionen.</a:t>
+              <a:t>Praxisbeispiele je Kanal; die Jahresplanung verknüpft Kanäle mit Zielgrößen.</a:t>
             </a:r>
           </a:p>
         </p:txBody>
@@ -1078,7 +1291,7 @@
           <a:lstStyle/>
           <a:p>
             <a:r>
-              <a:t>Siehe Trainerhandbuch (Sektion 3) für Moderationshinweise, Timing und erwartete Teilnehmerreaktionen.</a:t>
+              <a:t>Stille Einzelarbeit. Das Wertversprechen muss für das Segment relevant und von Wettbewerbern unterscheidbar sein.</a:t>
             </a:r>
           </a:p>
         </p:txBody>
@@ -4674,7 +4887,251 @@
             <a:avLst/>
           </a:prstGeom>
           <a:solidFill>
-            <a:srgbClr val="FFFFFF"/>
+            <a:srgbClr val="1F2C56"/>
+          </a:solidFill>
+          <a:ln>
+            <a:noFill/>
+          </a:ln>
+        </p:spPr>
+        <p:style>
+          <a:lnRef idx="1">
+            <a:schemeClr val="accent1"/>
+          </a:lnRef>
+          <a:fillRef idx="3">
+            <a:schemeClr val="accent1"/>
+          </a:fillRef>
+          <a:effectRef idx="2">
+            <a:schemeClr val="accent1"/>
+          </a:effectRef>
+          <a:fontRef idx="minor">
+            <a:schemeClr val="lt1"/>
+          </a:fontRef>
+        </p:style>
+        <p:txBody>
+          <a:bodyPr rtlCol="0" anchor="ctr"/>
+          <a:lstStyle/>
+          <a:p>
+            <a:pPr algn="ctr"/>
+          </a:p>
+        </p:txBody>
+      </p:sp>
+      <p:sp>
+        <p:nvSpPr>
+          <p:cNvPr id="3" name="TextBox 2"/>
+          <p:cNvSpPr txBox="1"/>
+          <p:nvPr/>
+        </p:nvSpPr>
+        <p:spPr>
+          <a:xfrm>
+            <a:off x="685800" y="2377440"/>
+            <a:ext cx="10817352" cy="365760"/>
+          </a:xfrm>
+          <a:prstGeom prst="rect">
+            <a:avLst/>
+          </a:prstGeom>
+          <a:noFill/>
+        </p:spPr>
+        <p:txBody>
+          <a:bodyPr wrap="none">
+            <a:spAutoFit/>
+          </a:bodyPr>
+          <a:lstStyle/>
+          <a:p>
+            <a:pPr algn="l"/>
+            <a:r>
+              <a:rPr sz="1200">
+                <a:solidFill>
+                  <a:srgbClr val="D9C089"/>
+                </a:solidFill>
+                <a:latin typeface="Consolas"/>
+              </a:rPr>
+              <a:t>10:15–11:50</a:t>
+            </a:r>
+          </a:p>
+        </p:txBody>
+      </p:sp>
+      <p:sp>
+        <p:nvSpPr>
+          <p:cNvPr id="4" name="Rectangle 3"/>
+          <p:cNvSpPr/>
+          <p:nvPr/>
+        </p:nvSpPr>
+        <p:spPr>
+          <a:xfrm>
+            <a:off x="685800" y="2788920"/>
+            <a:ext cx="548640" cy="38100"/>
+          </a:xfrm>
+          <a:prstGeom prst="rect">
+            <a:avLst/>
+          </a:prstGeom>
+          <a:solidFill>
+            <a:srgbClr val="D9C089"/>
+          </a:solidFill>
+          <a:ln>
+            <a:noFill/>
+          </a:ln>
+        </p:spPr>
+        <p:style>
+          <a:lnRef idx="1">
+            <a:schemeClr val="accent1"/>
+          </a:lnRef>
+          <a:fillRef idx="3">
+            <a:schemeClr val="accent1"/>
+          </a:fillRef>
+          <a:effectRef idx="2">
+            <a:schemeClr val="accent1"/>
+          </a:effectRef>
+          <a:fontRef idx="minor">
+            <a:schemeClr val="lt1"/>
+          </a:fontRef>
+        </p:style>
+        <p:txBody>
+          <a:bodyPr rtlCol="0" anchor="ctr"/>
+          <a:lstStyle/>
+          <a:p>
+            <a:pPr algn="ctr"/>
+          </a:p>
+        </p:txBody>
+      </p:sp>
+      <p:sp>
+        <p:nvSpPr>
+          <p:cNvPr id="5" name="TextBox 4"/>
+          <p:cNvSpPr txBox="1"/>
+          <p:nvPr/>
+        </p:nvSpPr>
+        <p:spPr>
+          <a:xfrm>
+            <a:off x="685800" y="3017520"/>
+            <a:ext cx="10817352" cy="1463040"/>
+          </a:xfrm>
+          <a:prstGeom prst="rect">
+            <a:avLst/>
+          </a:prstGeom>
+          <a:noFill/>
+        </p:spPr>
+        <p:txBody>
+          <a:bodyPr wrap="square">
+            <a:spAutoFit/>
+          </a:bodyPr>
+          <a:lstStyle/>
+          <a:p>
+            <a:pPr algn="l"/>
+            <a:r>
+              <a:rPr sz="4000" b="1" i="0">
+                <a:solidFill>
+                  <a:srgbClr val="FFFFFF"/>
+                </a:solidFill>
+                <a:latin typeface="Arial"/>
+              </a:rPr>
+              <a:t>Werkzeug &amp; Einzelarbeit I</a:t>
+            </a:r>
+          </a:p>
+        </p:txBody>
+      </p:sp>
+      <p:sp>
+        <p:nvSpPr>
+          <p:cNvPr id="6" name="TextBox 5"/>
+          <p:cNvSpPr txBox="1"/>
+          <p:nvPr/>
+        </p:nvSpPr>
+        <p:spPr>
+          <a:xfrm>
+            <a:off x="685800" y="4480560"/>
+            <a:ext cx="8653881" cy="1280160"/>
+          </a:xfrm>
+          <a:prstGeom prst="rect">
+            <a:avLst/>
+          </a:prstGeom>
+          <a:noFill/>
+        </p:spPr>
+        <p:txBody>
+          <a:bodyPr wrap="square">
+            <a:spAutoFit/>
+          </a:bodyPr>
+          <a:lstStyle/>
+          <a:p>
+            <a:pPr algn="l"/>
+            <a:r>
+              <a:rPr sz="1600" b="0" i="0">
+                <a:solidFill>
+                  <a:srgbClr val="C8D2E6"/>
+                </a:solidFill>
+                <a:latin typeface="Arial"/>
+              </a:rPr>
+              <a:t>Das eigene Zielsegment mit dem Scoring-Modell priorisieren.</a:t>
+            </a:r>
+          </a:p>
+        </p:txBody>
+      </p:sp>
+      <p:sp>
+        <p:nvSpPr>
+          <p:cNvPr id="7" name="TextBox 6"/>
+          <p:cNvSpPr txBox="1"/>
+          <p:nvPr/>
+        </p:nvSpPr>
+        <p:spPr>
+          <a:xfrm>
+            <a:off x="685800" y="6355080"/>
+            <a:ext cx="10817352" cy="274320"/>
+          </a:xfrm>
+          <a:prstGeom prst="rect">
+            <a:avLst/>
+          </a:prstGeom>
+          <a:noFill/>
+        </p:spPr>
+        <p:txBody>
+          <a:bodyPr wrap="none">
+            <a:spAutoFit/>
+          </a:bodyPr>
+          <a:lstStyle/>
+          <a:p>
+            <a:pPr algn="l"/>
+            <a:r>
+              <a:rPr sz="700">
+                <a:solidFill>
+                  <a:srgbClr val="8CA0C3"/>
+                </a:solidFill>
+                <a:latin typeface="Consolas"/>
+              </a:rPr>
+              <a:t>FKB Campus  ·  M15</a:t>
+            </a:r>
+          </a:p>
+        </p:txBody>
+      </p:sp>
+    </p:spTree>
+  </p:cSld>
+  <p:clrMapOvr>
+    <a:masterClrMapping/>
+  </p:clrMapOvr>
+</p:sld>
+</file>
+
+<file path=ppt/slides/slide11.xml><?xml version="1.0" encoding="utf-8"?>
+<p:sld xmlns:a="http://schemas.openxmlformats.org/drawingml/2006/main" xmlns:p="http://schemas.openxmlformats.org/presentationml/2006/main" xmlns:r="http://schemas.openxmlformats.org/officeDocument/2006/relationships">
+  <p:cSld>
+    <p:spTree>
+      <p:nvGrpSpPr>
+        <p:cNvPr id="1" name=""/>
+        <p:cNvGrpSpPr/>
+        <p:nvPr/>
+      </p:nvGrpSpPr>
+      <p:grpSpPr/>
+      <p:sp>
+        <p:nvSpPr>
+          <p:cNvPr id="2" name="Rectangle 1"/>
+          <p:cNvSpPr/>
+          <p:nvPr/>
+        </p:nvSpPr>
+        <p:spPr>
+          <a:xfrm>
+            <a:off x="0" y="0"/>
+            <a:ext cx="12188952" cy="6858000"/>
+          </a:xfrm>
+          <a:prstGeom prst="rect">
+            <a:avLst/>
+          </a:prstGeom>
+          <a:solidFill>
+            <a:srgbClr val="EDEDF3"/>
           </a:solidFill>
           <a:ln>
             <a:noFill/>
@@ -4775,43 +5232,51 @@
                 </a:solidFill>
                 <a:latin typeface="Consolas"/>
               </a:rPr>
-              <a:t>M15  ·  ÜBERSICHT</a:t>
-            </a:r>
-          </a:p>
-        </p:txBody>
-      </p:sp>
-      <p:sp>
-        <p:nvSpPr>
-          <p:cNvPr id="5" name="TextBox 4"/>
-          <p:cNvSpPr txBox="1"/>
-          <p:nvPr/>
-        </p:nvSpPr>
-        <p:spPr>
-          <a:xfrm>
-            <a:off x="685800" y="502920"/>
-            <a:ext cx="10817352" cy="594360"/>
-          </a:xfrm>
-          <a:prstGeom prst="rect">
-            <a:avLst/>
-          </a:prstGeom>
-          <a:noFill/>
-        </p:spPr>
-        <p:txBody>
-          <a:bodyPr wrap="square">
-            <a:spAutoFit/>
-          </a:bodyPr>
-          <a:lstStyle/>
-          <a:p>
-            <a:pPr algn="l"/>
-            <a:r>
-              <a:rPr sz="2000" b="1" i="0">
-                <a:solidFill>
-                  <a:srgbClr val="1F2C56"/>
-                </a:solidFill>
-                <a:latin typeface="Arial"/>
-              </a:rPr>
-              <a:t>Das Scoring-Modell zur Segmentpriorisierung</a:t>
-            </a:r>
+              <a:t>M15  ·  INHALT</a:t>
+            </a:r>
+          </a:p>
+        </p:txBody>
+      </p:sp>
+      <p:sp>
+        <p:nvSpPr>
+          <p:cNvPr id="5" name="Rectangle 4"/>
+          <p:cNvSpPr/>
+          <p:nvPr/>
+        </p:nvSpPr>
+        <p:spPr>
+          <a:xfrm>
+            <a:off x="0" y="1234440"/>
+            <a:ext cx="12188952" cy="12700"/>
+          </a:xfrm>
+          <a:prstGeom prst="rect">
+            <a:avLst/>
+          </a:prstGeom>
+          <a:solidFill>
+            <a:srgbClr val="D8DFE4"/>
+          </a:solidFill>
+          <a:ln>
+            <a:noFill/>
+          </a:ln>
+        </p:spPr>
+        <p:style>
+          <a:lnRef idx="1">
+            <a:schemeClr val="accent1"/>
+          </a:lnRef>
+          <a:fillRef idx="3">
+            <a:schemeClr val="accent1"/>
+          </a:fillRef>
+          <a:effectRef idx="2">
+            <a:schemeClr val="accent1"/>
+          </a:effectRef>
+          <a:fontRef idx="minor">
+            <a:schemeClr val="lt1"/>
+          </a:fontRef>
+        </p:style>
+        <p:txBody>
+          <a:bodyPr rtlCol="0" anchor="ctr"/>
+          <a:lstStyle/>
+          <a:p>
+            <a:pPr algn="ctr"/>
           </a:p>
         </p:txBody>
       </p:sp>
@@ -4823,8 +5288,8 @@
         </p:nvSpPr>
         <p:spPr>
           <a:xfrm>
-            <a:off x="685800" y="1143000"/>
-            <a:ext cx="10817352" cy="25400"/>
+            <a:off x="685800" y="502920"/>
+            <a:ext cx="36576" cy="658368"/>
           </a:xfrm>
           <a:prstGeom prst="rect">
             <a:avLst/>
@@ -4858,6 +5323,416 @@
           </a:p>
         </p:txBody>
       </p:sp>
+      <p:sp>
+        <p:nvSpPr>
+          <p:cNvPr id="7" name="TextBox 6"/>
+          <p:cNvSpPr txBox="1"/>
+          <p:nvPr/>
+        </p:nvSpPr>
+        <p:spPr>
+          <a:xfrm>
+            <a:off x="813816" y="502920"/>
+            <a:ext cx="10634472" cy="685800"/>
+          </a:xfrm>
+          <a:prstGeom prst="rect">
+            <a:avLst/>
+          </a:prstGeom>
+          <a:noFill/>
+        </p:spPr>
+        <p:txBody>
+          <a:bodyPr wrap="square">
+            <a:spAutoFit/>
+          </a:bodyPr>
+          <a:lstStyle/>
+          <a:p>
+            <a:pPr algn="l"/>
+            <a:r>
+              <a:rPr sz="2400" b="1" i="0">
+                <a:solidFill>
+                  <a:srgbClr val="1F2C56"/>
+                </a:solidFill>
+                <a:latin typeface="Arial"/>
+              </a:rPr>
+              <a:t>Segmente priorisieren mit dem Scoring-Modell</a:t>
+            </a:r>
+          </a:p>
+        </p:txBody>
+      </p:sp>
+      <p:sp>
+        <p:nvSpPr>
+          <p:cNvPr id="8" name="TextBox 7"/>
+          <p:cNvSpPr txBox="1"/>
+          <p:nvPr/>
+        </p:nvSpPr>
+        <p:spPr>
+          <a:xfrm>
+            <a:off x="685800" y="1417320"/>
+            <a:ext cx="10817352" cy="4892040"/>
+          </a:xfrm>
+          <a:prstGeom prst="rect">
+            <a:avLst/>
+          </a:prstGeom>
+          <a:noFill/>
+        </p:spPr>
+        <p:txBody>
+          <a:bodyPr wrap="square" anchor="ctr">
+            <a:spAutoFit/>
+          </a:bodyPr>
+          <a:lstStyle/>
+          <a:p>
+            <a:pPr marL="177800" indent="-177800">
+              <a:spcBef>
+                <a:spcPts val="600"/>
+              </a:spcBef>
+              <a:spcAft>
+                <a:spcPts val="200"/>
+              </a:spcAft>
+            </a:pPr>
+            <a:r>
+              <a:rPr sz="1200" i="1">
+                <a:solidFill>
+                  <a:srgbClr val="3D5466"/>
+                </a:solidFill>
+                <a:latin typeface="Arial"/>
+              </a:rPr>
+              <a:t>→  Priorisierung macht die Auswahl nachvollziehbar – nicht das Bauchgefühl entscheidet, sondern ein transparentes Scoring.</a:t>
+            </a:r>
+          </a:p>
+          <a:p>
+            <a:pPr marL="190500" indent="-190500">
+              <a:spcBef>
+                <a:spcPts val="400"/>
+              </a:spcBef>
+              <a:spcAft>
+                <a:spcPts val="200"/>
+              </a:spcAft>
+            </a:pPr>
+            <a:r>
+              <a:rPr sz="1300">
+                <a:solidFill>
+                  <a:srgbClr val="3D5466"/>
+                </a:solidFill>
+                <a:latin typeface="Arial"/>
+              </a:rPr>
+              <a:t>▸  Je Segment: Marktgröße, Ertragspotenzial, Wettbewerbsposition, strategische Passung bewerten.</a:t>
+            </a:r>
+          </a:p>
+          <a:p>
+            <a:pPr marL="190500" indent="-190500">
+              <a:spcBef>
+                <a:spcPts val="400"/>
+              </a:spcBef>
+              <a:spcAft>
+                <a:spcPts val="200"/>
+              </a:spcAft>
+            </a:pPr>
+            <a:r>
+              <a:rPr sz="1300">
+                <a:solidFill>
+                  <a:srgbClr val="3D5466"/>
+                </a:solidFill>
+                <a:latin typeface="Arial"/>
+              </a:rPr>
+              <a:t>▸  Der adressierbare Markt (SAM) grenzt das realistisch erreichbare Potenzial ein.</a:t>
+            </a:r>
+          </a:p>
+        </p:txBody>
+      </p:sp>
+      <p:sp>
+        <p:nvSpPr>
+          <p:cNvPr id="9" name="Rectangle 8"/>
+          <p:cNvSpPr/>
+          <p:nvPr/>
+        </p:nvSpPr>
+        <p:spPr>
+          <a:xfrm>
+            <a:off x="0" y="6510528"/>
+            <a:ext cx="12188952" cy="347472"/>
+          </a:xfrm>
+          <a:prstGeom prst="rect">
+            <a:avLst/>
+          </a:prstGeom>
+          <a:solidFill>
+            <a:srgbClr val="0A1937"/>
+          </a:solidFill>
+          <a:ln>
+            <a:noFill/>
+          </a:ln>
+        </p:spPr>
+        <p:style>
+          <a:lnRef idx="1">
+            <a:schemeClr val="accent1"/>
+          </a:lnRef>
+          <a:fillRef idx="3">
+            <a:schemeClr val="accent1"/>
+          </a:fillRef>
+          <a:effectRef idx="2">
+            <a:schemeClr val="accent1"/>
+          </a:effectRef>
+          <a:fontRef idx="minor">
+            <a:schemeClr val="lt1"/>
+          </a:fontRef>
+        </p:style>
+        <p:txBody>
+          <a:bodyPr rtlCol="0" anchor="ctr"/>
+          <a:lstStyle/>
+          <a:p>
+            <a:pPr algn="ctr"/>
+          </a:p>
+        </p:txBody>
+      </p:sp>
+      <p:sp>
+        <p:nvSpPr>
+          <p:cNvPr id="10" name="TextBox 9"/>
+          <p:cNvSpPr txBox="1"/>
+          <p:nvPr/>
+        </p:nvSpPr>
+        <p:spPr>
+          <a:xfrm>
+            <a:off x="685800" y="6583680"/>
+            <a:ext cx="6490411" cy="256032"/>
+          </a:xfrm>
+          <a:prstGeom prst="rect">
+            <a:avLst/>
+          </a:prstGeom>
+          <a:noFill/>
+        </p:spPr>
+        <p:txBody>
+          <a:bodyPr wrap="none">
+            <a:spAutoFit/>
+          </a:bodyPr>
+          <a:lstStyle/>
+          <a:p>
+            <a:pPr algn="l"/>
+            <a:r>
+              <a:rPr sz="700">
+                <a:solidFill>
+                  <a:srgbClr val="A0B4D2"/>
+                </a:solidFill>
+                <a:latin typeface="Consolas"/>
+              </a:rPr>
+              <a:t>FKB Campus  ·  M15</a:t>
+            </a:r>
+          </a:p>
+        </p:txBody>
+      </p:sp>
+    </p:spTree>
+  </p:cSld>
+  <p:clrMapOvr>
+    <a:masterClrMapping/>
+  </p:clrMapOvr>
+</p:sld>
+</file>
+
+<file path=ppt/slides/slide12.xml><?xml version="1.0" encoding="utf-8"?>
+<p:sld xmlns:a="http://schemas.openxmlformats.org/drawingml/2006/main" xmlns:p="http://schemas.openxmlformats.org/presentationml/2006/main" xmlns:r="http://schemas.openxmlformats.org/officeDocument/2006/relationships">
+  <p:cSld>
+    <p:spTree>
+      <p:nvGrpSpPr>
+        <p:cNvPr id="1" name=""/>
+        <p:cNvGrpSpPr/>
+        <p:nvPr/>
+      </p:nvGrpSpPr>
+      <p:grpSpPr/>
+      <p:sp>
+        <p:nvSpPr>
+          <p:cNvPr id="2" name="Rectangle 1"/>
+          <p:cNvSpPr/>
+          <p:nvPr/>
+        </p:nvSpPr>
+        <p:spPr>
+          <a:xfrm>
+            <a:off x="0" y="0"/>
+            <a:ext cx="12188952" cy="6858000"/>
+          </a:xfrm>
+          <a:prstGeom prst="rect">
+            <a:avLst/>
+          </a:prstGeom>
+          <a:solidFill>
+            <a:srgbClr val="FFFFFF"/>
+          </a:solidFill>
+          <a:ln>
+            <a:noFill/>
+          </a:ln>
+        </p:spPr>
+        <p:style>
+          <a:lnRef idx="1">
+            <a:schemeClr val="accent1"/>
+          </a:lnRef>
+          <a:fillRef idx="3">
+            <a:schemeClr val="accent1"/>
+          </a:fillRef>
+          <a:effectRef idx="2">
+            <a:schemeClr val="accent1"/>
+          </a:effectRef>
+          <a:fontRef idx="minor">
+            <a:schemeClr val="lt1"/>
+          </a:fontRef>
+        </p:style>
+        <p:txBody>
+          <a:bodyPr rtlCol="0" anchor="ctr"/>
+          <a:lstStyle/>
+          <a:p>
+            <a:pPr algn="ctr"/>
+          </a:p>
+        </p:txBody>
+      </p:sp>
+      <p:sp>
+        <p:nvSpPr>
+          <p:cNvPr id="3" name="Rectangle 2"/>
+          <p:cNvSpPr/>
+          <p:nvPr/>
+        </p:nvSpPr>
+        <p:spPr>
+          <a:xfrm>
+            <a:off x="0" y="0"/>
+            <a:ext cx="12188952" cy="50292"/>
+          </a:xfrm>
+          <a:prstGeom prst="rect">
+            <a:avLst/>
+          </a:prstGeom>
+          <a:solidFill>
+            <a:srgbClr val="1F2C56"/>
+          </a:solidFill>
+          <a:ln>
+            <a:noFill/>
+          </a:ln>
+        </p:spPr>
+        <p:style>
+          <a:lnRef idx="1">
+            <a:schemeClr val="accent1"/>
+          </a:lnRef>
+          <a:fillRef idx="3">
+            <a:schemeClr val="accent1"/>
+          </a:fillRef>
+          <a:effectRef idx="2">
+            <a:schemeClr val="accent1"/>
+          </a:effectRef>
+          <a:fontRef idx="minor">
+            <a:schemeClr val="lt1"/>
+          </a:fontRef>
+        </p:style>
+        <p:txBody>
+          <a:bodyPr rtlCol="0" anchor="ctr"/>
+          <a:lstStyle/>
+          <a:p>
+            <a:pPr algn="ctr"/>
+          </a:p>
+        </p:txBody>
+      </p:sp>
+      <p:sp>
+        <p:nvSpPr>
+          <p:cNvPr id="4" name="TextBox 3"/>
+          <p:cNvSpPr txBox="1"/>
+          <p:nvPr/>
+        </p:nvSpPr>
+        <p:spPr>
+          <a:xfrm>
+            <a:off x="685800" y="109728"/>
+            <a:ext cx="10817352" cy="228600"/>
+          </a:xfrm>
+          <a:prstGeom prst="rect">
+            <a:avLst/>
+          </a:prstGeom>
+          <a:noFill/>
+        </p:spPr>
+        <p:txBody>
+          <a:bodyPr wrap="none">
+            <a:spAutoFit/>
+          </a:bodyPr>
+          <a:lstStyle/>
+          <a:p>
+            <a:pPr algn="l"/>
+            <a:r>
+              <a:rPr sz="750">
+                <a:solidFill>
+                  <a:srgbClr val="78808C"/>
+                </a:solidFill>
+                <a:latin typeface="Consolas"/>
+              </a:rPr>
+              <a:t>M15  ·  ÜBERSICHT</a:t>
+            </a:r>
+          </a:p>
+        </p:txBody>
+      </p:sp>
+      <p:sp>
+        <p:nvSpPr>
+          <p:cNvPr id="5" name="TextBox 4"/>
+          <p:cNvSpPr txBox="1"/>
+          <p:nvPr/>
+        </p:nvSpPr>
+        <p:spPr>
+          <a:xfrm>
+            <a:off x="685800" y="502920"/>
+            <a:ext cx="10817352" cy="594360"/>
+          </a:xfrm>
+          <a:prstGeom prst="rect">
+            <a:avLst/>
+          </a:prstGeom>
+          <a:noFill/>
+        </p:spPr>
+        <p:txBody>
+          <a:bodyPr wrap="square">
+            <a:spAutoFit/>
+          </a:bodyPr>
+          <a:lstStyle/>
+          <a:p>
+            <a:pPr algn="l"/>
+            <a:r>
+              <a:rPr sz="2000" b="1" i="0">
+                <a:solidFill>
+                  <a:srgbClr val="1F2C56"/>
+                </a:solidFill>
+                <a:latin typeface="Arial"/>
+              </a:rPr>
+              <a:t>Scoring-Modell zur Segmentpriorisierung</a:t>
+            </a:r>
+          </a:p>
+        </p:txBody>
+      </p:sp>
+      <p:sp>
+        <p:nvSpPr>
+          <p:cNvPr id="6" name="Rectangle 5"/>
+          <p:cNvSpPr/>
+          <p:nvPr/>
+        </p:nvSpPr>
+        <p:spPr>
+          <a:xfrm>
+            <a:off x="685800" y="1143000"/>
+            <a:ext cx="10817352" cy="25400"/>
+          </a:xfrm>
+          <a:prstGeom prst="rect">
+            <a:avLst/>
+          </a:prstGeom>
+          <a:solidFill>
+            <a:srgbClr val="D9C089"/>
+          </a:solidFill>
+          <a:ln>
+            <a:noFill/>
+          </a:ln>
+        </p:spPr>
+        <p:style>
+          <a:lnRef idx="1">
+            <a:schemeClr val="accent1"/>
+          </a:lnRef>
+          <a:fillRef idx="3">
+            <a:schemeClr val="accent1"/>
+          </a:fillRef>
+          <a:effectRef idx="2">
+            <a:schemeClr val="accent1"/>
+          </a:effectRef>
+          <a:fontRef idx="minor">
+            <a:schemeClr val="lt1"/>
+          </a:fontRef>
+        </p:style>
+        <p:txBody>
+          <a:bodyPr rtlCol="0" anchor="ctr"/>
+          <a:lstStyle/>
+          <a:p>
+            <a:pPr algn="ctr"/>
+          </a:p>
+        </p:txBody>
+      </p:sp>
       <p:graphicFrame>
         <p:nvGraphicFramePr>
           <p:cNvPr id="7" name="Table 6"/>
@@ -4868,7 +5743,7 @@
         </p:nvGraphicFramePr>
         <p:xfrm>
           <a:off x="685800" y="1417320"/>
-          <a:ext cx="10817352" cy="2304288"/>
+          <a:ext cx="10817352" cy="1920240"/>
         </p:xfrm>
         <a:graphic>
           <a:graphicData uri="http://schemas.openxmlformats.org/drawingml/2006/table">
@@ -4877,11 +5752,9 @@
                 <a:tableStyleId>{5C22544A-7EE6-4342-B048-85BDC9FD1C3A}</a:tableStyleId>
               </a:tblPr>
               <a:tblGrid>
-                <a:gridCol w="2163470"/>
-                <a:gridCol w="2163470"/>
-                <a:gridCol w="2163470"/>
-                <a:gridCol w="2163470"/>
-                <a:gridCol w="2163472"/>
+                <a:gridCol w="3605784"/>
+                <a:gridCol w="3605784"/>
+                <a:gridCol w="3605784"/>
               </a:tblGrid>
               <a:tr h="384048">
                 <a:tc>
@@ -4918,7 +5791,7 @@
                           </a:solidFill>
                           <a:latin typeface="Arial"/>
                         </a:rPr>
-                        <a:t>Gewichtung</a:t>
+                        <a:t>Gewicht</a:t>
                       </a:r>
                     </a:p>
                   </a:txBody>
@@ -4940,51 +5813,7 @@
                           </a:solidFill>
                           <a:latin typeface="Arial"/>
                         </a:rPr>
-                        <a:t>Segment A</a:t>
-                      </a:r>
-                    </a:p>
-                  </a:txBody>
-                  <a:tcPr>
-                    <a:solidFill>
-                      <a:srgbClr val="1F2C56"/>
-                    </a:solidFill>
-                  </a:tcPr>
-                </a:tc>
-                <a:tc>
-                  <a:txBody>
-                    <a:bodyPr/>
-                    <a:lstStyle/>
-                    <a:p>
-                      <a:r>
-                        <a:rPr sz="1100" b="1">
-                          <a:solidFill>
-                            <a:srgbClr val="FFFFFF"/>
-                          </a:solidFill>
-                          <a:latin typeface="Arial"/>
-                        </a:rPr>
-                        <a:t>Segment B</a:t>
-                      </a:r>
-                    </a:p>
-                  </a:txBody>
-                  <a:tcPr>
-                    <a:solidFill>
-                      <a:srgbClr val="1F2C56"/>
-                    </a:solidFill>
-                  </a:tcPr>
-                </a:tc>
-                <a:tc>
-                  <a:txBody>
-                    <a:bodyPr/>
-                    <a:lstStyle/>
-                    <a:p>
-                      <a:r>
-                        <a:rPr sz="1100" b="1">
-                          <a:solidFill>
-                            <a:srgbClr val="FFFFFF"/>
-                          </a:solidFill>
-                          <a:latin typeface="Arial"/>
-                        </a:rPr>
-                        <a:t>Segment C</a:t>
+                        <a:t>Bewertung 1–5</a:t>
                       </a:r>
                     </a:p>
                   </a:txBody>
@@ -5008,7 +5837,7 @@
                           </a:solidFill>
                           <a:latin typeface="Arial"/>
                         </a:rPr>
-                        <a:t>Marktgröße (Anzahl Unternehmen in Region)</a:t>
+                        <a:t>Marktgröße / Potenzial</a:t>
                       </a:r>
                     </a:p>
                   </a:txBody>
@@ -5026,7 +5855,7 @@
                           </a:solidFill>
                           <a:latin typeface="Arial"/>
                         </a:rPr>
-                        <a:t>25 %</a:t>
+                        <a:t>hoch</a:t>
                       </a:r>
                     </a:p>
                   </a:txBody>
@@ -5036,23 +5865,17 @@
                   <a:txBody>
                     <a:bodyPr/>
                     <a:lstStyle/>
-                    <a:p/>
-                  </a:txBody>
-                  <a:tcPr/>
-                </a:tc>
-                <a:tc>
-                  <a:txBody>
-                    <a:bodyPr/>
-                    <a:lstStyle/>
-                    <a:p/>
-                  </a:txBody>
-                  <a:tcPr/>
-                </a:tc>
-                <a:tc>
-                  <a:txBody>
-                    <a:bodyPr/>
-                    <a:lstStyle/>
-                    <a:p/>
+                    <a:p>
+                      <a:r>
+                        <a:rPr sz="1050">
+                          <a:solidFill>
+                            <a:srgbClr val="3D5466"/>
+                          </a:solidFill>
+                          <a:latin typeface="Arial"/>
+                        </a:rPr>
+                        <a:t>___</a:t>
+                      </a:r>
+                    </a:p>
                   </a:txBody>
                   <a:tcPr/>
                 </a:tc>
@@ -5070,7 +5893,7 @@
                           </a:solidFill>
                           <a:latin typeface="Arial"/>
                         </a:rPr>
-                        <a:t>Durchschnittlicher Ertragspotenzial (DB)</a:t>
+                        <a:t>Ertragspotenzial</a:t>
                       </a:r>
                     </a:p>
                   </a:txBody>
@@ -5088,7 +5911,7 @@
                           </a:solidFill>
                           <a:latin typeface="Arial"/>
                         </a:rPr>
-                        <a:t>30 %</a:t>
+                        <a:t>hoch</a:t>
                       </a:r>
                     </a:p>
                   </a:txBody>
@@ -5098,23 +5921,17 @@
                   <a:txBody>
                     <a:bodyPr/>
                     <a:lstStyle/>
-                    <a:p/>
-                  </a:txBody>
-                  <a:tcPr/>
-                </a:tc>
-                <a:tc>
-                  <a:txBody>
-                    <a:bodyPr/>
-                    <a:lstStyle/>
-                    <a:p/>
-                  </a:txBody>
-                  <a:tcPr/>
-                </a:tc>
-                <a:tc>
-                  <a:txBody>
-                    <a:bodyPr/>
-                    <a:lstStyle/>
-                    <a:p/>
+                    <a:p>
+                      <a:r>
+                        <a:rPr sz="1050">
+                          <a:solidFill>
+                            <a:srgbClr val="3D5466"/>
+                          </a:solidFill>
+                          <a:latin typeface="Arial"/>
+                        </a:rPr>
+                        <a:t>___</a:t>
+                      </a:r>
+                    </a:p>
                   </a:txBody>
                   <a:tcPr/>
                 </a:tc>
@@ -5132,7 +5949,7 @@
                           </a:solidFill>
                           <a:latin typeface="Arial"/>
                         </a:rPr>
-                        <a:t>Eigene Expertise/Stärke in diesem Segment</a:t>
+                        <a:t>Wettbewerbsposition</a:t>
                       </a:r>
                     </a:p>
                   </a:txBody>
@@ -5150,7 +5967,7 @@
                           </a:solidFill>
                           <a:latin typeface="Arial"/>
                         </a:rPr>
-                        <a:t>25 %</a:t>
+                        <a:t>mittel</a:t>
                       </a:r>
                     </a:p>
                   </a:txBody>
@@ -5160,23 +5977,17 @@
                   <a:txBody>
                     <a:bodyPr/>
                     <a:lstStyle/>
-                    <a:p/>
-                  </a:txBody>
-                  <a:tcPr/>
-                </a:tc>
-                <a:tc>
-                  <a:txBody>
-                    <a:bodyPr/>
-                    <a:lstStyle/>
-                    <a:p/>
-                  </a:txBody>
-                  <a:tcPr/>
-                </a:tc>
-                <a:tc>
-                  <a:txBody>
-                    <a:bodyPr/>
-                    <a:lstStyle/>
-                    <a:p/>
+                    <a:p>
+                      <a:r>
+                        <a:rPr sz="1050">
+                          <a:solidFill>
+                            <a:srgbClr val="3D5466"/>
+                          </a:solidFill>
+                          <a:latin typeface="Arial"/>
+                        </a:rPr>
+                        <a:t>___</a:t>
+                      </a:r>
+                    </a:p>
                   </a:txBody>
                   <a:tcPr/>
                 </a:tc>
@@ -5194,7 +6005,7 @@
                           </a:solidFill>
                           <a:latin typeface="Arial"/>
                         </a:rPr>
-                        <a:t>Wettbewerbsintensität (gering = gut)</a:t>
+                        <a:t>Strategische Passung</a:t>
                       </a:r>
                     </a:p>
                   </a:txBody>
@@ -5212,51 +6023,7 @@
                           </a:solidFill>
                           <a:latin typeface="Arial"/>
                         </a:rPr>
-                        <a:t>20 %</a:t>
-                      </a:r>
-                    </a:p>
-                  </a:txBody>
-                  <a:tcPr/>
-                </a:tc>
-                <a:tc>
-                  <a:txBody>
-                    <a:bodyPr/>
-                    <a:lstStyle/>
-                    <a:p/>
-                  </a:txBody>
-                  <a:tcPr/>
-                </a:tc>
-                <a:tc>
-                  <a:txBody>
-                    <a:bodyPr/>
-                    <a:lstStyle/>
-                    <a:p/>
-                  </a:txBody>
-                  <a:tcPr/>
-                </a:tc>
-                <a:tc>
-                  <a:txBody>
-                    <a:bodyPr/>
-                    <a:lstStyle/>
-                    <a:p/>
-                  </a:txBody>
-                  <a:tcPr/>
-                </a:tc>
-              </a:tr>
-              <a:tr h="384048">
-                <a:tc>
-                  <a:txBody>
-                    <a:bodyPr/>
-                    <a:lstStyle/>
-                    <a:p>
-                      <a:r>
-                        <a:rPr sz="1050">
-                          <a:solidFill>
-                            <a:srgbClr val="3D5466"/>
-                          </a:solidFill>
-                          <a:latin typeface="Arial"/>
-                        </a:rPr>
-                        <a:t>Gesamtscore</a:t>
+                        <a:t>mittel</a:t>
                       </a:r>
                     </a:p>
                   </a:txBody>
@@ -5274,33 +6041,9 @@
                           </a:solidFill>
                           <a:latin typeface="Arial"/>
                         </a:rPr>
-                        <a:t>100 %</a:t>
+                        <a:t>___</a:t>
                       </a:r>
                     </a:p>
-                  </a:txBody>
-                  <a:tcPr/>
-                </a:tc>
-                <a:tc>
-                  <a:txBody>
-                    <a:bodyPr/>
-                    <a:lstStyle/>
-                    <a:p/>
-                  </a:txBody>
-                  <a:tcPr/>
-                </a:tc>
-                <a:tc>
-                  <a:txBody>
-                    <a:bodyPr/>
-                    <a:lstStyle/>
-                    <a:p/>
-                  </a:txBody>
-                  <a:tcPr/>
-                </a:tc>
-                <a:tc>
-                  <a:txBody>
-                    <a:bodyPr/>
-                    <a:lstStyle/>
-                    <a:p/>
                   </a:txBody>
                   <a:tcPr/>
                 </a:tc>
@@ -5418,1013 +6161,6 @@
                 <a:latin typeface="Consolas"/>
               </a:rPr>
               <a:t>Übersicht</a:t>
-            </a:r>
-          </a:p>
-        </p:txBody>
-      </p:sp>
-    </p:spTree>
-  </p:cSld>
-  <p:clrMapOvr>
-    <a:masterClrMapping/>
-  </p:clrMapOvr>
-</p:sld>
-</file>
-
-<file path=ppt/slides/slide11.xml><?xml version="1.0" encoding="utf-8"?>
-<p:sld xmlns:a="http://schemas.openxmlformats.org/drawingml/2006/main" xmlns:p="http://schemas.openxmlformats.org/presentationml/2006/main" xmlns:r="http://schemas.openxmlformats.org/officeDocument/2006/relationships">
-  <p:cSld>
-    <p:spTree>
-      <p:nvGrpSpPr>
-        <p:cNvPr id="1" name=""/>
-        <p:cNvGrpSpPr/>
-        <p:nvPr/>
-      </p:nvGrpSpPr>
-      <p:grpSpPr/>
-      <p:sp>
-        <p:nvSpPr>
-          <p:cNvPr id="2" name="Rectangle 1"/>
-          <p:cNvSpPr/>
-          <p:nvPr/>
-        </p:nvSpPr>
-        <p:spPr>
-          <a:xfrm>
-            <a:off x="0" y="0"/>
-            <a:ext cx="12188952" cy="6858000"/>
-          </a:xfrm>
-          <a:prstGeom prst="rect">
-            <a:avLst/>
-          </a:prstGeom>
-          <a:solidFill>
-            <a:srgbClr val="EDEDF3"/>
-          </a:solidFill>
-          <a:ln>
-            <a:noFill/>
-          </a:ln>
-        </p:spPr>
-        <p:style>
-          <a:lnRef idx="1">
-            <a:schemeClr val="accent1"/>
-          </a:lnRef>
-          <a:fillRef idx="3">
-            <a:schemeClr val="accent1"/>
-          </a:fillRef>
-          <a:effectRef idx="2">
-            <a:schemeClr val="accent1"/>
-          </a:effectRef>
-          <a:fontRef idx="minor">
-            <a:schemeClr val="lt1"/>
-          </a:fontRef>
-        </p:style>
-        <p:txBody>
-          <a:bodyPr rtlCol="0" anchor="ctr"/>
-          <a:lstStyle/>
-          <a:p>
-            <a:pPr algn="ctr"/>
-          </a:p>
-        </p:txBody>
-      </p:sp>
-      <p:sp>
-        <p:nvSpPr>
-          <p:cNvPr id="3" name="Rectangle 2"/>
-          <p:cNvSpPr/>
-          <p:nvPr/>
-        </p:nvSpPr>
-        <p:spPr>
-          <a:xfrm>
-            <a:off x="0" y="0"/>
-            <a:ext cx="12188952" cy="50292"/>
-          </a:xfrm>
-          <a:prstGeom prst="rect">
-            <a:avLst/>
-          </a:prstGeom>
-          <a:solidFill>
-            <a:srgbClr val="1F2C56"/>
-          </a:solidFill>
-          <a:ln>
-            <a:noFill/>
-          </a:ln>
-        </p:spPr>
-        <p:style>
-          <a:lnRef idx="1">
-            <a:schemeClr val="accent1"/>
-          </a:lnRef>
-          <a:fillRef idx="3">
-            <a:schemeClr val="accent1"/>
-          </a:fillRef>
-          <a:effectRef idx="2">
-            <a:schemeClr val="accent1"/>
-          </a:effectRef>
-          <a:fontRef idx="minor">
-            <a:schemeClr val="lt1"/>
-          </a:fontRef>
-        </p:style>
-        <p:txBody>
-          <a:bodyPr rtlCol="0" anchor="ctr"/>
-          <a:lstStyle/>
-          <a:p>
-            <a:pPr algn="ctr"/>
-          </a:p>
-        </p:txBody>
-      </p:sp>
-      <p:sp>
-        <p:nvSpPr>
-          <p:cNvPr id="4" name="TextBox 3"/>
-          <p:cNvSpPr txBox="1"/>
-          <p:nvPr/>
-        </p:nvSpPr>
-        <p:spPr>
-          <a:xfrm>
-            <a:off x="685800" y="109728"/>
-            <a:ext cx="10817352" cy="228600"/>
-          </a:xfrm>
-          <a:prstGeom prst="rect">
-            <a:avLst/>
-          </a:prstGeom>
-          <a:noFill/>
-        </p:spPr>
-        <p:txBody>
-          <a:bodyPr wrap="none">
-            <a:spAutoFit/>
-          </a:bodyPr>
-          <a:lstStyle/>
-          <a:p>
-            <a:pPr algn="l"/>
-            <a:r>
-              <a:rPr sz="750">
-                <a:solidFill>
-                  <a:srgbClr val="78808C"/>
-                </a:solidFill>
-                <a:latin typeface="Consolas"/>
-              </a:rPr>
-              <a:t>M15  ·  INHALT</a:t>
-            </a:r>
-          </a:p>
-        </p:txBody>
-      </p:sp>
-      <p:sp>
-        <p:nvSpPr>
-          <p:cNvPr id="5" name="Rectangle 4"/>
-          <p:cNvSpPr/>
-          <p:nvPr/>
-        </p:nvSpPr>
-        <p:spPr>
-          <a:xfrm>
-            <a:off x="0" y="1234440"/>
-            <a:ext cx="12188952" cy="12700"/>
-          </a:xfrm>
-          <a:prstGeom prst="rect">
-            <a:avLst/>
-          </a:prstGeom>
-          <a:solidFill>
-            <a:srgbClr val="D8DFE4"/>
-          </a:solidFill>
-          <a:ln>
-            <a:noFill/>
-          </a:ln>
-        </p:spPr>
-        <p:style>
-          <a:lnRef idx="1">
-            <a:schemeClr val="accent1"/>
-          </a:lnRef>
-          <a:fillRef idx="3">
-            <a:schemeClr val="accent1"/>
-          </a:fillRef>
-          <a:effectRef idx="2">
-            <a:schemeClr val="accent1"/>
-          </a:effectRef>
-          <a:fontRef idx="minor">
-            <a:schemeClr val="lt1"/>
-          </a:fontRef>
-        </p:style>
-        <p:txBody>
-          <a:bodyPr rtlCol="0" anchor="ctr"/>
-          <a:lstStyle/>
-          <a:p>
-            <a:pPr algn="ctr"/>
-          </a:p>
-        </p:txBody>
-      </p:sp>
-      <p:sp>
-        <p:nvSpPr>
-          <p:cNvPr id="6" name="Rectangle 5"/>
-          <p:cNvSpPr/>
-          <p:nvPr/>
-        </p:nvSpPr>
-        <p:spPr>
-          <a:xfrm>
-            <a:off x="685800" y="502920"/>
-            <a:ext cx="36576" cy="658368"/>
-          </a:xfrm>
-          <a:prstGeom prst="rect">
-            <a:avLst/>
-          </a:prstGeom>
-          <a:solidFill>
-            <a:srgbClr val="D9C089"/>
-          </a:solidFill>
-          <a:ln>
-            <a:noFill/>
-          </a:ln>
-        </p:spPr>
-        <p:style>
-          <a:lnRef idx="1">
-            <a:schemeClr val="accent1"/>
-          </a:lnRef>
-          <a:fillRef idx="3">
-            <a:schemeClr val="accent1"/>
-          </a:fillRef>
-          <a:effectRef idx="2">
-            <a:schemeClr val="accent1"/>
-          </a:effectRef>
-          <a:fontRef idx="minor">
-            <a:schemeClr val="lt1"/>
-          </a:fontRef>
-        </p:style>
-        <p:txBody>
-          <a:bodyPr rtlCol="0" anchor="ctr"/>
-          <a:lstStyle/>
-          <a:p>
-            <a:pPr algn="ctr"/>
-          </a:p>
-        </p:txBody>
-      </p:sp>
-      <p:sp>
-        <p:nvSpPr>
-          <p:cNvPr id="7" name="TextBox 6"/>
-          <p:cNvSpPr txBox="1"/>
-          <p:nvPr/>
-        </p:nvSpPr>
-        <p:spPr>
-          <a:xfrm>
-            <a:off x="813816" y="502920"/>
-            <a:ext cx="10634472" cy="685800"/>
-          </a:xfrm>
-          <a:prstGeom prst="rect">
-            <a:avLst/>
-          </a:prstGeom>
-          <a:noFill/>
-        </p:spPr>
-        <p:txBody>
-          <a:bodyPr wrap="square">
-            <a:spAutoFit/>
-          </a:bodyPr>
-          <a:lstStyle/>
-          <a:p>
-            <a:pPr algn="l"/>
-            <a:r>
-              <a:rPr sz="2400" b="1" i="0">
-                <a:solidFill>
-                  <a:srgbClr val="1F2C56"/>
-                </a:solidFill>
-                <a:latin typeface="Arial"/>
-              </a:rPr>
-              <a:t>Wie groß ist mein adressierbarer Markt?</a:t>
-            </a:r>
-          </a:p>
-        </p:txBody>
-      </p:sp>
-      <p:sp>
-        <p:nvSpPr>
-          <p:cNvPr id="8" name="TextBox 7"/>
-          <p:cNvSpPr txBox="1"/>
-          <p:nvPr/>
-        </p:nvSpPr>
-        <p:spPr>
-          <a:xfrm>
-            <a:off x="685800" y="1417320"/>
-            <a:ext cx="10817352" cy="4892040"/>
-          </a:xfrm>
-          <a:prstGeom prst="rect">
-            <a:avLst/>
-          </a:prstGeom>
-          <a:noFill/>
-        </p:spPr>
-        <p:txBody>
-          <a:bodyPr wrap="square">
-            <a:spAutoFit/>
-          </a:bodyPr>
-          <a:lstStyle/>
-          <a:p>
-            <a:pPr marL="190500" indent="-190500">
-              <a:spcBef>
-                <a:spcPts val="400"/>
-              </a:spcBef>
-              <a:spcAft>
-                <a:spcPts val="200"/>
-              </a:spcAft>
-            </a:pPr>
-            <a:r>
-              <a:rPr sz="1300">
-                <a:solidFill>
-                  <a:srgbClr val="3D5466"/>
-                </a:solidFill>
-                <a:latin typeface="Arial"/>
-              </a:rPr>
-              <a:t>▸  Vor dem strategischen Einstieg in ein Segment steht die Potenzialschätzung. Die Frage: Wie viele Unternehmen im Zielsegment gibt es in meiner Region, und wie viele davon betreuen wir noch nicht?</a:t>
-            </a:r>
-          </a:p>
-          <a:p>
-            <a:pPr marL="190500" indent="-190500">
-              <a:spcBef>
-                <a:spcPts val="400"/>
-              </a:spcBef>
-              <a:spcAft>
-                <a:spcPts val="200"/>
-              </a:spcAft>
-            </a:pPr>
-            <a:r>
-              <a:rPr sz="1300">
-                <a:solidFill>
-                  <a:srgbClr val="3D5466"/>
-                </a:solidFill>
-                <a:latin typeface="Arial"/>
-              </a:rPr>
-              <a:t>▸  Datenquellen für die Potenzialschätzung:</a:t>
-            </a:r>
-          </a:p>
-          <a:p>
-            <a:pPr marL="190500" indent="-190500">
-              <a:spcBef>
-                <a:spcPts val="400"/>
-              </a:spcBef>
-              <a:spcAft>
-                <a:spcPts val="200"/>
-              </a:spcAft>
-            </a:pPr>
-            <a:r>
-              <a:rPr sz="1300">
-                <a:solidFill>
-                  <a:srgbClr val="3D5466"/>
-                </a:solidFill>
-                <a:latin typeface="Arial"/>
-              </a:rPr>
-              <a:t>▸  Vereinfachte Potenzialrechnung:</a:t>
-            </a:r>
-          </a:p>
-          <a:p>
-            <a:pPr marL="190500" indent="-190500">
-              <a:spcBef>
-                <a:spcPts val="400"/>
-              </a:spcBef>
-              <a:spcAft>
-                <a:spcPts val="200"/>
-              </a:spcAft>
-            </a:pPr>
-            <a:r>
-              <a:rPr sz="1300">
-                <a:solidFill>
-                  <a:srgbClr val="3D5466"/>
-                </a:solidFill>
-                <a:latin typeface="Arial"/>
-              </a:rPr>
-              <a:t>▸  Zielunternehmen in Region: X</a:t>
-            </a:r>
-          </a:p>
-          <a:p>
-            <a:pPr marL="190500" indent="-190500">
-              <a:spcBef>
-                <a:spcPts val="400"/>
-              </a:spcBef>
-              <a:spcAft>
-                <a:spcPts val="200"/>
-              </a:spcAft>
-            </a:pPr>
-            <a:r>
-              <a:rPr sz="1300">
-                <a:solidFill>
-                  <a:srgbClr val="3D5466"/>
-                </a:solidFill>
-                <a:latin typeface="Arial"/>
-              </a:rPr>
-              <a:t>▸  Davon bereits Kunden: Y</a:t>
-            </a:r>
-          </a:p>
-          <a:p>
-            <a:pPr marL="190500" indent="-190500">
-              <a:spcBef>
-                <a:spcPts val="400"/>
-              </a:spcBef>
-              <a:spcAft>
-                <a:spcPts val="200"/>
-              </a:spcAft>
-            </a:pPr>
-            <a:r>
-              <a:rPr sz="1300">
-                <a:solidFill>
-                  <a:srgbClr val="3D5466"/>
-                </a:solidFill>
-                <a:latin typeface="Arial"/>
-              </a:rPr>
-              <a:t>▸  Adressierbares Neukundenpotenzial: X − Y</a:t>
-            </a:r>
-          </a:p>
-          <a:p>
-            <a:pPr marL="190500" indent="-190500">
-              <a:spcBef>
-                <a:spcPts val="400"/>
-              </a:spcBef>
-              <a:spcAft>
-                <a:spcPts val="200"/>
-              </a:spcAft>
-            </a:pPr>
-            <a:r>
-              <a:rPr sz="1300">
-                <a:solidFill>
-                  <a:srgbClr val="3D5466"/>
-                </a:solidFill>
-                <a:latin typeface="Arial"/>
-              </a:rPr>
-              <a:t>▸  Realistisch erreichbar in 12 Monaten (Marktdurchdringungsrate 2–5 %): Z</a:t>
-            </a:r>
-          </a:p>
-          <a:p>
-            <a:pPr marL="177800" indent="-177800">
-              <a:spcBef>
-                <a:spcPts val="600"/>
-              </a:spcBef>
-              <a:spcAft>
-                <a:spcPts val="200"/>
-              </a:spcAft>
-            </a:pPr>
-            <a:r>
-              <a:rPr sz="1200" i="1">
-                <a:solidFill>
-                  <a:srgbClr val="3D5466"/>
-                </a:solidFill>
-                <a:latin typeface="Arial"/>
-              </a:rPr>
-              <a:t>→  Praxistipp: Unterschätzen Sie die bestehenden Daten in agree nicht. Eine saubere Branchencodierung und ein aktuelles CRM sind die Basis jeder Potenzialanalyse.</a:t>
-            </a:r>
-          </a:p>
-          <a:p>
-            <a:pPr marL="190500" indent="-190500">
-              <a:spcBef>
-                <a:spcPts val="400"/>
-              </a:spcBef>
-              <a:spcAft>
-                <a:spcPts val="200"/>
-              </a:spcAft>
-            </a:pPr>
-            <a:r>
-              <a:rPr sz="1300">
-                <a:solidFill>
-                  <a:srgbClr val="3D5466"/>
-                </a:solidFill>
-                <a:latin typeface="Arial"/>
-              </a:rPr>
-              <a:t>▸  ## 4.4 Strategische Positionierung: Stärken-Schwächen vs. Wettbewerb</a:t>
-            </a:r>
-          </a:p>
-        </p:txBody>
-      </p:sp>
-      <p:sp>
-        <p:nvSpPr>
-          <p:cNvPr id="9" name="Rectangle 8"/>
-          <p:cNvSpPr/>
-          <p:nvPr/>
-        </p:nvSpPr>
-        <p:spPr>
-          <a:xfrm>
-            <a:off x="0" y="6510528"/>
-            <a:ext cx="12188952" cy="347472"/>
-          </a:xfrm>
-          <a:prstGeom prst="rect">
-            <a:avLst/>
-          </a:prstGeom>
-          <a:solidFill>
-            <a:srgbClr val="0A1937"/>
-          </a:solidFill>
-          <a:ln>
-            <a:noFill/>
-          </a:ln>
-        </p:spPr>
-        <p:style>
-          <a:lnRef idx="1">
-            <a:schemeClr val="accent1"/>
-          </a:lnRef>
-          <a:fillRef idx="3">
-            <a:schemeClr val="accent1"/>
-          </a:fillRef>
-          <a:effectRef idx="2">
-            <a:schemeClr val="accent1"/>
-          </a:effectRef>
-          <a:fontRef idx="minor">
-            <a:schemeClr val="lt1"/>
-          </a:fontRef>
-        </p:style>
-        <p:txBody>
-          <a:bodyPr rtlCol="0" anchor="ctr"/>
-          <a:lstStyle/>
-          <a:p>
-            <a:pPr algn="ctr"/>
-          </a:p>
-        </p:txBody>
-      </p:sp>
-      <p:sp>
-        <p:nvSpPr>
-          <p:cNvPr id="10" name="TextBox 9"/>
-          <p:cNvSpPr txBox="1"/>
-          <p:nvPr/>
-        </p:nvSpPr>
-        <p:spPr>
-          <a:xfrm>
-            <a:off x="685800" y="6583680"/>
-            <a:ext cx="6490411" cy="256032"/>
-          </a:xfrm>
-          <a:prstGeom prst="rect">
-            <a:avLst/>
-          </a:prstGeom>
-          <a:noFill/>
-        </p:spPr>
-        <p:txBody>
-          <a:bodyPr wrap="none">
-            <a:spAutoFit/>
-          </a:bodyPr>
-          <a:lstStyle/>
-          <a:p>
-            <a:pPr algn="l"/>
-            <a:r>
-              <a:rPr sz="700">
-                <a:solidFill>
-                  <a:srgbClr val="A0B4D2"/>
-                </a:solidFill>
-                <a:latin typeface="Consolas"/>
-              </a:rPr>
-              <a:t>FKB Campus  ·  M15</a:t>
-            </a:r>
-          </a:p>
-        </p:txBody>
-      </p:sp>
-    </p:spTree>
-  </p:cSld>
-  <p:clrMapOvr>
-    <a:masterClrMapping/>
-  </p:clrMapOvr>
-</p:sld>
-</file>
-
-<file path=ppt/slides/slide12.xml><?xml version="1.0" encoding="utf-8"?>
-<p:sld xmlns:a="http://schemas.openxmlformats.org/drawingml/2006/main" xmlns:p="http://schemas.openxmlformats.org/presentationml/2006/main" xmlns:r="http://schemas.openxmlformats.org/officeDocument/2006/relationships">
-  <p:cSld>
-    <p:spTree>
-      <p:nvGrpSpPr>
-        <p:cNvPr id="1" name=""/>
-        <p:cNvGrpSpPr/>
-        <p:nvPr/>
-      </p:nvGrpSpPr>
-      <p:grpSpPr/>
-      <p:sp>
-        <p:nvSpPr>
-          <p:cNvPr id="2" name="Rectangle 1"/>
-          <p:cNvSpPr/>
-          <p:nvPr/>
-        </p:nvSpPr>
-        <p:spPr>
-          <a:xfrm>
-            <a:off x="0" y="0"/>
-            <a:ext cx="12188952" cy="6858000"/>
-          </a:xfrm>
-          <a:prstGeom prst="rect">
-            <a:avLst/>
-          </a:prstGeom>
-          <a:solidFill>
-            <a:srgbClr val="EDEDF3"/>
-          </a:solidFill>
-          <a:ln>
-            <a:noFill/>
-          </a:ln>
-        </p:spPr>
-        <p:style>
-          <a:lnRef idx="1">
-            <a:schemeClr val="accent1"/>
-          </a:lnRef>
-          <a:fillRef idx="3">
-            <a:schemeClr val="accent1"/>
-          </a:fillRef>
-          <a:effectRef idx="2">
-            <a:schemeClr val="accent1"/>
-          </a:effectRef>
-          <a:fontRef idx="minor">
-            <a:schemeClr val="lt1"/>
-          </a:fontRef>
-        </p:style>
-        <p:txBody>
-          <a:bodyPr rtlCol="0" anchor="ctr"/>
-          <a:lstStyle/>
-          <a:p>
-            <a:pPr algn="ctr"/>
-          </a:p>
-        </p:txBody>
-      </p:sp>
-      <p:sp>
-        <p:nvSpPr>
-          <p:cNvPr id="3" name="Rectangle 2"/>
-          <p:cNvSpPr/>
-          <p:nvPr/>
-        </p:nvSpPr>
-        <p:spPr>
-          <a:xfrm>
-            <a:off x="0" y="0"/>
-            <a:ext cx="12188952" cy="50292"/>
-          </a:xfrm>
-          <a:prstGeom prst="rect">
-            <a:avLst/>
-          </a:prstGeom>
-          <a:solidFill>
-            <a:srgbClr val="1F2C56"/>
-          </a:solidFill>
-          <a:ln>
-            <a:noFill/>
-          </a:ln>
-        </p:spPr>
-        <p:style>
-          <a:lnRef idx="1">
-            <a:schemeClr val="accent1"/>
-          </a:lnRef>
-          <a:fillRef idx="3">
-            <a:schemeClr val="accent1"/>
-          </a:fillRef>
-          <a:effectRef idx="2">
-            <a:schemeClr val="accent1"/>
-          </a:effectRef>
-          <a:fontRef idx="minor">
-            <a:schemeClr val="lt1"/>
-          </a:fontRef>
-        </p:style>
-        <p:txBody>
-          <a:bodyPr rtlCol="0" anchor="ctr"/>
-          <a:lstStyle/>
-          <a:p>
-            <a:pPr algn="ctr"/>
-          </a:p>
-        </p:txBody>
-      </p:sp>
-      <p:sp>
-        <p:nvSpPr>
-          <p:cNvPr id="4" name="TextBox 3"/>
-          <p:cNvSpPr txBox="1"/>
-          <p:nvPr/>
-        </p:nvSpPr>
-        <p:spPr>
-          <a:xfrm>
-            <a:off x="685800" y="109728"/>
-            <a:ext cx="10817352" cy="228600"/>
-          </a:xfrm>
-          <a:prstGeom prst="rect">
-            <a:avLst/>
-          </a:prstGeom>
-          <a:noFill/>
-        </p:spPr>
-        <p:txBody>
-          <a:bodyPr wrap="none">
-            <a:spAutoFit/>
-          </a:bodyPr>
-          <a:lstStyle/>
-          <a:p>
-            <a:pPr algn="l"/>
-            <a:r>
-              <a:rPr sz="750">
-                <a:solidFill>
-                  <a:srgbClr val="78808C"/>
-                </a:solidFill>
-                <a:latin typeface="Consolas"/>
-              </a:rPr>
-              <a:t>M15  ·  INHALT</a:t>
-            </a:r>
-          </a:p>
-        </p:txBody>
-      </p:sp>
-      <p:sp>
-        <p:nvSpPr>
-          <p:cNvPr id="5" name="Rectangle 4"/>
-          <p:cNvSpPr/>
-          <p:nvPr/>
-        </p:nvSpPr>
-        <p:spPr>
-          <a:xfrm>
-            <a:off x="0" y="1234440"/>
-            <a:ext cx="12188952" cy="12700"/>
-          </a:xfrm>
-          <a:prstGeom prst="rect">
-            <a:avLst/>
-          </a:prstGeom>
-          <a:solidFill>
-            <a:srgbClr val="D8DFE4"/>
-          </a:solidFill>
-          <a:ln>
-            <a:noFill/>
-          </a:ln>
-        </p:spPr>
-        <p:style>
-          <a:lnRef idx="1">
-            <a:schemeClr val="accent1"/>
-          </a:lnRef>
-          <a:fillRef idx="3">
-            <a:schemeClr val="accent1"/>
-          </a:fillRef>
-          <a:effectRef idx="2">
-            <a:schemeClr val="accent1"/>
-          </a:effectRef>
-          <a:fontRef idx="minor">
-            <a:schemeClr val="lt1"/>
-          </a:fontRef>
-        </p:style>
-        <p:txBody>
-          <a:bodyPr rtlCol="0" anchor="ctr"/>
-          <a:lstStyle/>
-          <a:p>
-            <a:pPr algn="ctr"/>
-          </a:p>
-        </p:txBody>
-      </p:sp>
-      <p:sp>
-        <p:nvSpPr>
-          <p:cNvPr id="6" name="Rectangle 5"/>
-          <p:cNvSpPr/>
-          <p:nvPr/>
-        </p:nvSpPr>
-        <p:spPr>
-          <a:xfrm>
-            <a:off x="685800" y="502920"/>
-            <a:ext cx="36576" cy="658368"/>
-          </a:xfrm>
-          <a:prstGeom prst="rect">
-            <a:avLst/>
-          </a:prstGeom>
-          <a:solidFill>
-            <a:srgbClr val="D9C089"/>
-          </a:solidFill>
-          <a:ln>
-            <a:noFill/>
-          </a:ln>
-        </p:spPr>
-        <p:style>
-          <a:lnRef idx="1">
-            <a:schemeClr val="accent1"/>
-          </a:lnRef>
-          <a:fillRef idx="3">
-            <a:schemeClr val="accent1"/>
-          </a:fillRef>
-          <a:effectRef idx="2">
-            <a:schemeClr val="accent1"/>
-          </a:effectRef>
-          <a:fontRef idx="minor">
-            <a:schemeClr val="lt1"/>
-          </a:fontRef>
-        </p:style>
-        <p:txBody>
-          <a:bodyPr rtlCol="0" anchor="ctr"/>
-          <a:lstStyle/>
-          <a:p>
-            <a:pPr algn="ctr"/>
-          </a:p>
-        </p:txBody>
-      </p:sp>
-      <p:sp>
-        <p:nvSpPr>
-          <p:cNvPr id="7" name="TextBox 6"/>
-          <p:cNvSpPr txBox="1"/>
-          <p:nvPr/>
-        </p:nvSpPr>
-        <p:spPr>
-          <a:xfrm>
-            <a:off x="813816" y="502920"/>
-            <a:ext cx="10634472" cy="685800"/>
-          </a:xfrm>
-          <a:prstGeom prst="rect">
-            <a:avLst/>
-          </a:prstGeom>
-          <a:noFill/>
-        </p:spPr>
-        <p:txBody>
-          <a:bodyPr wrap="square">
-            <a:spAutoFit/>
-          </a:bodyPr>
-          <a:lstStyle/>
-          <a:p>
-            <a:pPr algn="l"/>
-            <a:r>
-              <a:rPr sz="2400" b="1" i="0">
-                <a:solidFill>
-                  <a:srgbClr val="1F2C56"/>
-                </a:solidFill>
-                <a:latin typeface="Arial"/>
-              </a:rPr>
-              <a:t>Wertversprechen formulieren</a:t>
-            </a:r>
-          </a:p>
-        </p:txBody>
-      </p:sp>
-      <p:sp>
-        <p:nvSpPr>
-          <p:cNvPr id="8" name="TextBox 7"/>
-          <p:cNvSpPr txBox="1"/>
-          <p:nvPr/>
-        </p:nvSpPr>
-        <p:spPr>
-          <a:xfrm>
-            <a:off x="685800" y="1417320"/>
-            <a:ext cx="10817352" cy="4892040"/>
-          </a:xfrm>
-          <a:prstGeom prst="rect">
-            <a:avLst/>
-          </a:prstGeom>
-          <a:noFill/>
-        </p:spPr>
-        <p:txBody>
-          <a:bodyPr wrap="square">
-            <a:spAutoFit/>
-          </a:bodyPr>
-          <a:lstStyle/>
-          <a:p>
-            <a:pPr marL="190500" indent="-190500">
-              <a:spcBef>
-                <a:spcPts val="400"/>
-              </a:spcBef>
-              <a:spcAft>
-                <a:spcPts val="200"/>
-              </a:spcAft>
-            </a:pPr>
-            <a:r>
-              <a:rPr sz="1300">
-                <a:solidFill>
-                  <a:srgbClr val="3D5466"/>
-                </a:solidFill>
-                <a:latin typeface="Arial"/>
-              </a:rPr>
-              <a:t>▸  Das Wertversprechen (Value Proposition) beantwortet: Warum sollte ein Unternehmen aus meinem Zielsegment zu uns wechseln – oder bleiben?</a:t>
-            </a:r>
-          </a:p>
-          <a:p>
-            <a:pPr marL="190500" indent="-190500">
-              <a:spcBef>
-                <a:spcPts val="400"/>
-              </a:spcBef>
-              <a:spcAft>
-                <a:spcPts val="200"/>
-              </a:spcAft>
-            </a:pPr>
-            <a:r>
-              <a:rPr sz="1300">
-                <a:solidFill>
-                  <a:srgbClr val="3D5466"/>
-                </a:solidFill>
-                <a:latin typeface="Arial"/>
-              </a:rPr>
-              <a:t>▸  Ein wirksames Wertversprechen im Firmenkundengeschäft ist:</a:t>
-            </a:r>
-          </a:p>
-          <a:p>
-            <a:pPr marL="190500" indent="-190500">
-              <a:spcBef>
-                <a:spcPts val="400"/>
-              </a:spcBef>
-              <a:spcAft>
-                <a:spcPts val="200"/>
-              </a:spcAft>
-            </a:pPr>
-            <a:r>
-              <a:rPr sz="1300">
-                <a:solidFill>
-                  <a:srgbClr val="3D5466"/>
-                </a:solidFill>
-                <a:latin typeface="Arial"/>
-              </a:rPr>
-              <a:t>▸  Spezifisch (nicht „wir sind die beste Bank"): „Für Handwerksbetriebe in der Region sind wir der Partner, der Finanzierungsentscheidungen in 48 Stunden trifft."</a:t>
-            </a:r>
-          </a:p>
-          <a:p>
-            <a:pPr marL="190500" indent="-190500">
-              <a:spcBef>
-                <a:spcPts val="400"/>
-              </a:spcBef>
-              <a:spcAft>
-                <a:spcPts val="200"/>
-              </a:spcAft>
-            </a:pPr>
-            <a:r>
-              <a:rPr sz="1300">
-                <a:solidFill>
-                  <a:srgbClr val="3D5466"/>
-                </a:solidFill>
-                <a:latin typeface="Arial"/>
-              </a:rPr>
-              <a:t>▸  Belegbar: Konkrete Referenzen, Bearbeitungszeiten, Verbundpartner-Einbindung</a:t>
-            </a:r>
-          </a:p>
-          <a:p>
-            <a:pPr marL="190500" indent="-190500">
-              <a:spcBef>
-                <a:spcPts val="400"/>
-              </a:spcBef>
-              <a:spcAft>
-                <a:spcPts val="200"/>
-              </a:spcAft>
-            </a:pPr>
-            <a:r>
-              <a:rPr sz="1300">
-                <a:solidFill>
-                  <a:srgbClr val="3D5466"/>
-                </a:solidFill>
-                <a:latin typeface="Arial"/>
-              </a:rPr>
-              <a:t>▸  Differenzierend: Was kann ich, was die Sparkasse oder Commerzbank nicht kann?</a:t>
-            </a:r>
-          </a:p>
-          <a:p>
-            <a:pPr marL="190500" indent="-190500">
-              <a:spcBef>
-                <a:spcPts val="400"/>
-              </a:spcBef>
-              <a:spcAft>
-                <a:spcPts val="200"/>
-              </a:spcAft>
-            </a:pPr>
-            <a:r>
-              <a:rPr sz="1300">
-                <a:solidFill>
-                  <a:srgbClr val="3D5466"/>
-                </a:solidFill>
-                <a:latin typeface="Arial"/>
-              </a:rPr>
-              <a:t>▸  ## 4.5 Neukundenansprache: Kanäle und Maßnahmen</a:t>
-            </a:r>
-          </a:p>
-        </p:txBody>
-      </p:sp>
-      <p:sp>
-        <p:nvSpPr>
-          <p:cNvPr id="9" name="Rectangle 8"/>
-          <p:cNvSpPr/>
-          <p:nvPr/>
-        </p:nvSpPr>
-        <p:spPr>
-          <a:xfrm>
-            <a:off x="0" y="6510528"/>
-            <a:ext cx="12188952" cy="347472"/>
-          </a:xfrm>
-          <a:prstGeom prst="rect">
-            <a:avLst/>
-          </a:prstGeom>
-          <a:solidFill>
-            <a:srgbClr val="0A1937"/>
-          </a:solidFill>
-          <a:ln>
-            <a:noFill/>
-          </a:ln>
-        </p:spPr>
-        <p:style>
-          <a:lnRef idx="1">
-            <a:schemeClr val="accent1"/>
-          </a:lnRef>
-          <a:fillRef idx="3">
-            <a:schemeClr val="accent1"/>
-          </a:fillRef>
-          <a:effectRef idx="2">
-            <a:schemeClr val="accent1"/>
-          </a:effectRef>
-          <a:fontRef idx="minor">
-            <a:schemeClr val="lt1"/>
-          </a:fontRef>
-        </p:style>
-        <p:txBody>
-          <a:bodyPr rtlCol="0" anchor="ctr"/>
-          <a:lstStyle/>
-          <a:p>
-            <a:pPr algn="ctr"/>
-          </a:p>
-        </p:txBody>
-      </p:sp>
-      <p:sp>
-        <p:nvSpPr>
-          <p:cNvPr id="10" name="TextBox 9"/>
-          <p:cNvSpPr txBox="1"/>
-          <p:nvPr/>
-        </p:nvSpPr>
-        <p:spPr>
-          <a:xfrm>
-            <a:off x="685800" y="6583680"/>
-            <a:ext cx="6490411" cy="256032"/>
-          </a:xfrm>
-          <a:prstGeom prst="rect">
-            <a:avLst/>
-          </a:prstGeom>
-          <a:noFill/>
-        </p:spPr>
-        <p:txBody>
-          <a:bodyPr wrap="none">
-            <a:spAutoFit/>
-          </a:bodyPr>
-          <a:lstStyle/>
-          <a:p>
-            <a:pPr algn="l"/>
-            <a:r>
-              <a:rPr sz="700">
-                <a:solidFill>
-                  <a:srgbClr val="A0B4D2"/>
-                </a:solidFill>
-                <a:latin typeface="Consolas"/>
-              </a:rPr>
-              <a:t>FKB Campus  ·  M15</a:t>
             </a:r>
           </a:p>
         </p:txBody>
@@ -6563,7 +6299,7 @@
                 </a:solidFill>
                 <a:latin typeface="Consolas"/>
               </a:rPr>
-              <a:t>M15  ·  INHALT</a:t>
+              <a:t>M15  ·  ARBEITSBLATT</a:t>
             </a:r>
           </a:p>
         </p:txBody>
@@ -6684,7 +6420,7 @@
                 </a:solidFill>
                 <a:latin typeface="Arial"/>
               </a:rPr>
-              <a:t>Empfehlungsmanagement systematisieren</a:t>
+              <a:t>Marktanalyse bearbeiten</a:t>
             </a:r>
           </a:p>
         </p:txBody>
@@ -6697,8 +6433,8 @@
         </p:nvSpPr>
         <p:spPr>
           <a:xfrm>
-            <a:off x="685800" y="1417320"/>
-            <a:ext cx="10817352" cy="4892040"/>
+            <a:off x="685800" y="1554480"/>
+            <a:ext cx="10817352" cy="3840480"/>
           </a:xfrm>
           <a:prstGeom prst="rect">
             <a:avLst/>
@@ -6720,13 +6456,13 @@
               </a:spcAft>
             </a:pPr>
             <a:r>
-              <a:rPr sz="1300">
+              <a:rPr sz="1400">
                 <a:solidFill>
                   <a:srgbClr val="3D5466"/>
                 </a:solidFill>
                 <a:latin typeface="Arial"/>
               </a:rPr>
-              <a:t>▸  Empfehlungen entstehen nicht zufällig. Ein aktives Empfehlungsmanagement umfasst:</a:t>
+              <a:t>▸  Analysieren Sie Ihr Zielsegment nach Branche, Region und Größe (AB-1).</a:t>
             </a:r>
           </a:p>
           <a:p>
@@ -6739,13 +6475,13 @@
               </a:spcAft>
             </a:pPr>
             <a:r>
-              <a:rPr sz="1300">
+              <a:rPr sz="1400">
                 <a:solidFill>
                   <a:srgbClr val="3D5466"/>
                 </a:solidFill>
                 <a:latin typeface="Arial"/>
               </a:rPr>
-              <a:t>▸  Identifizieren: Welche meiner Bestandskunden sind Meinungsführer in ihrem Branchenumfeld?</a:t>
+              <a:t>▸  Priorisieren Sie mit dem Scoring-Modell und definieren Sie Ihr Primärsegment.</a:t>
             </a:r>
           </a:p>
           <a:p>
@@ -6758,191 +6494,98 @@
               </a:spcAft>
             </a:pPr>
             <a:r>
-              <a:rPr sz="1300">
+              <a:rPr sz="1400">
                 <a:solidFill>
                   <a:srgbClr val="3D5466"/>
                 </a:solidFill>
                 <a:latin typeface="Arial"/>
               </a:rPr>
-              <a:t>▸  Beziehung vertiefen: Diese Kunden erhalten besondere Aufmerksamkeit – nicht wegen der Empfehlung, sondern wegen ihres Werts.</a:t>
-            </a:r>
-          </a:p>
-          <a:p>
-            <a:pPr marL="190500" indent="-190500">
-              <a:spcBef>
-                <a:spcPts val="400"/>
-              </a:spcBef>
-              <a:spcAft>
-                <a:spcPts val="200"/>
-              </a:spcAft>
-            </a:pPr>
-            <a:r>
-              <a:rPr sz="1300">
-                <a:solidFill>
-                  <a:srgbClr val="3D5466"/>
+              <a:t>▸  Schätzen Sie den adressierbaren Markt und das Ertragspotenzial.</a:t>
+            </a:r>
+          </a:p>
+        </p:txBody>
+      </p:sp>
+      <p:sp>
+        <p:nvSpPr>
+          <p:cNvPr id="9" name="Rectangle 8"/>
+          <p:cNvSpPr/>
+          <p:nvPr/>
+        </p:nvSpPr>
+        <p:spPr>
+          <a:xfrm>
+            <a:off x="685800" y="5486400"/>
+            <a:ext cx="10817352" cy="640080"/>
+          </a:xfrm>
+          <a:prstGeom prst="rect">
+            <a:avLst/>
+          </a:prstGeom>
+          <a:solidFill>
+            <a:srgbClr val="1F2C56"/>
+          </a:solidFill>
+          <a:ln>
+            <a:noFill/>
+          </a:ln>
+        </p:spPr>
+        <p:style>
+          <a:lnRef idx="1">
+            <a:schemeClr val="accent1"/>
+          </a:lnRef>
+          <a:fillRef idx="3">
+            <a:schemeClr val="accent1"/>
+          </a:fillRef>
+          <a:effectRef idx="2">
+            <a:schemeClr val="accent1"/>
+          </a:effectRef>
+          <a:fontRef idx="minor">
+            <a:schemeClr val="lt1"/>
+          </a:fontRef>
+        </p:style>
+        <p:txBody>
+          <a:bodyPr rtlCol="0" anchor="ctr"/>
+          <a:lstStyle/>
+          <a:p>
+            <a:pPr algn="ctr"/>
+          </a:p>
+        </p:txBody>
+      </p:sp>
+      <p:sp>
+        <p:nvSpPr>
+          <p:cNvPr id="10" name="TextBox 9"/>
+          <p:cNvSpPr txBox="1"/>
+          <p:nvPr/>
+        </p:nvSpPr>
+        <p:spPr>
+          <a:xfrm>
+            <a:off x="868680" y="5596128"/>
+            <a:ext cx="10451592" cy="457200"/>
+          </a:xfrm>
+          <a:prstGeom prst="rect">
+            <a:avLst/>
+          </a:prstGeom>
+          <a:noFill/>
+        </p:spPr>
+        <p:txBody>
+          <a:bodyPr wrap="square">
+            <a:spAutoFit/>
+          </a:bodyPr>
+          <a:lstStyle/>
+          <a:p>
+            <a:pPr algn="l"/>
+            <a:r>
+              <a:rPr sz="1300" b="1" i="0">
+                <a:solidFill>
+                  <a:srgbClr val="FFFFFF"/>
                 </a:solidFill>
                 <a:latin typeface="Arial"/>
               </a:rPr>
-              <a:t>▸  Aktiv bitten: Am Ende eines erfolgreichen Gesprächs: „Gibt es Unternehmen in Ihrem Umfeld, die unsere Zusammenarbeit kennenlernen sollten?"</a:t>
-            </a:r>
-          </a:p>
-          <a:p>
-            <a:pPr marL="190500" indent="-190500">
-              <a:spcBef>
-                <a:spcPts val="400"/>
-              </a:spcBef>
-              <a:spcAft>
-                <a:spcPts val="200"/>
-              </a:spcAft>
-            </a:pPr>
-            <a:r>
-              <a:rPr sz="1300">
-                <a:solidFill>
-                  <a:srgbClr val="3D5466"/>
-                </a:solidFill>
-                <a:latin typeface="Arial"/>
-              </a:rPr>
-              <a:t>▸  Danken und schließen: Rückmeldung geben, ob der Kontakt erfolgreich war.</a:t>
-            </a:r>
-          </a:p>
-          <a:p>
-            <a:pPr marL="190500" indent="-190500">
-              <a:spcBef>
-                <a:spcPts val="400"/>
-              </a:spcBef>
-              <a:spcAft>
-                <a:spcPts val="200"/>
-              </a:spcAft>
-            </a:pPr>
-            <a:r>
-              <a:rPr sz="1300">
-                <a:solidFill>
-                  <a:srgbClr val="3D5466"/>
-                </a:solidFill>
-                <a:latin typeface="Arial"/>
-              </a:rPr>
-              <a:t>▸  ## 4.6 Praxiscase: Thomas Gruber entwickelt seine Strategie für den Agrar-Markt</a:t>
-            </a:r>
-          </a:p>
-          <a:p>
-            <a:pPr marL="190500" indent="-190500">
-              <a:spcBef>
-                <a:spcPts val="400"/>
-              </a:spcBef>
-              <a:spcAft>
-                <a:spcPts val="200"/>
-              </a:spcAft>
-            </a:pPr>
-            <a:r>
-              <a:rPr sz="1300">
-                <a:solidFill>
-                  <a:srgbClr val="3D5466"/>
-                </a:solidFill>
-                <a:latin typeface="Arial"/>
-              </a:rPr>
-              <a:t>▸  Ausgangssituation</a:t>
-            </a:r>
-          </a:p>
-          <a:p>
-            <a:pPr marL="190500" indent="-190500">
-              <a:spcBef>
-                <a:spcPts val="400"/>
-              </a:spcBef>
-              <a:spcAft>
-                <a:spcPts val="200"/>
-              </a:spcAft>
-            </a:pPr>
-            <a:r>
-              <a:rPr sz="1300">
-                <a:solidFill>
-                  <a:srgbClr val="3D5466"/>
-                </a:solidFill>
-                <a:latin typeface="Arial"/>
-              </a:rPr>
-              <a:t>▸  Thomas entwickelt seine Marktbearbeitungsstrategie</a:t>
-            </a:r>
-          </a:p>
-          <a:p>
-            <a:pPr marL="190500" indent="-190500">
-              <a:spcBef>
-                <a:spcPts val="400"/>
-              </a:spcBef>
-              <a:spcAft>
-                <a:spcPts val="200"/>
-              </a:spcAft>
-            </a:pPr>
-            <a:r>
-              <a:rPr sz="1300">
-                <a:solidFill>
-                  <a:srgbClr val="3D5466"/>
-                </a:solidFill>
-                <a:latin typeface="Arial"/>
-              </a:rPr>
-              <a:t>▸  Schritt 1: Segmentpriorisierung</a:t>
-            </a:r>
-          </a:p>
-          <a:p>
-            <a:pPr marL="190500" indent="-190500">
-              <a:spcBef>
-                <a:spcPts val="400"/>
-              </a:spcBef>
-              <a:spcAft>
-                <a:spcPts val="200"/>
-              </a:spcAft>
-            </a:pPr>
-            <a:r>
-              <a:rPr sz="1300">
-                <a:solidFill>
-                  <a:srgbClr val="3D5466"/>
-                </a:solidFill>
-                <a:latin typeface="Arial"/>
-              </a:rPr>
-              <a:t>▸  Schritt 2: Marktpotenzial</a:t>
-            </a:r>
-          </a:p>
-          <a:p>
-            <a:pPr marL="190500" indent="-190500">
-              <a:spcBef>
-                <a:spcPts val="400"/>
-              </a:spcBef>
-              <a:spcAft>
-                <a:spcPts val="200"/>
-              </a:spcAft>
-            </a:pPr>
-            <a:r>
-              <a:rPr sz="1300">
-                <a:solidFill>
-                  <a:srgbClr val="3D5466"/>
-                </a:solidFill>
-                <a:latin typeface="Arial"/>
-              </a:rPr>
-              <a:t>▸  Schritt 3: Wertversprechen</a:t>
-            </a:r>
-          </a:p>
-          <a:p>
-            <a:pPr marL="190500" indent="-190500">
-              <a:spcBef>
-                <a:spcPts val="400"/>
-              </a:spcBef>
-              <a:spcAft>
-                <a:spcPts val="200"/>
-              </a:spcAft>
-            </a:pPr>
-            <a:r>
-              <a:rPr sz="1300">
-                <a:solidFill>
-                  <a:srgbClr val="3D5466"/>
-                </a:solidFill>
-                <a:latin typeface="Arial"/>
-              </a:rPr>
-              <a:t>▸  „Für landwirtschaftliche Betriebe in [Region] sind wir der Agrar-Spezialist der VR-Bank: schnelle Investitionsfinanzierungen, GAP-Expertise und ein Netzwerk in die wichtigsten Branchenverbände."</a:t>
-            </a:r>
-          </a:p>
-        </p:txBody>
-      </p:sp>
-      <p:sp>
-        <p:nvSpPr>
-          <p:cNvPr id="9" name="Rectangle 8"/>
+              <a:t>→  Bearbeitung im Teilnehmer-Workbook (Arbeitsblatt mit Ausfüllfeldern)</a:t>
+            </a:r>
+          </a:p>
+        </p:txBody>
+      </p:sp>
+      <p:sp>
+        <p:nvSpPr>
+          <p:cNvPr id="11" name="Rectangle 10"/>
           <p:cNvSpPr/>
           <p:nvPr/>
         </p:nvSpPr>
@@ -6985,7 +6628,7 @@
       </p:sp>
       <p:sp>
         <p:nvSpPr>
-          <p:cNvPr id="10" name="TextBox 9"/>
+          <p:cNvPr id="12" name="TextBox 11"/>
           <p:cNvSpPr txBox="1"/>
           <p:nvPr/>
         </p:nvSpPr>
@@ -7051,7 +6694,7 @@
             <a:avLst/>
           </a:prstGeom>
           <a:solidFill>
-            <a:srgbClr val="EDEDF3"/>
+            <a:srgbClr val="1F2C56"/>
           </a:solidFill>
           <a:ln>
             <a:noFill/>
@@ -7081,57 +6724,14 @@
       </p:sp>
       <p:sp>
         <p:nvSpPr>
-          <p:cNvPr id="3" name="Rectangle 2"/>
-          <p:cNvSpPr/>
-          <p:nvPr/>
-        </p:nvSpPr>
-        <p:spPr>
-          <a:xfrm>
-            <a:off x="0" y="0"/>
-            <a:ext cx="12188952" cy="50292"/>
-          </a:xfrm>
-          <a:prstGeom prst="rect">
-            <a:avLst/>
-          </a:prstGeom>
-          <a:solidFill>
-            <a:srgbClr val="1F2C56"/>
-          </a:solidFill>
-          <a:ln>
-            <a:noFill/>
-          </a:ln>
-        </p:spPr>
-        <p:style>
-          <a:lnRef idx="1">
-            <a:schemeClr val="accent1"/>
-          </a:lnRef>
-          <a:fillRef idx="3">
-            <a:schemeClr val="accent1"/>
-          </a:fillRef>
-          <a:effectRef idx="2">
-            <a:schemeClr val="accent1"/>
-          </a:effectRef>
-          <a:fontRef idx="minor">
-            <a:schemeClr val="lt1"/>
-          </a:fontRef>
-        </p:style>
-        <p:txBody>
-          <a:bodyPr rtlCol="0" anchor="ctr"/>
-          <a:lstStyle/>
-          <a:p>
-            <a:pPr algn="ctr"/>
-          </a:p>
-        </p:txBody>
-      </p:sp>
-      <p:sp>
-        <p:nvSpPr>
-          <p:cNvPr id="4" name="TextBox 3"/>
+          <p:cNvPr id="3" name="TextBox 2"/>
           <p:cNvSpPr txBox="1"/>
           <p:nvPr/>
         </p:nvSpPr>
         <p:spPr>
           <a:xfrm>
-            <a:off x="685800" y="109728"/>
-            <a:ext cx="10817352" cy="228600"/>
+            <a:off x="685800" y="2377440"/>
+            <a:ext cx="10817352" cy="365760"/>
           </a:xfrm>
           <a:prstGeom prst="rect">
             <a:avLst/>
@@ -7146,70 +6746,27 @@
           <a:p>
             <a:pPr algn="l"/>
             <a:r>
-              <a:rPr sz="750">
-                <a:solidFill>
-                  <a:srgbClr val="78808C"/>
+              <a:rPr sz="1200">
+                <a:solidFill>
+                  <a:srgbClr val="D9C089"/>
                 </a:solidFill>
                 <a:latin typeface="Consolas"/>
               </a:rPr>
-              <a:t>M15  ·  INHALT</a:t>
-            </a:r>
-          </a:p>
-        </p:txBody>
-      </p:sp>
-      <p:sp>
-        <p:nvSpPr>
-          <p:cNvPr id="5" name="Rectangle 4"/>
+              <a:t>13:10–14:45</a:t>
+            </a:r>
+          </a:p>
+        </p:txBody>
+      </p:sp>
+      <p:sp>
+        <p:nvSpPr>
+          <p:cNvPr id="4" name="Rectangle 3"/>
           <p:cNvSpPr/>
           <p:nvPr/>
         </p:nvSpPr>
         <p:spPr>
           <a:xfrm>
-            <a:off x="0" y="1234440"/>
-            <a:ext cx="12188952" cy="12700"/>
-          </a:xfrm>
-          <a:prstGeom prst="rect">
-            <a:avLst/>
-          </a:prstGeom>
-          <a:solidFill>
-            <a:srgbClr val="D8DFE4"/>
-          </a:solidFill>
-          <a:ln>
-            <a:noFill/>
-          </a:ln>
-        </p:spPr>
-        <p:style>
-          <a:lnRef idx="1">
-            <a:schemeClr val="accent1"/>
-          </a:lnRef>
-          <a:fillRef idx="3">
-            <a:schemeClr val="accent1"/>
-          </a:fillRef>
-          <a:effectRef idx="2">
-            <a:schemeClr val="accent1"/>
-          </a:effectRef>
-          <a:fontRef idx="minor">
-            <a:schemeClr val="lt1"/>
-          </a:fontRef>
-        </p:style>
-        <p:txBody>
-          <a:bodyPr rtlCol="0" anchor="ctr"/>
-          <a:lstStyle/>
-          <a:p>
-            <a:pPr algn="ctr"/>
-          </a:p>
-        </p:txBody>
-      </p:sp>
-      <p:sp>
-        <p:nvSpPr>
-          <p:cNvPr id="6" name="Rectangle 5"/>
-          <p:cNvSpPr/>
-          <p:nvPr/>
-        </p:nvSpPr>
-        <p:spPr>
-          <a:xfrm>
-            <a:off x="685800" y="502920"/>
-            <a:ext cx="36576" cy="658368"/>
+            <a:off x="685800" y="2788920"/>
+            <a:ext cx="548640" cy="38100"/>
           </a:xfrm>
           <a:prstGeom prst="rect">
             <a:avLst/>
@@ -7245,14 +6802,14 @@
       </p:sp>
       <p:sp>
         <p:nvSpPr>
-          <p:cNvPr id="7" name="TextBox 6"/>
+          <p:cNvPr id="5" name="TextBox 4"/>
           <p:cNvSpPr txBox="1"/>
           <p:nvPr/>
         </p:nvSpPr>
         <p:spPr>
           <a:xfrm>
-            <a:off x="813816" y="502920"/>
-            <a:ext cx="10634472" cy="685800"/>
+            <a:off x="685800" y="3017520"/>
+            <a:ext cx="10817352" cy="1463040"/>
           </a:xfrm>
           <a:prstGeom prst="rect">
             <a:avLst/>
@@ -7267,27 +6824,27 @@
           <a:p>
             <a:pPr algn="l"/>
             <a:r>
-              <a:rPr sz="2400" b="1" i="0">
-                <a:solidFill>
-                  <a:srgbClr val="1F2C56"/>
+              <a:rPr sz="4000" b="1" i="0">
+                <a:solidFill>
+                  <a:srgbClr val="FFFFFF"/>
                 </a:solidFill>
                 <a:latin typeface="Arial"/>
               </a:rPr>
-              <a:t>AB-1: Segmentpriorisierung – Scoring</a:t>
-            </a:r>
-          </a:p>
-        </p:txBody>
-      </p:sp>
-      <p:sp>
-        <p:nvSpPr>
-          <p:cNvPr id="8" name="TextBox 7"/>
+              <a:t>Theorie-Block II &amp; Strategie</a:t>
+            </a:r>
+          </a:p>
+        </p:txBody>
+      </p:sp>
+      <p:sp>
+        <p:nvSpPr>
+          <p:cNvPr id="6" name="TextBox 5"/>
           <p:cNvSpPr txBox="1"/>
           <p:nvPr/>
         </p:nvSpPr>
         <p:spPr>
           <a:xfrm>
-            <a:off x="685800" y="1417320"/>
-            <a:ext cx="10817352" cy="4892040"/>
+            <a:off x="685800" y="4480560"/>
+            <a:ext cx="8653881" cy="1280160"/>
           </a:xfrm>
           <a:prstGeom prst="rect">
             <a:avLst/>
@@ -7295,84 +6852,34 @@
           <a:noFill/>
         </p:spPr>
         <p:txBody>
-          <a:bodyPr wrap="square" anchor="ctr">
+          <a:bodyPr wrap="square">
             <a:spAutoFit/>
           </a:bodyPr>
           <a:lstStyle/>
           <a:p>
-            <a:pPr marL="190500" indent="-190500">
-              <a:spcBef>
-                <a:spcPts val="400"/>
-              </a:spcBef>
-              <a:spcAft>
-                <a:spcPts val="200"/>
-              </a:spcAft>
-            </a:pPr>
-            <a:r>
-              <a:rPr sz="1300">
-                <a:solidFill>
-                  <a:srgbClr val="3D5466"/>
+            <a:pPr algn="l"/>
+            <a:r>
+              <a:rPr sz="1600" b="0" i="0">
+                <a:solidFill>
+                  <a:srgbClr val="C8D2E6"/>
                 </a:solidFill>
                 <a:latin typeface="Arial"/>
               </a:rPr>
-              <a:t>▸  Meine drei Kandidatensegmente:</a:t>
-            </a:r>
-          </a:p>
-        </p:txBody>
-      </p:sp>
-      <p:sp>
-        <p:nvSpPr>
-          <p:cNvPr id="9" name="Rectangle 8"/>
-          <p:cNvSpPr/>
-          <p:nvPr/>
-        </p:nvSpPr>
-        <p:spPr>
-          <a:xfrm>
-            <a:off x="0" y="6510528"/>
-            <a:ext cx="12188952" cy="347472"/>
-          </a:xfrm>
-          <a:prstGeom prst="rect">
-            <a:avLst/>
-          </a:prstGeom>
-          <a:solidFill>
-            <a:srgbClr val="0A1937"/>
-          </a:solidFill>
-          <a:ln>
-            <a:noFill/>
-          </a:ln>
-        </p:spPr>
-        <p:style>
-          <a:lnRef idx="1">
-            <a:schemeClr val="accent1"/>
-          </a:lnRef>
-          <a:fillRef idx="3">
-            <a:schemeClr val="accent1"/>
-          </a:fillRef>
-          <a:effectRef idx="2">
-            <a:schemeClr val="accent1"/>
-          </a:effectRef>
-          <a:fontRef idx="minor">
-            <a:schemeClr val="lt1"/>
-          </a:fontRef>
-        </p:style>
-        <p:txBody>
-          <a:bodyPr rtlCol="0" anchor="ctr"/>
-          <a:lstStyle/>
-          <a:p>
-            <a:pPr algn="ctr"/>
-          </a:p>
-        </p:txBody>
-      </p:sp>
-      <p:sp>
-        <p:nvSpPr>
-          <p:cNvPr id="10" name="TextBox 9"/>
+              <a:t>Strategische Optionen kennen und das eigene Wertversprechen formulieren.</a:t>
+            </a:r>
+          </a:p>
+        </p:txBody>
+      </p:sp>
+      <p:sp>
+        <p:nvSpPr>
+          <p:cNvPr id="7" name="TextBox 6"/>
           <p:cNvSpPr txBox="1"/>
           <p:nvPr/>
         </p:nvSpPr>
         <p:spPr>
           <a:xfrm>
-            <a:off x="685800" y="6583680"/>
-            <a:ext cx="6490411" cy="256032"/>
+            <a:off x="685800" y="6355080"/>
+            <a:ext cx="10817352" cy="274320"/>
           </a:xfrm>
           <a:prstGeom prst="rect">
             <a:avLst/>
@@ -7389,7 +6896,7 @@
             <a:r>
               <a:rPr sz="700">
                 <a:solidFill>
-                  <a:srgbClr val="A0B4D2"/>
+                  <a:srgbClr val="8CA0C3"/>
                 </a:solidFill>
                 <a:latin typeface="Consolas"/>
               </a:rPr>
@@ -7431,7 +6938,7 @@
             <a:avLst/>
           </a:prstGeom>
           <a:solidFill>
-            <a:srgbClr val="FFFFFF"/>
+            <a:srgbClr val="EDEDF3"/>
           </a:solidFill>
           <a:ln>
             <a:noFill/>
@@ -7532,43 +7039,51 @@
                 </a:solidFill>
                 <a:latin typeface="Consolas"/>
               </a:rPr>
-              <a:t>M15  ·  ÜBERSICHT</a:t>
-            </a:r>
-          </a:p>
-        </p:txBody>
-      </p:sp>
-      <p:sp>
-        <p:nvSpPr>
-          <p:cNvPr id="5" name="TextBox 4"/>
-          <p:cNvSpPr txBox="1"/>
-          <p:nvPr/>
-        </p:nvSpPr>
-        <p:spPr>
-          <a:xfrm>
-            <a:off x="685800" y="502920"/>
-            <a:ext cx="10817352" cy="594360"/>
-          </a:xfrm>
-          <a:prstGeom prst="rect">
-            <a:avLst/>
-          </a:prstGeom>
-          <a:noFill/>
-        </p:spPr>
-        <p:txBody>
-          <a:bodyPr wrap="square">
-            <a:spAutoFit/>
-          </a:bodyPr>
-          <a:lstStyle/>
-          <a:p>
-            <a:pPr algn="l"/>
-            <a:r>
-              <a:rPr sz="2000" b="1" i="0">
-                <a:solidFill>
-                  <a:srgbClr val="1F2C56"/>
-                </a:solidFill>
-                <a:latin typeface="Arial"/>
-              </a:rPr>
-              <a:t>AB-1: Segmentpriorisierung – Scoring</a:t>
-            </a:r>
+              <a:t>M15  ·  INHALT</a:t>
+            </a:r>
+          </a:p>
+        </p:txBody>
+      </p:sp>
+      <p:sp>
+        <p:nvSpPr>
+          <p:cNvPr id="5" name="Rectangle 4"/>
+          <p:cNvSpPr/>
+          <p:nvPr/>
+        </p:nvSpPr>
+        <p:spPr>
+          <a:xfrm>
+            <a:off x="0" y="1234440"/>
+            <a:ext cx="12188952" cy="12700"/>
+          </a:xfrm>
+          <a:prstGeom prst="rect">
+            <a:avLst/>
+          </a:prstGeom>
+          <a:solidFill>
+            <a:srgbClr val="D8DFE4"/>
+          </a:solidFill>
+          <a:ln>
+            <a:noFill/>
+          </a:ln>
+        </p:spPr>
+        <p:style>
+          <a:lnRef idx="1">
+            <a:schemeClr val="accent1"/>
+          </a:lnRef>
+          <a:fillRef idx="3">
+            <a:schemeClr val="accent1"/>
+          </a:fillRef>
+          <a:effectRef idx="2">
+            <a:schemeClr val="accent1"/>
+          </a:effectRef>
+          <a:fontRef idx="minor">
+            <a:schemeClr val="lt1"/>
+          </a:fontRef>
+        </p:style>
+        <p:txBody>
+          <a:bodyPr rtlCol="0" anchor="ctr"/>
+          <a:lstStyle/>
+          <a:p>
+            <a:pPr algn="ctr"/>
           </a:p>
         </p:txBody>
       </p:sp>
@@ -7580,8 +7095,8 @@
         </p:nvSpPr>
         <p:spPr>
           <a:xfrm>
-            <a:off x="685800" y="1143000"/>
-            <a:ext cx="10817352" cy="25400"/>
+            <a:off x="685800" y="502920"/>
+            <a:ext cx="36576" cy="658368"/>
           </a:xfrm>
           <a:prstGeom prst="rect">
             <a:avLst/>
@@ -7615,450 +7130,124 @@
           </a:p>
         </p:txBody>
       </p:sp>
-      <p:graphicFrame>
-        <p:nvGraphicFramePr>
-          <p:cNvPr id="7" name="Table 6"/>
-          <p:cNvGraphicFramePr>
-            <a:graphicFrameLocks noGrp="1"/>
-          </p:cNvGraphicFramePr>
-          <p:nvPr/>
-        </p:nvGraphicFramePr>
-        <p:xfrm>
-          <a:off x="685800" y="1417320"/>
-          <a:ext cx="10817352" cy="2304288"/>
-        </p:xfrm>
-        <a:graphic>
-          <a:graphicData uri="http://schemas.openxmlformats.org/drawingml/2006/table">
-            <a:tbl>
-              <a:tblPr firstRow="1" bandRow="1">
-                <a:tableStyleId>{5C22544A-7EE6-4342-B048-85BDC9FD1C3A}</a:tableStyleId>
-              </a:tblPr>
-              <a:tblGrid>
-                <a:gridCol w="2163470"/>
-                <a:gridCol w="2163470"/>
-                <a:gridCol w="2163470"/>
-                <a:gridCol w="2163470"/>
-                <a:gridCol w="2163472"/>
-              </a:tblGrid>
-              <a:tr h="384048">
-                <a:tc>
-                  <a:txBody>
-                    <a:bodyPr/>
-                    <a:lstStyle/>
-                    <a:p>
-                      <a:r>
-                        <a:rPr sz="1100" b="1">
-                          <a:solidFill>
-                            <a:srgbClr val="FFFFFF"/>
-                          </a:solidFill>
-                          <a:latin typeface="Arial"/>
-                        </a:rPr>
-                        <a:t>Kriterium</a:t>
-                      </a:r>
-                    </a:p>
-                  </a:txBody>
-                  <a:tcPr>
-                    <a:solidFill>
-                      <a:srgbClr val="1F2C56"/>
-                    </a:solidFill>
-                  </a:tcPr>
-                </a:tc>
-                <a:tc>
-                  <a:txBody>
-                    <a:bodyPr/>
-                    <a:lstStyle/>
-                    <a:p>
-                      <a:r>
-                        <a:rPr sz="1100" b="1">
-                          <a:solidFill>
-                            <a:srgbClr val="FFFFFF"/>
-                          </a:solidFill>
-                          <a:latin typeface="Arial"/>
-                        </a:rPr>
-                        <a:t>Gewichtung</a:t>
-                      </a:r>
-                    </a:p>
-                  </a:txBody>
-                  <a:tcPr>
-                    <a:solidFill>
-                      <a:srgbClr val="1F2C56"/>
-                    </a:solidFill>
-                  </a:tcPr>
-                </a:tc>
-                <a:tc>
-                  <a:txBody>
-                    <a:bodyPr/>
-                    <a:lstStyle/>
-                    <a:p>
-                      <a:r>
-                        <a:rPr sz="1100" b="1">
-                          <a:solidFill>
-                            <a:srgbClr val="FFFFFF"/>
-                          </a:solidFill>
-                          <a:latin typeface="Arial"/>
-                        </a:rPr>
-                        <a:t>Segment 1: _____</a:t>
-                      </a:r>
-                    </a:p>
-                  </a:txBody>
-                  <a:tcPr>
-                    <a:solidFill>
-                      <a:srgbClr val="1F2C56"/>
-                    </a:solidFill>
-                  </a:tcPr>
-                </a:tc>
-                <a:tc>
-                  <a:txBody>
-                    <a:bodyPr/>
-                    <a:lstStyle/>
-                    <a:p>
-                      <a:r>
-                        <a:rPr sz="1100" b="1">
-                          <a:solidFill>
-                            <a:srgbClr val="FFFFFF"/>
-                          </a:solidFill>
-                          <a:latin typeface="Arial"/>
-                        </a:rPr>
-                        <a:t>Segment 2: _____</a:t>
-                      </a:r>
-                    </a:p>
-                  </a:txBody>
-                  <a:tcPr>
-                    <a:solidFill>
-                      <a:srgbClr val="1F2C56"/>
-                    </a:solidFill>
-                  </a:tcPr>
-                </a:tc>
-                <a:tc>
-                  <a:txBody>
-                    <a:bodyPr/>
-                    <a:lstStyle/>
-                    <a:p>
-                      <a:r>
-                        <a:rPr sz="1100" b="1">
-                          <a:solidFill>
-                            <a:srgbClr val="FFFFFF"/>
-                          </a:solidFill>
-                          <a:latin typeface="Arial"/>
-                        </a:rPr>
-                        <a:t>Segment 3: _____</a:t>
-                      </a:r>
-                    </a:p>
-                  </a:txBody>
-                  <a:tcPr>
-                    <a:solidFill>
-                      <a:srgbClr val="1F2C56"/>
-                    </a:solidFill>
-                  </a:tcPr>
-                </a:tc>
-              </a:tr>
-              <a:tr h="384048">
-                <a:tc>
-                  <a:txBody>
-                    <a:bodyPr/>
-                    <a:lstStyle/>
-                    <a:p>
-                      <a:r>
-                        <a:rPr sz="1050">
-                          <a:solidFill>
-                            <a:srgbClr val="3D5466"/>
-                          </a:solidFill>
-                          <a:latin typeface="Arial"/>
-                        </a:rPr>
-                        <a:t>Marktgröße in Region</a:t>
-                      </a:r>
-                    </a:p>
-                  </a:txBody>
-                  <a:tcPr/>
-                </a:tc>
-                <a:tc>
-                  <a:txBody>
-                    <a:bodyPr/>
-                    <a:lstStyle/>
-                    <a:p>
-                      <a:r>
-                        <a:rPr sz="1050">
-                          <a:solidFill>
-                            <a:srgbClr val="3D5466"/>
-                          </a:solidFill>
-                          <a:latin typeface="Arial"/>
-                        </a:rPr>
-                        <a:t>25 %</a:t>
-                      </a:r>
-                    </a:p>
-                  </a:txBody>
-                  <a:tcPr/>
-                </a:tc>
-                <a:tc>
-                  <a:txBody>
-                    <a:bodyPr/>
-                    <a:lstStyle/>
-                    <a:p/>
-                  </a:txBody>
-                  <a:tcPr/>
-                </a:tc>
-                <a:tc>
-                  <a:txBody>
-                    <a:bodyPr/>
-                    <a:lstStyle/>
-                    <a:p/>
-                  </a:txBody>
-                  <a:tcPr/>
-                </a:tc>
-                <a:tc>
-                  <a:txBody>
-                    <a:bodyPr/>
-                    <a:lstStyle/>
-                    <a:p/>
-                  </a:txBody>
-                  <a:tcPr/>
-                </a:tc>
-              </a:tr>
-              <a:tr h="384048">
-                <a:tc>
-                  <a:txBody>
-                    <a:bodyPr/>
-                    <a:lstStyle/>
-                    <a:p>
-                      <a:r>
-                        <a:rPr sz="1050">
-                          <a:solidFill>
-                            <a:srgbClr val="3D5466"/>
-                          </a:solidFill>
-                          <a:latin typeface="Arial"/>
-                        </a:rPr>
-                        <a:t>Ertragspotenzial (DB)</a:t>
-                      </a:r>
-                    </a:p>
-                  </a:txBody>
-                  <a:tcPr/>
-                </a:tc>
-                <a:tc>
-                  <a:txBody>
-                    <a:bodyPr/>
-                    <a:lstStyle/>
-                    <a:p>
-                      <a:r>
-                        <a:rPr sz="1050">
-                          <a:solidFill>
-                            <a:srgbClr val="3D5466"/>
-                          </a:solidFill>
-                          <a:latin typeface="Arial"/>
-                        </a:rPr>
-                        <a:t>30 %</a:t>
-                      </a:r>
-                    </a:p>
-                  </a:txBody>
-                  <a:tcPr/>
-                </a:tc>
-                <a:tc>
-                  <a:txBody>
-                    <a:bodyPr/>
-                    <a:lstStyle/>
-                    <a:p/>
-                  </a:txBody>
-                  <a:tcPr/>
-                </a:tc>
-                <a:tc>
-                  <a:txBody>
-                    <a:bodyPr/>
-                    <a:lstStyle/>
-                    <a:p/>
-                  </a:txBody>
-                  <a:tcPr/>
-                </a:tc>
-                <a:tc>
-                  <a:txBody>
-                    <a:bodyPr/>
-                    <a:lstStyle/>
-                    <a:p/>
-                  </a:txBody>
-                  <a:tcPr/>
-                </a:tc>
-              </a:tr>
-              <a:tr h="384048">
-                <a:tc>
-                  <a:txBody>
-                    <a:bodyPr/>
-                    <a:lstStyle/>
-                    <a:p>
-                      <a:r>
-                        <a:rPr sz="1050">
-                          <a:solidFill>
-                            <a:srgbClr val="3D5466"/>
-                          </a:solidFill>
-                          <a:latin typeface="Arial"/>
-                        </a:rPr>
-                        <a:t>Eigene Stärke/Expertise</a:t>
-                      </a:r>
-                    </a:p>
-                  </a:txBody>
-                  <a:tcPr/>
-                </a:tc>
-                <a:tc>
-                  <a:txBody>
-                    <a:bodyPr/>
-                    <a:lstStyle/>
-                    <a:p>
-                      <a:r>
-                        <a:rPr sz="1050">
-                          <a:solidFill>
-                            <a:srgbClr val="3D5466"/>
-                          </a:solidFill>
-                          <a:latin typeface="Arial"/>
-                        </a:rPr>
-                        <a:t>25 %</a:t>
-                      </a:r>
-                    </a:p>
-                  </a:txBody>
-                  <a:tcPr/>
-                </a:tc>
-                <a:tc>
-                  <a:txBody>
-                    <a:bodyPr/>
-                    <a:lstStyle/>
-                    <a:p/>
-                  </a:txBody>
-                  <a:tcPr/>
-                </a:tc>
-                <a:tc>
-                  <a:txBody>
-                    <a:bodyPr/>
-                    <a:lstStyle/>
-                    <a:p/>
-                  </a:txBody>
-                  <a:tcPr/>
-                </a:tc>
-                <a:tc>
-                  <a:txBody>
-                    <a:bodyPr/>
-                    <a:lstStyle/>
-                    <a:p/>
-                  </a:txBody>
-                  <a:tcPr/>
-                </a:tc>
-              </a:tr>
-              <a:tr h="384048">
-                <a:tc>
-                  <a:txBody>
-                    <a:bodyPr/>
-                    <a:lstStyle/>
-                    <a:p>
-                      <a:r>
-                        <a:rPr sz="1050">
-                          <a:solidFill>
-                            <a:srgbClr val="3D5466"/>
-                          </a:solidFill>
-                          <a:latin typeface="Arial"/>
-                        </a:rPr>
-                        <a:t>Wettbewerbsintensität (inv.)</a:t>
-                      </a:r>
-                    </a:p>
-                  </a:txBody>
-                  <a:tcPr/>
-                </a:tc>
-                <a:tc>
-                  <a:txBody>
-                    <a:bodyPr/>
-                    <a:lstStyle/>
-                    <a:p>
-                      <a:r>
-                        <a:rPr sz="1050">
-                          <a:solidFill>
-                            <a:srgbClr val="3D5466"/>
-                          </a:solidFill>
-                          <a:latin typeface="Arial"/>
-                        </a:rPr>
-                        <a:t>20 %</a:t>
-                      </a:r>
-                    </a:p>
-                  </a:txBody>
-                  <a:tcPr/>
-                </a:tc>
-                <a:tc>
-                  <a:txBody>
-                    <a:bodyPr/>
-                    <a:lstStyle/>
-                    <a:p/>
-                  </a:txBody>
-                  <a:tcPr/>
-                </a:tc>
-                <a:tc>
-                  <a:txBody>
-                    <a:bodyPr/>
-                    <a:lstStyle/>
-                    <a:p/>
-                  </a:txBody>
-                  <a:tcPr/>
-                </a:tc>
-                <a:tc>
-                  <a:txBody>
-                    <a:bodyPr/>
-                    <a:lstStyle/>
-                    <a:p/>
-                  </a:txBody>
-                  <a:tcPr/>
-                </a:tc>
-              </a:tr>
-              <a:tr h="384048">
-                <a:tc>
-                  <a:txBody>
-                    <a:bodyPr/>
-                    <a:lstStyle/>
-                    <a:p>
-                      <a:r>
-                        <a:rPr sz="1050">
-                          <a:solidFill>
-                            <a:srgbClr val="3D5466"/>
-                          </a:solidFill>
-                          <a:latin typeface="Arial"/>
-                        </a:rPr>
-                        <a:t>Gesamtscore</a:t>
-                      </a:r>
-                    </a:p>
-                  </a:txBody>
-                  <a:tcPr/>
-                </a:tc>
-                <a:tc>
-                  <a:txBody>
-                    <a:bodyPr/>
-                    <a:lstStyle/>
-                    <a:p/>
-                  </a:txBody>
-                  <a:tcPr/>
-                </a:tc>
-                <a:tc>
-                  <a:txBody>
-                    <a:bodyPr/>
-                    <a:lstStyle/>
-                    <a:p/>
-                  </a:txBody>
-                  <a:tcPr/>
-                </a:tc>
-                <a:tc>
-                  <a:txBody>
-                    <a:bodyPr/>
-                    <a:lstStyle/>
-                    <a:p/>
-                  </a:txBody>
-                  <a:tcPr/>
-                </a:tc>
-                <a:tc>
-                  <a:txBody>
-                    <a:bodyPr/>
-                    <a:lstStyle/>
-                    <a:p/>
-                  </a:txBody>
-                  <a:tcPr/>
-                </a:tc>
-              </a:tr>
-            </a:tbl>
-          </a:graphicData>
-        </a:graphic>
-      </p:graphicFrame>
-      <p:sp>
-        <p:nvSpPr>
-          <p:cNvPr id="8" name="Rectangle 7"/>
+      <p:sp>
+        <p:nvSpPr>
+          <p:cNvPr id="7" name="TextBox 6"/>
+          <p:cNvSpPr txBox="1"/>
+          <p:nvPr/>
+        </p:nvSpPr>
+        <p:spPr>
+          <a:xfrm>
+            <a:off x="813816" y="502920"/>
+            <a:ext cx="10634472" cy="685800"/>
+          </a:xfrm>
+          <a:prstGeom prst="rect">
+            <a:avLst/>
+          </a:prstGeom>
+          <a:noFill/>
+        </p:spPr>
+        <p:txBody>
+          <a:bodyPr wrap="square">
+            <a:spAutoFit/>
+          </a:bodyPr>
+          <a:lstStyle/>
+          <a:p>
+            <a:pPr algn="l"/>
+            <a:r>
+              <a:rPr sz="2400" b="1" i="0">
+                <a:solidFill>
+                  <a:srgbClr val="1F2C56"/>
+                </a:solidFill>
+                <a:latin typeface="Arial"/>
+              </a:rPr>
+              <a:t>Strategische Optionen für VR-Banken</a:t>
+            </a:r>
+          </a:p>
+        </p:txBody>
+      </p:sp>
+      <p:sp>
+        <p:nvSpPr>
+          <p:cNvPr id="8" name="TextBox 7"/>
+          <p:cNvSpPr txBox="1"/>
+          <p:nvPr/>
+        </p:nvSpPr>
+        <p:spPr>
+          <a:xfrm>
+            <a:off x="685800" y="1417320"/>
+            <a:ext cx="10817352" cy="4892040"/>
+          </a:xfrm>
+          <a:prstGeom prst="rect">
+            <a:avLst/>
+          </a:prstGeom>
+          <a:noFill/>
+        </p:spPr>
+        <p:txBody>
+          <a:bodyPr wrap="square" anchor="ctr">
+            <a:spAutoFit/>
+          </a:bodyPr>
+          <a:lstStyle/>
+          <a:p>
+            <a:pPr marL="177800" indent="-177800">
+              <a:spcBef>
+                <a:spcPts val="600"/>
+              </a:spcBef>
+              <a:spcAft>
+                <a:spcPts val="200"/>
+              </a:spcAft>
+            </a:pPr>
+            <a:r>
+              <a:rPr sz="1200" i="1">
+                <a:solidFill>
+                  <a:srgbClr val="3D5466"/>
+                </a:solidFill>
+                <a:latin typeface="Arial"/>
+              </a:rPr>
+              <a:t>→  Der richtige Kanal folgt aus dem Segment – Empfehlung, Kammer, Messe und Digital wirken je nach Zielgruppe unterschiedlich.</a:t>
+            </a:r>
+          </a:p>
+          <a:p>
+            <a:pPr marL="190500" indent="-190500">
+              <a:spcBef>
+                <a:spcPts val="400"/>
+              </a:spcBef>
+              <a:spcAft>
+                <a:spcPts val="200"/>
+              </a:spcAft>
+            </a:pPr>
+            <a:r>
+              <a:rPr sz="1300">
+                <a:solidFill>
+                  <a:srgbClr val="3D5466"/>
+                </a:solidFill>
+                <a:latin typeface="Arial"/>
+              </a:rPr>
+              <a:t>▸  Neukundenkanäle: Empfehlungsmanagement, Kammern/Verbände, Messen, digitale Ansprache.</a:t>
+            </a:r>
+          </a:p>
+          <a:p>
+            <a:pPr marL="190500" indent="-190500">
+              <a:spcBef>
+                <a:spcPts val="400"/>
+              </a:spcBef>
+              <a:spcAft>
+                <a:spcPts val="200"/>
+              </a:spcAft>
+            </a:pPr>
+            <a:r>
+              <a:rPr sz="1300">
+                <a:solidFill>
+                  <a:srgbClr val="3D5466"/>
+                </a:solidFill>
+                <a:latin typeface="Arial"/>
+              </a:rPr>
+              <a:t>▸  Empfehlungsmanagement systematisieren: aus zufriedenen Kunden werden Multiplikatoren.</a:t>
+            </a:r>
+          </a:p>
+        </p:txBody>
+      </p:sp>
+      <p:sp>
+        <p:nvSpPr>
+          <p:cNvPr id="9" name="Rectangle 8"/>
           <p:cNvSpPr/>
           <p:nvPr/>
         </p:nvSpPr>
@@ -8101,7 +7290,7 @@
       </p:sp>
       <p:sp>
         <p:nvSpPr>
-          <p:cNvPr id="9" name="TextBox 8"/>
+          <p:cNvPr id="10" name="TextBox 9"/>
           <p:cNvSpPr txBox="1"/>
           <p:nvPr/>
         </p:nvSpPr>
@@ -8130,41 +7319,6 @@
                 <a:latin typeface="Consolas"/>
               </a:rPr>
               <a:t>FKB Campus  ·  M15</a:t>
-            </a:r>
-          </a:p>
-        </p:txBody>
-      </p:sp>
-      <p:sp>
-        <p:nvSpPr>
-          <p:cNvPr id="10" name="TextBox 9"/>
-          <p:cNvSpPr txBox="1"/>
-          <p:nvPr/>
-        </p:nvSpPr>
-        <p:spPr>
-          <a:xfrm>
-            <a:off x="7176211" y="6583680"/>
-            <a:ext cx="4326940" cy="256032"/>
-          </a:xfrm>
-          <a:prstGeom prst="rect">
-            <a:avLst/>
-          </a:prstGeom>
-          <a:noFill/>
-        </p:spPr>
-        <p:txBody>
-          <a:bodyPr wrap="none">
-            <a:spAutoFit/>
-          </a:bodyPr>
-          <a:lstStyle/>
-          <a:p>
-            <a:pPr algn="r"/>
-            <a:r>
-              <a:rPr sz="700">
-                <a:solidFill>
-                  <a:srgbClr val="A0B4D2"/>
-                </a:solidFill>
-                <a:latin typeface="Consolas"/>
-              </a:rPr>
-              <a:t>Übersicht</a:t>
             </a:r>
           </a:p>
         </p:txBody>
@@ -8303,7 +7457,7 @@
                 </a:solidFill>
                 <a:latin typeface="Consolas"/>
               </a:rPr>
-              <a:t>M15  ·  INHALT</a:t>
+              <a:t>M15  ·  ARBEITSBLATT</a:t>
             </a:r>
           </a:p>
         </p:txBody>
@@ -8424,7 +7578,7 @@
                 </a:solidFill>
                 <a:latin typeface="Arial"/>
               </a:rPr>
-              <a:t>AB-3: Marktbearbeitungs-Jahresplan</a:t>
+              <a:t>Wertversprechen formulieren</a:t>
             </a:r>
           </a:p>
         </p:txBody>
@@ -8437,8 +7591,8 @@
         </p:nvSpPr>
         <p:spPr>
           <a:xfrm>
-            <a:off x="685800" y="1417320"/>
-            <a:ext cx="10817352" cy="4892040"/>
+            <a:off x="685800" y="1554480"/>
+            <a:ext cx="10817352" cy="3840480"/>
           </a:xfrm>
           <a:prstGeom prst="rect">
             <a:avLst/>
@@ -8446,7 +7600,7 @@
           <a:noFill/>
         </p:spPr>
         <p:txBody>
-          <a:bodyPr wrap="square" anchor="ctr">
+          <a:bodyPr wrap="square">
             <a:spAutoFit/>
           </a:bodyPr>
           <a:lstStyle/>
@@ -8460,13 +7614,51 @@
               </a:spcAft>
             </a:pPr>
             <a:r>
-              <a:rPr sz="1300">
+              <a:rPr sz="1400">
                 <a:solidFill>
                   <a:srgbClr val="3D5466"/>
                 </a:solidFill>
                 <a:latin typeface="Arial"/>
               </a:rPr>
-              <a:t>▸  Mein Wertversprechen (in einem Satz):</a:t>
+              <a:t>▸  Entwickeln Sie Ihre Marktbearbeitungsstrategie: Zielsegment, Wertversprechen, Top-3-Maßnahmen (AB-2).</a:t>
+            </a:r>
+          </a:p>
+          <a:p>
+            <a:pPr marL="190500" indent="-190500">
+              <a:spcBef>
+                <a:spcPts val="400"/>
+              </a:spcBef>
+              <a:spcAft>
+                <a:spcPts val="200"/>
+              </a:spcAft>
+            </a:pPr>
+            <a:r>
+              <a:rPr sz="1400">
+                <a:solidFill>
+                  <a:srgbClr val="3D5466"/>
+                </a:solidFill>
+                <a:latin typeface="Arial"/>
+              </a:rPr>
+              <a:t>▸  Formulieren Sie ein Wertversprechen, das den konkreten Nutzen für das Segment benennt.</a:t>
+            </a:r>
+          </a:p>
+          <a:p>
+            <a:pPr marL="190500" indent="-190500">
+              <a:spcBef>
+                <a:spcPts val="400"/>
+              </a:spcBef>
+              <a:spcAft>
+                <a:spcPts val="200"/>
+              </a:spcAft>
+            </a:pPr>
+            <a:r>
+              <a:rPr sz="1400">
+                <a:solidFill>
+                  <a:srgbClr val="3D5466"/>
+                </a:solidFill>
+                <a:latin typeface="Arial"/>
+              </a:rPr>
+              <a:t>▸  Wählen Sie die passenden Kanäle für Ihr Primärsegment.</a:t>
             </a:r>
           </a:p>
         </p:txBody>
@@ -8474,6 +7666,84 @@
       <p:sp>
         <p:nvSpPr>
           <p:cNvPr id="9" name="Rectangle 8"/>
+          <p:cNvSpPr/>
+          <p:nvPr/>
+        </p:nvSpPr>
+        <p:spPr>
+          <a:xfrm>
+            <a:off x="685800" y="5486400"/>
+            <a:ext cx="10817352" cy="640080"/>
+          </a:xfrm>
+          <a:prstGeom prst="rect">
+            <a:avLst/>
+          </a:prstGeom>
+          <a:solidFill>
+            <a:srgbClr val="1F2C56"/>
+          </a:solidFill>
+          <a:ln>
+            <a:noFill/>
+          </a:ln>
+        </p:spPr>
+        <p:style>
+          <a:lnRef idx="1">
+            <a:schemeClr val="accent1"/>
+          </a:lnRef>
+          <a:fillRef idx="3">
+            <a:schemeClr val="accent1"/>
+          </a:fillRef>
+          <a:effectRef idx="2">
+            <a:schemeClr val="accent1"/>
+          </a:effectRef>
+          <a:fontRef idx="minor">
+            <a:schemeClr val="lt1"/>
+          </a:fontRef>
+        </p:style>
+        <p:txBody>
+          <a:bodyPr rtlCol="0" anchor="ctr"/>
+          <a:lstStyle/>
+          <a:p>
+            <a:pPr algn="ctr"/>
+          </a:p>
+        </p:txBody>
+      </p:sp>
+      <p:sp>
+        <p:nvSpPr>
+          <p:cNvPr id="10" name="TextBox 9"/>
+          <p:cNvSpPr txBox="1"/>
+          <p:nvPr/>
+        </p:nvSpPr>
+        <p:spPr>
+          <a:xfrm>
+            <a:off x="868680" y="5596128"/>
+            <a:ext cx="10451592" cy="457200"/>
+          </a:xfrm>
+          <a:prstGeom prst="rect">
+            <a:avLst/>
+          </a:prstGeom>
+          <a:noFill/>
+        </p:spPr>
+        <p:txBody>
+          <a:bodyPr wrap="square">
+            <a:spAutoFit/>
+          </a:bodyPr>
+          <a:lstStyle/>
+          <a:p>
+            <a:pPr algn="l"/>
+            <a:r>
+              <a:rPr sz="1300" b="1" i="0">
+                <a:solidFill>
+                  <a:srgbClr val="FFFFFF"/>
+                </a:solidFill>
+                <a:latin typeface="Arial"/>
+              </a:rPr>
+              <a:t>→  Bearbeitung im Teilnehmer-Workbook (Arbeitsblatt mit Ausfüllfeldern)</a:t>
+            </a:r>
+          </a:p>
+        </p:txBody>
+      </p:sp>
+      <p:sp>
+        <p:nvSpPr>
+          <p:cNvPr id="11" name="Rectangle 10"/>
           <p:cNvSpPr/>
           <p:nvPr/>
         </p:nvSpPr>
@@ -8516,7 +7786,7 @@
       </p:sp>
       <p:sp>
         <p:nvSpPr>
-          <p:cNvPr id="10" name="TextBox 9"/>
+          <p:cNvPr id="12" name="TextBox 11"/>
           <p:cNvSpPr txBox="1"/>
           <p:nvPr/>
         </p:nvSpPr>
@@ -8582,7 +7852,251 @@
             <a:avLst/>
           </a:prstGeom>
           <a:solidFill>
-            <a:srgbClr val="FFFFFF"/>
+            <a:srgbClr val="1F2C56"/>
+          </a:solidFill>
+          <a:ln>
+            <a:noFill/>
+          </a:ln>
+        </p:spPr>
+        <p:style>
+          <a:lnRef idx="1">
+            <a:schemeClr val="accent1"/>
+          </a:lnRef>
+          <a:fillRef idx="3">
+            <a:schemeClr val="accent1"/>
+          </a:fillRef>
+          <a:effectRef idx="2">
+            <a:schemeClr val="accent1"/>
+          </a:effectRef>
+          <a:fontRef idx="minor">
+            <a:schemeClr val="lt1"/>
+          </a:fontRef>
+        </p:style>
+        <p:txBody>
+          <a:bodyPr rtlCol="0" anchor="ctr"/>
+          <a:lstStyle/>
+          <a:p>
+            <a:pPr algn="ctr"/>
+          </a:p>
+        </p:txBody>
+      </p:sp>
+      <p:sp>
+        <p:nvSpPr>
+          <p:cNvPr id="3" name="TextBox 2"/>
+          <p:cNvSpPr txBox="1"/>
+          <p:nvPr/>
+        </p:nvSpPr>
+        <p:spPr>
+          <a:xfrm>
+            <a:off x="685800" y="2377440"/>
+            <a:ext cx="10817352" cy="365760"/>
+          </a:xfrm>
+          <a:prstGeom prst="rect">
+            <a:avLst/>
+          </a:prstGeom>
+          <a:noFill/>
+        </p:spPr>
+        <p:txBody>
+          <a:bodyPr wrap="none">
+            <a:spAutoFit/>
+          </a:bodyPr>
+          <a:lstStyle/>
+          <a:p>
+            <a:pPr algn="l"/>
+            <a:r>
+              <a:rPr sz="1200">
+                <a:solidFill>
+                  <a:srgbClr val="D9C089"/>
+                </a:solidFill>
+                <a:latin typeface="Consolas"/>
+              </a:rPr>
+              <a:t>15:00–16:50</a:t>
+            </a:r>
+          </a:p>
+        </p:txBody>
+      </p:sp>
+      <p:sp>
+        <p:nvSpPr>
+          <p:cNvPr id="4" name="Rectangle 3"/>
+          <p:cNvSpPr/>
+          <p:nvPr/>
+        </p:nvSpPr>
+        <p:spPr>
+          <a:xfrm>
+            <a:off x="685800" y="2788920"/>
+            <a:ext cx="548640" cy="38100"/>
+          </a:xfrm>
+          <a:prstGeom prst="rect">
+            <a:avLst/>
+          </a:prstGeom>
+          <a:solidFill>
+            <a:srgbClr val="D9C089"/>
+          </a:solidFill>
+          <a:ln>
+            <a:noFill/>
+          </a:ln>
+        </p:spPr>
+        <p:style>
+          <a:lnRef idx="1">
+            <a:schemeClr val="accent1"/>
+          </a:lnRef>
+          <a:fillRef idx="3">
+            <a:schemeClr val="accent1"/>
+          </a:fillRef>
+          <a:effectRef idx="2">
+            <a:schemeClr val="accent1"/>
+          </a:effectRef>
+          <a:fontRef idx="minor">
+            <a:schemeClr val="lt1"/>
+          </a:fontRef>
+        </p:style>
+        <p:txBody>
+          <a:bodyPr rtlCol="0" anchor="ctr"/>
+          <a:lstStyle/>
+          <a:p>
+            <a:pPr algn="ctr"/>
+          </a:p>
+        </p:txBody>
+      </p:sp>
+      <p:sp>
+        <p:nvSpPr>
+          <p:cNvPr id="5" name="TextBox 4"/>
+          <p:cNvSpPr txBox="1"/>
+          <p:nvPr/>
+        </p:nvSpPr>
+        <p:spPr>
+          <a:xfrm>
+            <a:off x="685800" y="3017520"/>
+            <a:ext cx="10817352" cy="1463040"/>
+          </a:xfrm>
+          <a:prstGeom prst="rect">
+            <a:avLst/>
+          </a:prstGeom>
+          <a:noFill/>
+        </p:spPr>
+        <p:txBody>
+          <a:bodyPr wrap="square">
+            <a:spAutoFit/>
+          </a:bodyPr>
+          <a:lstStyle/>
+          <a:p>
+            <a:pPr algn="l"/>
+            <a:r>
+              <a:rPr sz="4000" b="1" i="0">
+                <a:solidFill>
+                  <a:srgbClr val="FFFFFF"/>
+                </a:solidFill>
+                <a:latin typeface="Arial"/>
+              </a:rPr>
+              <a:t>Einzelarbeit III: Jahresplan</a:t>
+            </a:r>
+          </a:p>
+        </p:txBody>
+      </p:sp>
+      <p:sp>
+        <p:nvSpPr>
+          <p:cNvPr id="6" name="TextBox 5"/>
+          <p:cNvSpPr txBox="1"/>
+          <p:nvPr/>
+        </p:nvSpPr>
+        <p:spPr>
+          <a:xfrm>
+            <a:off x="685800" y="4480560"/>
+            <a:ext cx="8653881" cy="1280160"/>
+          </a:xfrm>
+          <a:prstGeom prst="rect">
+            <a:avLst/>
+          </a:prstGeom>
+          <a:noFill/>
+        </p:spPr>
+        <p:txBody>
+          <a:bodyPr wrap="square">
+            <a:spAutoFit/>
+          </a:bodyPr>
+          <a:lstStyle/>
+          <a:p>
+            <a:pPr algn="l"/>
+            <a:r>
+              <a:rPr sz="1600" b="0" i="0">
+                <a:solidFill>
+                  <a:srgbClr val="C8D2E6"/>
+                </a:solidFill>
+                <a:latin typeface="Arial"/>
+              </a:rPr>
+              <a:t>Die Strategie in einen verbindlichen Jahresplan überführen.</a:t>
+            </a:r>
+          </a:p>
+        </p:txBody>
+      </p:sp>
+      <p:sp>
+        <p:nvSpPr>
+          <p:cNvPr id="7" name="TextBox 6"/>
+          <p:cNvSpPr txBox="1"/>
+          <p:nvPr/>
+        </p:nvSpPr>
+        <p:spPr>
+          <a:xfrm>
+            <a:off x="685800" y="6355080"/>
+            <a:ext cx="10817352" cy="274320"/>
+          </a:xfrm>
+          <a:prstGeom prst="rect">
+            <a:avLst/>
+          </a:prstGeom>
+          <a:noFill/>
+        </p:spPr>
+        <p:txBody>
+          <a:bodyPr wrap="none">
+            <a:spAutoFit/>
+          </a:bodyPr>
+          <a:lstStyle/>
+          <a:p>
+            <a:pPr algn="l"/>
+            <a:r>
+              <a:rPr sz="700">
+                <a:solidFill>
+                  <a:srgbClr val="8CA0C3"/>
+                </a:solidFill>
+                <a:latin typeface="Consolas"/>
+              </a:rPr>
+              <a:t>FKB Campus  ·  M15</a:t>
+            </a:r>
+          </a:p>
+        </p:txBody>
+      </p:sp>
+    </p:spTree>
+  </p:cSld>
+  <p:clrMapOvr>
+    <a:masterClrMapping/>
+  </p:clrMapOvr>
+</p:sld>
+</file>
+
+<file path=ppt/slides/slide18.xml><?xml version="1.0" encoding="utf-8"?>
+<p:sld xmlns:a="http://schemas.openxmlformats.org/drawingml/2006/main" xmlns:p="http://schemas.openxmlformats.org/presentationml/2006/main" xmlns:r="http://schemas.openxmlformats.org/officeDocument/2006/relationships">
+  <p:cSld>
+    <p:spTree>
+      <p:nvGrpSpPr>
+        <p:cNvPr id="1" name=""/>
+        <p:cNvGrpSpPr/>
+        <p:nvPr/>
+      </p:nvGrpSpPr>
+      <p:grpSpPr/>
+      <p:sp>
+        <p:nvSpPr>
+          <p:cNvPr id="2" name="Rectangle 1"/>
+          <p:cNvSpPr/>
+          <p:nvPr/>
+        </p:nvSpPr>
+        <p:spPr>
+          <a:xfrm>
+            <a:off x="0" y="0"/>
+            <a:ext cx="12188952" cy="6858000"/>
+          </a:xfrm>
+          <a:prstGeom prst="rect">
+            <a:avLst/>
+          </a:prstGeom>
+          <a:solidFill>
+            <a:srgbClr val="EDEDF3"/>
           </a:solidFill>
           <a:ln>
             <a:noFill/>
@@ -8683,43 +8197,51 @@
                 </a:solidFill>
                 <a:latin typeface="Consolas"/>
               </a:rPr>
-              <a:t>M15  ·  ÜBERSICHT</a:t>
-            </a:r>
-          </a:p>
-        </p:txBody>
-      </p:sp>
-      <p:sp>
-        <p:nvSpPr>
-          <p:cNvPr id="5" name="TextBox 4"/>
-          <p:cNvSpPr txBox="1"/>
-          <p:nvPr/>
-        </p:nvSpPr>
-        <p:spPr>
-          <a:xfrm>
-            <a:off x="685800" y="502920"/>
-            <a:ext cx="10817352" cy="594360"/>
-          </a:xfrm>
-          <a:prstGeom prst="rect">
-            <a:avLst/>
-          </a:prstGeom>
-          <a:noFill/>
-        </p:spPr>
-        <p:txBody>
-          <a:bodyPr wrap="square">
-            <a:spAutoFit/>
-          </a:bodyPr>
-          <a:lstStyle/>
-          <a:p>
-            <a:pPr algn="l"/>
-            <a:r>
-              <a:rPr sz="2000" b="1" i="0">
-                <a:solidFill>
-                  <a:srgbClr val="1F2C56"/>
-                </a:solidFill>
-                <a:latin typeface="Arial"/>
-              </a:rPr>
-              <a:t>AB-3: Marktbearbeitungs-Jahresplan</a:t>
-            </a:r>
+              <a:t>M15  ·  ARBEITSBLATT</a:t>
+            </a:r>
+          </a:p>
+        </p:txBody>
+      </p:sp>
+      <p:sp>
+        <p:nvSpPr>
+          <p:cNvPr id="5" name="Rectangle 4"/>
+          <p:cNvSpPr/>
+          <p:nvPr/>
+        </p:nvSpPr>
+        <p:spPr>
+          <a:xfrm>
+            <a:off x="0" y="1234440"/>
+            <a:ext cx="12188952" cy="12700"/>
+          </a:xfrm>
+          <a:prstGeom prst="rect">
+            <a:avLst/>
+          </a:prstGeom>
+          <a:solidFill>
+            <a:srgbClr val="D8DFE4"/>
+          </a:solidFill>
+          <a:ln>
+            <a:noFill/>
+          </a:ln>
+        </p:spPr>
+        <p:style>
+          <a:lnRef idx="1">
+            <a:schemeClr val="accent1"/>
+          </a:lnRef>
+          <a:fillRef idx="3">
+            <a:schemeClr val="accent1"/>
+          </a:fillRef>
+          <a:effectRef idx="2">
+            <a:schemeClr val="accent1"/>
+          </a:effectRef>
+          <a:fontRef idx="minor">
+            <a:schemeClr val="lt1"/>
+          </a:fontRef>
+        </p:style>
+        <p:txBody>
+          <a:bodyPr rtlCol="0" anchor="ctr"/>
+          <a:lstStyle/>
+          <a:p>
+            <a:pPr algn="ctr"/>
           </a:p>
         </p:txBody>
       </p:sp>
@@ -8731,8 +8253,8 @@
         </p:nvSpPr>
         <p:spPr>
           <a:xfrm>
-            <a:off x="685800" y="1143000"/>
-            <a:ext cx="10817352" cy="25400"/>
+            <a:off x="685800" y="502920"/>
+            <a:ext cx="36576" cy="658368"/>
           </a:xfrm>
           <a:prstGeom prst="rect">
             <a:avLst/>
@@ -8766,358 +8288,202 @@
           </a:p>
         </p:txBody>
       </p:sp>
-      <p:graphicFrame>
-        <p:nvGraphicFramePr>
-          <p:cNvPr id="7" name="Table 6"/>
-          <p:cNvGraphicFramePr>
-            <a:graphicFrameLocks noGrp="1"/>
-          </p:cNvGraphicFramePr>
-          <p:nvPr/>
-        </p:nvGraphicFramePr>
-        <p:xfrm>
-          <a:off x="685800" y="1417320"/>
-          <a:ext cx="10817352" cy="1920240"/>
-        </p:xfrm>
-        <a:graphic>
-          <a:graphicData uri="http://schemas.openxmlformats.org/drawingml/2006/table">
-            <a:tbl>
-              <a:tblPr firstRow="1" bandRow="1">
-                <a:tableStyleId>{5C22544A-7EE6-4342-B048-85BDC9FD1C3A}</a:tableStyleId>
-              </a:tblPr>
-              <a:tblGrid>
-                <a:gridCol w="2163470"/>
-                <a:gridCol w="2163470"/>
-                <a:gridCol w="2163470"/>
-                <a:gridCol w="2163470"/>
-                <a:gridCol w="2163472"/>
-              </a:tblGrid>
-              <a:tr h="384048">
-                <a:tc>
-                  <a:txBody>
-                    <a:bodyPr/>
-                    <a:lstStyle/>
-                    <a:p>
-                      <a:r>
-                        <a:rPr sz="1100" b="1">
-                          <a:solidFill>
-                            <a:srgbClr val="FFFFFF"/>
-                          </a:solidFill>
-                          <a:latin typeface="Arial"/>
-                        </a:rPr>
-                        <a:t>Quartal</a:t>
-                      </a:r>
-                    </a:p>
-                  </a:txBody>
-                  <a:tcPr>
-                    <a:solidFill>
-                      <a:srgbClr val="1F2C56"/>
-                    </a:solidFill>
-                  </a:tcPr>
-                </a:tc>
-                <a:tc>
-                  <a:txBody>
-                    <a:bodyPr/>
-                    <a:lstStyle/>
-                    <a:p>
-                      <a:r>
-                        <a:rPr sz="1100" b="1">
-                          <a:solidFill>
-                            <a:srgbClr val="FFFFFF"/>
-                          </a:solidFill>
-                          <a:latin typeface="Arial"/>
-                        </a:rPr>
-                        <a:t>Maßnahme</a:t>
-                      </a:r>
-                    </a:p>
-                  </a:txBody>
-                  <a:tcPr>
-                    <a:solidFill>
-                      <a:srgbClr val="1F2C56"/>
-                    </a:solidFill>
-                  </a:tcPr>
-                </a:tc>
-                <a:tc>
-                  <a:txBody>
-                    <a:bodyPr/>
-                    <a:lstStyle/>
-                    <a:p>
-                      <a:r>
-                        <a:rPr sz="1100" b="1">
-                          <a:solidFill>
-                            <a:srgbClr val="FFFFFF"/>
-                          </a:solidFill>
-                          <a:latin typeface="Arial"/>
-                        </a:rPr>
-                        <a:t>Kanal</a:t>
-                      </a:r>
-                    </a:p>
-                  </a:txBody>
-                  <a:tcPr>
-                    <a:solidFill>
-                      <a:srgbClr val="1F2C56"/>
-                    </a:solidFill>
-                  </a:tcPr>
-                </a:tc>
-                <a:tc>
-                  <a:txBody>
-                    <a:bodyPr/>
-                    <a:lstStyle/>
-                    <a:p>
-                      <a:r>
-                        <a:rPr sz="1100" b="1">
-                          <a:solidFill>
-                            <a:srgbClr val="FFFFFF"/>
-                          </a:solidFill>
-                          <a:latin typeface="Arial"/>
-                        </a:rPr>
-                        <a:t>Ziel</a:t>
-                      </a:r>
-                    </a:p>
-                  </a:txBody>
-                  <a:tcPr>
-                    <a:solidFill>
-                      <a:srgbClr val="1F2C56"/>
-                    </a:solidFill>
-                  </a:tcPr>
-                </a:tc>
-                <a:tc>
-                  <a:txBody>
-                    <a:bodyPr/>
-                    <a:lstStyle/>
-                    <a:p>
-                      <a:r>
-                        <a:rPr sz="1100" b="1">
-                          <a:solidFill>
-                            <a:srgbClr val="FFFFFF"/>
-                          </a:solidFill>
-                          <a:latin typeface="Arial"/>
-                        </a:rPr>
-                        <a:t>Messgröße</a:t>
-                      </a:r>
-                    </a:p>
-                  </a:txBody>
-                  <a:tcPr>
-                    <a:solidFill>
-                      <a:srgbClr val="1F2C56"/>
-                    </a:solidFill>
-                  </a:tcPr>
-                </a:tc>
-              </a:tr>
-              <a:tr h="384048">
-                <a:tc>
-                  <a:txBody>
-                    <a:bodyPr/>
-                    <a:lstStyle/>
-                    <a:p>
-                      <a:r>
-                        <a:rPr sz="1050">
-                          <a:solidFill>
-                            <a:srgbClr val="3D5466"/>
-                          </a:solidFill>
-                          <a:latin typeface="Arial"/>
-                        </a:rPr>
-                        <a:t>Q1</a:t>
-                      </a:r>
-                    </a:p>
-                  </a:txBody>
-                  <a:tcPr/>
-                </a:tc>
-                <a:tc>
-                  <a:txBody>
-                    <a:bodyPr/>
-                    <a:lstStyle/>
-                    <a:p/>
-                  </a:txBody>
-                  <a:tcPr/>
-                </a:tc>
-                <a:tc>
-                  <a:txBody>
-                    <a:bodyPr/>
-                    <a:lstStyle/>
-                    <a:p/>
-                  </a:txBody>
-                  <a:tcPr/>
-                </a:tc>
-                <a:tc>
-                  <a:txBody>
-                    <a:bodyPr/>
-                    <a:lstStyle/>
-                    <a:p/>
-                  </a:txBody>
-                  <a:tcPr/>
-                </a:tc>
-                <a:tc>
-                  <a:txBody>
-                    <a:bodyPr/>
-                    <a:lstStyle/>
-                    <a:p/>
-                  </a:txBody>
-                  <a:tcPr/>
-                </a:tc>
-              </a:tr>
-              <a:tr h="384048">
-                <a:tc>
-                  <a:txBody>
-                    <a:bodyPr/>
-                    <a:lstStyle/>
-                    <a:p>
-                      <a:r>
-                        <a:rPr sz="1050">
-                          <a:solidFill>
-                            <a:srgbClr val="3D5466"/>
-                          </a:solidFill>
-                          <a:latin typeface="Arial"/>
-                        </a:rPr>
-                        <a:t>Q2</a:t>
-                      </a:r>
-                    </a:p>
-                  </a:txBody>
-                  <a:tcPr/>
-                </a:tc>
-                <a:tc>
-                  <a:txBody>
-                    <a:bodyPr/>
-                    <a:lstStyle/>
-                    <a:p/>
-                  </a:txBody>
-                  <a:tcPr/>
-                </a:tc>
-                <a:tc>
-                  <a:txBody>
-                    <a:bodyPr/>
-                    <a:lstStyle/>
-                    <a:p/>
-                  </a:txBody>
-                  <a:tcPr/>
-                </a:tc>
-                <a:tc>
-                  <a:txBody>
-                    <a:bodyPr/>
-                    <a:lstStyle/>
-                    <a:p/>
-                  </a:txBody>
-                  <a:tcPr/>
-                </a:tc>
-                <a:tc>
-                  <a:txBody>
-                    <a:bodyPr/>
-                    <a:lstStyle/>
-                    <a:p/>
-                  </a:txBody>
-                  <a:tcPr/>
-                </a:tc>
-              </a:tr>
-              <a:tr h="384048">
-                <a:tc>
-                  <a:txBody>
-                    <a:bodyPr/>
-                    <a:lstStyle/>
-                    <a:p>
-                      <a:r>
-                        <a:rPr sz="1050">
-                          <a:solidFill>
-                            <a:srgbClr val="3D5466"/>
-                          </a:solidFill>
-                          <a:latin typeface="Arial"/>
-                        </a:rPr>
-                        <a:t>Q3</a:t>
-                      </a:r>
-                    </a:p>
-                  </a:txBody>
-                  <a:tcPr/>
-                </a:tc>
-                <a:tc>
-                  <a:txBody>
-                    <a:bodyPr/>
-                    <a:lstStyle/>
-                    <a:p/>
-                  </a:txBody>
-                  <a:tcPr/>
-                </a:tc>
-                <a:tc>
-                  <a:txBody>
-                    <a:bodyPr/>
-                    <a:lstStyle/>
-                    <a:p/>
-                  </a:txBody>
-                  <a:tcPr/>
-                </a:tc>
-                <a:tc>
-                  <a:txBody>
-                    <a:bodyPr/>
-                    <a:lstStyle/>
-                    <a:p/>
-                  </a:txBody>
-                  <a:tcPr/>
-                </a:tc>
-                <a:tc>
-                  <a:txBody>
-                    <a:bodyPr/>
-                    <a:lstStyle/>
-                    <a:p/>
-                  </a:txBody>
-                  <a:tcPr/>
-                </a:tc>
-              </a:tr>
-              <a:tr h="384048">
-                <a:tc>
-                  <a:txBody>
-                    <a:bodyPr/>
-                    <a:lstStyle/>
-                    <a:p>
-                      <a:r>
-                        <a:rPr sz="1050">
-                          <a:solidFill>
-                            <a:srgbClr val="3D5466"/>
-                          </a:solidFill>
-                          <a:latin typeface="Arial"/>
-                        </a:rPr>
-                        <a:t>Q4</a:t>
-                      </a:r>
-                    </a:p>
-                  </a:txBody>
-                  <a:tcPr/>
-                </a:tc>
-                <a:tc>
-                  <a:txBody>
-                    <a:bodyPr/>
-                    <a:lstStyle/>
-                    <a:p/>
-                  </a:txBody>
-                  <a:tcPr/>
-                </a:tc>
-                <a:tc>
-                  <a:txBody>
-                    <a:bodyPr/>
-                    <a:lstStyle/>
-                    <a:p/>
-                  </a:txBody>
-                  <a:tcPr/>
-                </a:tc>
-                <a:tc>
-                  <a:txBody>
-                    <a:bodyPr/>
-                    <a:lstStyle/>
-                    <a:p/>
-                  </a:txBody>
-                  <a:tcPr/>
-                </a:tc>
-                <a:tc>
-                  <a:txBody>
-                    <a:bodyPr/>
-                    <a:lstStyle/>
-                    <a:p/>
-                  </a:txBody>
-                  <a:tcPr/>
-                </a:tc>
-              </a:tr>
-            </a:tbl>
-          </a:graphicData>
-        </a:graphic>
-      </p:graphicFrame>
-      <p:sp>
-        <p:nvSpPr>
-          <p:cNvPr id="8" name="Rectangle 7"/>
+      <p:sp>
+        <p:nvSpPr>
+          <p:cNvPr id="7" name="TextBox 6"/>
+          <p:cNvSpPr txBox="1"/>
+          <p:nvPr/>
+        </p:nvSpPr>
+        <p:spPr>
+          <a:xfrm>
+            <a:off x="813816" y="502920"/>
+            <a:ext cx="10634472" cy="685800"/>
+          </a:xfrm>
+          <a:prstGeom prst="rect">
+            <a:avLst/>
+          </a:prstGeom>
+          <a:noFill/>
+        </p:spPr>
+        <p:txBody>
+          <a:bodyPr wrap="square">
+            <a:spAutoFit/>
+          </a:bodyPr>
+          <a:lstStyle/>
+          <a:p>
+            <a:pPr algn="l"/>
+            <a:r>
+              <a:rPr sz="2400" b="1" i="0">
+                <a:solidFill>
+                  <a:srgbClr val="1F2C56"/>
+                </a:solidFill>
+                <a:latin typeface="Arial"/>
+              </a:rPr>
+              <a:t>Marktbearbeitungs-Jahresplan erstellen</a:t>
+            </a:r>
+          </a:p>
+        </p:txBody>
+      </p:sp>
+      <p:sp>
+        <p:nvSpPr>
+          <p:cNvPr id="8" name="TextBox 7"/>
+          <p:cNvSpPr txBox="1"/>
+          <p:nvPr/>
+        </p:nvSpPr>
+        <p:spPr>
+          <a:xfrm>
+            <a:off x="685800" y="1554480"/>
+            <a:ext cx="10817352" cy="3840480"/>
+          </a:xfrm>
+          <a:prstGeom prst="rect">
+            <a:avLst/>
+          </a:prstGeom>
+          <a:noFill/>
+        </p:spPr>
+        <p:txBody>
+          <a:bodyPr wrap="square">
+            <a:spAutoFit/>
+          </a:bodyPr>
+          <a:lstStyle/>
+          <a:p>
+            <a:pPr marL="190500" indent="-190500">
+              <a:spcBef>
+                <a:spcPts val="400"/>
+              </a:spcBef>
+              <a:spcAft>
+                <a:spcPts val="200"/>
+              </a:spcAft>
+            </a:pPr>
+            <a:r>
+              <a:rPr sz="1400">
+                <a:solidFill>
+                  <a:srgbClr val="3D5466"/>
+                </a:solidFill>
+                <a:latin typeface="Arial"/>
+              </a:rPr>
+              <a:t>▸  Erstellen Sie Ihren Jahresplan: Zielgrößen, Maßnahmen, Meilensteine, Kontrollpunkte (AB-3).</a:t>
+            </a:r>
+          </a:p>
+          <a:p>
+            <a:pPr marL="190500" indent="-190500">
+              <a:spcBef>
+                <a:spcPts val="400"/>
+              </a:spcBef>
+              <a:spcAft>
+                <a:spcPts val="200"/>
+              </a:spcAft>
+            </a:pPr>
+            <a:r>
+              <a:rPr sz="1400">
+                <a:solidFill>
+                  <a:srgbClr val="3D5466"/>
+                </a:solidFill>
+                <a:latin typeface="Arial"/>
+              </a:rPr>
+              <a:t>▸  Verankern Sie je Quartal konkrete Aktivitäten und messbare Zwischenziele.</a:t>
+            </a:r>
+          </a:p>
+          <a:p>
+            <a:pPr marL="190500" indent="-190500">
+              <a:spcBef>
+                <a:spcPts val="400"/>
+              </a:spcBef>
+              <a:spcAft>
+                <a:spcPts val="200"/>
+              </a:spcAft>
+            </a:pPr>
+            <a:r>
+              <a:rPr sz="1400">
+                <a:solidFill>
+                  <a:srgbClr val="3D5466"/>
+                </a:solidFill>
+                <a:latin typeface="Arial"/>
+              </a:rPr>
+              <a:t>▸  Überarbeiten Sie den Plan nach dem Peer-Feedback (Konsolidierung).</a:t>
+            </a:r>
+          </a:p>
+        </p:txBody>
+      </p:sp>
+      <p:sp>
+        <p:nvSpPr>
+          <p:cNvPr id="9" name="Rectangle 8"/>
+          <p:cNvSpPr/>
+          <p:nvPr/>
+        </p:nvSpPr>
+        <p:spPr>
+          <a:xfrm>
+            <a:off x="685800" y="5486400"/>
+            <a:ext cx="10817352" cy="640080"/>
+          </a:xfrm>
+          <a:prstGeom prst="rect">
+            <a:avLst/>
+          </a:prstGeom>
+          <a:solidFill>
+            <a:srgbClr val="1F2C56"/>
+          </a:solidFill>
+          <a:ln>
+            <a:noFill/>
+          </a:ln>
+        </p:spPr>
+        <p:style>
+          <a:lnRef idx="1">
+            <a:schemeClr val="accent1"/>
+          </a:lnRef>
+          <a:fillRef idx="3">
+            <a:schemeClr val="accent1"/>
+          </a:fillRef>
+          <a:effectRef idx="2">
+            <a:schemeClr val="accent1"/>
+          </a:effectRef>
+          <a:fontRef idx="minor">
+            <a:schemeClr val="lt1"/>
+          </a:fontRef>
+        </p:style>
+        <p:txBody>
+          <a:bodyPr rtlCol="0" anchor="ctr"/>
+          <a:lstStyle/>
+          <a:p>
+            <a:pPr algn="ctr"/>
+          </a:p>
+        </p:txBody>
+      </p:sp>
+      <p:sp>
+        <p:nvSpPr>
+          <p:cNvPr id="10" name="TextBox 9"/>
+          <p:cNvSpPr txBox="1"/>
+          <p:nvPr/>
+        </p:nvSpPr>
+        <p:spPr>
+          <a:xfrm>
+            <a:off x="868680" y="5596128"/>
+            <a:ext cx="10451592" cy="457200"/>
+          </a:xfrm>
+          <a:prstGeom prst="rect">
+            <a:avLst/>
+          </a:prstGeom>
+          <a:noFill/>
+        </p:spPr>
+        <p:txBody>
+          <a:bodyPr wrap="square">
+            <a:spAutoFit/>
+          </a:bodyPr>
+          <a:lstStyle/>
+          <a:p>
+            <a:pPr algn="l"/>
+            <a:r>
+              <a:rPr sz="1300" b="1" i="0">
+                <a:solidFill>
+                  <a:srgbClr val="FFFFFF"/>
+                </a:solidFill>
+                <a:latin typeface="Arial"/>
+              </a:rPr>
+              <a:t>→  Bearbeitung im Teilnehmer-Workbook (Arbeitsblatt mit Ausfüllfeldern)</a:t>
+            </a:r>
+          </a:p>
+        </p:txBody>
+      </p:sp>
+      <p:sp>
+        <p:nvSpPr>
+          <p:cNvPr id="11" name="Rectangle 10"/>
           <p:cNvSpPr/>
           <p:nvPr/>
         </p:nvSpPr>
@@ -9160,7 +8526,7 @@
       </p:sp>
       <p:sp>
         <p:nvSpPr>
-          <p:cNvPr id="9" name="TextBox 8"/>
+          <p:cNvPr id="12" name="TextBox 11"/>
           <p:cNvSpPr txBox="1"/>
           <p:nvPr/>
         </p:nvSpPr>
@@ -9193,16 +8559,120 @@
           </a:p>
         </p:txBody>
       </p:sp>
-      <p:sp>
-        <p:nvSpPr>
-          <p:cNvPr id="10" name="TextBox 9"/>
+    </p:spTree>
+  </p:cSld>
+  <p:clrMapOvr>
+    <a:masterClrMapping/>
+  </p:clrMapOvr>
+</p:sld>
+</file>
+
+<file path=ppt/slides/slide19.xml><?xml version="1.0" encoding="utf-8"?>
+<p:sld xmlns:a="http://schemas.openxmlformats.org/drawingml/2006/main" xmlns:p="http://schemas.openxmlformats.org/presentationml/2006/main" xmlns:r="http://schemas.openxmlformats.org/officeDocument/2006/relationships">
+  <p:cSld>
+    <p:spTree>
+      <p:nvGrpSpPr>
+        <p:cNvPr id="1" name=""/>
+        <p:cNvGrpSpPr/>
+        <p:nvPr/>
+      </p:nvGrpSpPr>
+      <p:grpSpPr/>
+      <p:sp>
+        <p:nvSpPr>
+          <p:cNvPr id="2" name="Rectangle 1"/>
+          <p:cNvSpPr/>
+          <p:nvPr/>
+        </p:nvSpPr>
+        <p:spPr>
+          <a:xfrm>
+            <a:off x="0" y="0"/>
+            <a:ext cx="12188952" cy="6858000"/>
+          </a:xfrm>
+          <a:prstGeom prst="rect">
+            <a:avLst/>
+          </a:prstGeom>
+          <a:solidFill>
+            <a:srgbClr val="EDEDF3"/>
+          </a:solidFill>
+          <a:ln>
+            <a:noFill/>
+          </a:ln>
+        </p:spPr>
+        <p:style>
+          <a:lnRef idx="1">
+            <a:schemeClr val="accent1"/>
+          </a:lnRef>
+          <a:fillRef idx="3">
+            <a:schemeClr val="accent1"/>
+          </a:fillRef>
+          <a:effectRef idx="2">
+            <a:schemeClr val="accent1"/>
+          </a:effectRef>
+          <a:fontRef idx="minor">
+            <a:schemeClr val="lt1"/>
+          </a:fontRef>
+        </p:style>
+        <p:txBody>
+          <a:bodyPr rtlCol="0" anchor="ctr"/>
+          <a:lstStyle/>
+          <a:p>
+            <a:pPr algn="ctr"/>
+          </a:p>
+        </p:txBody>
+      </p:sp>
+      <p:sp>
+        <p:nvSpPr>
+          <p:cNvPr id="3" name="Rectangle 2"/>
+          <p:cNvSpPr/>
+          <p:nvPr/>
+        </p:nvSpPr>
+        <p:spPr>
+          <a:xfrm>
+            <a:off x="0" y="0"/>
+            <a:ext cx="12188952" cy="50292"/>
+          </a:xfrm>
+          <a:prstGeom prst="rect">
+            <a:avLst/>
+          </a:prstGeom>
+          <a:solidFill>
+            <a:srgbClr val="1F2C56"/>
+          </a:solidFill>
+          <a:ln>
+            <a:noFill/>
+          </a:ln>
+        </p:spPr>
+        <p:style>
+          <a:lnRef idx="1">
+            <a:schemeClr val="accent1"/>
+          </a:lnRef>
+          <a:fillRef idx="3">
+            <a:schemeClr val="accent1"/>
+          </a:fillRef>
+          <a:effectRef idx="2">
+            <a:schemeClr val="accent1"/>
+          </a:effectRef>
+          <a:fontRef idx="minor">
+            <a:schemeClr val="lt1"/>
+          </a:fontRef>
+        </p:style>
+        <p:txBody>
+          <a:bodyPr rtlCol="0" anchor="ctr"/>
+          <a:lstStyle/>
+          <a:p>
+            <a:pPr algn="ctr"/>
+          </a:p>
+        </p:txBody>
+      </p:sp>
+      <p:sp>
+        <p:nvSpPr>
+          <p:cNvPr id="4" name="TextBox 3"/>
           <p:cNvSpPr txBox="1"/>
           <p:nvPr/>
         </p:nvSpPr>
         <p:spPr>
           <a:xfrm>
-            <a:off x="7176211" y="6583680"/>
-            <a:ext cx="4326940" cy="256032"/>
+            <a:off x="685800" y="109728"/>
+            <a:ext cx="10817352" cy="228600"/>
           </a:xfrm>
           <a:prstGeom prst="rect">
             <a:avLst/>
@@ -9215,7 +8685,267 @@
           </a:bodyPr>
           <a:lstStyle/>
           <a:p>
-            <a:pPr algn="r"/>
+            <a:pPr algn="l"/>
+            <a:r>
+              <a:rPr sz="750">
+                <a:solidFill>
+                  <a:srgbClr val="78808C"/>
+                </a:solidFill>
+                <a:latin typeface="Consolas"/>
+              </a:rPr>
+              <a:t>M15  ·  INHALT</a:t>
+            </a:r>
+          </a:p>
+        </p:txBody>
+      </p:sp>
+      <p:sp>
+        <p:nvSpPr>
+          <p:cNvPr id="5" name="Rectangle 4"/>
+          <p:cNvSpPr/>
+          <p:nvPr/>
+        </p:nvSpPr>
+        <p:spPr>
+          <a:xfrm>
+            <a:off x="0" y="1234440"/>
+            <a:ext cx="12188952" cy="12700"/>
+          </a:xfrm>
+          <a:prstGeom prst="rect">
+            <a:avLst/>
+          </a:prstGeom>
+          <a:solidFill>
+            <a:srgbClr val="D8DFE4"/>
+          </a:solidFill>
+          <a:ln>
+            <a:noFill/>
+          </a:ln>
+        </p:spPr>
+        <p:style>
+          <a:lnRef idx="1">
+            <a:schemeClr val="accent1"/>
+          </a:lnRef>
+          <a:fillRef idx="3">
+            <a:schemeClr val="accent1"/>
+          </a:fillRef>
+          <a:effectRef idx="2">
+            <a:schemeClr val="accent1"/>
+          </a:effectRef>
+          <a:fontRef idx="minor">
+            <a:schemeClr val="lt1"/>
+          </a:fontRef>
+        </p:style>
+        <p:txBody>
+          <a:bodyPr rtlCol="0" anchor="ctr"/>
+          <a:lstStyle/>
+          <a:p>
+            <a:pPr algn="ctr"/>
+          </a:p>
+        </p:txBody>
+      </p:sp>
+      <p:sp>
+        <p:nvSpPr>
+          <p:cNvPr id="6" name="Rectangle 5"/>
+          <p:cNvSpPr/>
+          <p:nvPr/>
+        </p:nvSpPr>
+        <p:spPr>
+          <a:xfrm>
+            <a:off x="685800" y="502920"/>
+            <a:ext cx="36576" cy="658368"/>
+          </a:xfrm>
+          <a:prstGeom prst="rect">
+            <a:avLst/>
+          </a:prstGeom>
+          <a:solidFill>
+            <a:srgbClr val="D9C089"/>
+          </a:solidFill>
+          <a:ln>
+            <a:noFill/>
+          </a:ln>
+        </p:spPr>
+        <p:style>
+          <a:lnRef idx="1">
+            <a:schemeClr val="accent1"/>
+          </a:lnRef>
+          <a:fillRef idx="3">
+            <a:schemeClr val="accent1"/>
+          </a:fillRef>
+          <a:effectRef idx="2">
+            <a:schemeClr val="accent1"/>
+          </a:effectRef>
+          <a:fontRef idx="minor">
+            <a:schemeClr val="lt1"/>
+          </a:fontRef>
+        </p:style>
+        <p:txBody>
+          <a:bodyPr rtlCol="0" anchor="ctr"/>
+          <a:lstStyle/>
+          <a:p>
+            <a:pPr algn="ctr"/>
+          </a:p>
+        </p:txBody>
+      </p:sp>
+      <p:sp>
+        <p:nvSpPr>
+          <p:cNvPr id="7" name="TextBox 6"/>
+          <p:cNvSpPr txBox="1"/>
+          <p:nvPr/>
+        </p:nvSpPr>
+        <p:spPr>
+          <a:xfrm>
+            <a:off x="813816" y="502920"/>
+            <a:ext cx="10634472" cy="685800"/>
+          </a:xfrm>
+          <a:prstGeom prst="rect">
+            <a:avLst/>
+          </a:prstGeom>
+          <a:noFill/>
+        </p:spPr>
+        <p:txBody>
+          <a:bodyPr wrap="square">
+            <a:spAutoFit/>
+          </a:bodyPr>
+          <a:lstStyle/>
+          <a:p>
+            <a:pPr algn="l"/>
+            <a:r>
+              <a:rPr sz="2400" b="1" i="0">
+                <a:solidFill>
+                  <a:srgbClr val="1F2C56"/>
+                </a:solidFill>
+                <a:latin typeface="Arial"/>
+              </a:rPr>
+              <a:t>Prinzip dieses Moduls</a:t>
+            </a:r>
+          </a:p>
+        </p:txBody>
+      </p:sp>
+      <p:sp>
+        <p:nvSpPr>
+          <p:cNvPr id="8" name="TextBox 7"/>
+          <p:cNvSpPr txBox="1"/>
+          <p:nvPr/>
+        </p:nvSpPr>
+        <p:spPr>
+          <a:xfrm>
+            <a:off x="685800" y="1417320"/>
+            <a:ext cx="10817352" cy="4892040"/>
+          </a:xfrm>
+          <a:prstGeom prst="rect">
+            <a:avLst/>
+          </a:prstGeom>
+          <a:noFill/>
+        </p:spPr>
+        <p:txBody>
+          <a:bodyPr wrap="square" anchor="ctr">
+            <a:spAutoFit/>
+          </a:bodyPr>
+          <a:lstStyle/>
+          <a:p>
+            <a:pPr marL="177800" indent="-177800">
+              <a:spcBef>
+                <a:spcPts val="600"/>
+              </a:spcBef>
+              <a:spcAft>
+                <a:spcPts val="200"/>
+              </a:spcAft>
+            </a:pPr>
+            <a:r>
+              <a:rPr sz="1200" i="1">
+                <a:solidFill>
+                  <a:srgbClr val="3D5466"/>
+                </a:solidFill>
+                <a:latin typeface="Arial"/>
+              </a:rPr>
+              <a:t>→  Wer jeden Kunden gleich bedient, verzettelt seinen Markt.</a:t>
+            </a:r>
+          </a:p>
+          <a:p>
+            <a:pPr marL="190500" indent="-190500">
+              <a:spcBef>
+                <a:spcPts val="400"/>
+              </a:spcBef>
+              <a:spcAft>
+                <a:spcPts val="200"/>
+              </a:spcAft>
+            </a:pPr>
+            <a:r>
+              <a:rPr sz="1300">
+                <a:solidFill>
+                  <a:srgbClr val="3D5466"/>
+                </a:solidFill>
+                <a:latin typeface="Arial"/>
+              </a:rPr>
+              <a:t>▸  Ein priorisiertes Zielsegment mit klarem Wertversprechen schlägt die Gießkanne – Fokus ist die Strategie.</a:t>
+            </a:r>
+          </a:p>
+        </p:txBody>
+      </p:sp>
+      <p:sp>
+        <p:nvSpPr>
+          <p:cNvPr id="9" name="Rectangle 8"/>
+          <p:cNvSpPr/>
+          <p:nvPr/>
+        </p:nvSpPr>
+        <p:spPr>
+          <a:xfrm>
+            <a:off x="0" y="6510528"/>
+            <a:ext cx="12188952" cy="347472"/>
+          </a:xfrm>
+          <a:prstGeom prst="rect">
+            <a:avLst/>
+          </a:prstGeom>
+          <a:solidFill>
+            <a:srgbClr val="0A1937"/>
+          </a:solidFill>
+          <a:ln>
+            <a:noFill/>
+          </a:ln>
+        </p:spPr>
+        <p:style>
+          <a:lnRef idx="1">
+            <a:schemeClr val="accent1"/>
+          </a:lnRef>
+          <a:fillRef idx="3">
+            <a:schemeClr val="accent1"/>
+          </a:fillRef>
+          <a:effectRef idx="2">
+            <a:schemeClr val="accent1"/>
+          </a:effectRef>
+          <a:fontRef idx="minor">
+            <a:schemeClr val="lt1"/>
+          </a:fontRef>
+        </p:style>
+        <p:txBody>
+          <a:bodyPr rtlCol="0" anchor="ctr"/>
+          <a:lstStyle/>
+          <a:p>
+            <a:pPr algn="ctr"/>
+          </a:p>
+        </p:txBody>
+      </p:sp>
+      <p:sp>
+        <p:nvSpPr>
+          <p:cNvPr id="10" name="TextBox 9"/>
+          <p:cNvSpPr txBox="1"/>
+          <p:nvPr/>
+        </p:nvSpPr>
+        <p:spPr>
+          <a:xfrm>
+            <a:off x="685800" y="6583680"/>
+            <a:ext cx="6490411" cy="256032"/>
+          </a:xfrm>
+          <a:prstGeom prst="rect">
+            <a:avLst/>
+          </a:prstGeom>
+          <a:noFill/>
+        </p:spPr>
+        <p:txBody>
+          <a:bodyPr wrap="none">
+            <a:spAutoFit/>
+          </a:bodyPr>
+          <a:lstStyle/>
+          <a:p>
+            <a:pPr algn="l"/>
             <a:r>
               <a:rPr sz="700">
                 <a:solidFill>
@@ -9223,7 +8953,7 @@
                 </a:solidFill>
                 <a:latin typeface="Consolas"/>
               </a:rPr>
-              <a:t>Übersicht</a:t>
+              <a:t>FKB Campus  ·  M15</a:t>
             </a:r>
           </a:p>
         </p:txBody>
@@ -9602,6 +9332,424 @@
 </p:sld>
 </file>
 
+<file path=ppt/slides/slide20.xml><?xml version="1.0" encoding="utf-8"?>
+<p:sld xmlns:a="http://schemas.openxmlformats.org/drawingml/2006/main" xmlns:p="http://schemas.openxmlformats.org/presentationml/2006/main" xmlns:r="http://schemas.openxmlformats.org/officeDocument/2006/relationships">
+  <p:cSld>
+    <p:spTree>
+      <p:nvGrpSpPr>
+        <p:cNvPr id="1" name=""/>
+        <p:cNvGrpSpPr/>
+        <p:nvPr/>
+      </p:nvGrpSpPr>
+      <p:grpSpPr/>
+      <p:sp>
+        <p:nvSpPr>
+          <p:cNvPr id="2" name="Rectangle 1"/>
+          <p:cNvSpPr/>
+          <p:nvPr/>
+        </p:nvSpPr>
+        <p:spPr>
+          <a:xfrm>
+            <a:off x="0" y="0"/>
+            <a:ext cx="12188952" cy="6858000"/>
+          </a:xfrm>
+          <a:prstGeom prst="rect">
+            <a:avLst/>
+          </a:prstGeom>
+          <a:solidFill>
+            <a:srgbClr val="EDEDF3"/>
+          </a:solidFill>
+          <a:ln>
+            <a:noFill/>
+          </a:ln>
+        </p:spPr>
+        <p:style>
+          <a:lnRef idx="1">
+            <a:schemeClr val="accent1"/>
+          </a:lnRef>
+          <a:fillRef idx="3">
+            <a:schemeClr val="accent1"/>
+          </a:fillRef>
+          <a:effectRef idx="2">
+            <a:schemeClr val="accent1"/>
+          </a:effectRef>
+          <a:fontRef idx="minor">
+            <a:schemeClr val="lt1"/>
+          </a:fontRef>
+        </p:style>
+        <p:txBody>
+          <a:bodyPr rtlCol="0" anchor="ctr"/>
+          <a:lstStyle/>
+          <a:p>
+            <a:pPr algn="ctr"/>
+          </a:p>
+        </p:txBody>
+      </p:sp>
+      <p:sp>
+        <p:nvSpPr>
+          <p:cNvPr id="3" name="Rectangle 2"/>
+          <p:cNvSpPr/>
+          <p:nvPr/>
+        </p:nvSpPr>
+        <p:spPr>
+          <a:xfrm>
+            <a:off x="0" y="0"/>
+            <a:ext cx="12188952" cy="50292"/>
+          </a:xfrm>
+          <a:prstGeom prst="rect">
+            <a:avLst/>
+          </a:prstGeom>
+          <a:solidFill>
+            <a:srgbClr val="1F2C56"/>
+          </a:solidFill>
+          <a:ln>
+            <a:noFill/>
+          </a:ln>
+        </p:spPr>
+        <p:style>
+          <a:lnRef idx="1">
+            <a:schemeClr val="accent1"/>
+          </a:lnRef>
+          <a:fillRef idx="3">
+            <a:schemeClr val="accent1"/>
+          </a:fillRef>
+          <a:effectRef idx="2">
+            <a:schemeClr val="accent1"/>
+          </a:effectRef>
+          <a:fontRef idx="minor">
+            <a:schemeClr val="lt1"/>
+          </a:fontRef>
+        </p:style>
+        <p:txBody>
+          <a:bodyPr rtlCol="0" anchor="ctr"/>
+          <a:lstStyle/>
+          <a:p>
+            <a:pPr algn="ctr"/>
+          </a:p>
+        </p:txBody>
+      </p:sp>
+      <p:sp>
+        <p:nvSpPr>
+          <p:cNvPr id="4" name="TextBox 3"/>
+          <p:cNvSpPr txBox="1"/>
+          <p:nvPr/>
+        </p:nvSpPr>
+        <p:spPr>
+          <a:xfrm>
+            <a:off x="685800" y="109728"/>
+            <a:ext cx="10817352" cy="228600"/>
+          </a:xfrm>
+          <a:prstGeom prst="rect">
+            <a:avLst/>
+          </a:prstGeom>
+          <a:noFill/>
+        </p:spPr>
+        <p:txBody>
+          <a:bodyPr wrap="none">
+            <a:spAutoFit/>
+          </a:bodyPr>
+          <a:lstStyle/>
+          <a:p>
+            <a:pPr algn="l"/>
+            <a:r>
+              <a:rPr sz="750">
+                <a:solidFill>
+                  <a:srgbClr val="78808C"/>
+                </a:solidFill>
+                <a:latin typeface="Consolas"/>
+              </a:rPr>
+              <a:t>M15  ·  INHALT</a:t>
+            </a:r>
+          </a:p>
+        </p:txBody>
+      </p:sp>
+      <p:sp>
+        <p:nvSpPr>
+          <p:cNvPr id="5" name="Rectangle 4"/>
+          <p:cNvSpPr/>
+          <p:nvPr/>
+        </p:nvSpPr>
+        <p:spPr>
+          <a:xfrm>
+            <a:off x="0" y="1234440"/>
+            <a:ext cx="12188952" cy="12700"/>
+          </a:xfrm>
+          <a:prstGeom prst="rect">
+            <a:avLst/>
+          </a:prstGeom>
+          <a:solidFill>
+            <a:srgbClr val="D8DFE4"/>
+          </a:solidFill>
+          <a:ln>
+            <a:noFill/>
+          </a:ln>
+        </p:spPr>
+        <p:style>
+          <a:lnRef idx="1">
+            <a:schemeClr val="accent1"/>
+          </a:lnRef>
+          <a:fillRef idx="3">
+            <a:schemeClr val="accent1"/>
+          </a:fillRef>
+          <a:effectRef idx="2">
+            <a:schemeClr val="accent1"/>
+          </a:effectRef>
+          <a:fontRef idx="minor">
+            <a:schemeClr val="lt1"/>
+          </a:fontRef>
+        </p:style>
+        <p:txBody>
+          <a:bodyPr rtlCol="0" anchor="ctr"/>
+          <a:lstStyle/>
+          <a:p>
+            <a:pPr algn="ctr"/>
+          </a:p>
+        </p:txBody>
+      </p:sp>
+      <p:sp>
+        <p:nvSpPr>
+          <p:cNvPr id="6" name="Rectangle 5"/>
+          <p:cNvSpPr/>
+          <p:nvPr/>
+        </p:nvSpPr>
+        <p:spPr>
+          <a:xfrm>
+            <a:off x="685800" y="502920"/>
+            <a:ext cx="36576" cy="658368"/>
+          </a:xfrm>
+          <a:prstGeom prst="rect">
+            <a:avLst/>
+          </a:prstGeom>
+          <a:solidFill>
+            <a:srgbClr val="D9C089"/>
+          </a:solidFill>
+          <a:ln>
+            <a:noFill/>
+          </a:ln>
+        </p:spPr>
+        <p:style>
+          <a:lnRef idx="1">
+            <a:schemeClr val="accent1"/>
+          </a:lnRef>
+          <a:fillRef idx="3">
+            <a:schemeClr val="accent1"/>
+          </a:fillRef>
+          <a:effectRef idx="2">
+            <a:schemeClr val="accent1"/>
+          </a:effectRef>
+          <a:fontRef idx="minor">
+            <a:schemeClr val="lt1"/>
+          </a:fontRef>
+        </p:style>
+        <p:txBody>
+          <a:bodyPr rtlCol="0" anchor="ctr"/>
+          <a:lstStyle/>
+          <a:p>
+            <a:pPr algn="ctr"/>
+          </a:p>
+        </p:txBody>
+      </p:sp>
+      <p:sp>
+        <p:nvSpPr>
+          <p:cNvPr id="7" name="TextBox 6"/>
+          <p:cNvSpPr txBox="1"/>
+          <p:nvPr/>
+        </p:nvSpPr>
+        <p:spPr>
+          <a:xfrm>
+            <a:off x="813816" y="502920"/>
+            <a:ext cx="10634472" cy="685800"/>
+          </a:xfrm>
+          <a:prstGeom prst="rect">
+            <a:avLst/>
+          </a:prstGeom>
+          <a:noFill/>
+        </p:spPr>
+        <p:txBody>
+          <a:bodyPr wrap="square">
+            <a:spAutoFit/>
+          </a:bodyPr>
+          <a:lstStyle/>
+          <a:p>
+            <a:pPr algn="l"/>
+            <a:r>
+              <a:rPr sz="2400" b="1" i="0">
+                <a:solidFill>
+                  <a:srgbClr val="1F2C56"/>
+                </a:solidFill>
+                <a:latin typeface="Arial"/>
+              </a:rPr>
+              <a:t>Reflexion und Selbstcheck</a:t>
+            </a:r>
+          </a:p>
+        </p:txBody>
+      </p:sp>
+      <p:sp>
+        <p:nvSpPr>
+          <p:cNvPr id="8" name="TextBox 7"/>
+          <p:cNvSpPr txBox="1"/>
+          <p:nvPr/>
+        </p:nvSpPr>
+        <p:spPr>
+          <a:xfrm>
+            <a:off x="685800" y="1417320"/>
+            <a:ext cx="10817352" cy="4892040"/>
+          </a:xfrm>
+          <a:prstGeom prst="rect">
+            <a:avLst/>
+          </a:prstGeom>
+          <a:noFill/>
+        </p:spPr>
+        <p:txBody>
+          <a:bodyPr wrap="square" anchor="ctr">
+            <a:spAutoFit/>
+          </a:bodyPr>
+          <a:lstStyle/>
+          <a:p>
+            <a:pPr marL="190500" indent="-190500">
+              <a:spcBef>
+                <a:spcPts val="400"/>
+              </a:spcBef>
+              <a:spcAft>
+                <a:spcPts val="200"/>
+              </a:spcAft>
+            </a:pPr>
+            <a:r>
+              <a:rPr sz="1300">
+                <a:solidFill>
+                  <a:srgbClr val="3D5466"/>
+                </a:solidFill>
+                <a:latin typeface="Arial"/>
+              </a:rPr>
+              <a:t>▸  Was ist Ihre erste Aktion in den nächsten 7 Tagen?</a:t>
+            </a:r>
+          </a:p>
+          <a:p>
+            <a:pPr marL="190500" indent="-190500">
+              <a:spcBef>
+                <a:spcPts val="400"/>
+              </a:spcBef>
+              <a:spcAft>
+                <a:spcPts val="200"/>
+              </a:spcAft>
+            </a:pPr>
+            <a:r>
+              <a:rPr sz="1300">
+                <a:solidFill>
+                  <a:srgbClr val="3D5466"/>
+                </a:solidFill>
+                <a:latin typeface="Arial"/>
+              </a:rPr>
+              <a:t>▸  Bis wann sprechen Sie mit Ihrer Führungskraft über Ihren Jahresplan? (Datum)</a:t>
+            </a:r>
+          </a:p>
+          <a:p>
+            <a:pPr marL="190500" indent="-190500">
+              <a:spcBef>
+                <a:spcPts val="400"/>
+              </a:spcBef>
+              <a:spcAft>
+                <a:spcPts val="200"/>
+              </a:spcAft>
+            </a:pPr>
+            <a:r>
+              <a:rPr sz="1300">
+                <a:solidFill>
+                  <a:srgbClr val="3D5466"/>
+                </a:solidFill>
+                <a:latin typeface="Arial"/>
+              </a:rPr>
+              <a:t>▸  Welches Segment haben Sie bisher aus Gewohnheit bedient, obwohl es nicht Ihr Primärsegment ist?</a:t>
+            </a:r>
+          </a:p>
+        </p:txBody>
+      </p:sp>
+      <p:sp>
+        <p:nvSpPr>
+          <p:cNvPr id="9" name="Rectangle 8"/>
+          <p:cNvSpPr/>
+          <p:nvPr/>
+        </p:nvSpPr>
+        <p:spPr>
+          <a:xfrm>
+            <a:off x="0" y="6510528"/>
+            <a:ext cx="12188952" cy="347472"/>
+          </a:xfrm>
+          <a:prstGeom prst="rect">
+            <a:avLst/>
+          </a:prstGeom>
+          <a:solidFill>
+            <a:srgbClr val="0A1937"/>
+          </a:solidFill>
+          <a:ln>
+            <a:noFill/>
+          </a:ln>
+        </p:spPr>
+        <p:style>
+          <a:lnRef idx="1">
+            <a:schemeClr val="accent1"/>
+          </a:lnRef>
+          <a:fillRef idx="3">
+            <a:schemeClr val="accent1"/>
+          </a:fillRef>
+          <a:effectRef idx="2">
+            <a:schemeClr val="accent1"/>
+          </a:effectRef>
+          <a:fontRef idx="minor">
+            <a:schemeClr val="lt1"/>
+          </a:fontRef>
+        </p:style>
+        <p:txBody>
+          <a:bodyPr rtlCol="0" anchor="ctr"/>
+          <a:lstStyle/>
+          <a:p>
+            <a:pPr algn="ctr"/>
+          </a:p>
+        </p:txBody>
+      </p:sp>
+      <p:sp>
+        <p:nvSpPr>
+          <p:cNvPr id="10" name="TextBox 9"/>
+          <p:cNvSpPr txBox="1"/>
+          <p:nvPr/>
+        </p:nvSpPr>
+        <p:spPr>
+          <a:xfrm>
+            <a:off x="685800" y="6583680"/>
+            <a:ext cx="6490411" cy="256032"/>
+          </a:xfrm>
+          <a:prstGeom prst="rect">
+            <a:avLst/>
+          </a:prstGeom>
+          <a:noFill/>
+        </p:spPr>
+        <p:txBody>
+          <a:bodyPr wrap="none">
+            <a:spAutoFit/>
+          </a:bodyPr>
+          <a:lstStyle/>
+          <a:p>
+            <a:pPr algn="l"/>
+            <a:r>
+              <a:rPr sz="700">
+                <a:solidFill>
+                  <a:srgbClr val="A0B4D2"/>
+                </a:solidFill>
+                <a:latin typeface="Consolas"/>
+              </a:rPr>
+              <a:t>FKB Campus  ·  M15</a:t>
+            </a:r>
+          </a:p>
+        </p:txBody>
+      </p:sp>
+    </p:spTree>
+  </p:cSld>
+  <p:clrMapOvr>
+    <a:masterClrMapping/>
+  </p:clrMapOvr>
+</p:sld>
+</file>
+
 <file path=ppt/slides/slide3.xml><?xml version="1.0" encoding="utf-8"?>
 <p:sld xmlns:a="http://schemas.openxmlformats.org/drawingml/2006/main" xmlns:p="http://schemas.openxmlformats.org/presentationml/2006/main" xmlns:r="http://schemas.openxmlformats.org/officeDocument/2006/relationships">
   <p:cSld>
@@ -10951,7 +11099,7 @@
             <a:avLst/>
           </a:prstGeom>
           <a:solidFill>
-            <a:srgbClr val="EDEDF3"/>
+            <a:srgbClr val="1F2C56"/>
           </a:solidFill>
           <a:ln>
             <a:noFill/>
@@ -10981,57 +11129,14 @@
       </p:sp>
       <p:sp>
         <p:nvSpPr>
-          <p:cNvPr id="3" name="Rectangle 2"/>
-          <p:cNvSpPr/>
-          <p:nvPr/>
-        </p:nvSpPr>
-        <p:spPr>
-          <a:xfrm>
-            <a:off x="0" y="0"/>
-            <a:ext cx="12188952" cy="50292"/>
-          </a:xfrm>
-          <a:prstGeom prst="rect">
-            <a:avLst/>
-          </a:prstGeom>
-          <a:solidFill>
-            <a:srgbClr val="1F2C56"/>
-          </a:solidFill>
-          <a:ln>
-            <a:noFill/>
-          </a:ln>
-        </p:spPr>
-        <p:style>
-          <a:lnRef idx="1">
-            <a:schemeClr val="accent1"/>
-          </a:lnRef>
-          <a:fillRef idx="3">
-            <a:schemeClr val="accent1"/>
-          </a:fillRef>
-          <a:effectRef idx="2">
-            <a:schemeClr val="accent1"/>
-          </a:effectRef>
-          <a:fontRef idx="minor">
-            <a:schemeClr val="lt1"/>
-          </a:fontRef>
-        </p:style>
-        <p:txBody>
-          <a:bodyPr rtlCol="0" anchor="ctr"/>
-          <a:lstStyle/>
-          <a:p>
-            <a:pPr algn="ctr"/>
-          </a:p>
-        </p:txBody>
-      </p:sp>
-      <p:sp>
-        <p:nvSpPr>
-          <p:cNvPr id="4" name="TextBox 3"/>
+          <p:cNvPr id="3" name="TextBox 2"/>
           <p:cNvSpPr txBox="1"/>
           <p:nvPr/>
         </p:nvSpPr>
         <p:spPr>
           <a:xfrm>
-            <a:off x="685800" y="109728"/>
-            <a:ext cx="10817352" cy="228600"/>
+            <a:off x="685800" y="2377440"/>
+            <a:ext cx="10817352" cy="365760"/>
           </a:xfrm>
           <a:prstGeom prst="rect">
             <a:avLst/>
@@ -11046,70 +11151,27 @@
           <a:p>
             <a:pPr algn="l"/>
             <a:r>
-              <a:rPr sz="750">
-                <a:solidFill>
-                  <a:srgbClr val="78808C"/>
+              <a:rPr sz="1200">
+                <a:solidFill>
+                  <a:srgbClr val="D9C089"/>
                 </a:solidFill>
                 <a:latin typeface="Consolas"/>
               </a:rPr>
-              <a:t>M15  ·  INHALT</a:t>
-            </a:r>
-          </a:p>
-        </p:txBody>
-      </p:sp>
-      <p:sp>
-        <p:nvSpPr>
-          <p:cNvPr id="5" name="Rectangle 4"/>
+              <a:t>09:35–10:15</a:t>
+            </a:r>
+          </a:p>
+        </p:txBody>
+      </p:sp>
+      <p:sp>
+        <p:nvSpPr>
+          <p:cNvPr id="4" name="Rectangle 3"/>
           <p:cNvSpPr/>
           <p:nvPr/>
         </p:nvSpPr>
         <p:spPr>
           <a:xfrm>
-            <a:off x="0" y="1234440"/>
-            <a:ext cx="12188952" cy="12700"/>
-          </a:xfrm>
-          <a:prstGeom prst="rect">
-            <a:avLst/>
-          </a:prstGeom>
-          <a:solidFill>
-            <a:srgbClr val="D8DFE4"/>
-          </a:solidFill>
-          <a:ln>
-            <a:noFill/>
-          </a:ln>
-        </p:spPr>
-        <p:style>
-          <a:lnRef idx="1">
-            <a:schemeClr val="accent1"/>
-          </a:lnRef>
-          <a:fillRef idx="3">
-            <a:schemeClr val="accent1"/>
-          </a:fillRef>
-          <a:effectRef idx="2">
-            <a:schemeClr val="accent1"/>
-          </a:effectRef>
-          <a:fontRef idx="minor">
-            <a:schemeClr val="lt1"/>
-          </a:fontRef>
-        </p:style>
-        <p:txBody>
-          <a:bodyPr rtlCol="0" anchor="ctr"/>
-          <a:lstStyle/>
-          <a:p>
-            <a:pPr algn="ctr"/>
-          </a:p>
-        </p:txBody>
-      </p:sp>
-      <p:sp>
-        <p:nvSpPr>
-          <p:cNvPr id="6" name="Rectangle 5"/>
-          <p:cNvSpPr/>
-          <p:nvPr/>
-        </p:nvSpPr>
-        <p:spPr>
-          <a:xfrm>
-            <a:off x="685800" y="502920"/>
-            <a:ext cx="36576" cy="658368"/>
+            <a:off x="685800" y="2788920"/>
+            <a:ext cx="548640" cy="38100"/>
           </a:xfrm>
           <a:prstGeom prst="rect">
             <a:avLst/>
@@ -11145,14 +11207,14 @@
       </p:sp>
       <p:sp>
         <p:nvSpPr>
-          <p:cNvPr id="7" name="TextBox 6"/>
+          <p:cNvPr id="5" name="TextBox 4"/>
           <p:cNvSpPr txBox="1"/>
           <p:nvPr/>
         </p:nvSpPr>
         <p:spPr>
           <a:xfrm>
-            <a:off x="813816" y="502920"/>
-            <a:ext cx="10634472" cy="685800"/>
+            <a:off x="685800" y="3017520"/>
+            <a:ext cx="10817352" cy="1463040"/>
           </a:xfrm>
           <a:prstGeom prst="rect">
             <a:avLst/>
@@ -11167,27 +11229,27 @@
           <a:p>
             <a:pPr algn="l"/>
             <a:r>
-              <a:rPr sz="2400" b="1" i="0">
-                <a:solidFill>
-                  <a:srgbClr val="1F2C56"/>
+              <a:rPr sz="4000" b="1" i="0">
+                <a:solidFill>
+                  <a:srgbClr val="FFFFFF"/>
                 </a:solidFill>
                 <a:latin typeface="Arial"/>
               </a:rPr>
-              <a:t>Vom reaktiven zum strategischen Vertrieb</a:t>
-            </a:r>
-          </a:p>
-        </p:txBody>
-      </p:sp>
-      <p:sp>
-        <p:nvSpPr>
-          <p:cNvPr id="8" name="TextBox 7"/>
+              <a:t>Theorie-Block I: Markt &amp; Strategie</a:t>
+            </a:r>
+          </a:p>
+        </p:txBody>
+      </p:sp>
+      <p:sp>
+        <p:nvSpPr>
+          <p:cNvPr id="6" name="TextBox 5"/>
           <p:cNvSpPr txBox="1"/>
           <p:nvPr/>
         </p:nvSpPr>
         <p:spPr>
           <a:xfrm>
-            <a:off x="685800" y="1417320"/>
-            <a:ext cx="10817352" cy="4892040"/>
+            <a:off x="685800" y="4480560"/>
+            <a:ext cx="8653881" cy="1280160"/>
           </a:xfrm>
           <a:prstGeom prst="rect">
             <a:avLst/>
@@ -11200,174 +11262,29 @@
           </a:bodyPr>
           <a:lstStyle/>
           <a:p>
-            <a:pPr marL="190500" indent="-190500">
-              <a:spcBef>
-                <a:spcPts val="400"/>
-              </a:spcBef>
-              <a:spcAft>
-                <a:spcPts val="200"/>
-              </a:spcAft>
-            </a:pPr>
-            <a:r>
-              <a:rPr sz="1300">
-                <a:solidFill>
-                  <a:srgbClr val="3D5466"/>
+            <a:pPr algn="l"/>
+            <a:r>
+              <a:rPr sz="1600" b="0" i="0">
+                <a:solidFill>
+                  <a:srgbClr val="C8D2E6"/>
                 </a:solidFill>
                 <a:latin typeface="Arial"/>
               </a:rPr>
-              <a:t>▸  Eine Marktbearbeitungsstrategie beantwortet vier Fragen:</a:t>
-            </a:r>
-          </a:p>
-          <a:p>
-            <a:pPr marL="190500" indent="-190500">
-              <a:spcBef>
-                <a:spcPts val="400"/>
-              </a:spcBef>
-              <a:spcAft>
-                <a:spcPts val="200"/>
-              </a:spcAft>
-            </a:pPr>
-            <a:r>
-              <a:rPr sz="1300">
-                <a:solidFill>
-                  <a:srgbClr val="3D5466"/>
-                </a:solidFill>
-                <a:latin typeface="Arial"/>
-              </a:rPr>
-              <a:t>▸  Wen? – Welches Kundensegment bearbeite ich mit Priorität?</a:t>
-            </a:r>
-          </a:p>
-          <a:p>
-            <a:pPr marL="190500" indent="-190500">
-              <a:spcBef>
-                <a:spcPts val="400"/>
-              </a:spcBef>
-              <a:spcAft>
-                <a:spcPts val="200"/>
-              </a:spcAft>
-            </a:pPr>
-            <a:r>
-              <a:rPr sz="1300">
-                <a:solidFill>
-                  <a:srgbClr val="3D5466"/>
-                </a:solidFill>
-                <a:latin typeface="Arial"/>
-              </a:rPr>
-              <a:t>▸  Womit? – Was ist mein Wertversprechen für dieses Segment?</a:t>
-            </a:r>
-          </a:p>
-          <a:p>
-            <a:pPr marL="190500" indent="-190500">
-              <a:spcBef>
-                <a:spcPts val="400"/>
-              </a:spcBef>
-              <a:spcAft>
-                <a:spcPts val="200"/>
-              </a:spcAft>
-            </a:pPr>
-            <a:r>
-              <a:rPr sz="1300">
-                <a:solidFill>
-                  <a:srgbClr val="3D5466"/>
-                </a:solidFill>
-                <a:latin typeface="Arial"/>
-              </a:rPr>
-              <a:t>▸  Wie? – Über welche Kanäle und Maßnahmen erreiche ich diese Kunden?</a:t>
-            </a:r>
-          </a:p>
-          <a:p>
-            <a:pPr marL="190500" indent="-190500">
-              <a:spcBef>
-                <a:spcPts val="400"/>
-              </a:spcBef>
-              <a:spcAft>
-                <a:spcPts val="200"/>
-              </a:spcAft>
-            </a:pPr>
-            <a:r>
-              <a:rPr sz="1300">
-                <a:solidFill>
-                  <a:srgbClr val="3D5466"/>
-                </a:solidFill>
-                <a:latin typeface="Arial"/>
-              </a:rPr>
-              <a:t>▸  Wann? – Welche Meilensteine und Zielgrößen setze ich uns?</a:t>
-            </a:r>
-          </a:p>
-          <a:p>
-            <a:pPr marL="190500" indent="-190500">
-              <a:spcBef>
-                <a:spcPts val="400"/>
-              </a:spcBef>
-              <a:spcAft>
-                <a:spcPts val="200"/>
-              </a:spcAft>
-            </a:pPr>
-            <a:r>
-              <a:rPr sz="1300">
-                <a:solidFill>
-                  <a:srgbClr val="3D5466"/>
-                </a:solidFill>
-                <a:latin typeface="Arial"/>
-              </a:rPr>
-              <a:t>▸  ## 4.2 Marktsegmentierung im Firmenkundengeschäft</a:t>
-            </a:r>
-          </a:p>
-        </p:txBody>
-      </p:sp>
-      <p:sp>
-        <p:nvSpPr>
-          <p:cNvPr id="9" name="Rectangle 8"/>
-          <p:cNvSpPr/>
-          <p:nvPr/>
-        </p:nvSpPr>
-        <p:spPr>
-          <a:xfrm>
-            <a:off x="0" y="6510528"/>
-            <a:ext cx="12188952" cy="347472"/>
-          </a:xfrm>
-          <a:prstGeom prst="rect">
-            <a:avLst/>
-          </a:prstGeom>
-          <a:solidFill>
-            <a:srgbClr val="0A1937"/>
-          </a:solidFill>
-          <a:ln>
-            <a:noFill/>
-          </a:ln>
-        </p:spPr>
-        <p:style>
-          <a:lnRef idx="1">
-            <a:schemeClr val="accent1"/>
-          </a:lnRef>
-          <a:fillRef idx="3">
-            <a:schemeClr val="accent1"/>
-          </a:fillRef>
-          <a:effectRef idx="2">
-            <a:schemeClr val="accent1"/>
-          </a:effectRef>
-          <a:fontRef idx="minor">
-            <a:schemeClr val="lt1"/>
-          </a:fontRef>
-        </p:style>
-        <p:txBody>
-          <a:bodyPr rtlCol="0" anchor="ctr"/>
-          <a:lstStyle/>
-          <a:p>
-            <a:pPr algn="ctr"/>
-          </a:p>
-        </p:txBody>
-      </p:sp>
-      <p:sp>
-        <p:nvSpPr>
-          <p:cNvPr id="10" name="TextBox 9"/>
+              <a:t>Markt von Segment unterscheiden und die eigene Wettbewerbsstrategie schärfen.</a:t>
+            </a:r>
+          </a:p>
+        </p:txBody>
+      </p:sp>
+      <p:sp>
+        <p:nvSpPr>
+          <p:cNvPr id="7" name="TextBox 6"/>
           <p:cNvSpPr txBox="1"/>
           <p:nvPr/>
         </p:nvSpPr>
         <p:spPr>
           <a:xfrm>
-            <a:off x="685800" y="6583680"/>
-            <a:ext cx="6490411" cy="256032"/>
+            <a:off x="685800" y="6355080"/>
+            <a:ext cx="10817352" cy="274320"/>
           </a:xfrm>
           <a:prstGeom prst="rect">
             <a:avLst/>
@@ -11384,7 +11301,7 @@
             <a:r>
               <a:rPr sz="700">
                 <a:solidFill>
-                  <a:srgbClr val="A0B4D2"/>
+                  <a:srgbClr val="8CA0C3"/>
                 </a:solidFill>
                 <a:latin typeface="Consolas"/>
               </a:rPr>
@@ -11426,7 +11343,7 @@
             <a:avLst/>
           </a:prstGeom>
           <a:solidFill>
-            <a:srgbClr val="FFFFFF"/>
+            <a:srgbClr val="EDEDF3"/>
           </a:solidFill>
           <a:ln>
             <a:noFill/>
@@ -11527,43 +11444,51 @@
                 </a:solidFill>
                 <a:latin typeface="Consolas"/>
               </a:rPr>
-              <a:t>M15  ·  SCHAUBILD</a:t>
-            </a:r>
-          </a:p>
-        </p:txBody>
-      </p:sp>
-      <p:sp>
-        <p:nvSpPr>
-          <p:cNvPr id="5" name="TextBox 4"/>
-          <p:cNvSpPr txBox="1"/>
-          <p:nvPr/>
-        </p:nvSpPr>
-        <p:spPr>
-          <a:xfrm>
-            <a:off x="685800" y="502920"/>
-            <a:ext cx="10817352" cy="594360"/>
-          </a:xfrm>
-          <a:prstGeom prst="rect">
-            <a:avLst/>
-          </a:prstGeom>
-          <a:noFill/>
-        </p:spPr>
-        <p:txBody>
-          <a:bodyPr wrap="square">
-            <a:spAutoFit/>
-          </a:bodyPr>
-          <a:lstStyle/>
-          <a:p>
-            <a:pPr algn="l"/>
-            <a:r>
-              <a:rPr sz="2000" b="1" i="0">
-                <a:solidFill>
-                  <a:srgbClr val="1F2C56"/>
-                </a:solidFill>
-                <a:latin typeface="Arial"/>
-              </a:rPr>
-              <a:t>Strategie-Landkarte</a:t>
-            </a:r>
+              <a:t>M15  ·  INHALT</a:t>
+            </a:r>
+          </a:p>
+        </p:txBody>
+      </p:sp>
+      <p:sp>
+        <p:nvSpPr>
+          <p:cNvPr id="5" name="Rectangle 4"/>
+          <p:cNvSpPr/>
+          <p:nvPr/>
+        </p:nvSpPr>
+        <p:spPr>
+          <a:xfrm>
+            <a:off x="0" y="1234440"/>
+            <a:ext cx="12188952" cy="12700"/>
+          </a:xfrm>
+          <a:prstGeom prst="rect">
+            <a:avLst/>
+          </a:prstGeom>
+          <a:solidFill>
+            <a:srgbClr val="D8DFE4"/>
+          </a:solidFill>
+          <a:ln>
+            <a:noFill/>
+          </a:ln>
+        </p:spPr>
+        <p:style>
+          <a:lnRef idx="1">
+            <a:schemeClr val="accent1"/>
+          </a:lnRef>
+          <a:fillRef idx="3">
+            <a:schemeClr val="accent1"/>
+          </a:fillRef>
+          <a:effectRef idx="2">
+            <a:schemeClr val="accent1"/>
+          </a:effectRef>
+          <a:fontRef idx="minor">
+            <a:schemeClr val="lt1"/>
+          </a:fontRef>
+        </p:style>
+        <p:txBody>
+          <a:bodyPr rtlCol="0" anchor="ctr"/>
+          <a:lstStyle/>
+          <a:p>
+            <a:pPr algn="ctr"/>
           </a:p>
         </p:txBody>
       </p:sp>
@@ -11575,8 +11500,8 @@
         </p:nvSpPr>
         <p:spPr>
           <a:xfrm>
-            <a:off x="685800" y="1143000"/>
-            <a:ext cx="10817352" cy="25400"/>
+            <a:off x="685800" y="502920"/>
+            <a:ext cx="36576" cy="658368"/>
           </a:xfrm>
           <a:prstGeom prst="rect">
             <a:avLst/>
@@ -11610,33 +11535,124 @@
           </a:p>
         </p:txBody>
       </p:sp>
-      <p:pic>
-        <p:nvPicPr>
-          <p:cNvPr id="7" name="Picture 6" descr="image.png"/>
-          <p:cNvPicPr>
-            <a:picLocks noChangeAspect="1"/>
-          </p:cNvPicPr>
-          <p:nvPr/>
-        </p:nvPicPr>
-        <p:blipFill>
-          <a:blip r:embed="rId2"/>
-          <a:stretch>
-            <a:fillRect/>
-          </a:stretch>
-        </p:blipFill>
-        <p:spPr>
-          <a:xfrm>
-            <a:off x="2303489" y="1325880"/>
-            <a:ext cx="7581973" cy="4937760"/>
-          </a:xfrm>
-          <a:prstGeom prst="rect">
-            <a:avLst/>
-          </a:prstGeom>
-        </p:spPr>
-      </p:pic>
-      <p:sp>
-        <p:nvSpPr>
-          <p:cNvPr id="8" name="Rectangle 7"/>
+      <p:sp>
+        <p:nvSpPr>
+          <p:cNvPr id="7" name="TextBox 6"/>
+          <p:cNvSpPr txBox="1"/>
+          <p:nvPr/>
+        </p:nvSpPr>
+        <p:spPr>
+          <a:xfrm>
+            <a:off x="813816" y="502920"/>
+            <a:ext cx="10634472" cy="685800"/>
+          </a:xfrm>
+          <a:prstGeom prst="rect">
+            <a:avLst/>
+          </a:prstGeom>
+          <a:noFill/>
+        </p:spPr>
+        <p:txBody>
+          <a:bodyPr wrap="square">
+            <a:spAutoFit/>
+          </a:bodyPr>
+          <a:lstStyle/>
+          <a:p>
+            <a:pPr algn="l"/>
+            <a:r>
+              <a:rPr sz="2400" b="1" i="0">
+                <a:solidFill>
+                  <a:srgbClr val="1F2C56"/>
+                </a:solidFill>
+                <a:latin typeface="Arial"/>
+              </a:rPr>
+              <a:t>Vom reaktiven zum strategischen Vertrieb</a:t>
+            </a:r>
+          </a:p>
+        </p:txBody>
+      </p:sp>
+      <p:sp>
+        <p:nvSpPr>
+          <p:cNvPr id="8" name="TextBox 7"/>
+          <p:cNvSpPr txBox="1"/>
+          <p:nvPr/>
+        </p:nvSpPr>
+        <p:spPr>
+          <a:xfrm>
+            <a:off x="685800" y="1417320"/>
+            <a:ext cx="10817352" cy="4892040"/>
+          </a:xfrm>
+          <a:prstGeom prst="rect">
+            <a:avLst/>
+          </a:prstGeom>
+          <a:noFill/>
+        </p:spPr>
+        <p:txBody>
+          <a:bodyPr wrap="square" anchor="ctr">
+            <a:spAutoFit/>
+          </a:bodyPr>
+          <a:lstStyle/>
+          <a:p>
+            <a:pPr marL="177800" indent="-177800">
+              <a:spcBef>
+                <a:spcPts val="600"/>
+              </a:spcBef>
+              <a:spcAft>
+                <a:spcPts val="200"/>
+              </a:spcAft>
+            </a:pPr>
+            <a:r>
+              <a:rPr sz="1200" i="1">
+                <a:solidFill>
+                  <a:srgbClr val="3D5466"/>
+                </a:solidFill>
+                <a:latin typeface="Arial"/>
+              </a:rPr>
+              <a:t>→  Wer jeden Kunden gleich bedient, verzettelt seinen Markt – Fokus ist die Strategie.</a:t>
+            </a:r>
+          </a:p>
+          <a:p>
+            <a:pPr marL="190500" indent="-190500">
+              <a:spcBef>
+                <a:spcPts val="400"/>
+              </a:spcBef>
+              <a:spcAft>
+                <a:spcPts val="200"/>
+              </a:spcAft>
+            </a:pPr>
+            <a:r>
+              <a:rPr sz="1300">
+                <a:solidFill>
+                  <a:srgbClr val="3D5466"/>
+                </a:solidFill>
+                <a:latin typeface="Arial"/>
+              </a:rPr>
+              <a:t>▸  Reaktiver Vertrieb wartet auf Anfragen; strategischer Vertrieb wählt sein Zielsegment bewusst.</a:t>
+            </a:r>
+          </a:p>
+          <a:p>
+            <a:pPr marL="190500" indent="-190500">
+              <a:spcBef>
+                <a:spcPts val="400"/>
+              </a:spcBef>
+              <a:spcAft>
+                <a:spcPts val="200"/>
+              </a:spcAft>
+            </a:pPr>
+            <a:r>
+              <a:rPr sz="1300">
+                <a:solidFill>
+                  <a:srgbClr val="3D5466"/>
+                </a:solidFill>
+                <a:latin typeface="Arial"/>
+              </a:rPr>
+              <a:t>▸  Ein priorisiertes Segment mit klarem Wertversprechen schlägt die Gießkanne.</a:t>
+            </a:r>
+          </a:p>
+        </p:txBody>
+      </p:sp>
+      <p:sp>
+        <p:nvSpPr>
+          <p:cNvPr id="9" name="Rectangle 8"/>
           <p:cNvSpPr/>
           <p:nvPr/>
         </p:nvSpPr>
@@ -11679,7 +11695,7 @@
       </p:sp>
       <p:sp>
         <p:nvSpPr>
-          <p:cNvPr id="9" name="TextBox 8"/>
+          <p:cNvPr id="10" name="TextBox 9"/>
           <p:cNvSpPr txBox="1"/>
           <p:nvPr/>
         </p:nvSpPr>
@@ -11708,41 +11724,6 @@
                 <a:latin typeface="Consolas"/>
               </a:rPr>
               <a:t>FKB Campus  ·  M15</a:t>
-            </a:r>
-          </a:p>
-        </p:txBody>
-      </p:sp>
-      <p:sp>
-        <p:nvSpPr>
-          <p:cNvPr id="10" name="TextBox 9"/>
-          <p:cNvSpPr txBox="1"/>
-          <p:nvPr/>
-        </p:nvSpPr>
-        <p:spPr>
-          <a:xfrm>
-            <a:off x="7176211" y="6583680"/>
-            <a:ext cx="4326940" cy="256032"/>
-          </a:xfrm>
-          <a:prstGeom prst="rect">
-            <a:avLst/>
-          </a:prstGeom>
-          <a:noFill/>
-        </p:spPr>
-        <p:txBody>
-          <a:bodyPr wrap="none">
-            <a:spAutoFit/>
-          </a:bodyPr>
-          <a:lstStyle/>
-          <a:p>
-            <a:pPr algn="r"/>
-            <a:r>
-              <a:rPr sz="700">
-                <a:solidFill>
-                  <a:srgbClr val="A0B4D2"/>
-                </a:solidFill>
-                <a:latin typeface="Consolas"/>
-              </a:rPr>
-              <a:t>Schaubild</a:t>
             </a:r>
           </a:p>
         </p:txBody>
@@ -11916,7 +11897,7 @@
                 </a:solidFill>
                 <a:latin typeface="Arial"/>
               </a:rPr>
-              <a:t>Five-Forces-Modell nach Porter</a:t>
+              <a:t>Strategie-Landkarte der Marktbearbeitung</a:t>
             </a:r>
           </a:p>
         </p:txBody>
@@ -11980,8 +11961,8 @@
         </p:blipFill>
         <p:spPr>
           <a:xfrm>
-            <a:off x="2554863" y="1325880"/>
-            <a:ext cx="7079225" cy="4937760"/>
+            <a:off x="2303489" y="1325880"/>
+            <a:ext cx="7581973" cy="4937760"/>
           </a:xfrm>
           <a:prstGeom prst="rect">
             <a:avLst/>
@@ -12134,7 +12115,7 @@
             <a:avLst/>
           </a:prstGeom>
           <a:solidFill>
-            <a:srgbClr val="EDEDF3"/>
+            <a:srgbClr val="FFFFFF"/>
           </a:solidFill>
           <a:ln>
             <a:noFill/>
@@ -12235,51 +12216,43 @@
                 </a:solidFill>
                 <a:latin typeface="Consolas"/>
               </a:rPr>
-              <a:t>M15  ·  INHALT</a:t>
-            </a:r>
-          </a:p>
-        </p:txBody>
-      </p:sp>
-      <p:sp>
-        <p:nvSpPr>
-          <p:cNvPr id="5" name="Rectangle 4"/>
-          <p:cNvSpPr/>
-          <p:nvPr/>
-        </p:nvSpPr>
-        <p:spPr>
-          <a:xfrm>
-            <a:off x="0" y="1234440"/>
-            <a:ext cx="12188952" cy="12700"/>
-          </a:xfrm>
-          <a:prstGeom prst="rect">
-            <a:avLst/>
-          </a:prstGeom>
-          <a:solidFill>
-            <a:srgbClr val="D8DFE4"/>
-          </a:solidFill>
-          <a:ln>
-            <a:noFill/>
-          </a:ln>
-        </p:spPr>
-        <p:style>
-          <a:lnRef idx="1">
-            <a:schemeClr val="accent1"/>
-          </a:lnRef>
-          <a:fillRef idx="3">
-            <a:schemeClr val="accent1"/>
-          </a:fillRef>
-          <a:effectRef idx="2">
-            <a:schemeClr val="accent1"/>
-          </a:effectRef>
-          <a:fontRef idx="minor">
-            <a:schemeClr val="lt1"/>
-          </a:fontRef>
-        </p:style>
-        <p:txBody>
-          <a:bodyPr rtlCol="0" anchor="ctr"/>
-          <a:lstStyle/>
-          <a:p>
-            <a:pPr algn="ctr"/>
+              <a:t>M15  ·  SCHAUBILD</a:t>
+            </a:r>
+          </a:p>
+        </p:txBody>
+      </p:sp>
+      <p:sp>
+        <p:nvSpPr>
+          <p:cNvPr id="5" name="TextBox 4"/>
+          <p:cNvSpPr txBox="1"/>
+          <p:nvPr/>
+        </p:nvSpPr>
+        <p:spPr>
+          <a:xfrm>
+            <a:off x="685800" y="502920"/>
+            <a:ext cx="10817352" cy="594360"/>
+          </a:xfrm>
+          <a:prstGeom prst="rect">
+            <a:avLst/>
+          </a:prstGeom>
+          <a:noFill/>
+        </p:spPr>
+        <p:txBody>
+          <a:bodyPr wrap="square">
+            <a:spAutoFit/>
+          </a:bodyPr>
+          <a:lstStyle/>
+          <a:p>
+            <a:pPr algn="l"/>
+            <a:r>
+              <a:rPr sz="2000" b="1" i="0">
+                <a:solidFill>
+                  <a:srgbClr val="1F2C56"/>
+                </a:solidFill>
+                <a:latin typeface="Arial"/>
+              </a:rPr>
+              <a:t>Wettbewerbskräfte im Zielmarkt (Five Forces)</a:t>
+            </a:r>
           </a:p>
         </p:txBody>
       </p:sp>
@@ -12291,8 +12264,8 @@
         </p:nvSpPr>
         <p:spPr>
           <a:xfrm>
-            <a:off x="685800" y="502920"/>
-            <a:ext cx="36576" cy="658368"/>
+            <a:off x="685800" y="1143000"/>
+            <a:ext cx="10817352" cy="25400"/>
           </a:xfrm>
           <a:prstGeom prst="rect">
             <a:avLst/>
@@ -12326,105 +12299,33 @@
           </a:p>
         </p:txBody>
       </p:sp>
-      <p:sp>
-        <p:nvSpPr>
-          <p:cNvPr id="7" name="TextBox 6"/>
-          <p:cNvSpPr txBox="1"/>
-          <p:nvPr/>
-        </p:nvSpPr>
-        <p:spPr>
-          <a:xfrm>
-            <a:off x="813816" y="502920"/>
-            <a:ext cx="10634472" cy="685800"/>
-          </a:xfrm>
-          <a:prstGeom prst="rect">
-            <a:avLst/>
-          </a:prstGeom>
-          <a:noFill/>
-        </p:spPr>
-        <p:txBody>
-          <a:bodyPr wrap="square">
-            <a:spAutoFit/>
-          </a:bodyPr>
-          <a:lstStyle/>
-          <a:p>
-            <a:pPr algn="l"/>
-            <a:r>
-              <a:rPr sz="2400" b="1" i="0">
-                <a:solidFill>
-                  <a:srgbClr val="1F2C56"/>
-                </a:solidFill>
-                <a:latin typeface="Arial"/>
-              </a:rPr>
-              <a:t>Segmentierungskriterien</a:t>
-            </a:r>
-          </a:p>
-        </p:txBody>
-      </p:sp>
-      <p:sp>
-        <p:nvSpPr>
-          <p:cNvPr id="8" name="TextBox 7"/>
-          <p:cNvSpPr txBox="1"/>
-          <p:nvPr/>
-        </p:nvSpPr>
-        <p:spPr>
-          <a:xfrm>
-            <a:off x="685800" y="1417320"/>
-            <a:ext cx="10817352" cy="4892040"/>
-          </a:xfrm>
-          <a:prstGeom prst="rect">
-            <a:avLst/>
-          </a:prstGeom>
-          <a:noFill/>
-        </p:spPr>
-        <p:txBody>
-          <a:bodyPr wrap="square" anchor="ctr">
-            <a:spAutoFit/>
-          </a:bodyPr>
-          <a:lstStyle/>
-          <a:p>
-            <a:pPr marL="190500" indent="-190500">
-              <a:spcBef>
-                <a:spcPts val="400"/>
-              </a:spcBef>
-              <a:spcAft>
-                <a:spcPts val="200"/>
-              </a:spcAft>
-            </a:pPr>
-            <a:r>
-              <a:rPr sz="1300">
-                <a:solidFill>
-                  <a:srgbClr val="3D5466"/>
-                </a:solidFill>
-                <a:latin typeface="Arial"/>
-              </a:rPr>
-              <a:t>▸  Nicht jeder Firmenkunde ist gleich attraktiv. Eine sinnvolle Segmentierung kombiniert mehrere Kriterien:</a:t>
-            </a:r>
-          </a:p>
-          <a:p>
-            <a:pPr marL="190500" indent="-190500">
-              <a:spcBef>
-                <a:spcPts val="400"/>
-              </a:spcBef>
-              <a:spcAft>
-                <a:spcPts val="200"/>
-              </a:spcAft>
-            </a:pPr>
-            <a:r>
-              <a:rPr sz="1300">
-                <a:solidFill>
-                  <a:srgbClr val="3D5466"/>
-                </a:solidFill>
-                <a:latin typeface="Arial"/>
-              </a:rPr>
-              <a:t>▸  Empfehlung: Wählen Sie maximal zwei Primärsegmente. Breite schlägt Tiefe nur in sehr seltenen Fällen.</a:t>
-            </a:r>
-          </a:p>
-        </p:txBody>
-      </p:sp>
-      <p:sp>
-        <p:nvSpPr>
-          <p:cNvPr id="9" name="Rectangle 8"/>
+      <p:pic>
+        <p:nvPicPr>
+          <p:cNvPr id="7" name="Picture 6" descr="image.png"/>
+          <p:cNvPicPr>
+            <a:picLocks noChangeAspect="1"/>
+          </p:cNvPicPr>
+          <p:nvPr/>
+        </p:nvPicPr>
+        <p:blipFill>
+          <a:blip r:embed="rId2"/>
+          <a:stretch>
+            <a:fillRect/>
+          </a:stretch>
+        </p:blipFill>
+        <p:spPr>
+          <a:xfrm>
+            <a:off x="2554863" y="1325880"/>
+            <a:ext cx="7079225" cy="4937760"/>
+          </a:xfrm>
+          <a:prstGeom prst="rect">
+            <a:avLst/>
+          </a:prstGeom>
+        </p:spPr>
+      </p:pic>
+      <p:sp>
+        <p:nvSpPr>
+          <p:cNvPr id="8" name="Rectangle 7"/>
           <p:cNvSpPr/>
           <p:nvPr/>
         </p:nvSpPr>
@@ -12467,7 +12368,7 @@
       </p:sp>
       <p:sp>
         <p:nvSpPr>
-          <p:cNvPr id="10" name="TextBox 9"/>
+          <p:cNvPr id="9" name="TextBox 8"/>
           <p:cNvSpPr txBox="1"/>
           <p:nvPr/>
         </p:nvSpPr>
@@ -12496,6 +12397,41 @@
                 <a:latin typeface="Consolas"/>
               </a:rPr>
               <a:t>FKB Campus  ·  M15</a:t>
+            </a:r>
+          </a:p>
+        </p:txBody>
+      </p:sp>
+      <p:sp>
+        <p:nvSpPr>
+          <p:cNvPr id="10" name="TextBox 9"/>
+          <p:cNvSpPr txBox="1"/>
+          <p:nvPr/>
+        </p:nvSpPr>
+        <p:spPr>
+          <a:xfrm>
+            <a:off x="7176211" y="6583680"/>
+            <a:ext cx="4326940" cy="256032"/>
+          </a:xfrm>
+          <a:prstGeom prst="rect">
+            <a:avLst/>
+          </a:prstGeom>
+          <a:noFill/>
+        </p:spPr>
+        <p:txBody>
+          <a:bodyPr wrap="none">
+            <a:spAutoFit/>
+          </a:bodyPr>
+          <a:lstStyle/>
+          <a:p>
+            <a:pPr algn="r"/>
+            <a:r>
+              <a:rPr sz="700">
+                <a:solidFill>
+                  <a:srgbClr val="A0B4D2"/>
+                </a:solidFill>
+                <a:latin typeface="Consolas"/>
+              </a:rPr>
+              <a:t>Schaubild</a:t>
             </a:r>
           </a:p>
         </p:txBody>
@@ -12755,7 +12691,7 @@
                 </a:solidFill>
                 <a:latin typeface="Arial"/>
               </a:rPr>
-              <a:t>Das Scoring-Modell zur Segmentpriorisierung</a:t>
+              <a:t>Segmentierung: nach welchen Kriterien?</a:t>
             </a:r>
           </a:p>
         </p:txBody>
@@ -12781,6 +12717,25 @@
             <a:spAutoFit/>
           </a:bodyPr>
           <a:lstStyle/>
+          <a:p>
+            <a:pPr marL="177800" indent="-177800">
+              <a:spcBef>
+                <a:spcPts val="600"/>
+              </a:spcBef>
+              <a:spcAft>
+                <a:spcPts val="200"/>
+              </a:spcAft>
+            </a:pPr>
+            <a:r>
+              <a:rPr sz="1200" i="1">
+                <a:solidFill>
+                  <a:srgbClr val="3D5466"/>
+                </a:solidFill>
+                <a:latin typeface="Arial"/>
+              </a:rPr>
+              <a:t>→  Ein gutes Segment ist erreichbar, ertragsstark und zu Ihnen passend – nicht einfach nur groß.</a:t>
+            </a:r>
+          </a:p>
           <a:p>
             <a:pPr marL="190500" indent="-190500">
               <a:spcBef>
@@ -12797,7 +12752,7 @@
                 </a:solidFill>
                 <a:latin typeface="Arial"/>
               </a:rPr>
-              <a:t>▸  Ein einfaches Scoring-Modell hilft bei der Auswahl des Primärsegments:</a:t>
+              <a:t>▸  Kriterien: Branche (WZ-2008), Region, Umsatzgröße, Bedarfsprofil.</a:t>
             </a:r>
           </a:p>
           <a:p>
@@ -12816,26 +12771,7 @@
                 </a:solidFill>
                 <a:latin typeface="Arial"/>
               </a:rPr>
-              <a:t>▸  Bewertung je Kriterium: 1 (schwach) bis 5 (sehr stark).</a:t>
-            </a:r>
-          </a:p>
-          <a:p>
-            <a:pPr marL="190500" indent="-190500">
-              <a:spcBef>
-                <a:spcPts val="400"/>
-              </a:spcBef>
-              <a:spcAft>
-                <a:spcPts val="200"/>
-              </a:spcAft>
-            </a:pPr>
-            <a:r>
-              <a:rPr sz="1300">
-                <a:solidFill>
-                  <a:srgbClr val="3D5466"/>
-                </a:solidFill>
-                <a:latin typeface="Arial"/>
-              </a:rPr>
-              <a:t>▸  ## 4.3 Marktpotenzialanalyse</a:t>
+              <a:t>▸  agree liefert die Datenbasis: Branchenfilter, Umsatzklassen-Report, Ertragspotenzial.</a:t>
             </a:r>
           </a:p>
         </p:txBody>
